--- a/PPTs/Ch4_ARM_Arithmetic_Logic_Exercises.pptx
+++ b/PPTs/Ch4_ARM_Arithmetic_Logic_Exercises.pptx
@@ -5,7 +5,7 @@
     <p:sldMasterId id="2147483660" r:id="rId1"/>
   </p:sldMasterIdLst>
   <p:notesMasterIdLst>
-    <p:notesMasterId r:id="rId22"/>
+    <p:notesMasterId r:id="rId21"/>
   </p:notesMasterIdLst>
   <p:sldIdLst>
     <p:sldId id="256" r:id="rId2"/>
@@ -23,11 +23,10 @@
     <p:sldId id="568" r:id="rId14"/>
     <p:sldId id="571" r:id="rId15"/>
     <p:sldId id="574" r:id="rId16"/>
-    <p:sldId id="383" r:id="rId17"/>
-    <p:sldId id="554" r:id="rId18"/>
-    <p:sldId id="354" r:id="rId19"/>
-    <p:sldId id="357" r:id="rId20"/>
-    <p:sldId id="384" r:id="rId21"/>
+    <p:sldId id="354" r:id="rId17"/>
+    <p:sldId id="357" r:id="rId18"/>
+    <p:sldId id="384" r:id="rId19"/>
+    <p:sldId id="587" r:id="rId20"/>
   </p:sldIdLst>
   <p:sldSz cx="9144000" cy="6858000" type="screen4x3"/>
   <p:notesSz cx="6858000" cy="9144000"/>
@@ -148,7 +147,7 @@
 <file path=ppt/revisionInfo.xml><?xml version="1.0" encoding="utf-8"?>
 <p1510:revInfo xmlns:a="http://schemas.openxmlformats.org/drawingml/2006/main" xmlns:r="http://schemas.openxmlformats.org/officeDocument/2006/relationships" xmlns:p1510="http://schemas.microsoft.com/office/powerpoint/2015/10/main">
   <p1510:revLst>
-    <p1510:client id="{191F7D32-A5D4-44C8-A28D-1F95E29E1B1E}" v="1" dt="2025-09-24T02:24:36.422"/>
+    <p1510:client id="{191F7D32-A5D4-44C8-A28D-1F95E29E1B1E}" v="2" dt="2025-10-07T21:13:00.992"/>
   </p1510:revLst>
 </p1510:revInfo>
 </file>
@@ -157,8 +156,8 @@
 <pc:chgInfo xmlns:a="http://schemas.openxmlformats.org/drawingml/2006/main" xmlns:r="http://schemas.openxmlformats.org/officeDocument/2006/relationships" xmlns:ac="http://schemas.microsoft.com/office/drawing/2013/main/command" xmlns:pc="http://schemas.microsoft.com/office/powerpoint/2013/main/command">
   <pc:docChgLst>
     <pc:chgData name="Zonghua Gu" userId="9a7e1853e1951ef5" providerId="LiveId" clId="{CF1FAA12-072C-4ED5-BA76-0FFFAEFDB88A}"/>
-    <pc:docChg chg="delSld modSld">
-      <pc:chgData name="Zonghua Gu" userId="9a7e1853e1951ef5" providerId="LiveId" clId="{CF1FAA12-072C-4ED5-BA76-0FFFAEFDB88A}" dt="2025-09-25T15:39:53.846" v="24" actId="47"/>
+    <pc:docChg chg="addSld delSld modSld">
+      <pc:chgData name="Zonghua Gu" userId="9a7e1853e1951ef5" providerId="LiveId" clId="{CF1FAA12-072C-4ED5-BA76-0FFFAEFDB88A}" dt="2025-10-07T21:16:17.881" v="28" actId="47"/>
       <pc:docMkLst>
         <pc:docMk/>
       </pc:docMkLst>
@@ -234,6 +233,13 @@
         </pc:sldMkLst>
       </pc:sldChg>
       <pc:sldChg chg="del">
+        <pc:chgData name="Zonghua Gu" userId="9a7e1853e1951ef5" providerId="LiveId" clId="{CF1FAA12-072C-4ED5-BA76-0FFFAEFDB88A}" dt="2025-10-07T21:16:17.881" v="28" actId="47"/>
+        <pc:sldMkLst>
+          <pc:docMk/>
+          <pc:sldMk cId="2623990252" sldId="383"/>
+        </pc:sldMkLst>
+      </pc:sldChg>
+      <pc:sldChg chg="del">
         <pc:chgData name="Zonghua Gu" userId="9a7e1853e1951ef5" providerId="LiveId" clId="{CF1FAA12-072C-4ED5-BA76-0FFFAEFDB88A}" dt="2025-09-24T02:22:27.907" v="20" actId="47"/>
         <pc:sldMkLst>
           <pc:docMk/>
@@ -245,6 +251,13 @@
         <pc:sldMkLst>
           <pc:docMk/>
           <pc:sldMk cId="1496054644" sldId="387"/>
+        </pc:sldMkLst>
+      </pc:sldChg>
+      <pc:sldChg chg="del">
+        <pc:chgData name="Zonghua Gu" userId="9a7e1853e1951ef5" providerId="LiveId" clId="{CF1FAA12-072C-4ED5-BA76-0FFFAEFDB88A}" dt="2025-10-07T21:16:17.881" v="28" actId="47"/>
+        <pc:sldMkLst>
+          <pc:docMk/>
+          <pc:sldMk cId="4009754153" sldId="554"/>
         </pc:sldMkLst>
       </pc:sldChg>
       <pc:sldChg chg="del">
@@ -353,6 +366,20 @@
           <pc:sldMk cId="183442351" sldId="577"/>
         </pc:sldMkLst>
       </pc:sldChg>
+      <pc:sldChg chg="new del">
+        <pc:chgData name="Zonghua Gu" userId="9a7e1853e1951ef5" providerId="LiveId" clId="{CF1FAA12-072C-4ED5-BA76-0FFFAEFDB88A}" dt="2025-10-07T21:13:03.805" v="27" actId="47"/>
+        <pc:sldMkLst>
+          <pc:docMk/>
+          <pc:sldMk cId="3345466133" sldId="579"/>
+        </pc:sldMkLst>
+      </pc:sldChg>
+      <pc:sldChg chg="add">
+        <pc:chgData name="Zonghua Gu" userId="9a7e1853e1951ef5" providerId="LiveId" clId="{CF1FAA12-072C-4ED5-BA76-0FFFAEFDB88A}" dt="2025-10-07T21:13:00.992" v="26"/>
+        <pc:sldMkLst>
+          <pc:docMk/>
+          <pc:sldMk cId="3350438353" sldId="587"/>
+        </pc:sldMkLst>
+      </pc:sldChg>
     </pc:docChg>
   </pc:docChgLst>
 </pc:chgInfo>
@@ -441,7 +468,7 @@
             <a:fld id="{3AC3A17A-95E8-4381-B66B-5D6DE2B3048A}" type="datetimeFigureOut">
               <a:rPr lang="en-US" smtClean="0"/>
               <a:pPr/>
-              <a:t>9/25/2025</a:t>
+              <a:t>10/7/2025</a:t>
             </a:fld>
             <a:endParaRPr lang="en-US"/>
           </a:p>
@@ -1071,187 +1098,6 @@
       </p:grpSpPr>
       <p:sp>
         <p:nvSpPr>
-          <p:cNvPr id="324610" name="Rectangle 2"/>
-          <p:cNvSpPr>
-            <a:spLocks noGrp="1" noRot="1" noChangeAspect="1" noChangeArrowheads="1" noTextEdit="1"/>
-          </p:cNvSpPr>
-          <p:nvPr>
-            <p:ph type="sldImg"/>
-          </p:nvPr>
-        </p:nvSpPr>
-        <p:spPr>
-          <a:ln/>
-        </p:spPr>
-      </p:sp>
-      <p:sp>
-        <p:nvSpPr>
-          <p:cNvPr id="324611" name="Rectangle 3"/>
-          <p:cNvSpPr>
-            <a:spLocks noGrp="1" noChangeArrowheads="1"/>
-          </p:cNvSpPr>
-          <p:nvPr>
-            <p:ph type="body" idx="1"/>
-          </p:nvPr>
-        </p:nvSpPr>
-        <p:spPr/>
-        <p:txBody>
-          <a:bodyPr/>
-          <a:lstStyle/>
-          <a:p>
-            <a:pPr marL="0" marR="0" lvl="0" indent="0" algn="l" defTabSz="914400" rtl="0" eaLnBrk="1" fontAlgn="auto" latinLnBrk="0" hangingPunct="1">
-              <a:lnSpc>
-                <a:spcPct val="100000"/>
-              </a:lnSpc>
-              <a:spcBef>
-                <a:spcPts val="0"/>
-              </a:spcBef>
-              <a:spcAft>
-                <a:spcPts val="0"/>
-              </a:spcAft>
-              <a:buClrTx/>
-              <a:buSzTx/>
-              <a:buFontTx/>
-              <a:buNone/>
-              <a:tabLst/>
-              <a:defRPr/>
-            </a:pPr>
-            <a:r>
-              <a:rPr kumimoji="0" lang="en-US" sz="1200" b="0" i="0" u="none" strike="noStrike" kern="1200" cap="none" spc="0" normalizeH="0" baseline="0" noProof="0" dirty="0">
-                <a:ln>
-                  <a:noFill/>
-                </a:ln>
-                <a:solidFill>
-                  <a:prstClr val="black"/>
-                </a:solidFill>
-                <a:effectLst/>
-                <a:uLnTx/>
-                <a:uFillTx/>
-                <a:latin typeface="Gill Sans MT"/>
-                <a:ea typeface="+mn-ea"/>
-                <a:cs typeface="+mn-cs"/>
-              </a:rPr>
-              <a:t>C is cleared </a:t>
-            </a:r>
-            <a:r>
-              <a:rPr kumimoji="0" lang="en-US" sz="1200" b="0" i="0" u="none" strike="noStrike" kern="1200" cap="none" spc="0" normalizeH="0" baseline="0" noProof="0" dirty="0">
-                <a:ln>
-                  <a:noFill/>
-                </a:ln>
-                <a:solidFill>
-                  <a:prstClr val="black"/>
-                </a:solidFill>
-                <a:effectLst/>
-                <a:uLnTx/>
-                <a:uFillTx/>
-                <a:latin typeface="Gill Sans MT"/>
-                <a:ea typeface="+mn-ea"/>
-                <a:cs typeface="Times New Roman" pitchFamily="18" charset="0"/>
-              </a:rPr>
-              <a:t>upon </a:t>
-            </a:r>
-            <a:r>
-              <a:rPr kumimoji="0" lang="en-US" sz="1200" b="0" i="0" u="none" strike="noStrike" kern="1200" cap="none" spc="0" normalizeH="0" baseline="0" noProof="0" dirty="0">
-                <a:ln>
-                  <a:noFill/>
-                </a:ln>
-                <a:solidFill>
-                  <a:prstClr val="black"/>
-                </a:solidFill>
-                <a:effectLst/>
-                <a:uLnTx/>
-                <a:uFillTx/>
-                <a:latin typeface="Gill Sans MT"/>
-                <a:ea typeface="+mn-ea"/>
-                <a:cs typeface="+mn-cs"/>
-              </a:rPr>
-              <a:t>an </a:t>
-            </a:r>
-            <a:r>
-              <a:rPr kumimoji="0" lang="en-US" sz="1200" b="1" i="0" u="sng" strike="noStrike" kern="1200" cap="none" spc="0" normalizeH="0" baseline="0" noProof="0" dirty="0">
-                <a:ln>
-                  <a:noFill/>
-                </a:ln>
-                <a:solidFill>
-                  <a:srgbClr val="800000"/>
-                </a:solidFill>
-                <a:effectLst/>
-                <a:uLnTx/>
-                <a:uFillTx/>
-                <a:latin typeface="Gill Sans MT"/>
-                <a:ea typeface="+mn-ea"/>
-                <a:cs typeface="+mn-cs"/>
-              </a:rPr>
-              <a:t>unsigned</a:t>
-            </a:r>
-            <a:r>
-              <a:rPr kumimoji="0" lang="en-US" sz="1200" b="0" i="0" u="none" strike="noStrike" kern="1200" cap="none" spc="0" normalizeH="0" baseline="0" noProof="0" dirty="0">
-                <a:ln>
-                  <a:noFill/>
-                </a:ln>
-                <a:solidFill>
-                  <a:prstClr val="black"/>
-                </a:solidFill>
-                <a:effectLst/>
-                <a:uLnTx/>
-                <a:uFillTx/>
-                <a:latin typeface="Gill Sans MT"/>
-                <a:ea typeface="+mn-ea"/>
-                <a:cs typeface="+mn-cs"/>
-              </a:rPr>
-              <a:t> subtract if the answer is wrong</a:t>
-            </a:r>
-            <a:endParaRPr kumimoji="0" lang="en-US" sz="300" b="0" i="0" u="none" strike="noStrike" kern="1200" cap="none" spc="0" normalizeH="0" baseline="0" noProof="0" dirty="0">
-              <a:ln>
-                <a:noFill/>
-              </a:ln>
-              <a:solidFill>
-                <a:prstClr val="black"/>
-              </a:solidFill>
-              <a:effectLst/>
-              <a:uLnTx/>
-              <a:uFillTx/>
-              <a:latin typeface="Gill Sans MT"/>
-              <a:ea typeface="+mn-ea"/>
-              <a:cs typeface="+mn-cs"/>
-            </a:endParaRPr>
-          </a:p>
-          <a:p>
-            <a:endParaRPr lang="en-US" dirty="0"/>
-          </a:p>
-        </p:txBody>
-      </p:sp>
-    </p:spTree>
-    <p:extLst>
-      <p:ext uri="{BB962C8B-B14F-4D97-AF65-F5344CB8AC3E}">
-        <p14:creationId xmlns:p14="http://schemas.microsoft.com/office/powerpoint/2010/main" val="2841450837"/>
-      </p:ext>
-    </p:extLst>
-  </p:cSld>
-  <p:clrMapOvr>
-    <a:masterClrMapping/>
-  </p:clrMapOvr>
-</p:notes>
-</file>
-
-<file path=ppt/notesSlides/notesSlide5.xml><?xml version="1.0" encoding="utf-8"?>
-<p:notes xmlns:a="http://schemas.openxmlformats.org/drawingml/2006/main" xmlns:r="http://schemas.openxmlformats.org/officeDocument/2006/relationships" xmlns:p="http://schemas.openxmlformats.org/presentationml/2006/main">
-  <p:cSld>
-    <p:spTree>
-      <p:nvGrpSpPr>
-        <p:cNvPr id="1" name=""/>
-        <p:cNvGrpSpPr/>
-        <p:nvPr/>
-      </p:nvGrpSpPr>
-      <p:grpSpPr>
-        <a:xfrm>
-          <a:off x="0" y="0"/>
-          <a:ext cx="0" cy="0"/>
-          <a:chOff x="0" y="0"/>
-          <a:chExt cx="0" cy="0"/>
-        </a:xfrm>
-      </p:grpSpPr>
-      <p:sp>
-        <p:nvSpPr>
           <p:cNvPr id="2" name="Slide Image Placeholder 1"/>
           <p:cNvSpPr>
             <a:spLocks noGrp="1" noRot="1" noChangeAspect="1"/>
@@ -1339,7 +1185,7 @@
             <a:fld id="{1B0C9D69-9831-4844-8B1E-062B2DA58B0D}" type="slidenum">
               <a:rPr lang="en-US" smtClean="0"/>
               <a:pPr/>
-              <a:t>20</a:t>
+              <a:t>18</a:t>
             </a:fld>
             <a:endParaRPr lang="en-US"/>
           </a:p>
@@ -1501,7 +1347,7 @@
             <a:fld id="{966FEA0E-C2DF-4252-97AD-54F2B7E07EAC}" type="datetime1">
               <a:rPr lang="en-US" smtClean="0"/>
               <a:pPr eaLnBrk="1" latinLnBrk="0" hangingPunct="1"/>
-              <a:t>9/25/2025</a:t>
+              <a:t>10/7/2025</a:t>
             </a:fld>
             <a:endParaRPr lang="en-US" sz="1600" dirty="0"/>
           </a:p>
@@ -1862,7 +1708,7 @@
             <a:fld id="{69EF9524-0CAA-4F98-BAC2-CE6B712F5E94}" type="datetime1">
               <a:rPr lang="en-US" smtClean="0"/>
               <a:pPr eaLnBrk="1" latinLnBrk="0" hangingPunct="1"/>
-              <a:t>9/25/2025</a:t>
+              <a:t>10/7/2025</a:t>
             </a:fld>
             <a:endParaRPr lang="en-US"/>
           </a:p>
@@ -2039,7 +1885,7 @@
             <a:fld id="{CB20516D-6F89-4C89-8307-32A716E22875}" type="datetime1">
               <a:rPr lang="en-US" smtClean="0"/>
               <a:pPr eaLnBrk="1" latinLnBrk="0" hangingPunct="1"/>
-              <a:t>9/25/2025</a:t>
+              <a:t>10/7/2025</a:t>
             </a:fld>
             <a:endParaRPr lang="en-US"/>
           </a:p>
@@ -2276,7 +2122,7 @@
             <a:fld id="{0CD88620-7329-4FC3-B65D-4EA691138F1B}" type="datetime1">
               <a:rPr lang="en-US" smtClean="0"/>
               <a:pPr eaLnBrk="1" latinLnBrk="0" hangingPunct="1"/>
-              <a:t>9/25/2025</a:t>
+              <a:t>10/7/2025</a:t>
             </a:fld>
             <a:endParaRPr lang="en-US" dirty="0"/>
           </a:p>
@@ -2547,7 +2393,7 @@
             <a:fld id="{0E46F3A1-5653-427D-9F78-56077401431A}" type="datetime1">
               <a:rPr lang="en-US" smtClean="0"/>
               <a:pPr eaLnBrk="1" latinLnBrk="0" hangingPunct="1"/>
-              <a:t>9/25/2025</a:t>
+              <a:t>10/7/2025</a:t>
             </a:fld>
             <a:endParaRPr lang="en-US" dirty="0"/>
           </a:p>
@@ -2769,7 +2615,7 @@
             <a:fld id="{CB67FC03-415A-45F0-B002-DF181377F7DC}" type="datetime1">
               <a:rPr lang="en-US" smtClean="0"/>
               <a:pPr eaLnBrk="1" latinLnBrk="0" hangingPunct="1"/>
-              <a:t>9/25/2025</a:t>
+              <a:t>10/7/2025</a:t>
             </a:fld>
             <a:endParaRPr lang="en-US"/>
           </a:p>
@@ -3123,7 +2969,7 @@
             <a:fld id="{1B6FC726-A0B4-4FC7-90F5-F17415A5C1A3}" type="datetime1">
               <a:rPr lang="en-US" smtClean="0"/>
               <a:pPr eaLnBrk="1" latinLnBrk="0" hangingPunct="1"/>
-              <a:t>9/25/2025</a:t>
+              <a:t>10/7/2025</a:t>
             </a:fld>
             <a:endParaRPr lang="en-US"/>
           </a:p>
@@ -3357,7 +3203,7 @@
             <a:fld id="{BE217211-C3F9-4892-9CC3-C7105638567D}" type="datetime1">
               <a:rPr lang="en-US" smtClean="0"/>
               <a:pPr eaLnBrk="1" latinLnBrk="0" hangingPunct="1"/>
-              <a:t>9/25/2025</a:t>
+              <a:t>10/7/2025</a:t>
             </a:fld>
             <a:endParaRPr lang="en-US"/>
           </a:p>
@@ -3500,7 +3346,7 @@
             <a:fld id="{BA713E6A-6B26-4373-A75B-EF395DC64F9E}" type="datetime1">
               <a:rPr lang="en-US" smtClean="0"/>
               <a:pPr eaLnBrk="1" latinLnBrk="0" hangingPunct="1"/>
-              <a:t>9/25/2025</a:t>
+              <a:t>10/7/2025</a:t>
             </a:fld>
             <a:endParaRPr lang="en-US"/>
           </a:p>
@@ -3779,7 +3625,7 @@
             <a:fld id="{57EB41EF-4260-415A-8DD6-FEDCC46E7EFC}" type="datetime1">
               <a:rPr lang="en-US" smtClean="0"/>
               <a:pPr eaLnBrk="1" latinLnBrk="0" hangingPunct="1"/>
-              <a:t>9/25/2025</a:t>
+              <a:t>10/7/2025</a:t>
             </a:fld>
             <a:endParaRPr lang="en-US"/>
           </a:p>
@@ -4188,7 +4034,7 @@
             <a:fld id="{6BDA80A0-06CC-4492-94A0-E8516751045E}" type="datetime1">
               <a:rPr lang="en-US" smtClean="0"/>
               <a:pPr eaLnBrk="1" latinLnBrk="0" hangingPunct="1"/>
-              <a:t>9/25/2025</a:t>
+              <a:t>10/7/2025</a:t>
             </a:fld>
             <a:endParaRPr lang="en-US"/>
           </a:p>
@@ -4527,7 +4373,7 @@
             <a:fld id="{A25B5B4B-57EE-495D-8E74-A657CFD8BB6C}" type="datetime1">
               <a:rPr lang="en-US" smtClean="0"/>
               <a:pPr eaLnBrk="1" latinLnBrk="0" hangingPunct="1"/>
-              <a:t>9/25/2025</a:t>
+              <a:t>10/7/2025</a:t>
             </a:fld>
             <a:endParaRPr lang="en-US" sz="1400" dirty="0">
               <a:solidFill>
@@ -6180,1946 +6026,125 @@
       </p:grpSpPr>
       <p:sp>
         <p:nvSpPr>
-          <p:cNvPr id="38914" name="Rectangle 2"/>
-          <p:cNvSpPr>
-            <a:spLocks noGrp="1" noChangeArrowheads="1"/>
+          <p:cNvPr id="2" name="Title 1">
+            <a:extLst>
+              <a:ext uri="{FF2B5EF4-FFF2-40B4-BE49-F238E27FC236}">
+                <a16:creationId xmlns:a16="http://schemas.microsoft.com/office/drawing/2014/main" id="{11B52526-FDDF-35FA-A44E-1A2334442F74}"/>
+              </a:ext>
+            </a:extLst>
+          </p:cNvPr>
+          <p:cNvSpPr>
+            <a:spLocks noGrp="1"/>
           </p:cNvSpPr>
           <p:nvPr>
             <p:ph type="title"/>
           </p:nvPr>
+        </p:nvSpPr>
+        <p:spPr/>
+        <p:txBody>
+          <a:bodyPr/>
+          <a:lstStyle/>
+          <a:p>
+            <a:r>
+              <a:rPr lang="en-US" dirty="0"/>
+              <a:t>Flags ANDS</a:t>
+            </a:r>
+          </a:p>
+        </p:txBody>
+      </p:sp>
+      <p:sp>
+        <p:nvSpPr>
+          <p:cNvPr id="3" name="Slide Number Placeholder 2">
+            <a:extLst>
+              <a:ext uri="{FF2B5EF4-FFF2-40B4-BE49-F238E27FC236}">
+                <a16:creationId xmlns:a16="http://schemas.microsoft.com/office/drawing/2014/main" id="{BCB70333-70B3-0D05-E999-759739E502C6}"/>
+              </a:ext>
+            </a:extLst>
+          </p:cNvPr>
+          <p:cNvSpPr>
+            <a:spLocks noGrp="1"/>
+          </p:cNvSpPr>
+          <p:nvPr>
+            <p:ph type="sldNum" sz="quarter" idx="12"/>
+          </p:nvPr>
+        </p:nvSpPr>
+        <p:spPr/>
+        <p:txBody>
+          <a:bodyPr/>
+          <a:lstStyle/>
+          <a:p>
+            <a:fld id="{EA7C8D44-3667-46F6-9772-CC52308E2A7F}" type="slidenum">
+              <a:rPr kumimoji="0" lang="en-US" smtClean="0"/>
+              <a:pPr/>
+              <a:t>16</a:t>
+            </a:fld>
+            <a:endParaRPr kumimoji="0" lang="en-US" dirty="0"/>
+          </a:p>
+        </p:txBody>
+      </p:sp>
+      <p:sp>
+        <p:nvSpPr>
+          <p:cNvPr id="4" name="Content Placeholder 3">
+            <a:extLst>
+              <a:ext uri="{FF2B5EF4-FFF2-40B4-BE49-F238E27FC236}">
+                <a16:creationId xmlns:a16="http://schemas.microsoft.com/office/drawing/2014/main" id="{43995D49-573C-6129-4E24-762AAEB6BD07}"/>
+              </a:ext>
+            </a:extLst>
+          </p:cNvPr>
+          <p:cNvSpPr>
+            <a:spLocks noGrp="1"/>
+          </p:cNvSpPr>
+          <p:nvPr>
+            <p:ph sz="quarter" idx="1"/>
+          </p:nvPr>
+        </p:nvSpPr>
+        <p:spPr/>
+        <p:txBody>
+          <a:bodyPr/>
+          <a:lstStyle/>
+          <a:p>
+            <a:r>
+              <a:rPr lang="en-US" dirty="0"/>
+              <a:t>What are value of r2, and NZCV flags after execution, assuming all flags are initially 0.</a:t>
+            </a:r>
+          </a:p>
+          <a:p>
+            <a:endParaRPr lang="en-US" dirty="0"/>
+          </a:p>
+          <a:p>
+            <a:endParaRPr lang="en-US" dirty="0"/>
+          </a:p>
+        </p:txBody>
+      </p:sp>
+      <p:sp>
+        <p:nvSpPr>
+          <p:cNvPr id="7" name="Rectangle 6">
+            <a:extLst>
+              <a:ext uri="{FF2B5EF4-FFF2-40B4-BE49-F238E27FC236}">
+                <a16:creationId xmlns:a16="http://schemas.microsoft.com/office/drawing/2014/main" id="{BCB598EB-3D73-A532-9DE0-CBC965E702FA}"/>
+              </a:ext>
+            </a:extLst>
+          </p:cNvPr>
+          <p:cNvSpPr/>
+          <p:nvPr/>
         </p:nvSpPr>
         <p:spPr>
           <a:xfrm>
-            <a:off x="1024745" y="39747"/>
-            <a:ext cx="8229600" cy="990600"/>
-          </a:xfrm>
-          <a:ln>
-            <a:miter lim="800000"/>
-            <a:headEnd/>
-            <a:tailEnd/>
-          </a:ln>
-        </p:spPr>
-        <p:txBody>
-          <a:bodyPr/>
-          <a:lstStyle/>
-          <a:p>
-            <a:r>
-              <a:rPr lang="en-US" sz="3600" dirty="0">
-                <a:solidFill>
-                  <a:srgbClr val="FF0000"/>
-                </a:solidFill>
-                <a:latin typeface="Gill Sans MT"/>
-                <a:cs typeface="Times New Roman" pitchFamily="18" charset="0"/>
-              </a:rPr>
-              <a:t>Summary of Carry and Overflow Flags</a:t>
-            </a:r>
-            <a:endParaRPr lang="en-US" sz="3600" dirty="0">
-              <a:solidFill>
-                <a:srgbClr val="FF0000"/>
-              </a:solidFill>
-            </a:endParaRPr>
-          </a:p>
-        </p:txBody>
-      </p:sp>
-      <p:sp>
-        <p:nvSpPr>
-          <p:cNvPr id="8" name="Slide Number Placeholder 3"/>
-          <p:cNvSpPr>
-            <a:spLocks noGrp="1"/>
-          </p:cNvSpPr>
-          <p:nvPr>
-            <p:ph type="sldNum" sz="quarter" idx="4294967295"/>
-          </p:nvPr>
-        </p:nvSpPr>
-        <p:spPr>
-          <a:xfrm>
-            <a:off x="612648" y="6356350"/>
-            <a:ext cx="1981200" cy="365760"/>
-          </a:xfrm>
-          <a:prstGeom prst="rect">
-            <a:avLst/>
-          </a:prstGeom>
-        </p:spPr>
-        <p:txBody>
-          <a:bodyPr/>
-          <a:lstStyle/>
-          <a:p>
-            <a:pPr marL="0" marR="0" lvl="0" indent="0" algn="l" defTabSz="914400" rtl="0" eaLnBrk="1" fontAlgn="auto" latinLnBrk="0" hangingPunct="1">
-              <a:lnSpc>
-                <a:spcPct val="100000"/>
-              </a:lnSpc>
-              <a:spcBef>
-                <a:spcPts val="0"/>
-              </a:spcBef>
-              <a:spcAft>
-                <a:spcPts val="0"/>
-              </a:spcAft>
-              <a:buClrTx/>
-              <a:buSzTx/>
-              <a:buFontTx/>
-              <a:buNone/>
-              <a:tabLst/>
-              <a:defRPr/>
-            </a:pPr>
-            <a:fld id="{3D56C4D0-D1DD-434F-9E39-17578F101405}" type="slidenum">
-              <a:rPr kumimoji="0" lang="en-US" sz="1400" b="0" i="0" u="none" strike="noStrike" kern="1200" cap="none" spc="0" normalizeH="0" baseline="0" noProof="0">
-                <a:ln>
-                  <a:noFill/>
-                </a:ln>
-                <a:solidFill>
-                  <a:srgbClr val="1F497D"/>
-                </a:solidFill>
-                <a:effectLst/>
-                <a:uLnTx/>
-                <a:uFillTx/>
-                <a:latin typeface="Gill Sans MT"/>
-                <a:ea typeface="+mn-ea"/>
-                <a:cs typeface="+mn-cs"/>
-              </a:rPr>
-              <a:pPr marL="0" marR="0" lvl="0" indent="0" algn="l" defTabSz="914400" rtl="0" eaLnBrk="1" fontAlgn="auto" latinLnBrk="0" hangingPunct="1">
-                <a:lnSpc>
-                  <a:spcPct val="100000"/>
-                </a:lnSpc>
-                <a:spcBef>
-                  <a:spcPts val="0"/>
-                </a:spcBef>
-                <a:spcAft>
-                  <a:spcPts val="0"/>
-                </a:spcAft>
-                <a:buClrTx/>
-                <a:buSzTx/>
-                <a:buFontTx/>
-                <a:buNone/>
-                <a:tabLst/>
-                <a:defRPr/>
-              </a:pPr>
-              <a:t>16</a:t>
-            </a:fld>
-            <a:endParaRPr kumimoji="0" lang="en-US" sz="1400" b="0" i="0" u="none" strike="noStrike" kern="1200" cap="none" spc="0" normalizeH="0" baseline="0" noProof="0">
-              <a:ln>
-                <a:noFill/>
-              </a:ln>
-              <a:solidFill>
-                <a:srgbClr val="1F497D"/>
-              </a:solidFill>
-              <a:effectLst/>
-              <a:uLnTx/>
-              <a:uFillTx/>
-              <a:latin typeface="Gill Sans MT"/>
-              <a:ea typeface="+mn-ea"/>
-              <a:cs typeface="+mn-cs"/>
-            </a:endParaRPr>
-          </a:p>
-        </p:txBody>
-      </p:sp>
-      <p:sp>
-        <p:nvSpPr>
-          <p:cNvPr id="323586" name="Date Placeholder 3"/>
-          <p:cNvSpPr txBox="1">
-            <a:spLocks noGrp="1"/>
-          </p:cNvSpPr>
-          <p:nvPr/>
-        </p:nvSpPr>
-        <p:spPr bwMode="auto">
-          <a:xfrm>
-            <a:off x="457200" y="6245225"/>
-            <a:ext cx="2133600" cy="476250"/>
-          </a:xfrm>
-          <a:prstGeom prst="rect">
-            <a:avLst/>
-          </a:prstGeom>
-          <a:noFill/>
-          <a:ln>
-            <a:noFill/>
-          </a:ln>
-          <a:extLst>
-            <a:ext uri="{909E8E84-426E-40DD-AFC4-6F175D3DCCD1}">
-              <a14:hiddenFill xmlns:a14="http://schemas.microsoft.com/office/drawing/2010/main">
-                <a:solidFill>
-                  <a:srgbClr val="FFFFFF"/>
-                </a:solidFill>
-              </a14:hiddenFill>
-            </a:ext>
-            <a:ext uri="{91240B29-F687-4F45-9708-019B960494DF}">
-              <a14:hiddenLine xmlns:a14="http://schemas.microsoft.com/office/drawing/2010/main" w="9525">
-                <a:solidFill>
-                  <a:srgbClr val="000000"/>
-                </a:solidFill>
-                <a:miter lim="800000"/>
-                <a:headEnd/>
-                <a:tailEnd/>
-              </a14:hiddenLine>
-            </a:ext>
-          </a:extLst>
-        </p:spPr>
-        <p:txBody>
-          <a:bodyPr/>
-          <a:lstStyle>
-            <a:lvl1pPr>
-              <a:defRPr>
-                <a:solidFill>
-                  <a:schemeClr val="tx1"/>
-                </a:solidFill>
-                <a:latin typeface="Arial" pitchFamily="34" charset="0"/>
-              </a:defRPr>
-            </a:lvl1pPr>
-            <a:lvl2pPr marL="742950" indent="-285750">
-              <a:defRPr>
-                <a:solidFill>
-                  <a:schemeClr val="tx1"/>
-                </a:solidFill>
-                <a:latin typeface="Arial" pitchFamily="34" charset="0"/>
-              </a:defRPr>
-            </a:lvl2pPr>
-            <a:lvl3pPr marL="1143000" indent="-228600">
-              <a:defRPr>
-                <a:solidFill>
-                  <a:schemeClr val="tx1"/>
-                </a:solidFill>
-                <a:latin typeface="Arial" pitchFamily="34" charset="0"/>
-              </a:defRPr>
-            </a:lvl3pPr>
-            <a:lvl4pPr marL="1600200" indent="-228600">
-              <a:defRPr>
-                <a:solidFill>
-                  <a:schemeClr val="tx1"/>
-                </a:solidFill>
-                <a:latin typeface="Arial" pitchFamily="34" charset="0"/>
-              </a:defRPr>
-            </a:lvl4pPr>
-            <a:lvl5pPr marL="2057400" indent="-228600">
-              <a:defRPr>
-                <a:solidFill>
-                  <a:schemeClr val="tx1"/>
-                </a:solidFill>
-                <a:latin typeface="Arial" pitchFamily="34" charset="0"/>
-              </a:defRPr>
-            </a:lvl5pPr>
-            <a:lvl6pPr marL="2514600" indent="-228600" fontAlgn="base">
-              <a:spcBef>
-                <a:spcPct val="0"/>
-              </a:spcBef>
-              <a:spcAft>
-                <a:spcPct val="0"/>
-              </a:spcAft>
-              <a:defRPr>
-                <a:solidFill>
-                  <a:schemeClr val="tx1"/>
-                </a:solidFill>
-                <a:latin typeface="Arial" pitchFamily="34" charset="0"/>
-              </a:defRPr>
-            </a:lvl6pPr>
-            <a:lvl7pPr marL="2971800" indent="-228600" fontAlgn="base">
-              <a:spcBef>
-                <a:spcPct val="0"/>
-              </a:spcBef>
-              <a:spcAft>
-                <a:spcPct val="0"/>
-              </a:spcAft>
-              <a:defRPr>
-                <a:solidFill>
-                  <a:schemeClr val="tx1"/>
-                </a:solidFill>
-                <a:latin typeface="Arial" pitchFamily="34" charset="0"/>
-              </a:defRPr>
-            </a:lvl7pPr>
-            <a:lvl8pPr marL="3429000" indent="-228600" fontAlgn="base">
-              <a:spcBef>
-                <a:spcPct val="0"/>
-              </a:spcBef>
-              <a:spcAft>
-                <a:spcPct val="0"/>
-              </a:spcAft>
-              <a:defRPr>
-                <a:solidFill>
-                  <a:schemeClr val="tx1"/>
-                </a:solidFill>
-                <a:latin typeface="Arial" pitchFamily="34" charset="0"/>
-              </a:defRPr>
-            </a:lvl8pPr>
-            <a:lvl9pPr marL="3886200" indent="-228600" fontAlgn="base">
-              <a:spcBef>
-                <a:spcPct val="0"/>
-              </a:spcBef>
-              <a:spcAft>
-                <a:spcPct val="0"/>
-              </a:spcAft>
-              <a:defRPr>
-                <a:solidFill>
-                  <a:schemeClr val="tx1"/>
-                </a:solidFill>
-                <a:latin typeface="Arial" pitchFamily="34" charset="0"/>
-              </a:defRPr>
-            </a:lvl9pPr>
-          </a:lstStyle>
-          <a:p>
-            <a:pPr marL="0" marR="0" lvl="0" indent="0" algn="l" defTabSz="914400" rtl="0" eaLnBrk="1" fontAlgn="auto" latinLnBrk="0" hangingPunct="1">
-              <a:lnSpc>
-                <a:spcPct val="100000"/>
-              </a:lnSpc>
-              <a:spcBef>
-                <a:spcPts val="0"/>
-              </a:spcBef>
-              <a:spcAft>
-                <a:spcPts val="0"/>
-              </a:spcAft>
-              <a:buClrTx/>
-              <a:buSzTx/>
-              <a:buFontTx/>
-              <a:buNone/>
-              <a:tabLst/>
-              <a:defRPr/>
-            </a:pPr>
-            <a:endParaRPr kumimoji="0" lang="en-US" sz="1400" b="0" i="0" u="none" strike="noStrike" kern="1200" cap="none" spc="0" normalizeH="0" baseline="0" noProof="0">
-              <a:ln>
-                <a:noFill/>
-              </a:ln>
-              <a:solidFill>
-                <a:srgbClr val="EEECE1"/>
-              </a:solidFill>
-              <a:effectLst/>
-              <a:uLnTx/>
-              <a:uFillTx/>
-              <a:latin typeface="Arial" pitchFamily="34" charset="0"/>
-              <a:ea typeface="+mn-ea"/>
-              <a:cs typeface="+mn-cs"/>
-            </a:endParaRPr>
-          </a:p>
-        </p:txBody>
-      </p:sp>
-      <p:sp>
-        <p:nvSpPr>
-          <p:cNvPr id="323587" name="Slide Number Placeholder 5"/>
-          <p:cNvSpPr txBox="1">
-            <a:spLocks noGrp="1"/>
-          </p:cNvSpPr>
-          <p:nvPr/>
-        </p:nvSpPr>
-        <p:spPr bwMode="auto">
-          <a:xfrm>
-            <a:off x="6553200" y="5864225"/>
-            <a:ext cx="2133600" cy="476250"/>
-          </a:xfrm>
-          <a:prstGeom prst="rect">
-            <a:avLst/>
-          </a:prstGeom>
-          <a:noFill/>
-          <a:ln>
-            <a:noFill/>
-          </a:ln>
-          <a:extLst>
-            <a:ext uri="{909E8E84-426E-40DD-AFC4-6F175D3DCCD1}">
-              <a14:hiddenFill xmlns:a14="http://schemas.microsoft.com/office/drawing/2010/main">
-                <a:solidFill>
-                  <a:srgbClr val="FFFFFF"/>
-                </a:solidFill>
-              </a14:hiddenFill>
-            </a:ext>
-            <a:ext uri="{91240B29-F687-4F45-9708-019B960494DF}">
-              <a14:hiddenLine xmlns:a14="http://schemas.microsoft.com/office/drawing/2010/main" w="9525">
-                <a:solidFill>
-                  <a:srgbClr val="000000"/>
-                </a:solidFill>
-                <a:miter lim="800000"/>
-                <a:headEnd/>
-                <a:tailEnd/>
-              </a14:hiddenLine>
-            </a:ext>
-          </a:extLst>
-        </p:spPr>
-        <p:txBody>
-          <a:bodyPr/>
-          <a:lstStyle>
-            <a:lvl1pPr>
-              <a:defRPr>
-                <a:solidFill>
-                  <a:schemeClr val="tx1"/>
-                </a:solidFill>
-                <a:latin typeface="Arial" pitchFamily="34" charset="0"/>
-              </a:defRPr>
-            </a:lvl1pPr>
-            <a:lvl2pPr marL="742950" indent="-285750">
-              <a:defRPr>
-                <a:solidFill>
-                  <a:schemeClr val="tx1"/>
-                </a:solidFill>
-                <a:latin typeface="Arial" pitchFamily="34" charset="0"/>
-              </a:defRPr>
-            </a:lvl2pPr>
-            <a:lvl3pPr marL="1143000" indent="-228600">
-              <a:defRPr>
-                <a:solidFill>
-                  <a:schemeClr val="tx1"/>
-                </a:solidFill>
-                <a:latin typeface="Arial" pitchFamily="34" charset="0"/>
-              </a:defRPr>
-            </a:lvl3pPr>
-            <a:lvl4pPr marL="1600200" indent="-228600">
-              <a:defRPr>
-                <a:solidFill>
-                  <a:schemeClr val="tx1"/>
-                </a:solidFill>
-                <a:latin typeface="Arial" pitchFamily="34" charset="0"/>
-              </a:defRPr>
-            </a:lvl4pPr>
-            <a:lvl5pPr marL="2057400" indent="-228600">
-              <a:defRPr>
-                <a:solidFill>
-                  <a:schemeClr val="tx1"/>
-                </a:solidFill>
-                <a:latin typeface="Arial" pitchFamily="34" charset="0"/>
-              </a:defRPr>
-            </a:lvl5pPr>
-            <a:lvl6pPr marL="2514600" indent="-228600" fontAlgn="base">
-              <a:spcBef>
-                <a:spcPct val="0"/>
-              </a:spcBef>
-              <a:spcAft>
-                <a:spcPct val="0"/>
-              </a:spcAft>
-              <a:defRPr>
-                <a:solidFill>
-                  <a:schemeClr val="tx1"/>
-                </a:solidFill>
-                <a:latin typeface="Arial" pitchFamily="34" charset="0"/>
-              </a:defRPr>
-            </a:lvl6pPr>
-            <a:lvl7pPr marL="2971800" indent="-228600" fontAlgn="base">
-              <a:spcBef>
-                <a:spcPct val="0"/>
-              </a:spcBef>
-              <a:spcAft>
-                <a:spcPct val="0"/>
-              </a:spcAft>
-              <a:defRPr>
-                <a:solidFill>
-                  <a:schemeClr val="tx1"/>
-                </a:solidFill>
-                <a:latin typeface="Arial" pitchFamily="34" charset="0"/>
-              </a:defRPr>
-            </a:lvl7pPr>
-            <a:lvl8pPr marL="3429000" indent="-228600" fontAlgn="base">
-              <a:spcBef>
-                <a:spcPct val="0"/>
-              </a:spcBef>
-              <a:spcAft>
-                <a:spcPct val="0"/>
-              </a:spcAft>
-              <a:defRPr>
-                <a:solidFill>
-                  <a:schemeClr val="tx1"/>
-                </a:solidFill>
-                <a:latin typeface="Arial" pitchFamily="34" charset="0"/>
-              </a:defRPr>
-            </a:lvl8pPr>
-            <a:lvl9pPr marL="3886200" indent="-228600" fontAlgn="base">
-              <a:spcBef>
-                <a:spcPct val="0"/>
-              </a:spcBef>
-              <a:spcAft>
-                <a:spcPct val="0"/>
-              </a:spcAft>
-              <a:defRPr>
-                <a:solidFill>
-                  <a:schemeClr val="tx1"/>
-                </a:solidFill>
-                <a:latin typeface="Arial" pitchFamily="34" charset="0"/>
-              </a:defRPr>
-            </a:lvl9pPr>
-          </a:lstStyle>
-          <a:p>
-            <a:pPr marL="0" marR="0" lvl="0" indent="0" algn="r" defTabSz="914400" rtl="0" eaLnBrk="1" fontAlgn="auto" latinLnBrk="0" hangingPunct="1">
-              <a:lnSpc>
-                <a:spcPct val="100000"/>
-              </a:lnSpc>
-              <a:spcBef>
-                <a:spcPts val="0"/>
-              </a:spcBef>
-              <a:spcAft>
-                <a:spcPts val="0"/>
-              </a:spcAft>
-              <a:buClrTx/>
-              <a:buSzTx/>
-              <a:buFontTx/>
-              <a:buNone/>
-              <a:tabLst/>
-              <a:defRPr/>
-            </a:pPr>
-            <a:fld id="{433D14BE-FE52-4332-969F-3696FB65ED39}" type="slidenum">
-              <a:rPr kumimoji="0" lang="en-US" sz="1400" b="0" i="0" u="none" strike="noStrike" kern="1200" cap="none" spc="0" normalizeH="0" baseline="0" noProof="0">
-                <a:ln>
-                  <a:noFill/>
-                </a:ln>
-                <a:solidFill>
-                  <a:srgbClr val="EEECE1"/>
-                </a:solidFill>
-                <a:effectLst/>
-                <a:uLnTx/>
-                <a:uFillTx/>
-                <a:latin typeface="Arial" pitchFamily="34" charset="0"/>
-                <a:ea typeface="+mn-ea"/>
-                <a:cs typeface="+mn-cs"/>
-              </a:rPr>
-              <a:pPr marL="0" marR="0" lvl="0" indent="0" algn="r" defTabSz="914400" rtl="0" eaLnBrk="1" fontAlgn="auto" latinLnBrk="0" hangingPunct="1">
-                <a:lnSpc>
-                  <a:spcPct val="100000"/>
-                </a:lnSpc>
-                <a:spcBef>
-                  <a:spcPts val="0"/>
-                </a:spcBef>
-                <a:spcAft>
-                  <a:spcPts val="0"/>
-                </a:spcAft>
-                <a:buClrTx/>
-                <a:buSzTx/>
-                <a:buFontTx/>
-                <a:buNone/>
-                <a:tabLst/>
-                <a:defRPr/>
-              </a:pPr>
-              <a:t>16</a:t>
-            </a:fld>
-            <a:endParaRPr kumimoji="0" lang="en-US" sz="1400" b="0" i="0" u="none" strike="noStrike" kern="1200" cap="none" spc="0" normalizeH="0" baseline="0" noProof="0">
-              <a:ln>
-                <a:noFill/>
-              </a:ln>
-              <a:solidFill>
-                <a:srgbClr val="EEECE1"/>
-              </a:solidFill>
-              <a:effectLst/>
-              <a:uLnTx/>
-              <a:uFillTx/>
-              <a:latin typeface="Arial" pitchFamily="34" charset="0"/>
-              <a:ea typeface="+mn-ea"/>
-              <a:cs typeface="+mn-cs"/>
-            </a:endParaRPr>
-          </a:p>
-        </p:txBody>
-      </p:sp>
-      <p:sp>
-        <p:nvSpPr>
-          <p:cNvPr id="38917" name="Rectangle 5"/>
-          <p:cNvSpPr>
-            <a:spLocks noChangeArrowheads="1"/>
-          </p:cNvSpPr>
-          <p:nvPr/>
-        </p:nvSpPr>
-        <p:spPr bwMode="auto">
-          <a:xfrm>
-            <a:off x="609600" y="3370151"/>
-            <a:ext cx="8083550" cy="2354491"/>
-          </a:xfrm>
-          <a:prstGeom prst="rect">
-            <a:avLst/>
-          </a:prstGeom>
-          <a:noFill/>
-          <a:ln>
-            <a:noFill/>
-          </a:ln>
-          <a:extLst>
-            <a:ext uri="{909E8E84-426E-40DD-AFC4-6F175D3DCCD1}">
-              <a14:hiddenFill xmlns:a14="http://schemas.microsoft.com/office/drawing/2010/main">
-                <a:solidFill>
-                  <a:srgbClr val="FFFFFF"/>
-                </a:solidFill>
-              </a14:hiddenFill>
-            </a:ext>
-            <a:ext uri="{91240B29-F687-4F45-9708-019B960494DF}">
-              <a14:hiddenLine xmlns:a14="http://schemas.microsoft.com/office/drawing/2010/main" w="9525">
-                <a:solidFill>
-                  <a:srgbClr val="000000"/>
-                </a:solidFill>
-                <a:miter lim="800000"/>
-                <a:headEnd/>
-                <a:tailEnd/>
-              </a14:hiddenLine>
-            </a:ext>
-          </a:extLst>
-        </p:spPr>
-        <p:txBody>
-          <a:bodyPr anchor="ctr">
-            <a:spAutoFit/>
-          </a:bodyPr>
-          <a:lstStyle/>
-          <a:p>
-            <a:pPr marL="0" marR="0" lvl="0" indent="0" algn="l" defTabSz="914400" rtl="0" eaLnBrk="1" fontAlgn="auto" latinLnBrk="0" hangingPunct="1">
-              <a:lnSpc>
-                <a:spcPct val="100000"/>
-              </a:lnSpc>
-              <a:spcBef>
-                <a:spcPts val="0"/>
-              </a:spcBef>
-              <a:spcAft>
-                <a:spcPts val="0"/>
-              </a:spcAft>
-              <a:buClrTx/>
-              <a:buSzTx/>
-              <a:buFontTx/>
-              <a:buNone/>
-              <a:tabLst/>
-              <a:defRPr/>
-            </a:pPr>
-            <a:endParaRPr kumimoji="0" lang="en-US" sz="700" b="0" i="0" u="none" strike="noStrike" kern="1200" cap="none" spc="0" normalizeH="0" baseline="0" noProof="0" dirty="0">
-              <a:ln>
-                <a:noFill/>
-              </a:ln>
-              <a:solidFill>
-                <a:prstClr val="black"/>
-              </a:solidFill>
-              <a:effectLst/>
-              <a:uLnTx/>
-              <a:uFillTx/>
-              <a:latin typeface="Gill Sans MT"/>
-              <a:ea typeface="+mn-ea"/>
-              <a:cs typeface="+mn-cs"/>
-            </a:endParaRPr>
-          </a:p>
-          <a:p>
-            <a:pPr marL="0" marR="0" lvl="0" indent="0" algn="l" defTabSz="914400" rtl="0" eaLnBrk="0" fontAlgn="auto" latinLnBrk="0" hangingPunct="0">
-              <a:lnSpc>
-                <a:spcPct val="100000"/>
-              </a:lnSpc>
-              <a:spcBef>
-                <a:spcPts val="0"/>
-              </a:spcBef>
-              <a:spcAft>
-                <a:spcPts val="0"/>
-              </a:spcAft>
-              <a:buClrTx/>
-              <a:buSzTx/>
-              <a:buFontTx/>
-              <a:buNone/>
-              <a:tabLst/>
-              <a:defRPr/>
-            </a:pPr>
-            <a:r>
-              <a:rPr kumimoji="0" lang="en-US" b="0" i="0" u="none" strike="noStrike" kern="1200" cap="none" spc="0" normalizeH="0" baseline="0" noProof="0" dirty="0">
-                <a:ln>
-                  <a:noFill/>
-                </a:ln>
-                <a:solidFill>
-                  <a:prstClr val="black"/>
-                </a:solidFill>
-                <a:effectLst/>
-                <a:uLnTx/>
-                <a:uFillTx/>
-                <a:latin typeface="Gill Sans MT"/>
-                <a:cs typeface="Times New Roman" pitchFamily="18" charset="0"/>
-              </a:rPr>
-              <a:t>Carry flag C = 1 upon an </a:t>
-            </a:r>
-            <a:r>
-              <a:rPr kumimoji="0" lang="en-US" b="1" i="0" u="sng" strike="noStrike" kern="1200" cap="none" spc="0" normalizeH="0" baseline="0" noProof="0" dirty="0">
-                <a:ln>
-                  <a:noFill/>
-                </a:ln>
-                <a:solidFill>
-                  <a:srgbClr val="800000"/>
-                </a:solidFill>
-                <a:effectLst/>
-                <a:uLnTx/>
-                <a:uFillTx/>
-                <a:latin typeface="Gill Sans MT"/>
-                <a:cs typeface="Times New Roman" pitchFamily="18" charset="0"/>
-              </a:rPr>
-              <a:t>unsigned</a:t>
-            </a:r>
-            <a:r>
-              <a:rPr kumimoji="0" lang="en-US" b="0" i="0" u="none" strike="noStrike" kern="1200" cap="none" spc="0" normalizeH="0" baseline="0" noProof="0" dirty="0">
-                <a:ln>
-                  <a:noFill/>
-                </a:ln>
-                <a:solidFill>
-                  <a:prstClr val="black"/>
-                </a:solidFill>
-                <a:effectLst/>
-                <a:uLnTx/>
-                <a:uFillTx/>
-                <a:latin typeface="Gill Sans MT"/>
-                <a:cs typeface="Times New Roman" pitchFamily="18" charset="0"/>
-              </a:rPr>
-              <a:t> addition if the answer is wrong (true result &gt; 2</a:t>
-            </a:r>
-            <a:r>
-              <a:rPr kumimoji="0" lang="en-US" b="0" i="0" u="none" strike="noStrike" kern="1200" cap="none" spc="0" normalizeH="0" baseline="30000" noProof="0" dirty="0">
-                <a:ln>
-                  <a:noFill/>
-                </a:ln>
-                <a:solidFill>
-                  <a:prstClr val="black"/>
-                </a:solidFill>
-                <a:effectLst/>
-                <a:uLnTx/>
-                <a:uFillTx/>
-                <a:latin typeface="Gill Sans MT"/>
-                <a:cs typeface="Times New Roman" pitchFamily="18" charset="0"/>
-              </a:rPr>
-              <a:t>n</a:t>
-            </a:r>
-            <a:r>
-              <a:rPr kumimoji="0" lang="en-US" b="0" i="0" u="none" strike="noStrike" kern="1200" cap="none" spc="0" normalizeH="0" baseline="0" noProof="0" dirty="0">
-                <a:ln>
-                  <a:noFill/>
-                </a:ln>
-                <a:solidFill>
-                  <a:prstClr val="black"/>
-                </a:solidFill>
-                <a:effectLst/>
-                <a:uLnTx/>
-                <a:uFillTx/>
-                <a:latin typeface="Gill Sans MT"/>
-                <a:cs typeface="Times New Roman" pitchFamily="18" charset="0"/>
-              </a:rPr>
-              <a:t>-1)</a:t>
-            </a:r>
-          </a:p>
-          <a:p>
-            <a:pPr lvl="0" fontAlgn="auto">
-              <a:spcBef>
-                <a:spcPts val="0"/>
-              </a:spcBef>
-              <a:spcAft>
-                <a:spcPts val="0"/>
-              </a:spcAft>
-            </a:pPr>
-            <a:r>
-              <a:rPr lang="en-US" b="0" dirty="0">
-                <a:solidFill>
-                  <a:prstClr val="black"/>
-                </a:solidFill>
-                <a:latin typeface="Gill Sans MT"/>
-                <a:cs typeface="Times New Roman" pitchFamily="18" charset="0"/>
-              </a:rPr>
-              <a:t>Carry flag </a:t>
-            </a:r>
-            <a:r>
-              <a:rPr lang="en-US" b="0" dirty="0">
-                <a:solidFill>
-                  <a:prstClr val="black"/>
-                </a:solidFill>
-                <a:latin typeface="Gill Sans MT"/>
-              </a:rPr>
-              <a:t>C = 0 (Borrow flag = 1) </a:t>
-            </a:r>
-            <a:r>
-              <a:rPr lang="en-US" b="0" dirty="0">
-                <a:solidFill>
-                  <a:prstClr val="black"/>
-                </a:solidFill>
-                <a:latin typeface="Gill Sans MT"/>
-                <a:cs typeface="Times New Roman" pitchFamily="18" charset="0"/>
-              </a:rPr>
-              <a:t>upon </a:t>
-            </a:r>
-            <a:r>
-              <a:rPr lang="en-US" b="0" dirty="0">
-                <a:solidFill>
-                  <a:prstClr val="black"/>
-                </a:solidFill>
-                <a:latin typeface="Gill Sans MT"/>
-              </a:rPr>
-              <a:t>an </a:t>
-            </a:r>
-            <a:r>
-              <a:rPr lang="en-US" u="sng" dirty="0">
-                <a:solidFill>
-                  <a:srgbClr val="800000"/>
-                </a:solidFill>
-                <a:latin typeface="Gill Sans MT"/>
-              </a:rPr>
-              <a:t>unsigned</a:t>
-            </a:r>
-            <a:r>
-              <a:rPr lang="en-US" b="0" dirty="0">
-                <a:solidFill>
-                  <a:prstClr val="black"/>
-                </a:solidFill>
-                <a:latin typeface="Gill Sans MT"/>
-              </a:rPr>
-              <a:t> subtraction </a:t>
-            </a:r>
-            <a:r>
-              <a:rPr lang="en-US" b="0" dirty="0">
-                <a:solidFill>
-                  <a:prstClr val="black"/>
-                </a:solidFill>
-                <a:latin typeface="Gill Sans MT"/>
-                <a:cs typeface="Times New Roman" pitchFamily="18" charset="0"/>
-              </a:rPr>
-              <a:t>if the answer is wrong </a:t>
-            </a:r>
-            <a:r>
-              <a:rPr lang="en-US" b="0" dirty="0">
-                <a:solidFill>
-                  <a:prstClr val="black"/>
-                </a:solidFill>
-                <a:latin typeface="Gill Sans MT"/>
-              </a:rPr>
-              <a:t> (</a:t>
-            </a:r>
-            <a:r>
-              <a:rPr lang="en-US" b="0" dirty="0">
-                <a:solidFill>
-                  <a:prstClr val="black"/>
-                </a:solidFill>
-                <a:latin typeface="Gill Sans MT"/>
-                <a:cs typeface="Times New Roman" pitchFamily="18" charset="0"/>
-              </a:rPr>
-              <a:t>true result &lt; 0)</a:t>
-            </a:r>
-            <a:endParaRPr lang="en-US" sz="700" b="0" dirty="0">
-              <a:solidFill>
-                <a:prstClr val="black"/>
-              </a:solidFill>
-              <a:latin typeface="Gill Sans MT"/>
-            </a:endParaRPr>
-          </a:p>
-          <a:p>
-            <a:pPr lvl="0" fontAlgn="auto">
-              <a:spcBef>
-                <a:spcPts val="0"/>
-              </a:spcBef>
-              <a:spcAft>
-                <a:spcPts val="0"/>
-              </a:spcAft>
-              <a:defRPr/>
-            </a:pPr>
-            <a:r>
-              <a:rPr kumimoji="0" lang="en-US" b="0" i="0" u="none" strike="noStrike" kern="1200" cap="none" spc="0" normalizeH="0" baseline="0" noProof="0" dirty="0">
-                <a:ln>
-                  <a:noFill/>
-                </a:ln>
-                <a:solidFill>
-                  <a:prstClr val="black"/>
-                </a:solidFill>
-                <a:effectLst/>
-                <a:uLnTx/>
-                <a:uFillTx/>
-                <a:latin typeface="Gill Sans MT"/>
-                <a:cs typeface="Times New Roman" pitchFamily="18" charset="0"/>
-              </a:rPr>
-              <a:t>Overflow</a:t>
-            </a:r>
-            <a:r>
-              <a:rPr kumimoji="0" lang="en-US" b="0" i="0" u="none" strike="noStrike" kern="1200" cap="none" spc="0" normalizeH="0" noProof="0" dirty="0">
-                <a:ln>
-                  <a:noFill/>
-                </a:ln>
-                <a:solidFill>
-                  <a:prstClr val="black"/>
-                </a:solidFill>
-                <a:effectLst/>
-                <a:uLnTx/>
-                <a:uFillTx/>
-                <a:latin typeface="Gill Sans MT"/>
-                <a:cs typeface="Times New Roman" pitchFamily="18" charset="0"/>
-              </a:rPr>
-              <a:t> flag </a:t>
-            </a:r>
-            <a:r>
-              <a:rPr kumimoji="0" lang="en-US" b="0" i="0" u="none" strike="noStrike" kern="1200" cap="none" spc="0" normalizeH="0" baseline="0" noProof="0" dirty="0">
-                <a:ln>
-                  <a:noFill/>
-                </a:ln>
-                <a:solidFill>
-                  <a:prstClr val="black"/>
-                </a:solidFill>
-                <a:effectLst/>
-                <a:uLnTx/>
-                <a:uFillTx/>
-                <a:latin typeface="Gill Sans MT"/>
-                <a:cs typeface="Times New Roman" pitchFamily="18" charset="0"/>
-              </a:rPr>
-              <a:t>V =1 upon a </a:t>
-            </a:r>
-            <a:r>
-              <a:rPr kumimoji="0" lang="en-US" b="1" i="0" u="sng" strike="noStrike" kern="1200" cap="none" spc="0" normalizeH="0" baseline="0" noProof="0" dirty="0">
-                <a:ln>
-                  <a:noFill/>
-                </a:ln>
-                <a:solidFill>
-                  <a:srgbClr val="800000"/>
-                </a:solidFill>
-                <a:effectLst/>
-                <a:uLnTx/>
-                <a:uFillTx/>
-                <a:latin typeface="Gill Sans MT"/>
-                <a:cs typeface="Times New Roman" pitchFamily="18" charset="0"/>
-              </a:rPr>
-              <a:t>signed</a:t>
-            </a:r>
-            <a:r>
-              <a:rPr kumimoji="0" lang="en-US" b="0" i="0" u="none" strike="noStrike" kern="1200" cap="none" spc="0" normalizeH="0" baseline="0" noProof="0" dirty="0">
-                <a:ln>
-                  <a:noFill/>
-                </a:ln>
-                <a:solidFill>
-                  <a:prstClr val="black"/>
-                </a:solidFill>
-                <a:effectLst/>
-                <a:uLnTx/>
-                <a:uFillTx/>
-                <a:latin typeface="Gill Sans MT"/>
-                <a:cs typeface="Times New Roman" pitchFamily="18" charset="0"/>
-              </a:rPr>
-              <a:t> addition </a:t>
-            </a:r>
-            <a:r>
-              <a:rPr lang="en-US" b="0" dirty="0">
-                <a:solidFill>
-                  <a:prstClr val="black"/>
-                </a:solidFill>
-                <a:latin typeface="Gill Sans MT"/>
-                <a:cs typeface="Times New Roman" pitchFamily="18" charset="0"/>
-              </a:rPr>
-              <a:t>if the answer is wrong (true result &gt; 2</a:t>
-            </a:r>
-            <a:r>
-              <a:rPr lang="en-US" b="0" baseline="30000" dirty="0">
-                <a:solidFill>
-                  <a:prstClr val="black"/>
-                </a:solidFill>
-                <a:latin typeface="Gill Sans MT"/>
-                <a:cs typeface="Times New Roman" pitchFamily="18" charset="0"/>
-              </a:rPr>
-              <a:t>n</a:t>
-            </a:r>
-            <a:r>
-              <a:rPr lang="en-US" altLang="zh-CN" b="0" baseline="30000" dirty="0">
-                <a:solidFill>
-                  <a:prstClr val="black"/>
-                </a:solidFill>
-                <a:latin typeface="Gill Sans MT"/>
-                <a:cs typeface="Times New Roman" pitchFamily="18" charset="0"/>
-              </a:rPr>
-              <a:t>-1</a:t>
-            </a:r>
-            <a:r>
-              <a:rPr lang="en-US" b="0" dirty="0">
-                <a:solidFill>
-                  <a:prstClr val="black"/>
-                </a:solidFill>
-                <a:latin typeface="Gill Sans MT"/>
-                <a:cs typeface="Times New Roman" pitchFamily="18" charset="0"/>
-              </a:rPr>
-              <a:t>-1 </a:t>
-            </a:r>
-            <a:r>
-              <a:rPr lang="en-US" altLang="zh-CN" b="0" dirty="0">
-                <a:solidFill>
-                  <a:prstClr val="black"/>
-                </a:solidFill>
-                <a:latin typeface="Gill Sans MT"/>
-                <a:cs typeface="Times New Roman" pitchFamily="18" charset="0"/>
-              </a:rPr>
-              <a:t>or true result &lt; -</a:t>
-            </a:r>
-            <a:r>
-              <a:rPr lang="en-US" b="0" dirty="0">
-                <a:solidFill>
-                  <a:prstClr val="black"/>
-                </a:solidFill>
-                <a:latin typeface="Gill Sans MT"/>
-                <a:cs typeface="Times New Roman" pitchFamily="18" charset="0"/>
-              </a:rPr>
-              <a:t>2</a:t>
-            </a:r>
-            <a:r>
-              <a:rPr lang="en-US" b="0" baseline="30000" dirty="0">
-                <a:solidFill>
-                  <a:prstClr val="black"/>
-                </a:solidFill>
-                <a:latin typeface="Gill Sans MT"/>
-                <a:cs typeface="Times New Roman" pitchFamily="18" charset="0"/>
-              </a:rPr>
-              <a:t>n</a:t>
-            </a:r>
-            <a:r>
-              <a:rPr lang="en-US" altLang="zh-CN" b="0" baseline="30000" dirty="0">
-                <a:solidFill>
-                  <a:prstClr val="black"/>
-                </a:solidFill>
-                <a:latin typeface="Gill Sans MT"/>
-                <a:cs typeface="Times New Roman" pitchFamily="18" charset="0"/>
-              </a:rPr>
-              <a:t>-1</a:t>
-            </a:r>
-            <a:r>
-              <a:rPr lang="en-US" altLang="zh-CN" b="0" dirty="0">
-                <a:solidFill>
-                  <a:prstClr val="black"/>
-                </a:solidFill>
-                <a:latin typeface="Gill Sans MT"/>
-                <a:cs typeface="Times New Roman" pitchFamily="18" charset="0"/>
-              </a:rPr>
-              <a:t>)</a:t>
-            </a:r>
-            <a:endParaRPr kumimoji="0" lang="en-US" b="0" i="0" u="none" strike="noStrike" kern="1200" cap="none" spc="0" normalizeH="0" noProof="0" dirty="0">
-              <a:ln>
-                <a:noFill/>
-              </a:ln>
-              <a:solidFill>
-                <a:prstClr val="black"/>
-              </a:solidFill>
-              <a:effectLst/>
-              <a:uLnTx/>
-              <a:uFillTx/>
-              <a:latin typeface="Gill Sans MT"/>
-              <a:cs typeface="Times New Roman" pitchFamily="18" charset="0"/>
-            </a:endParaRPr>
-          </a:p>
-          <a:p>
-            <a:pPr marL="0" marR="0" lvl="0" indent="0" algn="l" defTabSz="914400" rtl="0" eaLnBrk="0" fontAlgn="auto" latinLnBrk="0" hangingPunct="0">
-              <a:lnSpc>
-                <a:spcPct val="100000"/>
-              </a:lnSpc>
-              <a:spcBef>
-                <a:spcPts val="0"/>
-              </a:spcBef>
-              <a:spcAft>
-                <a:spcPts val="0"/>
-              </a:spcAft>
-              <a:buClrTx/>
-              <a:buSzTx/>
-              <a:buFontTx/>
-              <a:buNone/>
-              <a:tabLst/>
-              <a:defRPr/>
-            </a:pPr>
-            <a:endParaRPr kumimoji="0" lang="en-US" b="0" i="0" u="none" strike="noStrike" kern="1200" cap="none" spc="0" normalizeH="0" baseline="0" noProof="0" dirty="0">
-              <a:ln>
-                <a:noFill/>
-              </a:ln>
-              <a:solidFill>
-                <a:prstClr val="black"/>
-              </a:solidFill>
-              <a:effectLst/>
-              <a:uLnTx/>
-              <a:uFillTx/>
-              <a:latin typeface="Gill Sans MT"/>
-              <a:cs typeface="Times New Roman" pitchFamily="18" charset="0"/>
-            </a:endParaRPr>
-          </a:p>
-        </p:txBody>
-      </p:sp>
-      <p:graphicFrame>
-        <p:nvGraphicFramePr>
-          <p:cNvPr id="39012" name="Group 100"/>
-          <p:cNvGraphicFramePr>
-            <a:graphicFrameLocks noGrp="1"/>
-          </p:cNvGraphicFramePr>
-          <p:nvPr>
-            <p:extLst>
-              <p:ext uri="{D42A27DB-BD31-4B8C-83A1-F6EECF244321}">
-                <p14:modId xmlns:p14="http://schemas.microsoft.com/office/powerpoint/2010/main" val="494443522"/>
-              </p:ext>
-            </p:extLst>
-          </p:nvPr>
-        </p:nvGraphicFramePr>
-        <p:xfrm>
-          <a:off x="1447800" y="1143000"/>
-          <a:ext cx="5715000" cy="2362201"/>
-        </p:xfrm>
-        <a:graphic>
-          <a:graphicData uri="http://schemas.openxmlformats.org/drawingml/2006/table">
-            <a:tbl>
-              <a:tblPr>
-                <a:tableStyleId>{BC89EF96-8CEA-46FF-86C4-4CE0E7609802}</a:tableStyleId>
-              </a:tblPr>
-              <a:tblGrid>
-                <a:gridCol w="585788">
-                  <a:extLst>
-                    <a:ext uri="{9D8B030D-6E8A-4147-A177-3AD203B41FA5}">
-                      <a16:colId xmlns:a16="http://schemas.microsoft.com/office/drawing/2014/main" val="20000"/>
-                    </a:ext>
-                  </a:extLst>
-                </a:gridCol>
-                <a:gridCol w="1279525">
-                  <a:extLst>
-                    <a:ext uri="{9D8B030D-6E8A-4147-A177-3AD203B41FA5}">
-                      <a16:colId xmlns:a16="http://schemas.microsoft.com/office/drawing/2014/main" val="20001"/>
-                    </a:ext>
-                  </a:extLst>
-                </a:gridCol>
-                <a:gridCol w="3849687">
-                  <a:extLst>
-                    <a:ext uri="{9D8B030D-6E8A-4147-A177-3AD203B41FA5}">
-                      <a16:colId xmlns:a16="http://schemas.microsoft.com/office/drawing/2014/main" val="20002"/>
-                    </a:ext>
-                  </a:extLst>
-                </a:gridCol>
-              </a:tblGrid>
-              <a:tr h="473075">
-                <a:tc>
-                  <a:txBody>
-                    <a:bodyPr/>
-                    <a:lstStyle/>
-                    <a:p>
-                      <a:pPr marL="0" marR="0" lvl="0" indent="0" algn="just" defTabSz="914400" rtl="0" eaLnBrk="1" fontAlgn="base" latinLnBrk="0" hangingPunct="1">
-                        <a:lnSpc>
-                          <a:spcPct val="100000"/>
-                        </a:lnSpc>
-                        <a:spcBef>
-                          <a:spcPct val="0"/>
-                        </a:spcBef>
-                        <a:spcAft>
-                          <a:spcPct val="0"/>
-                        </a:spcAft>
-                        <a:buClrTx/>
-                        <a:buSzTx/>
-                        <a:buFontTx/>
-                        <a:buNone/>
-                        <a:tabLst/>
-                      </a:pPr>
-                      <a:r>
-                        <a:rPr kumimoji="0" lang="en-US" sz="2000" u="none" strike="noStrike" cap="none" normalizeH="0" baseline="0" dirty="0">
-                          <a:ln>
-                            <a:noFill/>
-                          </a:ln>
-                          <a:effectLst/>
-                        </a:rPr>
-                        <a:t>Bit</a:t>
-                      </a:r>
-                      <a:endParaRPr kumimoji="0" lang="en-US" sz="2000" b="1" i="0" u="none" strike="noStrike" cap="none" normalizeH="0" baseline="0" dirty="0">
-                        <a:ln>
-                          <a:noFill/>
-                        </a:ln>
-                        <a:solidFill>
-                          <a:schemeClr val="tx1"/>
-                        </a:solidFill>
-                        <a:effectLst/>
-                        <a:latin typeface="+mn-lt"/>
-                      </a:endParaRPr>
-                    </a:p>
-                  </a:txBody>
-                  <a:tcPr horzOverflow="overflow"/>
-                </a:tc>
-                <a:tc>
-                  <a:txBody>
-                    <a:bodyPr/>
-                    <a:lstStyle/>
-                    <a:p>
-                      <a:pPr marL="0" marR="0" lvl="0" indent="0" algn="just" defTabSz="914400" rtl="0" eaLnBrk="1" fontAlgn="base" latinLnBrk="0" hangingPunct="1">
-                        <a:lnSpc>
-                          <a:spcPct val="100000"/>
-                        </a:lnSpc>
-                        <a:spcBef>
-                          <a:spcPct val="0"/>
-                        </a:spcBef>
-                        <a:spcAft>
-                          <a:spcPct val="0"/>
-                        </a:spcAft>
-                        <a:buClrTx/>
-                        <a:buSzTx/>
-                        <a:buFontTx/>
-                        <a:buNone/>
-                        <a:tabLst/>
-                      </a:pPr>
-                      <a:r>
-                        <a:rPr kumimoji="0" lang="en-US" sz="2000" u="none" strike="noStrike" cap="none" normalizeH="0" baseline="0" dirty="0">
-                          <a:ln>
-                            <a:noFill/>
-                          </a:ln>
-                          <a:effectLst/>
-                        </a:rPr>
-                        <a:t>Name</a:t>
-                      </a:r>
-                      <a:endParaRPr kumimoji="0" lang="en-US" sz="2000" b="1" i="0" u="none" strike="noStrike" cap="none" normalizeH="0" baseline="0" dirty="0">
-                        <a:ln>
-                          <a:noFill/>
-                        </a:ln>
-                        <a:solidFill>
-                          <a:schemeClr val="tx1"/>
-                        </a:solidFill>
-                        <a:effectLst/>
-                        <a:latin typeface="+mn-lt"/>
-                      </a:endParaRPr>
-                    </a:p>
-                  </a:txBody>
-                  <a:tcPr horzOverflow="overflow"/>
-                </a:tc>
-                <a:tc>
-                  <a:txBody>
-                    <a:bodyPr/>
-                    <a:lstStyle/>
-                    <a:p>
-                      <a:pPr marL="0" marR="0" lvl="0" indent="0" algn="just" defTabSz="914400" rtl="0" eaLnBrk="1" fontAlgn="base" latinLnBrk="0" hangingPunct="1">
-                        <a:lnSpc>
-                          <a:spcPct val="100000"/>
-                        </a:lnSpc>
-                        <a:spcBef>
-                          <a:spcPct val="0"/>
-                        </a:spcBef>
-                        <a:spcAft>
-                          <a:spcPct val="0"/>
-                        </a:spcAft>
-                        <a:buClrTx/>
-                        <a:buSzTx/>
-                        <a:buFontTx/>
-                        <a:buNone/>
-                        <a:tabLst/>
-                      </a:pPr>
-                      <a:r>
-                        <a:rPr kumimoji="0" lang="en-US" sz="2000" u="none" strike="noStrike" cap="none" normalizeH="0" baseline="0">
-                          <a:ln>
-                            <a:noFill/>
-                          </a:ln>
-                          <a:effectLst/>
-                        </a:rPr>
-                        <a:t>Meaning after add or sub</a:t>
-                      </a:r>
-                      <a:endParaRPr kumimoji="0" lang="en-US" sz="2000" b="1" i="0" u="none" strike="noStrike" cap="none" normalizeH="0" baseline="0">
-                        <a:ln>
-                          <a:noFill/>
-                        </a:ln>
-                        <a:solidFill>
-                          <a:schemeClr val="tx1"/>
-                        </a:solidFill>
-                        <a:effectLst/>
-                        <a:latin typeface="+mn-lt"/>
-                      </a:endParaRPr>
-                    </a:p>
-                  </a:txBody>
-                  <a:tcPr horzOverflow="overflow"/>
-                </a:tc>
-                <a:extLst>
-                  <a:ext uri="{0D108BD9-81ED-4DB2-BD59-A6C34878D82A}">
-                    <a16:rowId xmlns:a16="http://schemas.microsoft.com/office/drawing/2014/main" val="10000"/>
-                  </a:ext>
-                </a:extLst>
-              </a:tr>
-              <a:tr h="471488">
-                <a:tc>
-                  <a:txBody>
-                    <a:bodyPr/>
-                    <a:lstStyle/>
-                    <a:p>
-                      <a:pPr marL="0" marR="0" lvl="0" indent="0" algn="just" defTabSz="914400" rtl="0" eaLnBrk="1" fontAlgn="base" latinLnBrk="0" hangingPunct="1">
-                        <a:lnSpc>
-                          <a:spcPct val="100000"/>
-                        </a:lnSpc>
-                        <a:spcBef>
-                          <a:spcPct val="0"/>
-                        </a:spcBef>
-                        <a:spcAft>
-                          <a:spcPct val="0"/>
-                        </a:spcAft>
-                        <a:buClrTx/>
-                        <a:buSzTx/>
-                        <a:buFontTx/>
-                        <a:buNone/>
-                        <a:tabLst/>
-                      </a:pPr>
-                      <a:r>
-                        <a:rPr kumimoji="0" lang="en-US" sz="2000" u="none" strike="noStrike" cap="none" normalizeH="0" baseline="0">
-                          <a:ln>
-                            <a:noFill/>
-                          </a:ln>
-                          <a:effectLst/>
-                        </a:rPr>
-                        <a:t>N</a:t>
-                      </a:r>
-                      <a:endParaRPr kumimoji="0" lang="en-US" sz="2000" b="0" i="0" u="none" strike="noStrike" cap="none" normalizeH="0" baseline="0">
-                        <a:ln>
-                          <a:noFill/>
-                        </a:ln>
-                        <a:solidFill>
-                          <a:schemeClr val="tx1"/>
-                        </a:solidFill>
-                        <a:effectLst/>
-                        <a:latin typeface="+mn-lt"/>
-                      </a:endParaRPr>
-                    </a:p>
-                  </a:txBody>
-                  <a:tcPr horzOverflow="overflow"/>
-                </a:tc>
-                <a:tc>
-                  <a:txBody>
-                    <a:bodyPr/>
-                    <a:lstStyle/>
-                    <a:p>
-                      <a:pPr marL="0" marR="0" lvl="0" indent="0" algn="just" defTabSz="914400" rtl="0" eaLnBrk="1" fontAlgn="base" latinLnBrk="0" hangingPunct="1">
-                        <a:lnSpc>
-                          <a:spcPct val="100000"/>
-                        </a:lnSpc>
-                        <a:spcBef>
-                          <a:spcPct val="0"/>
-                        </a:spcBef>
-                        <a:spcAft>
-                          <a:spcPct val="0"/>
-                        </a:spcAft>
-                        <a:buClrTx/>
-                        <a:buSzTx/>
-                        <a:buFontTx/>
-                        <a:buNone/>
-                        <a:tabLst/>
-                      </a:pPr>
-                      <a:r>
-                        <a:rPr kumimoji="0" lang="en-US" sz="2000" u="none" strike="noStrike" cap="none" normalizeH="0" baseline="0" dirty="0">
-                          <a:ln>
-                            <a:noFill/>
-                          </a:ln>
-                          <a:effectLst/>
-                        </a:rPr>
-                        <a:t>negative</a:t>
-                      </a:r>
-                      <a:endParaRPr kumimoji="0" lang="en-US" sz="2000" b="0" i="0" u="none" strike="noStrike" cap="none" normalizeH="0" baseline="0" dirty="0">
-                        <a:ln>
-                          <a:noFill/>
-                        </a:ln>
-                        <a:solidFill>
-                          <a:schemeClr val="tx1"/>
-                        </a:solidFill>
-                        <a:effectLst/>
-                        <a:latin typeface="+mn-lt"/>
-                      </a:endParaRPr>
-                    </a:p>
-                  </a:txBody>
-                  <a:tcPr horzOverflow="overflow"/>
-                </a:tc>
-                <a:tc>
-                  <a:txBody>
-                    <a:bodyPr/>
-                    <a:lstStyle/>
-                    <a:p>
-                      <a:pPr marL="0" marR="0" lvl="0" indent="0" algn="just" defTabSz="914400" rtl="0" eaLnBrk="1" fontAlgn="base" latinLnBrk="0" hangingPunct="1">
-                        <a:lnSpc>
-                          <a:spcPct val="100000"/>
-                        </a:lnSpc>
-                        <a:spcBef>
-                          <a:spcPct val="0"/>
-                        </a:spcBef>
-                        <a:spcAft>
-                          <a:spcPct val="0"/>
-                        </a:spcAft>
-                        <a:buClrTx/>
-                        <a:buSzTx/>
-                        <a:buFontTx/>
-                        <a:buNone/>
-                        <a:tabLst/>
-                      </a:pPr>
-                      <a:r>
-                        <a:rPr kumimoji="0" lang="en-US" sz="2000" u="none" strike="noStrike" cap="none" normalizeH="0" baseline="0">
-                          <a:ln>
-                            <a:noFill/>
-                          </a:ln>
-                          <a:effectLst/>
-                        </a:rPr>
-                        <a:t>result is negative</a:t>
-                      </a:r>
-                      <a:endParaRPr kumimoji="0" lang="en-US" sz="2000" b="0" i="0" u="none" strike="noStrike" cap="none" normalizeH="0" baseline="0">
-                        <a:ln>
-                          <a:noFill/>
-                        </a:ln>
-                        <a:solidFill>
-                          <a:schemeClr val="tx1"/>
-                        </a:solidFill>
-                        <a:effectLst/>
-                        <a:latin typeface="+mn-lt"/>
-                      </a:endParaRPr>
-                    </a:p>
-                  </a:txBody>
-                  <a:tcPr horzOverflow="overflow"/>
-                </a:tc>
-                <a:extLst>
-                  <a:ext uri="{0D108BD9-81ED-4DB2-BD59-A6C34878D82A}">
-                    <a16:rowId xmlns:a16="http://schemas.microsoft.com/office/drawing/2014/main" val="10001"/>
-                  </a:ext>
-                </a:extLst>
-              </a:tr>
-              <a:tr h="473075">
-                <a:tc>
-                  <a:txBody>
-                    <a:bodyPr/>
-                    <a:lstStyle/>
-                    <a:p>
-                      <a:pPr marL="0" marR="0" lvl="0" indent="0" algn="just" defTabSz="914400" rtl="0" eaLnBrk="1" fontAlgn="base" latinLnBrk="0" hangingPunct="1">
-                        <a:lnSpc>
-                          <a:spcPct val="100000"/>
-                        </a:lnSpc>
-                        <a:spcBef>
-                          <a:spcPct val="0"/>
-                        </a:spcBef>
-                        <a:spcAft>
-                          <a:spcPct val="0"/>
-                        </a:spcAft>
-                        <a:buClrTx/>
-                        <a:buSzTx/>
-                        <a:buFontTx/>
-                        <a:buNone/>
-                        <a:tabLst/>
-                      </a:pPr>
-                      <a:r>
-                        <a:rPr kumimoji="0" lang="en-US" sz="2000" u="none" strike="noStrike" cap="none" normalizeH="0" baseline="0">
-                          <a:ln>
-                            <a:noFill/>
-                          </a:ln>
-                          <a:effectLst/>
-                        </a:rPr>
-                        <a:t>Z</a:t>
-                      </a:r>
-                      <a:endParaRPr kumimoji="0" lang="en-US" sz="2000" b="0" i="0" u="none" strike="noStrike" cap="none" normalizeH="0" baseline="0">
-                        <a:ln>
-                          <a:noFill/>
-                        </a:ln>
-                        <a:solidFill>
-                          <a:schemeClr val="tx1"/>
-                        </a:solidFill>
-                        <a:effectLst/>
-                        <a:latin typeface="+mn-lt"/>
-                      </a:endParaRPr>
-                    </a:p>
-                  </a:txBody>
-                  <a:tcPr horzOverflow="overflow"/>
-                </a:tc>
-                <a:tc>
-                  <a:txBody>
-                    <a:bodyPr/>
-                    <a:lstStyle/>
-                    <a:p>
-                      <a:pPr marL="0" marR="0" lvl="0" indent="0" algn="just" defTabSz="914400" rtl="0" eaLnBrk="1" fontAlgn="base" latinLnBrk="0" hangingPunct="1">
-                        <a:lnSpc>
-                          <a:spcPct val="100000"/>
-                        </a:lnSpc>
-                        <a:spcBef>
-                          <a:spcPct val="0"/>
-                        </a:spcBef>
-                        <a:spcAft>
-                          <a:spcPct val="0"/>
-                        </a:spcAft>
-                        <a:buClrTx/>
-                        <a:buSzTx/>
-                        <a:buFontTx/>
-                        <a:buNone/>
-                        <a:tabLst/>
-                      </a:pPr>
-                      <a:r>
-                        <a:rPr kumimoji="0" lang="en-US" sz="2000" u="none" strike="noStrike" cap="none" normalizeH="0" baseline="0" dirty="0">
-                          <a:ln>
-                            <a:noFill/>
-                          </a:ln>
-                          <a:effectLst/>
-                        </a:rPr>
-                        <a:t>zero</a:t>
-                      </a:r>
-                      <a:endParaRPr kumimoji="0" lang="en-US" sz="2000" b="0" i="0" u="none" strike="noStrike" cap="none" normalizeH="0" baseline="0" dirty="0">
-                        <a:ln>
-                          <a:noFill/>
-                        </a:ln>
-                        <a:solidFill>
-                          <a:schemeClr val="tx1"/>
-                        </a:solidFill>
-                        <a:effectLst/>
-                        <a:latin typeface="+mn-lt"/>
-                      </a:endParaRPr>
-                    </a:p>
-                  </a:txBody>
-                  <a:tcPr horzOverflow="overflow"/>
-                </a:tc>
-                <a:tc>
-                  <a:txBody>
-                    <a:bodyPr/>
-                    <a:lstStyle/>
-                    <a:p>
-                      <a:pPr marL="0" marR="0" lvl="0" indent="0" algn="just" defTabSz="914400" rtl="0" eaLnBrk="1" fontAlgn="base" latinLnBrk="0" hangingPunct="1">
-                        <a:lnSpc>
-                          <a:spcPct val="100000"/>
-                        </a:lnSpc>
-                        <a:spcBef>
-                          <a:spcPct val="0"/>
-                        </a:spcBef>
-                        <a:spcAft>
-                          <a:spcPct val="0"/>
-                        </a:spcAft>
-                        <a:buClrTx/>
-                        <a:buSzTx/>
-                        <a:buFontTx/>
-                        <a:buNone/>
-                        <a:tabLst/>
-                      </a:pPr>
-                      <a:r>
-                        <a:rPr kumimoji="0" lang="en-US" sz="2000" u="none" strike="noStrike" cap="none" normalizeH="0" baseline="0">
-                          <a:ln>
-                            <a:noFill/>
-                          </a:ln>
-                          <a:effectLst/>
-                        </a:rPr>
-                        <a:t>result is zero</a:t>
-                      </a:r>
-                      <a:endParaRPr kumimoji="0" lang="en-US" sz="2000" b="0" i="0" u="none" strike="noStrike" cap="none" normalizeH="0" baseline="0">
-                        <a:ln>
-                          <a:noFill/>
-                        </a:ln>
-                        <a:solidFill>
-                          <a:schemeClr val="tx1"/>
-                        </a:solidFill>
-                        <a:effectLst/>
-                        <a:latin typeface="+mn-lt"/>
-                      </a:endParaRPr>
-                    </a:p>
-                  </a:txBody>
-                  <a:tcPr horzOverflow="overflow"/>
-                </a:tc>
-                <a:extLst>
-                  <a:ext uri="{0D108BD9-81ED-4DB2-BD59-A6C34878D82A}">
-                    <a16:rowId xmlns:a16="http://schemas.microsoft.com/office/drawing/2014/main" val="10002"/>
-                  </a:ext>
-                </a:extLst>
-              </a:tr>
-              <a:tr h="471488">
-                <a:tc>
-                  <a:txBody>
-                    <a:bodyPr/>
-                    <a:lstStyle/>
-                    <a:p>
-                      <a:pPr marL="0" marR="0" lvl="0" indent="0" algn="just" defTabSz="914400" rtl="0" eaLnBrk="1" fontAlgn="base" latinLnBrk="0" hangingPunct="1">
-                        <a:lnSpc>
-                          <a:spcPct val="100000"/>
-                        </a:lnSpc>
-                        <a:spcBef>
-                          <a:spcPct val="0"/>
-                        </a:spcBef>
-                        <a:spcAft>
-                          <a:spcPct val="0"/>
-                        </a:spcAft>
-                        <a:buClrTx/>
-                        <a:buSzTx/>
-                        <a:buFontTx/>
-                        <a:buNone/>
-                        <a:tabLst/>
-                      </a:pPr>
-                      <a:r>
-                        <a:rPr kumimoji="0" lang="en-US" sz="2000" u="none" strike="noStrike" cap="none" normalizeH="0" baseline="0">
-                          <a:ln>
-                            <a:noFill/>
-                          </a:ln>
-                          <a:effectLst/>
-                        </a:rPr>
-                        <a:t>V</a:t>
-                      </a:r>
-                      <a:endParaRPr kumimoji="0" lang="en-US" sz="2000" b="0" i="0" u="none" strike="noStrike" cap="none" normalizeH="0" baseline="0">
-                        <a:ln>
-                          <a:noFill/>
-                        </a:ln>
-                        <a:solidFill>
-                          <a:schemeClr val="tx1"/>
-                        </a:solidFill>
-                        <a:effectLst/>
-                        <a:latin typeface="+mn-lt"/>
-                      </a:endParaRPr>
-                    </a:p>
-                  </a:txBody>
-                  <a:tcPr horzOverflow="overflow"/>
-                </a:tc>
-                <a:tc>
-                  <a:txBody>
-                    <a:bodyPr/>
-                    <a:lstStyle/>
-                    <a:p>
-                      <a:pPr marL="0" marR="0" lvl="0" indent="0" algn="just" defTabSz="914400" rtl="0" eaLnBrk="1" fontAlgn="base" latinLnBrk="0" hangingPunct="1">
-                        <a:lnSpc>
-                          <a:spcPct val="100000"/>
-                        </a:lnSpc>
-                        <a:spcBef>
-                          <a:spcPct val="0"/>
-                        </a:spcBef>
-                        <a:spcAft>
-                          <a:spcPct val="0"/>
-                        </a:spcAft>
-                        <a:buClrTx/>
-                        <a:buSzTx/>
-                        <a:buFontTx/>
-                        <a:buNone/>
-                        <a:tabLst/>
-                      </a:pPr>
-                      <a:r>
-                        <a:rPr kumimoji="0" lang="en-US" sz="2000" u="none" strike="noStrike" cap="none" normalizeH="0" baseline="0">
-                          <a:ln>
-                            <a:noFill/>
-                          </a:ln>
-                          <a:effectLst/>
-                        </a:rPr>
-                        <a:t>overflow</a:t>
-                      </a:r>
-                      <a:endParaRPr kumimoji="0" lang="en-US" sz="2000" b="0" i="0" u="none" strike="noStrike" cap="none" normalizeH="0" baseline="0">
-                        <a:ln>
-                          <a:noFill/>
-                        </a:ln>
-                        <a:solidFill>
-                          <a:schemeClr val="tx1"/>
-                        </a:solidFill>
-                        <a:effectLst/>
-                        <a:latin typeface="+mn-lt"/>
-                      </a:endParaRPr>
-                    </a:p>
-                  </a:txBody>
-                  <a:tcPr horzOverflow="overflow"/>
-                </a:tc>
-                <a:tc>
-                  <a:txBody>
-                    <a:bodyPr/>
-                    <a:lstStyle/>
-                    <a:p>
-                      <a:pPr marL="0" marR="0" lvl="0" indent="0" algn="just" defTabSz="914400" rtl="0" eaLnBrk="1" fontAlgn="base" latinLnBrk="0" hangingPunct="1">
-                        <a:lnSpc>
-                          <a:spcPct val="100000"/>
-                        </a:lnSpc>
-                        <a:spcBef>
-                          <a:spcPct val="0"/>
-                        </a:spcBef>
-                        <a:spcAft>
-                          <a:spcPct val="0"/>
-                        </a:spcAft>
-                        <a:buClrTx/>
-                        <a:buSzTx/>
-                        <a:buFontTx/>
-                        <a:buNone/>
-                        <a:tabLst/>
-                      </a:pPr>
-                      <a:r>
-                        <a:rPr kumimoji="0" lang="en-US" sz="2000" u="none" strike="noStrike" cap="none" normalizeH="0" baseline="0" dirty="0">
-                          <a:ln>
-                            <a:noFill/>
-                          </a:ln>
-                          <a:effectLst/>
-                        </a:rPr>
-                        <a:t>signed overflow</a:t>
-                      </a:r>
-                      <a:endParaRPr kumimoji="0" lang="en-US" sz="2000" b="0" i="0" u="none" strike="noStrike" cap="none" normalizeH="0" baseline="0" dirty="0">
-                        <a:ln>
-                          <a:noFill/>
-                        </a:ln>
-                        <a:solidFill>
-                          <a:schemeClr val="tx1"/>
-                        </a:solidFill>
-                        <a:effectLst/>
-                        <a:latin typeface="+mn-lt"/>
-                      </a:endParaRPr>
-                    </a:p>
-                  </a:txBody>
-                  <a:tcPr horzOverflow="overflow"/>
-                </a:tc>
-                <a:extLst>
-                  <a:ext uri="{0D108BD9-81ED-4DB2-BD59-A6C34878D82A}">
-                    <a16:rowId xmlns:a16="http://schemas.microsoft.com/office/drawing/2014/main" val="10003"/>
-                  </a:ext>
-                </a:extLst>
-              </a:tr>
-              <a:tr h="473075">
-                <a:tc>
-                  <a:txBody>
-                    <a:bodyPr/>
-                    <a:lstStyle/>
-                    <a:p>
-                      <a:pPr marL="0" marR="0" lvl="0" indent="0" algn="just" defTabSz="914400" rtl="0" eaLnBrk="1" fontAlgn="base" latinLnBrk="0" hangingPunct="1">
-                        <a:lnSpc>
-                          <a:spcPct val="100000"/>
-                        </a:lnSpc>
-                        <a:spcBef>
-                          <a:spcPct val="0"/>
-                        </a:spcBef>
-                        <a:spcAft>
-                          <a:spcPct val="0"/>
-                        </a:spcAft>
-                        <a:buClrTx/>
-                        <a:buSzTx/>
-                        <a:buFontTx/>
-                        <a:buNone/>
-                        <a:tabLst/>
-                      </a:pPr>
-                      <a:r>
-                        <a:rPr kumimoji="0" lang="en-US" sz="2000" u="none" strike="noStrike" cap="none" normalizeH="0" baseline="0">
-                          <a:ln>
-                            <a:noFill/>
-                          </a:ln>
-                          <a:effectLst/>
-                        </a:rPr>
-                        <a:t>C</a:t>
-                      </a:r>
-                      <a:endParaRPr kumimoji="0" lang="en-US" sz="2000" b="0" i="0" u="none" strike="noStrike" cap="none" normalizeH="0" baseline="0">
-                        <a:ln>
-                          <a:noFill/>
-                        </a:ln>
-                        <a:solidFill>
-                          <a:schemeClr val="tx1"/>
-                        </a:solidFill>
-                        <a:effectLst/>
-                        <a:latin typeface="+mn-lt"/>
-                      </a:endParaRPr>
-                    </a:p>
-                  </a:txBody>
-                  <a:tcPr horzOverflow="overflow"/>
-                </a:tc>
-                <a:tc>
-                  <a:txBody>
-                    <a:bodyPr/>
-                    <a:lstStyle/>
-                    <a:p>
-                      <a:pPr marL="0" marR="0" lvl="0" indent="0" algn="just" defTabSz="914400" rtl="0" eaLnBrk="1" fontAlgn="base" latinLnBrk="0" hangingPunct="1">
-                        <a:lnSpc>
-                          <a:spcPct val="100000"/>
-                        </a:lnSpc>
-                        <a:spcBef>
-                          <a:spcPct val="0"/>
-                        </a:spcBef>
-                        <a:spcAft>
-                          <a:spcPct val="0"/>
-                        </a:spcAft>
-                        <a:buClrTx/>
-                        <a:buSzTx/>
-                        <a:buFontTx/>
-                        <a:buNone/>
-                        <a:tabLst/>
-                      </a:pPr>
-                      <a:r>
-                        <a:rPr kumimoji="0" lang="en-US" sz="2000" u="none" strike="noStrike" cap="none" normalizeH="0" baseline="0">
-                          <a:ln>
-                            <a:noFill/>
-                          </a:ln>
-                          <a:effectLst/>
-                        </a:rPr>
-                        <a:t>carry</a:t>
-                      </a:r>
-                      <a:endParaRPr kumimoji="0" lang="en-US" sz="2000" b="0" i="0" u="none" strike="noStrike" cap="none" normalizeH="0" baseline="0">
-                        <a:ln>
-                          <a:noFill/>
-                        </a:ln>
-                        <a:solidFill>
-                          <a:schemeClr val="tx1"/>
-                        </a:solidFill>
-                        <a:effectLst/>
-                        <a:latin typeface="+mn-lt"/>
-                      </a:endParaRPr>
-                    </a:p>
-                  </a:txBody>
-                  <a:tcPr horzOverflow="overflow"/>
-                </a:tc>
-                <a:tc>
-                  <a:txBody>
-                    <a:bodyPr/>
-                    <a:lstStyle/>
-                    <a:p>
-                      <a:pPr marL="0" marR="0" lvl="0" indent="0" algn="just" defTabSz="914400" rtl="0" eaLnBrk="1" fontAlgn="base" latinLnBrk="0" hangingPunct="1">
-                        <a:lnSpc>
-                          <a:spcPct val="100000"/>
-                        </a:lnSpc>
-                        <a:spcBef>
-                          <a:spcPct val="0"/>
-                        </a:spcBef>
-                        <a:spcAft>
-                          <a:spcPct val="0"/>
-                        </a:spcAft>
-                        <a:buClrTx/>
-                        <a:buSzTx/>
-                        <a:buFontTx/>
-                        <a:buNone/>
-                        <a:tabLst/>
-                      </a:pPr>
-                      <a:r>
-                        <a:rPr kumimoji="0" lang="en-US" sz="2000" u="none" strike="noStrike" cap="none" normalizeH="0" baseline="0" dirty="0">
-                          <a:ln>
-                            <a:noFill/>
-                          </a:ln>
-                          <a:effectLst/>
-                        </a:rPr>
-                        <a:t>unsigned overflow</a:t>
-                      </a:r>
-                      <a:endParaRPr kumimoji="0" lang="en-US" sz="2000" b="0" i="0" u="none" strike="noStrike" cap="none" normalizeH="0" baseline="0" dirty="0">
-                        <a:ln>
-                          <a:noFill/>
-                        </a:ln>
-                        <a:solidFill>
-                          <a:schemeClr val="tx1"/>
-                        </a:solidFill>
-                        <a:effectLst/>
-                        <a:latin typeface="+mn-lt"/>
-                      </a:endParaRPr>
-                    </a:p>
-                  </a:txBody>
-                  <a:tcPr horzOverflow="overflow"/>
-                </a:tc>
-                <a:extLst>
-                  <a:ext uri="{0D108BD9-81ED-4DB2-BD59-A6C34878D82A}">
-                    <a16:rowId xmlns:a16="http://schemas.microsoft.com/office/drawing/2014/main" val="10004"/>
-                  </a:ext>
-                </a:extLst>
-              </a:tr>
-            </a:tbl>
-          </a:graphicData>
-        </a:graphic>
-      </p:graphicFrame>
-      <p:sp>
-        <p:nvSpPr>
-          <p:cNvPr id="17" name="Rectangle 20"/>
-          <p:cNvSpPr>
-            <a:spLocks noChangeArrowheads="1"/>
-          </p:cNvSpPr>
-          <p:nvPr/>
-        </p:nvSpPr>
-        <p:spPr bwMode="auto">
-          <a:xfrm>
-            <a:off x="3340970" y="5575300"/>
-            <a:ext cx="1943100" cy="400050"/>
-          </a:xfrm>
-          <a:prstGeom prst="rect">
-            <a:avLst/>
-          </a:prstGeom>
-          <a:solidFill>
-            <a:srgbClr val="FFFF00"/>
-          </a:solidFill>
-          <a:ln w="12700">
-            <a:solidFill>
-              <a:schemeClr val="tx1"/>
-            </a:solidFill>
-            <a:miter lim="800000"/>
-            <a:headEnd type="none" w="sm" len="sm"/>
-            <a:tailEnd type="none" w="sm" len="sm"/>
-          </a:ln>
-        </p:spPr>
-        <p:txBody>
-          <a:bodyPr wrap="none" anchor="ctr"/>
-          <a:lstStyle/>
-          <a:p>
-            <a:pPr algn="ctr" defTabSz="342900" eaLnBrk="1" fontAlgn="auto" hangingPunct="1">
-              <a:spcBef>
-                <a:spcPts val="0"/>
-              </a:spcBef>
-              <a:spcAft>
-                <a:spcPts val="0"/>
-              </a:spcAft>
-            </a:pPr>
-            <a:endParaRPr lang="en-US" sz="1350" b="0" dirty="0">
-              <a:solidFill>
-                <a:prstClr val="black"/>
-              </a:solidFill>
-              <a:latin typeface="Calibri"/>
-            </a:endParaRPr>
-          </a:p>
-        </p:txBody>
-      </p:sp>
-      <p:sp>
-        <p:nvSpPr>
-          <p:cNvPr id="18" name="Text Box 21"/>
-          <p:cNvSpPr txBox="1">
-            <a:spLocks noChangeArrowheads="1"/>
-          </p:cNvSpPr>
-          <p:nvPr/>
-        </p:nvSpPr>
-        <p:spPr bwMode="auto">
-          <a:xfrm>
-            <a:off x="3271914" y="5336505"/>
-            <a:ext cx="380232" cy="323165"/>
-          </a:xfrm>
-          <a:prstGeom prst="rect">
-            <a:avLst/>
-          </a:prstGeom>
-          <a:noFill/>
-          <a:ln w="12700">
-            <a:noFill/>
-            <a:miter lim="800000"/>
-            <a:headEnd type="none" w="sm" len="sm"/>
-            <a:tailEnd type="none" w="sm" len="sm"/>
-          </a:ln>
-        </p:spPr>
-        <p:txBody>
-          <a:bodyPr wrap="none">
-            <a:spAutoFit/>
-          </a:bodyPr>
-          <a:lstStyle/>
-          <a:p>
-            <a:pPr defTabSz="342900" eaLnBrk="1" fontAlgn="auto" hangingPunct="1">
-              <a:spcBef>
-                <a:spcPts val="0"/>
-              </a:spcBef>
-              <a:spcAft>
-                <a:spcPts val="0"/>
-              </a:spcAft>
-            </a:pPr>
-            <a:r>
-              <a:rPr lang="en-US" sz="1500" b="0">
-                <a:solidFill>
-                  <a:prstClr val="black"/>
-                </a:solidFill>
-                <a:latin typeface="Calibri"/>
-              </a:rPr>
-              <a:t>31</a:t>
-            </a:r>
-          </a:p>
-        </p:txBody>
-      </p:sp>
-      <p:sp>
-        <p:nvSpPr>
-          <p:cNvPr id="19" name="Text Box 22"/>
-          <p:cNvSpPr txBox="1">
-            <a:spLocks noChangeArrowheads="1"/>
-          </p:cNvSpPr>
-          <p:nvPr/>
-        </p:nvSpPr>
-        <p:spPr bwMode="auto">
-          <a:xfrm>
-            <a:off x="4998320" y="5325789"/>
-            <a:ext cx="282450" cy="323165"/>
-          </a:xfrm>
-          <a:prstGeom prst="rect">
-            <a:avLst/>
-          </a:prstGeom>
-          <a:noFill/>
-          <a:ln w="12700">
-            <a:noFill/>
-            <a:miter lim="800000"/>
-            <a:headEnd type="none" w="sm" len="sm"/>
-            <a:tailEnd type="none" w="sm" len="sm"/>
-          </a:ln>
-        </p:spPr>
-        <p:txBody>
-          <a:bodyPr wrap="none">
-            <a:spAutoFit/>
-          </a:bodyPr>
-          <a:lstStyle/>
-          <a:p>
-            <a:pPr defTabSz="342900" eaLnBrk="1" fontAlgn="auto" hangingPunct="1">
-              <a:spcBef>
-                <a:spcPts val="0"/>
-              </a:spcBef>
-              <a:spcAft>
-                <a:spcPts val="0"/>
-              </a:spcAft>
-            </a:pPr>
-            <a:r>
-              <a:rPr lang="en-US" sz="1500" b="0" dirty="0">
-                <a:solidFill>
-                  <a:prstClr val="black"/>
-                </a:solidFill>
-                <a:latin typeface="Calibri"/>
-              </a:rPr>
-              <a:t>0</a:t>
-            </a:r>
-          </a:p>
-        </p:txBody>
-      </p:sp>
-      <p:sp>
-        <p:nvSpPr>
-          <p:cNvPr id="20" name="Rectangle 19"/>
-          <p:cNvSpPr/>
-          <p:nvPr/>
-        </p:nvSpPr>
-        <p:spPr>
-          <a:xfrm>
-            <a:off x="3340970" y="5575300"/>
-            <a:ext cx="159741" cy="399772"/>
+            <a:off x="860298" y="2213036"/>
+            <a:ext cx="3467100" cy="1015663"/>
           </a:xfrm>
           <a:prstGeom prst="rect">
             <a:avLst/>
           </a:prstGeom>
         </p:spPr>
         <p:style>
-          <a:lnRef idx="1">
+          <a:lnRef idx="2">
             <a:schemeClr val="accent1"/>
           </a:lnRef>
-          <a:fillRef idx="2">
-            <a:schemeClr val="accent1"/>
+          <a:fillRef idx="1">
+            <a:schemeClr val="lt1"/>
           </a:fillRef>
-          <a:effectRef idx="1">
+          <a:effectRef idx="0">
             <a:schemeClr val="accent1"/>
           </a:effectRef>
           <a:fontRef idx="minor">
@@ -8127,412 +6152,56 @@
           </a:fontRef>
         </p:style>
         <p:txBody>
-          <a:bodyPr rtlCol="0" anchor="ctr"/>
-          <a:lstStyle/>
-          <a:p>
-            <a:pPr algn="ctr" defTabSz="342900" eaLnBrk="1" fontAlgn="auto" hangingPunct="1">
-              <a:spcBef>
-                <a:spcPts val="0"/>
-              </a:spcBef>
-              <a:spcAft>
-                <a:spcPts val="0"/>
-              </a:spcAft>
-            </a:pPr>
-            <a:r>
-              <a:rPr lang="en-US" sz="1350" b="0" dirty="0">
-                <a:solidFill>
-                  <a:prstClr val="black"/>
-                </a:solidFill>
-                <a:latin typeface="Calibri"/>
-              </a:rPr>
-              <a:t>N</a:t>
-            </a:r>
-          </a:p>
-        </p:txBody>
-      </p:sp>
-      <p:sp>
-        <p:nvSpPr>
-          <p:cNvPr id="21" name="Rectangle 20"/>
-          <p:cNvSpPr/>
-          <p:nvPr/>
-        </p:nvSpPr>
-        <p:spPr>
-          <a:xfrm>
-            <a:off x="3503092" y="5575022"/>
-            <a:ext cx="159741" cy="399772"/>
-          </a:xfrm>
-          <a:prstGeom prst="rect">
-            <a:avLst/>
-          </a:prstGeom>
-        </p:spPr>
-        <p:style>
-          <a:lnRef idx="1">
-            <a:schemeClr val="accent1"/>
-          </a:lnRef>
-          <a:fillRef idx="2">
-            <a:schemeClr val="accent1"/>
-          </a:fillRef>
-          <a:effectRef idx="1">
-            <a:schemeClr val="accent1"/>
-          </a:effectRef>
-          <a:fontRef idx="minor">
-            <a:schemeClr val="dk1"/>
-          </a:fontRef>
-        </p:style>
-        <p:txBody>
-          <a:bodyPr rtlCol="0" anchor="ctr"/>
-          <a:lstStyle/>
-          <a:p>
-            <a:pPr algn="ctr" defTabSz="342900" eaLnBrk="1" fontAlgn="auto" hangingPunct="1">
-              <a:spcBef>
-                <a:spcPts val="0"/>
-              </a:spcBef>
-              <a:spcAft>
-                <a:spcPts val="0"/>
-              </a:spcAft>
-            </a:pPr>
-            <a:r>
-              <a:rPr lang="en-US" sz="1350" b="0" dirty="0">
-                <a:solidFill>
-                  <a:prstClr val="black"/>
-                </a:solidFill>
-                <a:latin typeface="Calibri"/>
-              </a:rPr>
-              <a:t>Z</a:t>
-            </a:r>
-          </a:p>
-        </p:txBody>
-      </p:sp>
-      <p:sp>
-        <p:nvSpPr>
-          <p:cNvPr id="22" name="Rectangle 21"/>
-          <p:cNvSpPr/>
-          <p:nvPr/>
-        </p:nvSpPr>
-        <p:spPr>
-          <a:xfrm>
-            <a:off x="3665215" y="5574465"/>
-            <a:ext cx="159741" cy="399772"/>
-          </a:xfrm>
-          <a:prstGeom prst="rect">
-            <a:avLst/>
-          </a:prstGeom>
-        </p:spPr>
-        <p:style>
-          <a:lnRef idx="1">
-            <a:schemeClr val="accent1"/>
-          </a:lnRef>
-          <a:fillRef idx="2">
-            <a:schemeClr val="accent1"/>
-          </a:fillRef>
-          <a:effectRef idx="1">
-            <a:schemeClr val="accent1"/>
-          </a:effectRef>
-          <a:fontRef idx="minor">
-            <a:schemeClr val="dk1"/>
-          </a:fontRef>
-        </p:style>
-        <p:txBody>
-          <a:bodyPr rtlCol="0" anchor="ctr"/>
-          <a:lstStyle/>
-          <a:p>
-            <a:pPr algn="ctr" defTabSz="342900" eaLnBrk="1" fontAlgn="auto" hangingPunct="1">
-              <a:spcBef>
-                <a:spcPts val="0"/>
-              </a:spcBef>
-              <a:spcAft>
-                <a:spcPts val="0"/>
-              </a:spcAft>
-            </a:pPr>
-            <a:r>
-              <a:rPr lang="en-US" sz="1350" b="0" dirty="0">
-                <a:solidFill>
-                  <a:prstClr val="black"/>
-                </a:solidFill>
-                <a:latin typeface="Calibri"/>
-              </a:rPr>
-              <a:t>C</a:t>
-            </a:r>
-          </a:p>
-        </p:txBody>
-      </p:sp>
-      <p:sp>
-        <p:nvSpPr>
-          <p:cNvPr id="23" name="Rectangle 22"/>
-          <p:cNvSpPr/>
-          <p:nvPr/>
-        </p:nvSpPr>
-        <p:spPr>
-          <a:xfrm>
-            <a:off x="3824956" y="5574464"/>
-            <a:ext cx="159741" cy="399772"/>
-          </a:xfrm>
-          <a:prstGeom prst="rect">
-            <a:avLst/>
-          </a:prstGeom>
-        </p:spPr>
-        <p:style>
-          <a:lnRef idx="1">
-            <a:schemeClr val="accent1"/>
-          </a:lnRef>
-          <a:fillRef idx="2">
-            <a:schemeClr val="accent1"/>
-          </a:fillRef>
-          <a:effectRef idx="1">
-            <a:schemeClr val="accent1"/>
-          </a:effectRef>
-          <a:fontRef idx="minor">
-            <a:schemeClr val="dk1"/>
-          </a:fontRef>
-        </p:style>
-        <p:txBody>
-          <a:bodyPr rtlCol="0" anchor="ctr"/>
-          <a:lstStyle/>
-          <a:p>
-            <a:pPr algn="ctr" defTabSz="342900" eaLnBrk="1" fontAlgn="auto" hangingPunct="1">
-              <a:spcBef>
-                <a:spcPts val="0"/>
-              </a:spcBef>
-              <a:spcAft>
-                <a:spcPts val="0"/>
-              </a:spcAft>
-            </a:pPr>
-            <a:r>
-              <a:rPr lang="en-US" sz="1350" b="0" dirty="0">
-                <a:solidFill>
-                  <a:prstClr val="black"/>
-                </a:solidFill>
-                <a:latin typeface="Calibri"/>
-              </a:rPr>
-              <a:t>V</a:t>
-            </a:r>
-          </a:p>
-        </p:txBody>
-      </p:sp>
-      <p:sp>
-        <p:nvSpPr>
-          <p:cNvPr id="24" name="Rectangle 23"/>
-          <p:cNvSpPr/>
-          <p:nvPr/>
-        </p:nvSpPr>
-        <p:spPr>
-          <a:xfrm>
-            <a:off x="2878666" y="6009879"/>
-            <a:ext cx="2941896" cy="300082"/>
-          </a:xfrm>
-          <a:prstGeom prst="rect">
-            <a:avLst/>
-          </a:prstGeom>
-        </p:spPr>
-        <p:txBody>
-          <a:bodyPr wrap="none">
+          <a:bodyPr wrap="square">
             <a:spAutoFit/>
           </a:bodyPr>
           <a:lstStyle/>
           <a:p>
-            <a:pPr defTabSz="342900" eaLnBrk="1" fontAlgn="auto" hangingPunct="1">
-              <a:spcBef>
-                <a:spcPts val="0"/>
-              </a:spcBef>
-              <a:spcAft>
-                <a:spcPts val="0"/>
-              </a:spcAft>
-            </a:pPr>
-            <a:r>
-              <a:rPr lang="en-US" sz="1350" b="0" dirty="0">
-                <a:solidFill>
-                  <a:prstClr val="black"/>
-                </a:solidFill>
-                <a:latin typeface="Calibri"/>
+            <a:r>
+              <a:rPr lang="pt-BR" sz="2000" dirty="0">
+                <a:latin typeface="Consolas" panose="020B0609020204030204" pitchFamily="49" charset="0"/>
+                <a:cs typeface="Consolas" panose="020B0609020204030204" pitchFamily="49" charset="0"/>
               </a:rPr>
-              <a:t>CPSR (Current Program Status Register)</a:t>
-            </a:r>
-          </a:p>
-        </p:txBody>
-      </p:sp>
-      <p:sp>
-        <p:nvSpPr>
-          <p:cNvPr id="16" name="Horizontal Scroll 15"/>
-          <p:cNvSpPr/>
-          <p:nvPr/>
-        </p:nvSpPr>
-        <p:spPr>
-          <a:xfrm>
-            <a:off x="76200" y="-23210"/>
-            <a:ext cx="1265712" cy="762000"/>
-          </a:xfrm>
-          <a:prstGeom prst="horizontalScroll">
-            <a:avLst/>
-          </a:prstGeom>
-          <a:gradFill rotWithShape="1">
-            <a:gsLst>
-              <a:gs pos="0">
-                <a:srgbClr val="4F81BD">
-                  <a:tint val="50000"/>
-                  <a:satMod val="300000"/>
-                </a:srgbClr>
-              </a:gs>
-              <a:gs pos="35000">
-                <a:srgbClr val="4F81BD">
-                  <a:tint val="37000"/>
-                  <a:satMod val="300000"/>
-                </a:srgbClr>
-              </a:gs>
-              <a:gs pos="100000">
-                <a:srgbClr val="4F81BD">
-                  <a:tint val="15000"/>
-                  <a:satMod val="350000"/>
-                </a:srgbClr>
-              </a:gs>
-            </a:gsLst>
-            <a:lin ang="16200000" scaled="1"/>
-          </a:gradFill>
-          <a:ln w="9525" cap="flat" cmpd="sng" algn="ctr">
-            <a:solidFill>
-              <a:srgbClr val="4F81BD">
-                <a:shade val="95000"/>
-                <a:satMod val="105000"/>
-              </a:srgbClr>
-            </a:solidFill>
-            <a:prstDash val="solid"/>
-          </a:ln>
-          <a:effectLst>
-            <a:outerShdw blurRad="40000" dist="20000" dir="5400000" rotWithShape="0">
-              <a:srgbClr val="000000">
-                <a:alpha val="38000"/>
-              </a:srgbClr>
-            </a:outerShdw>
-          </a:effectLst>
-        </p:spPr>
-        <p:txBody>
-          <a:bodyPr rtlCol="0" anchor="ctr"/>
-          <a:lstStyle/>
-          <a:p>
-            <a:pPr marL="0" marR="0" lvl="0" indent="0" algn="ctr" defTabSz="457200" eaLnBrk="1" fontAlgn="auto" latinLnBrk="0" hangingPunct="1">
-              <a:lnSpc>
-                <a:spcPct val="100000"/>
-              </a:lnSpc>
-              <a:spcBef>
-                <a:spcPts val="0"/>
-              </a:spcBef>
-              <a:spcAft>
-                <a:spcPts val="0"/>
-              </a:spcAft>
-              <a:buClrTx/>
-              <a:buSzTx/>
-              <a:buFontTx/>
-              <a:buNone/>
-              <a:tabLst/>
-              <a:defRPr/>
-            </a:pPr>
-            <a:r>
-              <a:rPr kumimoji="0" lang="en-US" sz="2400" b="0" i="0" u="none" strike="noStrike" kern="0" cap="none" spc="0" normalizeH="0" baseline="0" noProof="0" dirty="0">
-                <a:ln>
-                  <a:noFill/>
-                </a:ln>
-                <a:solidFill>
-                  <a:prstClr val="black"/>
-                </a:solidFill>
-                <a:effectLst/>
-                <a:uLnTx/>
-                <a:uFillTx/>
-                <a:latin typeface="Calibri"/>
-                <a:ea typeface="+mn-ea"/>
-                <a:cs typeface="+mn-cs"/>
+              <a:t>LDR r0, =0xFFFFFFF00</a:t>
+            </a:r>
+          </a:p>
+          <a:p>
+            <a:r>
+              <a:rPr lang="pt-BR" sz="2000" dirty="0">
+                <a:latin typeface="Consolas" panose="020B0609020204030204" pitchFamily="49" charset="0"/>
+                <a:cs typeface="Consolas" panose="020B0609020204030204" pitchFamily="49" charset="0"/>
               </a:rPr>
-              <a:t>Review</a:t>
-            </a:r>
+              <a:t>LDR r1, =0x00000001</a:t>
+            </a:r>
+          </a:p>
+          <a:p>
+            <a:r>
+              <a:rPr lang="pt-BR" sz="2000" dirty="0">
+                <a:latin typeface="Consolas" panose="020B0609020204030204" pitchFamily="49" charset="0"/>
+                <a:cs typeface="Consolas" panose="020B0609020204030204" pitchFamily="49" charset="0"/>
+              </a:rPr>
+              <a:t>ANDS r2, r1, r0, LSL #1</a:t>
+            </a:r>
+            <a:endParaRPr lang="en-US" sz="2000" dirty="0">
+              <a:solidFill>
+                <a:srgbClr val="C00000"/>
+              </a:solidFill>
+              <a:latin typeface="Consolas" panose="020B0609020204030204" pitchFamily="49" charset="0"/>
+              <a:cs typeface="Consolas" panose="020B0609020204030204" pitchFamily="49" charset="0"/>
+            </a:endParaRPr>
           </a:p>
         </p:txBody>
       </p:sp>
     </p:spTree>
     <p:extLst>
       <p:ext uri="{BB962C8B-B14F-4D97-AF65-F5344CB8AC3E}">
-        <p14:creationId xmlns:p14="http://schemas.microsoft.com/office/powerpoint/2010/main" val="2623990252"/>
+        <p14:creationId xmlns:p14="http://schemas.microsoft.com/office/powerpoint/2010/main" val="2291445225"/>
       </p:ext>
     </p:extLst>
   </p:cSld>
   <p:clrMapOvr>
     <a:masterClrMapping/>
   </p:clrMapOvr>
-  <p:timing>
-    <p:tnLst>
-      <p:par>
-        <p:cTn id="1" dur="indefinite" restart="never" nodeType="tmRoot">
-          <p:childTnLst>
-            <p:seq concurrent="1" nextAc="seek">
-              <p:cTn id="2" dur="indefinite" nodeType="mainSeq">
-                <p:childTnLst>
-                  <p:par>
-                    <p:cTn id="3" fill="hold" nodeType="clickPar">
-                      <p:stCondLst>
-                        <p:cond delay="indefinite"/>
-                      </p:stCondLst>
-                      <p:childTnLst>
-                        <p:par>
-                          <p:cTn id="4" fill="hold" nodeType="withGroup">
-                            <p:stCondLst>
-                              <p:cond delay="0"/>
-                            </p:stCondLst>
-                            <p:childTnLst>
-                              <p:par>
-                                <p:cTn id="5" presetID="1" presetClass="entr" presetSubtype="0" fill="hold" grpId="0" nodeType="clickEffect">
-                                  <p:stCondLst>
-                                    <p:cond delay="0"/>
-                                  </p:stCondLst>
-                                  <p:childTnLst>
-                                    <p:set>
-                                      <p:cBhvr>
-                                        <p:cTn id="6" dur="1" fill="hold">
-                                          <p:stCondLst>
-                                            <p:cond delay="499"/>
-                                          </p:stCondLst>
-                                        </p:cTn>
-                                        <p:tgtEl>
-                                          <p:spTgt spid="38917"/>
-                                        </p:tgtEl>
-                                        <p:attrNameLst>
-                                          <p:attrName>style.visibility</p:attrName>
-                                        </p:attrNameLst>
-                                      </p:cBhvr>
-                                      <p:to>
-                                        <p:strVal val="visible"/>
-                                      </p:to>
-                                    </p:set>
-                                  </p:childTnLst>
-                                </p:cTn>
-                              </p:par>
-                            </p:childTnLst>
-                          </p:cTn>
-                        </p:par>
-                      </p:childTnLst>
-                    </p:cTn>
-                  </p:par>
-                </p:childTnLst>
-              </p:cTn>
-              <p:prevCondLst>
-                <p:cond evt="onPrev" delay="0">
-                  <p:tgtEl>
-                    <p:sldTgt/>
-                  </p:tgtEl>
-                </p:cond>
-              </p:prevCondLst>
-              <p:nextCondLst>
-                <p:cond evt="onNext" delay="0">
-                  <p:tgtEl>
-                    <p:sldTgt/>
-                  </p:tgtEl>
-                </p:cond>
-              </p:nextCondLst>
-            </p:seq>
-          </p:childTnLst>
-        </p:cTn>
-      </p:par>
-    </p:tnLst>
-    <p:bldLst>
-      <p:bldP spid="38917" grpId="0" autoUpdateAnimBg="0"/>
-    </p:bldLst>
-  </p:timing>
 </p:sld>
 </file>
 
@@ -8558,7 +6227,7 @@
           <p:cNvPr id="2" name="Title 1">
             <a:extLst>
               <a:ext uri="{FF2B5EF4-FFF2-40B4-BE49-F238E27FC236}">
-                <a16:creationId xmlns:a16="http://schemas.microsoft.com/office/drawing/2014/main" id="{B5BCB23D-EFE6-FA45-DAF9-9FF26087AA94}"/>
+                <a16:creationId xmlns:a16="http://schemas.microsoft.com/office/drawing/2014/main" id="{E3C709F9-4905-FD89-18E1-B8EB2F602C94}"/>
               </a:ext>
             </a:extLst>
           </p:cNvPr>
@@ -8576,17 +6245,17 @@
           <a:p>
             <a:r>
               <a:rPr lang="en-US" dirty="0"/>
-              <a:t>References</a:t>
-            </a:r>
-          </a:p>
-        </p:txBody>
-      </p:sp>
-      <p:sp>
-        <p:nvSpPr>
-          <p:cNvPr id="3" name="Content Placeholder 2">
+              <a:t>Flags ADDS</a:t>
+            </a:r>
+          </a:p>
+        </p:txBody>
+      </p:sp>
+      <p:sp>
+        <p:nvSpPr>
+          <p:cNvPr id="3" name="Slide Number Placeholder 2">
             <a:extLst>
               <a:ext uri="{FF2B5EF4-FFF2-40B4-BE49-F238E27FC236}">
-                <a16:creationId xmlns:a16="http://schemas.microsoft.com/office/drawing/2014/main" id="{88866A56-D44E-D648-C861-46FA398FDE43}"/>
+                <a16:creationId xmlns:a16="http://schemas.microsoft.com/office/drawing/2014/main" id="{40E8A52C-2E2E-54F3-49AA-2CABED2CB91F}"/>
               </a:ext>
             </a:extLst>
           </p:cNvPr>
@@ -8594,7 +6263,7 @@
             <a:spLocks noGrp="1"/>
           </p:cNvSpPr>
           <p:nvPr>
-            <p:ph sz="quarter" idx="1"/>
+            <p:ph type="sldNum" sz="quarter" idx="12"/>
           </p:nvPr>
         </p:nvSpPr>
         <p:spPr/>
@@ -8602,48 +6271,54 @@
           <a:bodyPr/>
           <a:lstStyle/>
           <a:p>
-            <a:r>
-              <a:rPr lang="en-US" dirty="0"/>
-              <a:t>Lecture 2: Carry flag for unsigned addition and subtraction</a:t>
-            </a:r>
-          </a:p>
-          <a:p>
-            <a:pPr lvl="1"/>
-            <a:r>
-              <a:rPr lang="en-US" dirty="0">
-                <a:hlinkClick r:id="rId2"/>
-              </a:rPr>
-              <a:t>https://www.youtube.com/watch?v=MxGW2WurKuM&amp;list=PLRJhV4hUhIymmp5CCeIFPyxbknsdcXCc8&amp;index=2</a:t>
-            </a:r>
-            <a:endParaRPr lang="en-US" dirty="0"/>
-          </a:p>
-          <a:p>
-            <a:r>
-              <a:rPr lang="en-US" dirty="0"/>
-              <a:t>Lecture 3: Overflow flag for signed addition and subtraction</a:t>
-            </a:r>
-          </a:p>
-          <a:p>
-            <a:pPr lvl="1"/>
-            <a:r>
-              <a:rPr lang="en-US" dirty="0">
-                <a:hlinkClick r:id="rId3"/>
-              </a:rPr>
-              <a:t>https://www.youtube.com/watch?v=BIn6iyYIGio&amp;list=PLRJhV4hUhIymmp5CCeIFPyxbknsdcXCc8&amp;index=3</a:t>
-            </a:r>
-            <a:r>
-              <a:rPr lang="en-US" dirty="0"/>
-              <a:t> </a:t>
-            </a:r>
-          </a:p>
-        </p:txBody>
-      </p:sp>
-      <p:sp>
-        <p:nvSpPr>
-          <p:cNvPr id="4" name="Horizontal Scroll 15">
+            <a:fld id="{EA7C8D44-3667-46F6-9772-CC52308E2A7F}" type="slidenum">
+              <a:rPr kumimoji="0" lang="en-US" smtClean="0"/>
+              <a:pPr/>
+              <a:t>17</a:t>
+            </a:fld>
+            <a:endParaRPr kumimoji="0" lang="en-US" dirty="0"/>
+          </a:p>
+        </p:txBody>
+      </p:sp>
+      <p:sp>
+        <p:nvSpPr>
+          <p:cNvPr id="7" name="Content Placeholder 3">
             <a:extLst>
               <a:ext uri="{FF2B5EF4-FFF2-40B4-BE49-F238E27FC236}">
-                <a16:creationId xmlns:a16="http://schemas.microsoft.com/office/drawing/2014/main" id="{91B1BB63-1586-6983-A850-9ABE39B4AF7D}"/>
+                <a16:creationId xmlns:a16="http://schemas.microsoft.com/office/drawing/2014/main" id="{B21BD5E1-8C43-5CBF-BEB4-B430BDD4D73C}"/>
+              </a:ext>
+            </a:extLst>
+          </p:cNvPr>
+          <p:cNvSpPr>
+            <a:spLocks noGrp="1"/>
+          </p:cNvSpPr>
+          <p:nvPr>
+            <p:ph sz="quarter" idx="1"/>
+          </p:nvPr>
+        </p:nvSpPr>
+        <p:spPr>
+          <a:xfrm>
+            <a:off x="457200" y="1219200"/>
+            <a:ext cx="8229600" cy="4937760"/>
+          </a:xfrm>
+        </p:spPr>
+        <p:txBody>
+          <a:bodyPr/>
+          <a:lstStyle/>
+          <a:p>
+            <a:r>
+              <a:rPr lang="en-US" dirty="0"/>
+              <a:t>What are value of r2, and NZCV flags after execution, assuming all flags are initially 0.</a:t>
+            </a:r>
+          </a:p>
+        </p:txBody>
+      </p:sp>
+      <p:sp>
+        <p:nvSpPr>
+          <p:cNvPr id="8" name="Rectangle 7">
+            <a:extLst>
+              <a:ext uri="{FF2B5EF4-FFF2-40B4-BE49-F238E27FC236}">
+                <a16:creationId xmlns:a16="http://schemas.microsoft.com/office/drawing/2014/main" id="{D43F8B0C-9B9C-5AAA-26B5-003AE580EB61}"/>
               </a:ext>
             </a:extLst>
           </p:cNvPr>
@@ -8652,97 +6327,72 @@
         </p:nvSpPr>
         <p:spPr>
           <a:xfrm>
-            <a:off x="76200" y="-23210"/>
-            <a:ext cx="1265712" cy="762000"/>
+            <a:off x="860298" y="2133600"/>
+            <a:ext cx="3467100" cy="1015663"/>
           </a:xfrm>
-          <a:prstGeom prst="horizontalScroll">
+          <a:prstGeom prst="rect">
             <a:avLst/>
           </a:prstGeom>
-          <a:gradFill rotWithShape="1">
-            <a:gsLst>
-              <a:gs pos="0">
-                <a:srgbClr val="4F81BD">
-                  <a:tint val="50000"/>
-                  <a:satMod val="300000"/>
-                </a:srgbClr>
-              </a:gs>
-              <a:gs pos="35000">
-                <a:srgbClr val="4F81BD">
-                  <a:tint val="37000"/>
-                  <a:satMod val="300000"/>
-                </a:srgbClr>
-              </a:gs>
-              <a:gs pos="100000">
-                <a:srgbClr val="4F81BD">
-                  <a:tint val="15000"/>
-                  <a:satMod val="350000"/>
-                </a:srgbClr>
-              </a:gs>
-            </a:gsLst>
-            <a:lin ang="16200000" scaled="1"/>
-          </a:gradFill>
-          <a:ln w="9525" cap="flat" cmpd="sng" algn="ctr">
-            <a:solidFill>
-              <a:srgbClr val="4F81BD">
-                <a:shade val="95000"/>
-                <a:satMod val="105000"/>
-              </a:srgbClr>
-            </a:solidFill>
-            <a:prstDash val="solid"/>
-          </a:ln>
-          <a:effectLst>
-            <a:outerShdw blurRad="40000" dist="20000" dir="5400000" rotWithShape="0">
-              <a:srgbClr val="000000">
-                <a:alpha val="38000"/>
-              </a:srgbClr>
-            </a:outerShdw>
-          </a:effectLst>
         </p:spPr>
-        <p:txBody>
-          <a:bodyPr rtlCol="0" anchor="ctr"/>
-          <a:lstStyle/>
-          <a:p>
-            <a:pPr marL="0" marR="0" lvl="0" indent="0" algn="ctr" defTabSz="457200" eaLnBrk="1" fontAlgn="auto" latinLnBrk="0" hangingPunct="1">
-              <a:lnSpc>
-                <a:spcPct val="100000"/>
-              </a:lnSpc>
-              <a:spcBef>
-                <a:spcPts val="0"/>
-              </a:spcBef>
-              <a:spcAft>
-                <a:spcPts val="0"/>
-              </a:spcAft>
-              <a:buClrTx/>
-              <a:buSzTx/>
-              <a:buFontTx/>
-              <a:buNone/>
-              <a:tabLst/>
-              <a:defRPr/>
-            </a:pPr>
-            <a:r>
-              <a:rPr kumimoji="0" lang="en-US" sz="2400" b="0" i="0" u="none" strike="noStrike" kern="0" cap="none" spc="0" normalizeH="0" baseline="0" noProof="0" dirty="0">
-                <a:ln>
-                  <a:noFill/>
-                </a:ln>
-                <a:solidFill>
-                  <a:prstClr val="black"/>
-                </a:solidFill>
-                <a:effectLst/>
-                <a:uLnTx/>
-                <a:uFillTx/>
-                <a:latin typeface="Calibri"/>
-                <a:ea typeface="+mn-ea"/>
-                <a:cs typeface="+mn-cs"/>
+        <p:style>
+          <a:lnRef idx="2">
+            <a:schemeClr val="accent1"/>
+          </a:lnRef>
+          <a:fillRef idx="1">
+            <a:schemeClr val="lt1"/>
+          </a:fillRef>
+          <a:effectRef idx="0">
+            <a:schemeClr val="accent1"/>
+          </a:effectRef>
+          <a:fontRef idx="minor">
+            <a:schemeClr val="dk1"/>
+          </a:fontRef>
+        </p:style>
+        <p:txBody>
+          <a:bodyPr wrap="square">
+            <a:spAutoFit/>
+          </a:bodyPr>
+          <a:lstStyle/>
+          <a:p>
+            <a:r>
+              <a:rPr lang="pt-BR" sz="2000" dirty="0">
+                <a:latin typeface="Consolas" panose="020B0609020204030204" pitchFamily="49" charset="0"/>
+                <a:cs typeface="Consolas" panose="020B0609020204030204" pitchFamily="49" charset="0"/>
               </a:rPr>
-              <a:t>Review</a:t>
-            </a:r>
+              <a:t>LDR r0, =0xFFFFFFF00</a:t>
+            </a:r>
+          </a:p>
+          <a:p>
+            <a:r>
+              <a:rPr lang="pt-BR" sz="2000" dirty="0">
+                <a:latin typeface="Consolas" panose="020B0609020204030204" pitchFamily="49" charset="0"/>
+                <a:cs typeface="Consolas" panose="020B0609020204030204" pitchFamily="49" charset="0"/>
+              </a:rPr>
+              <a:t>LDR r1, =0x00000001</a:t>
+            </a:r>
+          </a:p>
+          <a:p>
+            <a:r>
+              <a:rPr lang="pt-BR" sz="2000" dirty="0">
+                <a:latin typeface="Consolas" panose="020B0609020204030204" pitchFamily="49" charset="0"/>
+                <a:cs typeface="Consolas" panose="020B0609020204030204" pitchFamily="49" charset="0"/>
+              </a:rPr>
+              <a:t>ADDS r2, r1, r0, LSL #1</a:t>
+            </a:r>
+            <a:endParaRPr lang="en-US" sz="2000" dirty="0">
+              <a:solidFill>
+                <a:srgbClr val="C00000"/>
+              </a:solidFill>
+              <a:latin typeface="Consolas" panose="020B0609020204030204" pitchFamily="49" charset="0"/>
+              <a:cs typeface="Consolas" panose="020B0609020204030204" pitchFamily="49" charset="0"/>
+            </a:endParaRPr>
           </a:p>
         </p:txBody>
       </p:sp>
     </p:spTree>
     <p:extLst>
       <p:ext uri="{BB962C8B-B14F-4D97-AF65-F5344CB8AC3E}">
-        <p14:creationId xmlns:p14="http://schemas.microsoft.com/office/powerpoint/2010/main" val="4009754153"/>
+        <p14:creationId xmlns:p14="http://schemas.microsoft.com/office/powerpoint/2010/main" val="1401545001"/>
       </p:ext>
     </p:extLst>
   </p:cSld>
@@ -8774,562 +6424,6 @@
           <p:cNvPr id="2" name="Title 1">
             <a:extLst>
               <a:ext uri="{FF2B5EF4-FFF2-40B4-BE49-F238E27FC236}">
-                <a16:creationId xmlns:a16="http://schemas.microsoft.com/office/drawing/2014/main" id="{11B52526-FDDF-35FA-A44E-1A2334442F74}"/>
-              </a:ext>
-            </a:extLst>
-          </p:cNvPr>
-          <p:cNvSpPr>
-            <a:spLocks noGrp="1"/>
-          </p:cNvSpPr>
-          <p:nvPr>
-            <p:ph type="title"/>
-          </p:nvPr>
-        </p:nvSpPr>
-        <p:spPr/>
-        <p:txBody>
-          <a:bodyPr/>
-          <a:lstStyle/>
-          <a:p>
-            <a:r>
-              <a:rPr lang="en-US" dirty="0"/>
-              <a:t>Flags ANDS</a:t>
-            </a:r>
-          </a:p>
-        </p:txBody>
-      </p:sp>
-      <p:sp>
-        <p:nvSpPr>
-          <p:cNvPr id="3" name="Slide Number Placeholder 2">
-            <a:extLst>
-              <a:ext uri="{FF2B5EF4-FFF2-40B4-BE49-F238E27FC236}">
-                <a16:creationId xmlns:a16="http://schemas.microsoft.com/office/drawing/2014/main" id="{BCB70333-70B3-0D05-E999-759739E502C6}"/>
-              </a:ext>
-            </a:extLst>
-          </p:cNvPr>
-          <p:cNvSpPr>
-            <a:spLocks noGrp="1"/>
-          </p:cNvSpPr>
-          <p:nvPr>
-            <p:ph type="sldNum" sz="quarter" idx="12"/>
-          </p:nvPr>
-        </p:nvSpPr>
-        <p:spPr/>
-        <p:txBody>
-          <a:bodyPr/>
-          <a:lstStyle/>
-          <a:p>
-            <a:fld id="{EA7C8D44-3667-46F6-9772-CC52308E2A7F}" type="slidenum">
-              <a:rPr kumimoji="0" lang="en-US" smtClean="0"/>
-              <a:pPr/>
-              <a:t>18</a:t>
-            </a:fld>
-            <a:endParaRPr kumimoji="0" lang="en-US" dirty="0"/>
-          </a:p>
-        </p:txBody>
-      </p:sp>
-      <p:sp>
-        <p:nvSpPr>
-          <p:cNvPr id="4" name="Content Placeholder 3">
-            <a:extLst>
-              <a:ext uri="{FF2B5EF4-FFF2-40B4-BE49-F238E27FC236}">
-                <a16:creationId xmlns:a16="http://schemas.microsoft.com/office/drawing/2014/main" id="{43995D49-573C-6129-4E24-762AAEB6BD07}"/>
-              </a:ext>
-            </a:extLst>
-          </p:cNvPr>
-          <p:cNvSpPr>
-            <a:spLocks noGrp="1"/>
-          </p:cNvSpPr>
-          <p:nvPr>
-            <p:ph sz="quarter" idx="1"/>
-          </p:nvPr>
-        </p:nvSpPr>
-        <p:spPr/>
-        <p:txBody>
-          <a:bodyPr/>
-          <a:lstStyle/>
-          <a:p>
-            <a:r>
-              <a:rPr lang="en-US" dirty="0"/>
-              <a:t>What are value of r2, and NZCV flags after execution, assuming all flags are initially 0.</a:t>
-            </a:r>
-          </a:p>
-          <a:p>
-            <a:endParaRPr lang="en-US" dirty="0"/>
-          </a:p>
-          <a:p>
-            <a:endParaRPr lang="en-US" dirty="0"/>
-          </a:p>
-        </p:txBody>
-      </p:sp>
-      <p:sp>
-        <p:nvSpPr>
-          <p:cNvPr id="7" name="Rectangle 6">
-            <a:extLst>
-              <a:ext uri="{FF2B5EF4-FFF2-40B4-BE49-F238E27FC236}">
-                <a16:creationId xmlns:a16="http://schemas.microsoft.com/office/drawing/2014/main" id="{BCB598EB-3D73-A532-9DE0-CBC965E702FA}"/>
-              </a:ext>
-            </a:extLst>
-          </p:cNvPr>
-          <p:cNvSpPr/>
-          <p:nvPr/>
-        </p:nvSpPr>
-        <p:spPr>
-          <a:xfrm>
-            <a:off x="860298" y="2213036"/>
-            <a:ext cx="3467100" cy="1015663"/>
-          </a:xfrm>
-          <a:prstGeom prst="rect">
-            <a:avLst/>
-          </a:prstGeom>
-        </p:spPr>
-        <p:style>
-          <a:lnRef idx="2">
-            <a:schemeClr val="accent1"/>
-          </a:lnRef>
-          <a:fillRef idx="1">
-            <a:schemeClr val="lt1"/>
-          </a:fillRef>
-          <a:effectRef idx="0">
-            <a:schemeClr val="accent1"/>
-          </a:effectRef>
-          <a:fontRef idx="minor">
-            <a:schemeClr val="dk1"/>
-          </a:fontRef>
-        </p:style>
-        <p:txBody>
-          <a:bodyPr wrap="square">
-            <a:spAutoFit/>
-          </a:bodyPr>
-          <a:lstStyle/>
-          <a:p>
-            <a:r>
-              <a:rPr lang="pt-BR" sz="2000" dirty="0">
-                <a:latin typeface="Consolas" panose="020B0609020204030204" pitchFamily="49" charset="0"/>
-                <a:cs typeface="Consolas" panose="020B0609020204030204" pitchFamily="49" charset="0"/>
-              </a:rPr>
-              <a:t>LDR r0, =0xFFFFFFF00</a:t>
-            </a:r>
-          </a:p>
-          <a:p>
-            <a:r>
-              <a:rPr lang="pt-BR" sz="2000" dirty="0">
-                <a:latin typeface="Consolas" panose="020B0609020204030204" pitchFamily="49" charset="0"/>
-                <a:cs typeface="Consolas" panose="020B0609020204030204" pitchFamily="49" charset="0"/>
-              </a:rPr>
-              <a:t>LDR r1, =0x00000001</a:t>
-            </a:r>
-          </a:p>
-          <a:p>
-            <a:r>
-              <a:rPr lang="pt-BR" sz="2000" dirty="0">
-                <a:latin typeface="Consolas" panose="020B0609020204030204" pitchFamily="49" charset="0"/>
-                <a:cs typeface="Consolas" panose="020B0609020204030204" pitchFamily="49" charset="0"/>
-              </a:rPr>
-              <a:t>ANDS r2, r1, r0, LSL #1</a:t>
-            </a:r>
-            <a:endParaRPr lang="en-US" sz="2000" dirty="0">
-              <a:solidFill>
-                <a:srgbClr val="C00000"/>
-              </a:solidFill>
-              <a:latin typeface="Consolas" panose="020B0609020204030204" pitchFamily="49" charset="0"/>
-              <a:cs typeface="Consolas" panose="020B0609020204030204" pitchFamily="49" charset="0"/>
-            </a:endParaRPr>
-          </a:p>
-        </p:txBody>
-      </p:sp>
-    </p:spTree>
-    <p:extLst>
-      <p:ext uri="{BB962C8B-B14F-4D97-AF65-F5344CB8AC3E}">
-        <p14:creationId xmlns:p14="http://schemas.microsoft.com/office/powerpoint/2010/main" val="2291445225"/>
-      </p:ext>
-    </p:extLst>
-  </p:cSld>
-  <p:clrMapOvr>
-    <a:masterClrMapping/>
-  </p:clrMapOvr>
-</p:sld>
-</file>
-
-<file path=ppt/slides/slide19.xml><?xml version="1.0" encoding="utf-8"?>
-<p:sld xmlns:a="http://schemas.openxmlformats.org/drawingml/2006/main" xmlns:r="http://schemas.openxmlformats.org/officeDocument/2006/relationships" xmlns:p="http://schemas.openxmlformats.org/presentationml/2006/main">
-  <p:cSld>
-    <p:spTree>
-      <p:nvGrpSpPr>
-        <p:cNvPr id="1" name=""/>
-        <p:cNvGrpSpPr/>
-        <p:nvPr/>
-      </p:nvGrpSpPr>
-      <p:grpSpPr>
-        <a:xfrm>
-          <a:off x="0" y="0"/>
-          <a:ext cx="0" cy="0"/>
-          <a:chOff x="0" y="0"/>
-          <a:chExt cx="0" cy="0"/>
-        </a:xfrm>
-      </p:grpSpPr>
-      <p:sp>
-        <p:nvSpPr>
-          <p:cNvPr id="2" name="Title 1">
-            <a:extLst>
-              <a:ext uri="{FF2B5EF4-FFF2-40B4-BE49-F238E27FC236}">
-                <a16:creationId xmlns:a16="http://schemas.microsoft.com/office/drawing/2014/main" id="{E3C709F9-4905-FD89-18E1-B8EB2F602C94}"/>
-              </a:ext>
-            </a:extLst>
-          </p:cNvPr>
-          <p:cNvSpPr>
-            <a:spLocks noGrp="1"/>
-          </p:cNvSpPr>
-          <p:nvPr>
-            <p:ph type="title"/>
-          </p:nvPr>
-        </p:nvSpPr>
-        <p:spPr/>
-        <p:txBody>
-          <a:bodyPr/>
-          <a:lstStyle/>
-          <a:p>
-            <a:r>
-              <a:rPr lang="en-US" dirty="0"/>
-              <a:t>Flags ADDS</a:t>
-            </a:r>
-          </a:p>
-        </p:txBody>
-      </p:sp>
-      <p:sp>
-        <p:nvSpPr>
-          <p:cNvPr id="3" name="Slide Number Placeholder 2">
-            <a:extLst>
-              <a:ext uri="{FF2B5EF4-FFF2-40B4-BE49-F238E27FC236}">
-                <a16:creationId xmlns:a16="http://schemas.microsoft.com/office/drawing/2014/main" id="{40E8A52C-2E2E-54F3-49AA-2CABED2CB91F}"/>
-              </a:ext>
-            </a:extLst>
-          </p:cNvPr>
-          <p:cNvSpPr>
-            <a:spLocks noGrp="1"/>
-          </p:cNvSpPr>
-          <p:nvPr>
-            <p:ph type="sldNum" sz="quarter" idx="12"/>
-          </p:nvPr>
-        </p:nvSpPr>
-        <p:spPr/>
-        <p:txBody>
-          <a:bodyPr/>
-          <a:lstStyle/>
-          <a:p>
-            <a:fld id="{EA7C8D44-3667-46F6-9772-CC52308E2A7F}" type="slidenum">
-              <a:rPr kumimoji="0" lang="en-US" smtClean="0"/>
-              <a:pPr/>
-              <a:t>19</a:t>
-            </a:fld>
-            <a:endParaRPr kumimoji="0" lang="en-US" dirty="0"/>
-          </a:p>
-        </p:txBody>
-      </p:sp>
-      <p:sp>
-        <p:nvSpPr>
-          <p:cNvPr id="7" name="Content Placeholder 3">
-            <a:extLst>
-              <a:ext uri="{FF2B5EF4-FFF2-40B4-BE49-F238E27FC236}">
-                <a16:creationId xmlns:a16="http://schemas.microsoft.com/office/drawing/2014/main" id="{B21BD5E1-8C43-5CBF-BEB4-B430BDD4D73C}"/>
-              </a:ext>
-            </a:extLst>
-          </p:cNvPr>
-          <p:cNvSpPr>
-            <a:spLocks noGrp="1"/>
-          </p:cNvSpPr>
-          <p:nvPr>
-            <p:ph sz="quarter" idx="1"/>
-          </p:nvPr>
-        </p:nvSpPr>
-        <p:spPr>
-          <a:xfrm>
-            <a:off x="457200" y="1219200"/>
-            <a:ext cx="8229600" cy="4937760"/>
-          </a:xfrm>
-        </p:spPr>
-        <p:txBody>
-          <a:bodyPr/>
-          <a:lstStyle/>
-          <a:p>
-            <a:r>
-              <a:rPr lang="en-US" dirty="0"/>
-              <a:t>What are value of r2, and NZCV flags after execution, assuming all flags are initially 0.</a:t>
-            </a:r>
-          </a:p>
-        </p:txBody>
-      </p:sp>
-      <p:sp>
-        <p:nvSpPr>
-          <p:cNvPr id="8" name="Rectangle 7">
-            <a:extLst>
-              <a:ext uri="{FF2B5EF4-FFF2-40B4-BE49-F238E27FC236}">
-                <a16:creationId xmlns:a16="http://schemas.microsoft.com/office/drawing/2014/main" id="{D43F8B0C-9B9C-5AAA-26B5-003AE580EB61}"/>
-              </a:ext>
-            </a:extLst>
-          </p:cNvPr>
-          <p:cNvSpPr/>
-          <p:nvPr/>
-        </p:nvSpPr>
-        <p:spPr>
-          <a:xfrm>
-            <a:off x="860298" y="2133600"/>
-            <a:ext cx="3467100" cy="1015663"/>
-          </a:xfrm>
-          <a:prstGeom prst="rect">
-            <a:avLst/>
-          </a:prstGeom>
-        </p:spPr>
-        <p:style>
-          <a:lnRef idx="2">
-            <a:schemeClr val="accent1"/>
-          </a:lnRef>
-          <a:fillRef idx="1">
-            <a:schemeClr val="lt1"/>
-          </a:fillRef>
-          <a:effectRef idx="0">
-            <a:schemeClr val="accent1"/>
-          </a:effectRef>
-          <a:fontRef idx="minor">
-            <a:schemeClr val="dk1"/>
-          </a:fontRef>
-        </p:style>
-        <p:txBody>
-          <a:bodyPr wrap="square">
-            <a:spAutoFit/>
-          </a:bodyPr>
-          <a:lstStyle/>
-          <a:p>
-            <a:r>
-              <a:rPr lang="pt-BR" sz="2000" dirty="0">
-                <a:latin typeface="Consolas" panose="020B0609020204030204" pitchFamily="49" charset="0"/>
-                <a:cs typeface="Consolas" panose="020B0609020204030204" pitchFamily="49" charset="0"/>
-              </a:rPr>
-              <a:t>LDR r0, =0xFFFFFFF00</a:t>
-            </a:r>
-          </a:p>
-          <a:p>
-            <a:r>
-              <a:rPr lang="pt-BR" sz="2000" dirty="0">
-                <a:latin typeface="Consolas" panose="020B0609020204030204" pitchFamily="49" charset="0"/>
-                <a:cs typeface="Consolas" panose="020B0609020204030204" pitchFamily="49" charset="0"/>
-              </a:rPr>
-              <a:t>LDR r1, =0x00000001</a:t>
-            </a:r>
-          </a:p>
-          <a:p>
-            <a:r>
-              <a:rPr lang="pt-BR" sz="2000" dirty="0">
-                <a:latin typeface="Consolas" panose="020B0609020204030204" pitchFamily="49" charset="0"/>
-                <a:cs typeface="Consolas" panose="020B0609020204030204" pitchFamily="49" charset="0"/>
-              </a:rPr>
-              <a:t>ADDS r2, r1, r0, LSL #1</a:t>
-            </a:r>
-            <a:endParaRPr lang="en-US" sz="2000" dirty="0">
-              <a:solidFill>
-                <a:srgbClr val="C00000"/>
-              </a:solidFill>
-              <a:latin typeface="Consolas" panose="020B0609020204030204" pitchFamily="49" charset="0"/>
-              <a:cs typeface="Consolas" panose="020B0609020204030204" pitchFamily="49" charset="0"/>
-            </a:endParaRPr>
-          </a:p>
-        </p:txBody>
-      </p:sp>
-    </p:spTree>
-    <p:extLst>
-      <p:ext uri="{BB962C8B-B14F-4D97-AF65-F5344CB8AC3E}">
-        <p14:creationId xmlns:p14="http://schemas.microsoft.com/office/powerpoint/2010/main" val="1401545001"/>
-      </p:ext>
-    </p:extLst>
-  </p:cSld>
-  <p:clrMapOvr>
-    <a:masterClrMapping/>
-  </p:clrMapOvr>
-</p:sld>
-</file>
-
-<file path=ppt/slides/slide2.xml><?xml version="1.0" encoding="utf-8"?>
-<p:sld xmlns:a="http://schemas.openxmlformats.org/drawingml/2006/main" xmlns:r="http://schemas.openxmlformats.org/officeDocument/2006/relationships" xmlns:p="http://schemas.openxmlformats.org/presentationml/2006/main">
-  <p:cSld>
-    <p:spTree>
-      <p:nvGrpSpPr>
-        <p:cNvPr id="1" name=""/>
-        <p:cNvGrpSpPr/>
-        <p:nvPr/>
-      </p:nvGrpSpPr>
-      <p:grpSpPr>
-        <a:xfrm>
-          <a:off x="0" y="0"/>
-          <a:ext cx="0" cy="0"/>
-          <a:chOff x="0" y="0"/>
-          <a:chExt cx="0" cy="0"/>
-        </a:xfrm>
-      </p:grpSpPr>
-      <p:sp>
-        <p:nvSpPr>
-          <p:cNvPr id="2" name="Title 1">
-            <a:extLst>
-              <a:ext uri="{FF2B5EF4-FFF2-40B4-BE49-F238E27FC236}">
-                <a16:creationId xmlns:a16="http://schemas.microsoft.com/office/drawing/2014/main" id="{6BA372BA-4E36-5939-EA5D-65E91EDB30B3}"/>
-              </a:ext>
-            </a:extLst>
-          </p:cNvPr>
-          <p:cNvSpPr>
-            <a:spLocks noGrp="1"/>
-          </p:cNvSpPr>
-          <p:nvPr>
-            <p:ph type="title"/>
-          </p:nvPr>
-        </p:nvSpPr>
-        <p:spPr/>
-        <p:txBody>
-          <a:bodyPr/>
-          <a:lstStyle/>
-          <a:p>
-            <a:r>
-              <a:rPr lang="en-US" dirty="0"/>
-              <a:t>Bit Manipulations</a:t>
-            </a:r>
-          </a:p>
-        </p:txBody>
-      </p:sp>
-      <p:sp>
-        <p:nvSpPr>
-          <p:cNvPr id="3" name="Slide Number Placeholder 2">
-            <a:extLst>
-              <a:ext uri="{FF2B5EF4-FFF2-40B4-BE49-F238E27FC236}">
-                <a16:creationId xmlns:a16="http://schemas.microsoft.com/office/drawing/2014/main" id="{4B2DE8FE-731E-0AC7-29AB-17D9745E19A1}"/>
-              </a:ext>
-            </a:extLst>
-          </p:cNvPr>
-          <p:cNvSpPr>
-            <a:spLocks noGrp="1"/>
-          </p:cNvSpPr>
-          <p:nvPr>
-            <p:ph type="sldNum" sz="quarter" idx="12"/>
-          </p:nvPr>
-        </p:nvSpPr>
-        <p:spPr/>
-        <p:txBody>
-          <a:bodyPr/>
-          <a:lstStyle/>
-          <a:p>
-            <a:fld id="{EA7C8D44-3667-46F6-9772-CC52308E2A7F}" type="slidenum">
-              <a:rPr kumimoji="0" lang="en-US" smtClean="0"/>
-              <a:pPr/>
-              <a:t>2</a:t>
-            </a:fld>
-            <a:endParaRPr kumimoji="0" lang="en-US" dirty="0"/>
-          </a:p>
-        </p:txBody>
-      </p:sp>
-      <p:sp>
-        <p:nvSpPr>
-          <p:cNvPr id="4" name="Content Placeholder 3">
-            <a:extLst>
-              <a:ext uri="{FF2B5EF4-FFF2-40B4-BE49-F238E27FC236}">
-                <a16:creationId xmlns:a16="http://schemas.microsoft.com/office/drawing/2014/main" id="{0DBB9D86-D583-CABE-4B85-A5314A655FCE}"/>
-              </a:ext>
-            </a:extLst>
-          </p:cNvPr>
-          <p:cNvSpPr>
-            <a:spLocks noGrp="1"/>
-          </p:cNvSpPr>
-          <p:nvPr>
-            <p:ph sz="quarter" idx="1"/>
-          </p:nvPr>
-        </p:nvSpPr>
-        <p:spPr/>
-        <p:txBody>
-          <a:bodyPr>
-            <a:normAutofit/>
-          </a:bodyPr>
-          <a:lstStyle/>
-          <a:p>
-            <a:r>
-              <a:rPr lang="pt-BR" dirty="0"/>
-              <a:t>Compute register values after each instruction</a:t>
-            </a:r>
-          </a:p>
-          <a:p>
-            <a:r>
-              <a:rPr lang="pt-BR" dirty="0"/>
-              <a:t>MOV R0, #0xABC</a:t>
-            </a:r>
-          </a:p>
-          <a:p>
-            <a:r>
-              <a:rPr lang="pt-BR" dirty="0"/>
-              <a:t>MOV R1, #0xDEF</a:t>
-            </a:r>
-          </a:p>
-          <a:p>
-            <a:r>
-              <a:rPr lang="pt-BR" dirty="0"/>
-              <a:t>AND R2, R0, R1</a:t>
-            </a:r>
-          </a:p>
-          <a:p>
-            <a:r>
-              <a:rPr lang="pt-BR" dirty="0"/>
-              <a:t>ORR R3, R0, R1</a:t>
-            </a:r>
-          </a:p>
-          <a:p>
-            <a:r>
-              <a:rPr lang="pt-BR" dirty="0"/>
-              <a:t>EOR R4, R0, R1</a:t>
-            </a:r>
-          </a:p>
-          <a:p>
-            <a:r>
-              <a:rPr lang="pt-BR" dirty="0"/>
-              <a:t>ORN R5, R0, R1</a:t>
-            </a:r>
-          </a:p>
-          <a:p>
-            <a:r>
-              <a:rPr lang="pt-BR" dirty="0"/>
-              <a:t>BIC r6, R0, R1</a:t>
-            </a:r>
-            <a:endParaRPr lang="en-US" dirty="0"/>
-          </a:p>
-        </p:txBody>
-      </p:sp>
-    </p:spTree>
-    <p:extLst>
-      <p:ext uri="{BB962C8B-B14F-4D97-AF65-F5344CB8AC3E}">
-        <p14:creationId xmlns:p14="http://schemas.microsoft.com/office/powerpoint/2010/main" val="1248622466"/>
-      </p:ext>
-    </p:extLst>
-  </p:cSld>
-  <p:clrMapOvr>
-    <a:masterClrMapping/>
-  </p:clrMapOvr>
-</p:sld>
-</file>
-
-<file path=ppt/slides/slide20.xml><?xml version="1.0" encoding="utf-8"?>
-<p:sld xmlns:a="http://schemas.openxmlformats.org/drawingml/2006/main" xmlns:r="http://schemas.openxmlformats.org/officeDocument/2006/relationships" xmlns:p="http://schemas.openxmlformats.org/presentationml/2006/main">
-  <p:cSld>
-    <p:spTree>
-      <p:nvGrpSpPr>
-        <p:cNvPr id="1" name=""/>
-        <p:cNvGrpSpPr/>
-        <p:nvPr/>
-      </p:nvGrpSpPr>
-      <p:grpSpPr>
-        <a:xfrm>
-          <a:off x="0" y="0"/>
-          <a:ext cx="0" cy="0"/>
-          <a:chOff x="0" y="0"/>
-          <a:chExt cx="0" cy="0"/>
-        </a:xfrm>
-      </p:grpSpPr>
-      <p:sp>
-        <p:nvSpPr>
-          <p:cNvPr id="2" name="Title 1">
-            <a:extLst>
-              <a:ext uri="{FF2B5EF4-FFF2-40B4-BE49-F238E27FC236}">
                 <a16:creationId xmlns:a16="http://schemas.microsoft.com/office/drawing/2014/main" id="{F03CE9CC-DEC3-BC36-FF0A-FD088EB33CA9}"/>
               </a:ext>
             </a:extLst>
@@ -9377,7 +6471,7 @@
             <a:fld id="{EA7C8D44-3667-46F6-9772-CC52308E2A7F}" type="slidenum">
               <a:rPr kumimoji="0" lang="en-US" smtClean="0"/>
               <a:pPr/>
-              <a:t>20</a:t>
+              <a:t>18</a:t>
             </a:fld>
             <a:endParaRPr kumimoji="0" lang="en-US" dirty="0"/>
           </a:p>
@@ -9667,6 +6761,3581 @@
     <p:extLst>
       <p:ext uri="{BB962C8B-B14F-4D97-AF65-F5344CB8AC3E}">
         <p14:creationId xmlns:p14="http://schemas.microsoft.com/office/powerpoint/2010/main" val="1456166100"/>
+      </p:ext>
+    </p:extLst>
+  </p:cSld>
+  <p:clrMapOvr>
+    <a:masterClrMapping/>
+  </p:clrMapOvr>
+</p:sld>
+</file>
+
+<file path=ppt/slides/slide19.xml><?xml version="1.0" encoding="utf-8"?>
+<p:sld xmlns:a="http://schemas.openxmlformats.org/drawingml/2006/main" xmlns:r="http://schemas.openxmlformats.org/officeDocument/2006/relationships" xmlns:p="http://schemas.openxmlformats.org/presentationml/2006/main">
+  <p:cSld>
+    <p:spTree>
+      <p:nvGrpSpPr>
+        <p:cNvPr id="1" name="">
+          <a:extLst>
+            <a:ext uri="{FF2B5EF4-FFF2-40B4-BE49-F238E27FC236}">
+              <a16:creationId xmlns:a16="http://schemas.microsoft.com/office/drawing/2014/main" id="{733FE46E-21D3-BB71-D0EF-810E9660EA5D}"/>
+            </a:ext>
+          </a:extLst>
+        </p:cNvPr>
+        <p:cNvGrpSpPr/>
+        <p:nvPr/>
+      </p:nvGrpSpPr>
+      <p:grpSpPr>
+        <a:xfrm>
+          <a:off x="0" y="0"/>
+          <a:ext cx="0" cy="0"/>
+          <a:chOff x="0" y="0"/>
+          <a:chExt cx="0" cy="0"/>
+        </a:xfrm>
+      </p:grpSpPr>
+      <p:sp>
+        <p:nvSpPr>
+          <p:cNvPr id="2" name="Title 1">
+            <a:extLst>
+              <a:ext uri="{FF2B5EF4-FFF2-40B4-BE49-F238E27FC236}">
+                <a16:creationId xmlns:a16="http://schemas.microsoft.com/office/drawing/2014/main" id="{7FA9ABE5-E35E-9995-C450-C422553E96B1}"/>
+              </a:ext>
+            </a:extLst>
+          </p:cNvPr>
+          <p:cNvSpPr>
+            <a:spLocks noGrp="1"/>
+          </p:cNvSpPr>
+          <p:nvPr>
+            <p:ph type="title"/>
+          </p:nvPr>
+        </p:nvSpPr>
+        <p:spPr/>
+        <p:txBody>
+          <a:bodyPr/>
+          <a:lstStyle/>
+          <a:p>
+            <a:r>
+              <a:rPr lang="en-US" dirty="0"/>
+              <a:t>Addition &amp; Subtraction</a:t>
+            </a:r>
+          </a:p>
+        </p:txBody>
+      </p:sp>
+      <p:sp>
+        <p:nvSpPr>
+          <p:cNvPr id="3" name="Slide Number Placeholder 2">
+            <a:extLst>
+              <a:ext uri="{FF2B5EF4-FFF2-40B4-BE49-F238E27FC236}">
+                <a16:creationId xmlns:a16="http://schemas.microsoft.com/office/drawing/2014/main" id="{6CDC54EC-7E8A-1399-9BF2-5015E8B14A5D}"/>
+              </a:ext>
+            </a:extLst>
+          </p:cNvPr>
+          <p:cNvSpPr>
+            <a:spLocks noGrp="1"/>
+          </p:cNvSpPr>
+          <p:nvPr>
+            <p:ph type="sldNum" sz="quarter" idx="12"/>
+          </p:nvPr>
+        </p:nvSpPr>
+        <p:spPr/>
+        <p:txBody>
+          <a:bodyPr/>
+          <a:lstStyle/>
+          <a:p>
+            <a:fld id="{EA7C8D44-3667-46F6-9772-CC52308E2A7F}" type="slidenum">
+              <a:rPr kumimoji="0" lang="en-US" smtClean="0"/>
+              <a:pPr/>
+              <a:t>19</a:t>
+            </a:fld>
+            <a:endParaRPr kumimoji="0" lang="en-US" dirty="0"/>
+          </a:p>
+        </p:txBody>
+      </p:sp>
+      <p:graphicFrame>
+        <p:nvGraphicFramePr>
+          <p:cNvPr id="6" name="Table 5">
+            <a:extLst>
+              <a:ext uri="{FF2B5EF4-FFF2-40B4-BE49-F238E27FC236}">
+                <a16:creationId xmlns:a16="http://schemas.microsoft.com/office/drawing/2014/main" id="{B0565DDE-CFDA-64B0-7C1A-5C1F5D8B93A0}"/>
+              </a:ext>
+            </a:extLst>
+          </p:cNvPr>
+          <p:cNvGraphicFramePr>
+            <a:graphicFrameLocks noGrp="1"/>
+          </p:cNvGraphicFramePr>
+          <p:nvPr/>
+        </p:nvGraphicFramePr>
+        <p:xfrm>
+          <a:off x="1094263" y="2333942"/>
+          <a:ext cx="6955473" cy="3304858"/>
+        </p:xfrm>
+        <a:graphic>
+          <a:graphicData uri="http://schemas.openxmlformats.org/drawingml/2006/table">
+            <a:tbl>
+              <a:tblPr firstRow="1" bandRow="1"/>
+              <a:tblGrid>
+                <a:gridCol w="1702524">
+                  <a:extLst>
+                    <a:ext uri="{9D8B030D-6E8A-4147-A177-3AD203B41FA5}">
+                      <a16:colId xmlns:a16="http://schemas.microsoft.com/office/drawing/2014/main" val="2359662815"/>
+                    </a:ext>
+                  </a:extLst>
+                </a:gridCol>
+                <a:gridCol w="1144345">
+                  <a:extLst>
+                    <a:ext uri="{9D8B030D-6E8A-4147-A177-3AD203B41FA5}">
+                      <a16:colId xmlns:a16="http://schemas.microsoft.com/office/drawing/2014/main" val="1212662852"/>
+                    </a:ext>
+                  </a:extLst>
+                </a:gridCol>
+                <a:gridCol w="1173887">
+                  <a:extLst>
+                    <a:ext uri="{9D8B030D-6E8A-4147-A177-3AD203B41FA5}">
+                      <a16:colId xmlns:a16="http://schemas.microsoft.com/office/drawing/2014/main" val="4290731535"/>
+                    </a:ext>
+                  </a:extLst>
+                </a:gridCol>
+                <a:gridCol w="1191767">
+                  <a:extLst>
+                    <a:ext uri="{9D8B030D-6E8A-4147-A177-3AD203B41FA5}">
+                      <a16:colId xmlns:a16="http://schemas.microsoft.com/office/drawing/2014/main" val="4234417883"/>
+                    </a:ext>
+                  </a:extLst>
+                </a:gridCol>
+                <a:gridCol w="1742950">
+                  <a:extLst>
+                    <a:ext uri="{9D8B030D-6E8A-4147-A177-3AD203B41FA5}">
+                      <a16:colId xmlns:a16="http://schemas.microsoft.com/office/drawing/2014/main" val="1819084519"/>
+                    </a:ext>
+                  </a:extLst>
+                </a:gridCol>
+              </a:tblGrid>
+              <a:tr h="332105">
+                <a:tc>
+                  <a:txBody>
+                    <a:bodyPr/>
+                    <a:lstStyle/>
+                    <a:p>
+                      <a:pPr indent="139700">
+                        <a:lnSpc>
+                          <a:spcPct val="115000"/>
+                        </a:lnSpc>
+                        <a:spcAft>
+                          <a:spcPts val="800"/>
+                        </a:spcAft>
+                        <a:buNone/>
+                      </a:pPr>
+                      <a:r>
+                        <a:rPr lang="en-US" sz="1600" kern="100">
+                          <a:solidFill>
+                            <a:srgbClr val="000000"/>
+                          </a:solidFill>
+                          <a:effectLst/>
+                          <a:latin typeface="Calibri" panose="020F0502020204030204" pitchFamily="34" charset="0"/>
+                          <a:ea typeface="Times New Roman" panose="02020603050405020304" pitchFamily="18" charset="0"/>
+                          <a:cs typeface="Times New Roman" panose="02020603050405020304" pitchFamily="18" charset="0"/>
+                        </a:rPr>
+                        <a:t>Expression</a:t>
+                      </a:r>
+                      <a:endParaRPr lang="en-US" sz="1800" kern="100">
+                        <a:effectLst/>
+                        <a:latin typeface="Aptos" panose="020B0004020202020204" pitchFamily="34" charset="0"/>
+                        <a:ea typeface="DengXian" panose="02010600030101010101" pitchFamily="2" charset="-122"/>
+                        <a:cs typeface="Times New Roman" panose="02020603050405020304" pitchFamily="18" charset="0"/>
+                      </a:endParaRPr>
+                    </a:p>
+                  </a:txBody>
+                  <a:tcPr marL="68580" marR="68580" marT="0" marB="0" anchor="ctr">
+                    <a:lnL w="12700" cap="flat" cmpd="sng" algn="ctr">
+                      <a:solidFill>
+                        <a:srgbClr val="000000"/>
+                      </a:solidFill>
+                      <a:prstDash val="solid"/>
+                      <a:round/>
+                      <a:headEnd type="none" w="med" len="med"/>
+                      <a:tailEnd type="none" w="med" len="med"/>
+                    </a:lnL>
+                    <a:lnR w="12700" cap="flat" cmpd="sng" algn="ctr">
+                      <a:solidFill>
+                        <a:srgbClr val="000000"/>
+                      </a:solidFill>
+                      <a:prstDash val="solid"/>
+                      <a:round/>
+                      <a:headEnd type="none" w="med" len="med"/>
+                      <a:tailEnd type="none" w="med" len="med"/>
+                    </a:lnR>
+                    <a:lnT w="12700" cap="flat" cmpd="sng" algn="ctr">
+                      <a:solidFill>
+                        <a:srgbClr val="000000"/>
+                      </a:solidFill>
+                      <a:prstDash val="solid"/>
+                      <a:round/>
+                      <a:headEnd type="none" w="med" len="med"/>
+                      <a:tailEnd type="none" w="med" len="med"/>
+                    </a:lnT>
+                    <a:lnB w="12700" cap="flat" cmpd="sng" algn="ctr">
+                      <a:solidFill>
+                        <a:srgbClr val="000000"/>
+                      </a:solidFill>
+                      <a:prstDash val="solid"/>
+                      <a:round/>
+                      <a:headEnd type="none" w="med" len="med"/>
+                      <a:tailEnd type="none" w="med" len="med"/>
+                    </a:lnB>
+                    <a:solidFill>
+                      <a:srgbClr val="FFFFFF"/>
+                    </a:solidFill>
+                  </a:tcPr>
+                </a:tc>
+                <a:tc>
+                  <a:txBody>
+                    <a:bodyPr/>
+                    <a:lstStyle/>
+                    <a:p>
+                      <a:pPr indent="139700">
+                        <a:lnSpc>
+                          <a:spcPct val="115000"/>
+                        </a:lnSpc>
+                        <a:spcAft>
+                          <a:spcPts val="800"/>
+                        </a:spcAft>
+                        <a:buNone/>
+                      </a:pPr>
+                      <a:r>
+                        <a:rPr lang="en-US" sz="1600" kern="100">
+                          <a:solidFill>
+                            <a:srgbClr val="000000"/>
+                          </a:solidFill>
+                          <a:effectLst/>
+                          <a:latin typeface="Calibri" panose="020F0502020204030204" pitchFamily="34" charset="0"/>
+                          <a:ea typeface="Times New Roman" panose="02020603050405020304" pitchFamily="18" charset="0"/>
+                          <a:cs typeface="Times New Roman" panose="02020603050405020304" pitchFamily="18" charset="0"/>
+                        </a:rPr>
+                        <a:t>Result</a:t>
+                      </a:r>
+                      <a:endParaRPr lang="en-US" sz="1800" kern="100">
+                        <a:effectLst/>
+                        <a:latin typeface="Aptos" panose="020B0004020202020204" pitchFamily="34" charset="0"/>
+                        <a:ea typeface="DengXian" panose="02010600030101010101" pitchFamily="2" charset="-122"/>
+                        <a:cs typeface="Times New Roman" panose="02020603050405020304" pitchFamily="18" charset="0"/>
+                      </a:endParaRPr>
+                    </a:p>
+                  </a:txBody>
+                  <a:tcPr marL="68580" marR="68580" marT="0" marB="0" anchor="ctr">
+                    <a:lnL w="12700" cap="flat" cmpd="sng" algn="ctr">
+                      <a:solidFill>
+                        <a:srgbClr val="000000"/>
+                      </a:solidFill>
+                      <a:prstDash val="solid"/>
+                      <a:round/>
+                      <a:headEnd type="none" w="med" len="med"/>
+                      <a:tailEnd type="none" w="med" len="med"/>
+                    </a:lnL>
+                    <a:lnR w="12700" cap="flat" cmpd="sng" algn="ctr">
+                      <a:solidFill>
+                        <a:srgbClr val="000000"/>
+                      </a:solidFill>
+                      <a:prstDash val="solid"/>
+                      <a:round/>
+                      <a:headEnd type="none" w="med" len="med"/>
+                      <a:tailEnd type="none" w="med" len="med"/>
+                    </a:lnR>
+                    <a:lnT w="12700" cap="flat" cmpd="sng" algn="ctr">
+                      <a:solidFill>
+                        <a:srgbClr val="000000"/>
+                      </a:solidFill>
+                      <a:prstDash val="solid"/>
+                      <a:round/>
+                      <a:headEnd type="none" w="med" len="med"/>
+                      <a:tailEnd type="none" w="med" len="med"/>
+                    </a:lnT>
+                    <a:lnB w="12700" cap="flat" cmpd="sng" algn="ctr">
+                      <a:solidFill>
+                        <a:srgbClr val="000000"/>
+                      </a:solidFill>
+                      <a:prstDash val="solid"/>
+                      <a:round/>
+                      <a:headEnd type="none" w="med" len="med"/>
+                      <a:tailEnd type="none" w="med" len="med"/>
+                    </a:lnB>
+                    <a:solidFill>
+                      <a:srgbClr val="FFFFFF"/>
+                    </a:solidFill>
+                  </a:tcPr>
+                </a:tc>
+                <a:tc>
+                  <a:txBody>
+                    <a:bodyPr/>
+                    <a:lstStyle/>
+                    <a:p>
+                      <a:pPr indent="139700">
+                        <a:lnSpc>
+                          <a:spcPct val="115000"/>
+                        </a:lnSpc>
+                        <a:spcAft>
+                          <a:spcPts val="800"/>
+                        </a:spcAft>
+                        <a:buNone/>
+                      </a:pPr>
+                      <a:r>
+                        <a:rPr lang="en-US" sz="1600" kern="100" dirty="0">
+                          <a:solidFill>
+                            <a:srgbClr val="000000"/>
+                          </a:solidFill>
+                          <a:effectLst/>
+                          <a:latin typeface="Calibri" panose="020F0502020204030204" pitchFamily="34" charset="0"/>
+                          <a:ea typeface="Times New Roman" panose="02020603050405020304" pitchFamily="18" charset="0"/>
+                          <a:cs typeface="Times New Roman" panose="02020603050405020304" pitchFamily="18" charset="0"/>
+                        </a:rPr>
+                        <a:t>C</a:t>
+                      </a:r>
+                      <a:endParaRPr lang="en-US" sz="1800" kern="100" dirty="0">
+                        <a:effectLst/>
+                        <a:latin typeface="Aptos" panose="020B0004020202020204" pitchFamily="34" charset="0"/>
+                        <a:ea typeface="DengXian" panose="02010600030101010101" pitchFamily="2" charset="-122"/>
+                        <a:cs typeface="Times New Roman" panose="02020603050405020304" pitchFamily="18" charset="0"/>
+                      </a:endParaRPr>
+                    </a:p>
+                  </a:txBody>
+                  <a:tcPr marL="68580" marR="68580" marT="0" marB="0" anchor="ctr">
+                    <a:lnL w="12700" cap="flat" cmpd="sng" algn="ctr">
+                      <a:solidFill>
+                        <a:srgbClr val="000000"/>
+                      </a:solidFill>
+                      <a:prstDash val="solid"/>
+                      <a:round/>
+                      <a:headEnd type="none" w="med" len="med"/>
+                      <a:tailEnd type="none" w="med" len="med"/>
+                    </a:lnL>
+                    <a:lnR w="12700" cap="flat" cmpd="sng" algn="ctr">
+                      <a:solidFill>
+                        <a:srgbClr val="000000"/>
+                      </a:solidFill>
+                      <a:prstDash val="solid"/>
+                      <a:round/>
+                      <a:headEnd type="none" w="med" len="med"/>
+                      <a:tailEnd type="none" w="med" len="med"/>
+                    </a:lnR>
+                    <a:lnT w="12700" cap="flat" cmpd="sng" algn="ctr">
+                      <a:solidFill>
+                        <a:srgbClr val="000000"/>
+                      </a:solidFill>
+                      <a:prstDash val="solid"/>
+                      <a:round/>
+                      <a:headEnd type="none" w="med" len="med"/>
+                      <a:tailEnd type="none" w="med" len="med"/>
+                    </a:lnT>
+                    <a:lnB w="12700" cap="flat" cmpd="sng" algn="ctr">
+                      <a:solidFill>
+                        <a:srgbClr val="000000"/>
+                      </a:solidFill>
+                      <a:prstDash val="solid"/>
+                      <a:round/>
+                      <a:headEnd type="none" w="med" len="med"/>
+                      <a:tailEnd type="none" w="med" len="med"/>
+                    </a:lnB>
+                    <a:solidFill>
+                      <a:srgbClr val="FFFFFF"/>
+                    </a:solidFill>
+                  </a:tcPr>
+                </a:tc>
+                <a:tc>
+                  <a:txBody>
+                    <a:bodyPr/>
+                    <a:lstStyle/>
+                    <a:p>
+                      <a:pPr>
+                        <a:lnSpc>
+                          <a:spcPct val="115000"/>
+                        </a:lnSpc>
+                        <a:spcAft>
+                          <a:spcPts val="800"/>
+                        </a:spcAft>
+                        <a:buNone/>
+                      </a:pPr>
+                      <a:r>
+                        <a:rPr lang="en-US" sz="1600" kern="100" dirty="0">
+                          <a:solidFill>
+                            <a:srgbClr val="000000"/>
+                          </a:solidFill>
+                          <a:effectLst/>
+                          <a:latin typeface="Aptos" panose="020B0004020202020204" pitchFamily="34" charset="0"/>
+                          <a:ea typeface="DengXian" panose="02010600030101010101" pitchFamily="2" charset="-122"/>
+                          <a:cs typeface="Times New Roman" panose="02020603050405020304" pitchFamily="18" charset="0"/>
+                        </a:rPr>
+                        <a:t>V</a:t>
+                      </a:r>
+                      <a:endParaRPr lang="en-US" sz="1800" kern="100" dirty="0">
+                        <a:effectLst/>
+                        <a:latin typeface="Aptos" panose="020B0004020202020204" pitchFamily="34" charset="0"/>
+                        <a:ea typeface="DengXian" panose="02010600030101010101" pitchFamily="2" charset="-122"/>
+                        <a:cs typeface="Times New Roman" panose="02020603050405020304" pitchFamily="18" charset="0"/>
+                      </a:endParaRPr>
+                    </a:p>
+                  </a:txBody>
+                  <a:tcPr marL="68580" marR="68580" marT="0" marB="0" anchor="ctr">
+                    <a:lnL w="12700" cap="flat" cmpd="sng" algn="ctr">
+                      <a:solidFill>
+                        <a:srgbClr val="000000"/>
+                      </a:solidFill>
+                      <a:prstDash val="solid"/>
+                      <a:round/>
+                      <a:headEnd type="none" w="med" len="med"/>
+                      <a:tailEnd type="none" w="med" len="med"/>
+                    </a:lnL>
+                    <a:lnR w="12700" cap="flat" cmpd="sng" algn="ctr">
+                      <a:solidFill>
+                        <a:srgbClr val="000000"/>
+                      </a:solidFill>
+                      <a:prstDash val="solid"/>
+                      <a:round/>
+                      <a:headEnd type="none" w="med" len="med"/>
+                      <a:tailEnd type="none" w="med" len="med"/>
+                    </a:lnR>
+                    <a:lnT w="12700" cap="flat" cmpd="sng" algn="ctr">
+                      <a:solidFill>
+                        <a:srgbClr val="000000"/>
+                      </a:solidFill>
+                      <a:prstDash val="solid"/>
+                      <a:round/>
+                      <a:headEnd type="none" w="med" len="med"/>
+                      <a:tailEnd type="none" w="med" len="med"/>
+                    </a:lnT>
+                    <a:lnB w="12700" cap="flat" cmpd="sng" algn="ctr">
+                      <a:solidFill>
+                        <a:srgbClr val="000000"/>
+                      </a:solidFill>
+                      <a:prstDash val="solid"/>
+                      <a:round/>
+                      <a:headEnd type="none" w="med" len="med"/>
+                      <a:tailEnd type="none" w="med" len="med"/>
+                    </a:lnB>
+                    <a:solidFill>
+                      <a:srgbClr val="FFFFFF"/>
+                    </a:solidFill>
+                  </a:tcPr>
+                </a:tc>
+                <a:tc>
+                  <a:txBody>
+                    <a:bodyPr/>
+                    <a:lstStyle/>
+                    <a:p>
+                      <a:pPr indent="139700">
+                        <a:lnSpc>
+                          <a:spcPct val="115000"/>
+                        </a:lnSpc>
+                        <a:spcAft>
+                          <a:spcPts val="800"/>
+                        </a:spcAft>
+                        <a:buNone/>
+                      </a:pPr>
+                      <a:r>
+                        <a:rPr lang="en-US" sz="1600" kern="100" dirty="0">
+                          <a:solidFill>
+                            <a:srgbClr val="000000"/>
+                          </a:solidFill>
+                          <a:effectLst/>
+                          <a:latin typeface="Calibri" panose="020F0502020204030204" pitchFamily="34" charset="0"/>
+                          <a:ea typeface="Times New Roman" panose="02020603050405020304" pitchFamily="18" charset="0"/>
+                          <a:cs typeface="Times New Roman" panose="02020603050405020304" pitchFamily="18" charset="0"/>
+                        </a:rPr>
+                        <a:t>Correct Result?</a:t>
+                      </a:r>
+                      <a:endParaRPr lang="en-US" sz="1800" kern="100" dirty="0">
+                        <a:effectLst/>
+                        <a:latin typeface="Aptos" panose="020B0004020202020204" pitchFamily="34" charset="0"/>
+                        <a:ea typeface="DengXian" panose="02010600030101010101" pitchFamily="2" charset="-122"/>
+                        <a:cs typeface="Times New Roman" panose="02020603050405020304" pitchFamily="18" charset="0"/>
+                      </a:endParaRPr>
+                    </a:p>
+                    <a:p>
+                      <a:pPr indent="139700">
+                        <a:lnSpc>
+                          <a:spcPct val="115000"/>
+                        </a:lnSpc>
+                        <a:spcAft>
+                          <a:spcPts val="800"/>
+                        </a:spcAft>
+                        <a:buNone/>
+                      </a:pPr>
+                      <a:r>
+                        <a:rPr lang="en-US" sz="1600" kern="100" dirty="0">
+                          <a:solidFill>
+                            <a:srgbClr val="000000"/>
+                          </a:solidFill>
+                          <a:effectLst/>
+                          <a:latin typeface="Calibri" panose="020F0502020204030204" pitchFamily="34" charset="0"/>
+                          <a:ea typeface="Times New Roman" panose="02020603050405020304" pitchFamily="18" charset="0"/>
+                          <a:cs typeface="Times New Roman" panose="02020603050405020304" pitchFamily="18" charset="0"/>
+                        </a:rPr>
+                        <a:t>Unsigned/Signed</a:t>
+                      </a:r>
+                      <a:endParaRPr lang="en-US" sz="1800" kern="100" dirty="0">
+                        <a:effectLst/>
+                        <a:latin typeface="Aptos" panose="020B0004020202020204" pitchFamily="34" charset="0"/>
+                        <a:ea typeface="DengXian" panose="02010600030101010101" pitchFamily="2" charset="-122"/>
+                        <a:cs typeface="Times New Roman" panose="02020603050405020304" pitchFamily="18" charset="0"/>
+                      </a:endParaRPr>
+                    </a:p>
+                  </a:txBody>
+                  <a:tcPr marL="68580" marR="68580" marT="0" marB="0" anchor="ctr">
+                    <a:lnL w="12700" cap="flat" cmpd="sng" algn="ctr">
+                      <a:solidFill>
+                        <a:srgbClr val="000000"/>
+                      </a:solidFill>
+                      <a:prstDash val="solid"/>
+                      <a:round/>
+                      <a:headEnd type="none" w="med" len="med"/>
+                      <a:tailEnd type="none" w="med" len="med"/>
+                    </a:lnL>
+                    <a:lnR w="12700" cap="flat" cmpd="sng" algn="ctr">
+                      <a:solidFill>
+                        <a:srgbClr val="000000"/>
+                      </a:solidFill>
+                      <a:prstDash val="solid"/>
+                      <a:round/>
+                      <a:headEnd type="none" w="med" len="med"/>
+                      <a:tailEnd type="none" w="med" len="med"/>
+                    </a:lnR>
+                    <a:lnT w="12700" cap="flat" cmpd="sng" algn="ctr">
+                      <a:solidFill>
+                        <a:srgbClr val="000000"/>
+                      </a:solidFill>
+                      <a:prstDash val="solid"/>
+                      <a:round/>
+                      <a:headEnd type="none" w="med" len="med"/>
+                      <a:tailEnd type="none" w="med" len="med"/>
+                    </a:lnT>
+                    <a:lnB w="12700" cap="flat" cmpd="sng" algn="ctr">
+                      <a:solidFill>
+                        <a:srgbClr val="000000"/>
+                      </a:solidFill>
+                      <a:prstDash val="solid"/>
+                      <a:round/>
+                      <a:headEnd type="none" w="med" len="med"/>
+                      <a:tailEnd type="none" w="med" len="med"/>
+                    </a:lnB>
+                    <a:solidFill>
+                      <a:srgbClr val="FFFFFF"/>
+                    </a:solidFill>
+                  </a:tcPr>
+                </a:tc>
+                <a:extLst>
+                  <a:ext uri="{0D108BD9-81ED-4DB2-BD59-A6C34878D82A}">
+                    <a16:rowId xmlns:a16="http://schemas.microsoft.com/office/drawing/2014/main" val="1062056900"/>
+                  </a:ext>
+                </a:extLst>
+              </a:tr>
+              <a:tr h="332105">
+                <a:tc>
+                  <a:txBody>
+                    <a:bodyPr/>
+                    <a:lstStyle/>
+                    <a:p>
+                      <a:pPr indent="140335">
+                        <a:lnSpc>
+                          <a:spcPct val="115000"/>
+                        </a:lnSpc>
+                        <a:spcAft>
+                          <a:spcPts val="800"/>
+                        </a:spcAft>
+                        <a:buNone/>
+                      </a:pPr>
+                      <a:r>
+                        <a:rPr lang="en-US" sz="1600" b="1" kern="100">
+                          <a:solidFill>
+                            <a:srgbClr val="000000"/>
+                          </a:solidFill>
+                          <a:effectLst/>
+                          <a:latin typeface="Consolas" panose="020B0609020204030204" pitchFamily="49" charset="0"/>
+                          <a:ea typeface="Times New Roman" panose="02020603050405020304" pitchFamily="18" charset="0"/>
+                          <a:cs typeface="Consolas" panose="020B0609020204030204" pitchFamily="49" charset="0"/>
+                        </a:rPr>
+                        <a:t>0100 + 0010</a:t>
+                      </a:r>
+                      <a:endParaRPr lang="en-US" sz="1800" kern="100">
+                        <a:effectLst/>
+                        <a:latin typeface="Aptos" panose="020B0004020202020204" pitchFamily="34" charset="0"/>
+                        <a:ea typeface="DengXian" panose="02010600030101010101" pitchFamily="2" charset="-122"/>
+                        <a:cs typeface="Times New Roman" panose="02020603050405020304" pitchFamily="18" charset="0"/>
+                      </a:endParaRPr>
+                    </a:p>
+                  </a:txBody>
+                  <a:tcPr marL="68580" marR="68580" marT="0" marB="0" anchor="ctr">
+                    <a:lnL w="12700" cap="flat" cmpd="sng" algn="ctr">
+                      <a:solidFill>
+                        <a:srgbClr val="000000"/>
+                      </a:solidFill>
+                      <a:prstDash val="solid"/>
+                      <a:round/>
+                      <a:headEnd type="none" w="med" len="med"/>
+                      <a:tailEnd type="none" w="med" len="med"/>
+                    </a:lnL>
+                    <a:lnR w="12700" cap="flat" cmpd="sng" algn="ctr">
+                      <a:solidFill>
+                        <a:srgbClr val="000000"/>
+                      </a:solidFill>
+                      <a:prstDash val="solid"/>
+                      <a:round/>
+                      <a:headEnd type="none" w="med" len="med"/>
+                      <a:tailEnd type="none" w="med" len="med"/>
+                    </a:lnR>
+                    <a:lnT w="12700" cap="flat" cmpd="sng" algn="ctr">
+                      <a:solidFill>
+                        <a:srgbClr val="000000"/>
+                      </a:solidFill>
+                      <a:prstDash val="solid"/>
+                      <a:round/>
+                      <a:headEnd type="none" w="med" len="med"/>
+                      <a:tailEnd type="none" w="med" len="med"/>
+                    </a:lnT>
+                    <a:lnB w="12700" cap="flat" cmpd="sng" algn="ctr">
+                      <a:solidFill>
+                        <a:srgbClr val="000000"/>
+                      </a:solidFill>
+                      <a:prstDash val="solid"/>
+                      <a:round/>
+                      <a:headEnd type="none" w="med" len="med"/>
+                      <a:tailEnd type="none" w="med" len="med"/>
+                    </a:lnB>
+                    <a:solidFill>
+                      <a:srgbClr val="FFFFFF"/>
+                    </a:solidFill>
+                  </a:tcPr>
+                </a:tc>
+                <a:tc>
+                  <a:txBody>
+                    <a:bodyPr/>
+                    <a:lstStyle/>
+                    <a:p>
+                      <a:pPr indent="140335">
+                        <a:lnSpc>
+                          <a:spcPct val="115000"/>
+                        </a:lnSpc>
+                        <a:spcAft>
+                          <a:spcPts val="800"/>
+                        </a:spcAft>
+                        <a:buNone/>
+                      </a:pPr>
+                      <a:r>
+                        <a:rPr lang="en-US" sz="1600" b="1" kern="100">
+                          <a:solidFill>
+                            <a:srgbClr val="000000"/>
+                          </a:solidFill>
+                          <a:effectLst/>
+                          <a:latin typeface="Consolas" panose="020B0609020204030204" pitchFamily="49" charset="0"/>
+                          <a:ea typeface="Times New Roman" panose="02020603050405020304" pitchFamily="18" charset="0"/>
+                          <a:cs typeface="Consolas" panose="020B0609020204030204" pitchFamily="49" charset="0"/>
+                        </a:rPr>
+                        <a:t>0110</a:t>
+                      </a:r>
+                      <a:endParaRPr lang="en-US" sz="1800" kern="100">
+                        <a:effectLst/>
+                        <a:latin typeface="Aptos" panose="020B0004020202020204" pitchFamily="34" charset="0"/>
+                        <a:ea typeface="DengXian" panose="02010600030101010101" pitchFamily="2" charset="-122"/>
+                        <a:cs typeface="Times New Roman" panose="02020603050405020304" pitchFamily="18" charset="0"/>
+                      </a:endParaRPr>
+                    </a:p>
+                  </a:txBody>
+                  <a:tcPr marL="68580" marR="68580" marT="0" marB="0" anchor="ctr">
+                    <a:lnL w="12700" cap="flat" cmpd="sng" algn="ctr">
+                      <a:solidFill>
+                        <a:srgbClr val="000000"/>
+                      </a:solidFill>
+                      <a:prstDash val="solid"/>
+                      <a:round/>
+                      <a:headEnd type="none" w="med" len="med"/>
+                      <a:tailEnd type="none" w="med" len="med"/>
+                    </a:lnL>
+                    <a:lnR w="12700" cap="flat" cmpd="sng" algn="ctr">
+                      <a:solidFill>
+                        <a:srgbClr val="000000"/>
+                      </a:solidFill>
+                      <a:prstDash val="solid"/>
+                      <a:round/>
+                      <a:headEnd type="none" w="med" len="med"/>
+                      <a:tailEnd type="none" w="med" len="med"/>
+                    </a:lnR>
+                    <a:lnT w="12700" cap="flat" cmpd="sng" algn="ctr">
+                      <a:solidFill>
+                        <a:srgbClr val="000000"/>
+                      </a:solidFill>
+                      <a:prstDash val="solid"/>
+                      <a:round/>
+                      <a:headEnd type="none" w="med" len="med"/>
+                      <a:tailEnd type="none" w="med" len="med"/>
+                    </a:lnT>
+                    <a:lnB w="12700" cap="flat" cmpd="sng" algn="ctr">
+                      <a:solidFill>
+                        <a:srgbClr val="000000"/>
+                      </a:solidFill>
+                      <a:prstDash val="solid"/>
+                      <a:round/>
+                      <a:headEnd type="none" w="med" len="med"/>
+                      <a:tailEnd type="none" w="med" len="med"/>
+                    </a:lnB>
+                    <a:solidFill>
+                      <a:srgbClr val="FFFFFF"/>
+                    </a:solidFill>
+                  </a:tcPr>
+                </a:tc>
+                <a:tc>
+                  <a:txBody>
+                    <a:bodyPr/>
+                    <a:lstStyle/>
+                    <a:p>
+                      <a:pPr indent="140335">
+                        <a:lnSpc>
+                          <a:spcPct val="115000"/>
+                        </a:lnSpc>
+                        <a:spcAft>
+                          <a:spcPts val="800"/>
+                        </a:spcAft>
+                        <a:buNone/>
+                      </a:pPr>
+                      <a:endParaRPr lang="en-US" sz="1800" kern="100" dirty="0">
+                        <a:effectLst/>
+                        <a:latin typeface="Aptos" panose="020B0004020202020204" pitchFamily="34" charset="0"/>
+                        <a:ea typeface="DengXian" panose="02010600030101010101" pitchFamily="2" charset="-122"/>
+                        <a:cs typeface="Times New Roman" panose="02020603050405020304" pitchFamily="18" charset="0"/>
+                      </a:endParaRPr>
+                    </a:p>
+                  </a:txBody>
+                  <a:tcPr marL="68580" marR="68580" marT="0" marB="0" anchor="ctr">
+                    <a:lnL w="12700" cap="flat" cmpd="sng" algn="ctr">
+                      <a:solidFill>
+                        <a:srgbClr val="000000"/>
+                      </a:solidFill>
+                      <a:prstDash val="solid"/>
+                      <a:round/>
+                      <a:headEnd type="none" w="med" len="med"/>
+                      <a:tailEnd type="none" w="med" len="med"/>
+                    </a:lnL>
+                    <a:lnR w="12700" cap="flat" cmpd="sng" algn="ctr">
+                      <a:solidFill>
+                        <a:srgbClr val="000000"/>
+                      </a:solidFill>
+                      <a:prstDash val="solid"/>
+                      <a:round/>
+                      <a:headEnd type="none" w="med" len="med"/>
+                      <a:tailEnd type="none" w="med" len="med"/>
+                    </a:lnR>
+                    <a:lnT w="12700" cap="flat" cmpd="sng" algn="ctr">
+                      <a:solidFill>
+                        <a:srgbClr val="000000"/>
+                      </a:solidFill>
+                      <a:prstDash val="solid"/>
+                      <a:round/>
+                      <a:headEnd type="none" w="med" len="med"/>
+                      <a:tailEnd type="none" w="med" len="med"/>
+                    </a:lnT>
+                    <a:lnB w="12700" cap="flat" cmpd="sng" algn="ctr">
+                      <a:solidFill>
+                        <a:srgbClr val="000000"/>
+                      </a:solidFill>
+                      <a:prstDash val="solid"/>
+                      <a:round/>
+                      <a:headEnd type="none" w="med" len="med"/>
+                      <a:tailEnd type="none" w="med" len="med"/>
+                    </a:lnB>
+                    <a:solidFill>
+                      <a:srgbClr val="FFFFFF"/>
+                    </a:solidFill>
+                  </a:tcPr>
+                </a:tc>
+                <a:tc>
+                  <a:txBody>
+                    <a:bodyPr/>
+                    <a:lstStyle/>
+                    <a:p>
+                      <a:pPr indent="140335">
+                        <a:lnSpc>
+                          <a:spcPct val="115000"/>
+                        </a:lnSpc>
+                        <a:spcAft>
+                          <a:spcPts val="800"/>
+                        </a:spcAft>
+                        <a:buNone/>
+                      </a:pPr>
+                      <a:endParaRPr lang="en-US" sz="1800" kern="100">
+                        <a:effectLst/>
+                        <a:latin typeface="Aptos" panose="020B0004020202020204" pitchFamily="34" charset="0"/>
+                        <a:ea typeface="DengXian" panose="02010600030101010101" pitchFamily="2" charset="-122"/>
+                        <a:cs typeface="Times New Roman" panose="02020603050405020304" pitchFamily="18" charset="0"/>
+                      </a:endParaRPr>
+                    </a:p>
+                  </a:txBody>
+                  <a:tcPr marL="68580" marR="68580" marT="0" marB="0" anchor="ctr">
+                    <a:lnL w="12700" cap="flat" cmpd="sng" algn="ctr">
+                      <a:solidFill>
+                        <a:srgbClr val="000000"/>
+                      </a:solidFill>
+                      <a:prstDash val="solid"/>
+                      <a:round/>
+                      <a:headEnd type="none" w="med" len="med"/>
+                      <a:tailEnd type="none" w="med" len="med"/>
+                    </a:lnL>
+                    <a:lnR w="12700" cap="flat" cmpd="sng" algn="ctr">
+                      <a:solidFill>
+                        <a:srgbClr val="000000"/>
+                      </a:solidFill>
+                      <a:prstDash val="solid"/>
+                      <a:round/>
+                      <a:headEnd type="none" w="med" len="med"/>
+                      <a:tailEnd type="none" w="med" len="med"/>
+                    </a:lnR>
+                    <a:lnT w="12700" cap="flat" cmpd="sng" algn="ctr">
+                      <a:solidFill>
+                        <a:srgbClr val="000000"/>
+                      </a:solidFill>
+                      <a:prstDash val="solid"/>
+                      <a:round/>
+                      <a:headEnd type="none" w="med" len="med"/>
+                      <a:tailEnd type="none" w="med" len="med"/>
+                    </a:lnT>
+                    <a:lnB w="12700" cap="flat" cmpd="sng" algn="ctr">
+                      <a:solidFill>
+                        <a:srgbClr val="000000"/>
+                      </a:solidFill>
+                      <a:prstDash val="solid"/>
+                      <a:round/>
+                      <a:headEnd type="none" w="med" len="med"/>
+                      <a:tailEnd type="none" w="med" len="med"/>
+                    </a:lnB>
+                    <a:solidFill>
+                      <a:srgbClr val="FFFFFF"/>
+                    </a:solidFill>
+                  </a:tcPr>
+                </a:tc>
+                <a:tc>
+                  <a:txBody>
+                    <a:bodyPr/>
+                    <a:lstStyle/>
+                    <a:p>
+                      <a:pPr indent="140335">
+                        <a:lnSpc>
+                          <a:spcPct val="115000"/>
+                        </a:lnSpc>
+                        <a:spcAft>
+                          <a:spcPts val="800"/>
+                        </a:spcAft>
+                        <a:buNone/>
+                      </a:pPr>
+                      <a:endParaRPr lang="en-US" sz="1800" kern="100" dirty="0">
+                        <a:effectLst/>
+                        <a:latin typeface="Aptos" panose="020B0004020202020204" pitchFamily="34" charset="0"/>
+                        <a:ea typeface="DengXian" panose="02010600030101010101" pitchFamily="2" charset="-122"/>
+                        <a:cs typeface="Times New Roman" panose="02020603050405020304" pitchFamily="18" charset="0"/>
+                      </a:endParaRPr>
+                    </a:p>
+                  </a:txBody>
+                  <a:tcPr marL="68580" marR="68580" marT="0" marB="0" anchor="ctr">
+                    <a:lnL w="12700" cap="flat" cmpd="sng" algn="ctr">
+                      <a:solidFill>
+                        <a:srgbClr val="000000"/>
+                      </a:solidFill>
+                      <a:prstDash val="solid"/>
+                      <a:round/>
+                      <a:headEnd type="none" w="med" len="med"/>
+                      <a:tailEnd type="none" w="med" len="med"/>
+                    </a:lnL>
+                    <a:lnR w="12700" cap="flat" cmpd="sng" algn="ctr">
+                      <a:solidFill>
+                        <a:srgbClr val="000000"/>
+                      </a:solidFill>
+                      <a:prstDash val="solid"/>
+                      <a:round/>
+                      <a:headEnd type="none" w="med" len="med"/>
+                      <a:tailEnd type="none" w="med" len="med"/>
+                    </a:lnR>
+                    <a:lnT w="12700" cap="flat" cmpd="sng" algn="ctr">
+                      <a:solidFill>
+                        <a:srgbClr val="000000"/>
+                      </a:solidFill>
+                      <a:prstDash val="solid"/>
+                      <a:round/>
+                      <a:headEnd type="none" w="med" len="med"/>
+                      <a:tailEnd type="none" w="med" len="med"/>
+                    </a:lnT>
+                    <a:lnB w="12700" cap="flat" cmpd="sng" algn="ctr">
+                      <a:solidFill>
+                        <a:srgbClr val="000000"/>
+                      </a:solidFill>
+                      <a:prstDash val="solid"/>
+                      <a:round/>
+                      <a:headEnd type="none" w="med" len="med"/>
+                      <a:tailEnd type="none" w="med" len="med"/>
+                    </a:lnB>
+                    <a:solidFill>
+                      <a:srgbClr val="FFFFFF"/>
+                    </a:solidFill>
+                  </a:tcPr>
+                </a:tc>
+                <a:extLst>
+                  <a:ext uri="{0D108BD9-81ED-4DB2-BD59-A6C34878D82A}">
+                    <a16:rowId xmlns:a16="http://schemas.microsoft.com/office/drawing/2014/main" val="3994890508"/>
+                  </a:ext>
+                </a:extLst>
+              </a:tr>
+              <a:tr h="332105">
+                <a:tc>
+                  <a:txBody>
+                    <a:bodyPr/>
+                    <a:lstStyle/>
+                    <a:p>
+                      <a:pPr indent="140335">
+                        <a:lnSpc>
+                          <a:spcPct val="115000"/>
+                        </a:lnSpc>
+                        <a:spcAft>
+                          <a:spcPts val="800"/>
+                        </a:spcAft>
+                        <a:buNone/>
+                      </a:pPr>
+                      <a:r>
+                        <a:rPr lang="en-US" sz="1600" b="1" kern="100">
+                          <a:solidFill>
+                            <a:srgbClr val="000000"/>
+                          </a:solidFill>
+                          <a:effectLst/>
+                          <a:latin typeface="Consolas" panose="020B0609020204030204" pitchFamily="49" charset="0"/>
+                          <a:ea typeface="Times New Roman" panose="02020603050405020304" pitchFamily="18" charset="0"/>
+                          <a:cs typeface="Consolas" panose="020B0609020204030204" pitchFamily="49" charset="0"/>
+                        </a:rPr>
+                        <a:t>0100 + 0110</a:t>
+                      </a:r>
+                      <a:endParaRPr lang="en-US" sz="1800" kern="100">
+                        <a:effectLst/>
+                        <a:latin typeface="Aptos" panose="020B0004020202020204" pitchFamily="34" charset="0"/>
+                        <a:ea typeface="DengXian" panose="02010600030101010101" pitchFamily="2" charset="-122"/>
+                        <a:cs typeface="Times New Roman" panose="02020603050405020304" pitchFamily="18" charset="0"/>
+                      </a:endParaRPr>
+                    </a:p>
+                  </a:txBody>
+                  <a:tcPr marL="68580" marR="68580" marT="0" marB="0" anchor="ctr">
+                    <a:lnL w="12700" cap="flat" cmpd="sng" algn="ctr">
+                      <a:solidFill>
+                        <a:srgbClr val="000000"/>
+                      </a:solidFill>
+                      <a:prstDash val="solid"/>
+                      <a:round/>
+                      <a:headEnd type="none" w="med" len="med"/>
+                      <a:tailEnd type="none" w="med" len="med"/>
+                    </a:lnL>
+                    <a:lnR w="12700" cap="flat" cmpd="sng" algn="ctr">
+                      <a:solidFill>
+                        <a:srgbClr val="000000"/>
+                      </a:solidFill>
+                      <a:prstDash val="solid"/>
+                      <a:round/>
+                      <a:headEnd type="none" w="med" len="med"/>
+                      <a:tailEnd type="none" w="med" len="med"/>
+                    </a:lnR>
+                    <a:lnT w="12700" cap="flat" cmpd="sng" algn="ctr">
+                      <a:solidFill>
+                        <a:srgbClr val="000000"/>
+                      </a:solidFill>
+                      <a:prstDash val="solid"/>
+                      <a:round/>
+                      <a:headEnd type="none" w="med" len="med"/>
+                      <a:tailEnd type="none" w="med" len="med"/>
+                    </a:lnT>
+                    <a:lnB w="12700" cap="flat" cmpd="sng" algn="ctr">
+                      <a:solidFill>
+                        <a:srgbClr val="000000"/>
+                      </a:solidFill>
+                      <a:prstDash val="solid"/>
+                      <a:round/>
+                      <a:headEnd type="none" w="med" len="med"/>
+                      <a:tailEnd type="none" w="med" len="med"/>
+                    </a:lnB>
+                    <a:solidFill>
+                      <a:srgbClr val="FFFFFF"/>
+                    </a:solidFill>
+                  </a:tcPr>
+                </a:tc>
+                <a:tc>
+                  <a:txBody>
+                    <a:bodyPr/>
+                    <a:lstStyle/>
+                    <a:p>
+                      <a:pPr indent="140335">
+                        <a:lnSpc>
+                          <a:spcPct val="115000"/>
+                        </a:lnSpc>
+                        <a:spcAft>
+                          <a:spcPts val="800"/>
+                        </a:spcAft>
+                        <a:buNone/>
+                      </a:pPr>
+                      <a:r>
+                        <a:rPr lang="en-US" sz="1600" b="1" kern="100">
+                          <a:solidFill>
+                            <a:srgbClr val="000000"/>
+                          </a:solidFill>
+                          <a:effectLst/>
+                          <a:latin typeface="Consolas" panose="020B0609020204030204" pitchFamily="49" charset="0"/>
+                          <a:ea typeface="Times New Roman" panose="02020603050405020304" pitchFamily="18" charset="0"/>
+                          <a:cs typeface="Consolas" panose="020B0609020204030204" pitchFamily="49" charset="0"/>
+                        </a:rPr>
+                        <a:t>1010</a:t>
+                      </a:r>
+                      <a:endParaRPr lang="en-US" sz="1800" kern="100">
+                        <a:effectLst/>
+                        <a:latin typeface="Aptos" panose="020B0004020202020204" pitchFamily="34" charset="0"/>
+                        <a:ea typeface="DengXian" panose="02010600030101010101" pitchFamily="2" charset="-122"/>
+                        <a:cs typeface="Times New Roman" panose="02020603050405020304" pitchFamily="18" charset="0"/>
+                      </a:endParaRPr>
+                    </a:p>
+                  </a:txBody>
+                  <a:tcPr marL="68580" marR="68580" marT="0" marB="0" anchor="ctr">
+                    <a:lnL w="12700" cap="flat" cmpd="sng" algn="ctr">
+                      <a:solidFill>
+                        <a:srgbClr val="000000"/>
+                      </a:solidFill>
+                      <a:prstDash val="solid"/>
+                      <a:round/>
+                      <a:headEnd type="none" w="med" len="med"/>
+                      <a:tailEnd type="none" w="med" len="med"/>
+                    </a:lnL>
+                    <a:lnR w="12700" cap="flat" cmpd="sng" algn="ctr">
+                      <a:solidFill>
+                        <a:srgbClr val="000000"/>
+                      </a:solidFill>
+                      <a:prstDash val="solid"/>
+                      <a:round/>
+                      <a:headEnd type="none" w="med" len="med"/>
+                      <a:tailEnd type="none" w="med" len="med"/>
+                    </a:lnR>
+                    <a:lnT w="12700" cap="flat" cmpd="sng" algn="ctr">
+                      <a:solidFill>
+                        <a:srgbClr val="000000"/>
+                      </a:solidFill>
+                      <a:prstDash val="solid"/>
+                      <a:round/>
+                      <a:headEnd type="none" w="med" len="med"/>
+                      <a:tailEnd type="none" w="med" len="med"/>
+                    </a:lnT>
+                    <a:lnB w="12700" cap="flat" cmpd="sng" algn="ctr">
+                      <a:solidFill>
+                        <a:srgbClr val="000000"/>
+                      </a:solidFill>
+                      <a:prstDash val="solid"/>
+                      <a:round/>
+                      <a:headEnd type="none" w="med" len="med"/>
+                      <a:tailEnd type="none" w="med" len="med"/>
+                    </a:lnB>
+                    <a:solidFill>
+                      <a:srgbClr val="FFFFFF"/>
+                    </a:solidFill>
+                  </a:tcPr>
+                </a:tc>
+                <a:tc>
+                  <a:txBody>
+                    <a:bodyPr/>
+                    <a:lstStyle/>
+                    <a:p>
+                      <a:pPr indent="140335">
+                        <a:lnSpc>
+                          <a:spcPct val="115000"/>
+                        </a:lnSpc>
+                        <a:spcAft>
+                          <a:spcPts val="800"/>
+                        </a:spcAft>
+                        <a:buNone/>
+                      </a:pPr>
+                      <a:endParaRPr lang="en-US" sz="1800" kern="100">
+                        <a:effectLst/>
+                        <a:latin typeface="Aptos" panose="020B0004020202020204" pitchFamily="34" charset="0"/>
+                        <a:ea typeface="DengXian" panose="02010600030101010101" pitchFamily="2" charset="-122"/>
+                        <a:cs typeface="Times New Roman" panose="02020603050405020304" pitchFamily="18" charset="0"/>
+                      </a:endParaRPr>
+                    </a:p>
+                  </a:txBody>
+                  <a:tcPr marL="68580" marR="68580" marT="0" marB="0" anchor="ctr">
+                    <a:lnL w="12700" cap="flat" cmpd="sng" algn="ctr">
+                      <a:solidFill>
+                        <a:srgbClr val="000000"/>
+                      </a:solidFill>
+                      <a:prstDash val="solid"/>
+                      <a:round/>
+                      <a:headEnd type="none" w="med" len="med"/>
+                      <a:tailEnd type="none" w="med" len="med"/>
+                    </a:lnL>
+                    <a:lnR w="12700" cap="flat" cmpd="sng" algn="ctr">
+                      <a:solidFill>
+                        <a:srgbClr val="000000"/>
+                      </a:solidFill>
+                      <a:prstDash val="solid"/>
+                      <a:round/>
+                      <a:headEnd type="none" w="med" len="med"/>
+                      <a:tailEnd type="none" w="med" len="med"/>
+                    </a:lnR>
+                    <a:lnT w="12700" cap="flat" cmpd="sng" algn="ctr">
+                      <a:solidFill>
+                        <a:srgbClr val="000000"/>
+                      </a:solidFill>
+                      <a:prstDash val="solid"/>
+                      <a:round/>
+                      <a:headEnd type="none" w="med" len="med"/>
+                      <a:tailEnd type="none" w="med" len="med"/>
+                    </a:lnT>
+                    <a:lnB w="12700" cap="flat" cmpd="sng" algn="ctr">
+                      <a:solidFill>
+                        <a:srgbClr val="000000"/>
+                      </a:solidFill>
+                      <a:prstDash val="solid"/>
+                      <a:round/>
+                      <a:headEnd type="none" w="med" len="med"/>
+                      <a:tailEnd type="none" w="med" len="med"/>
+                    </a:lnB>
+                    <a:solidFill>
+                      <a:srgbClr val="FFFFFF"/>
+                    </a:solidFill>
+                  </a:tcPr>
+                </a:tc>
+                <a:tc>
+                  <a:txBody>
+                    <a:bodyPr/>
+                    <a:lstStyle/>
+                    <a:p>
+                      <a:pPr indent="140335">
+                        <a:lnSpc>
+                          <a:spcPct val="115000"/>
+                        </a:lnSpc>
+                        <a:spcAft>
+                          <a:spcPts val="800"/>
+                        </a:spcAft>
+                        <a:buNone/>
+                      </a:pPr>
+                      <a:endParaRPr lang="en-US" sz="1800" kern="100">
+                        <a:effectLst/>
+                        <a:latin typeface="Aptos" panose="020B0004020202020204" pitchFamily="34" charset="0"/>
+                        <a:ea typeface="DengXian" panose="02010600030101010101" pitchFamily="2" charset="-122"/>
+                        <a:cs typeface="Times New Roman" panose="02020603050405020304" pitchFamily="18" charset="0"/>
+                      </a:endParaRPr>
+                    </a:p>
+                  </a:txBody>
+                  <a:tcPr marL="68580" marR="68580" marT="0" marB="0" anchor="ctr">
+                    <a:lnL w="12700" cap="flat" cmpd="sng" algn="ctr">
+                      <a:solidFill>
+                        <a:srgbClr val="000000"/>
+                      </a:solidFill>
+                      <a:prstDash val="solid"/>
+                      <a:round/>
+                      <a:headEnd type="none" w="med" len="med"/>
+                      <a:tailEnd type="none" w="med" len="med"/>
+                    </a:lnL>
+                    <a:lnR w="12700" cap="flat" cmpd="sng" algn="ctr">
+                      <a:solidFill>
+                        <a:srgbClr val="000000"/>
+                      </a:solidFill>
+                      <a:prstDash val="solid"/>
+                      <a:round/>
+                      <a:headEnd type="none" w="med" len="med"/>
+                      <a:tailEnd type="none" w="med" len="med"/>
+                    </a:lnR>
+                    <a:lnT w="12700" cap="flat" cmpd="sng" algn="ctr">
+                      <a:solidFill>
+                        <a:srgbClr val="000000"/>
+                      </a:solidFill>
+                      <a:prstDash val="solid"/>
+                      <a:round/>
+                      <a:headEnd type="none" w="med" len="med"/>
+                      <a:tailEnd type="none" w="med" len="med"/>
+                    </a:lnT>
+                    <a:lnB w="12700" cap="flat" cmpd="sng" algn="ctr">
+                      <a:solidFill>
+                        <a:srgbClr val="000000"/>
+                      </a:solidFill>
+                      <a:prstDash val="solid"/>
+                      <a:round/>
+                      <a:headEnd type="none" w="med" len="med"/>
+                      <a:tailEnd type="none" w="med" len="med"/>
+                    </a:lnB>
+                    <a:solidFill>
+                      <a:srgbClr val="FFFFFF"/>
+                    </a:solidFill>
+                  </a:tcPr>
+                </a:tc>
+                <a:tc>
+                  <a:txBody>
+                    <a:bodyPr/>
+                    <a:lstStyle/>
+                    <a:p>
+                      <a:pPr indent="140335">
+                        <a:lnSpc>
+                          <a:spcPct val="115000"/>
+                        </a:lnSpc>
+                        <a:spcAft>
+                          <a:spcPts val="800"/>
+                        </a:spcAft>
+                        <a:buNone/>
+                      </a:pPr>
+                      <a:endParaRPr lang="en-US" sz="1800" kern="100" dirty="0">
+                        <a:effectLst/>
+                        <a:latin typeface="Aptos" panose="020B0004020202020204" pitchFamily="34" charset="0"/>
+                        <a:ea typeface="DengXian" panose="02010600030101010101" pitchFamily="2" charset="-122"/>
+                        <a:cs typeface="Times New Roman" panose="02020603050405020304" pitchFamily="18" charset="0"/>
+                      </a:endParaRPr>
+                    </a:p>
+                  </a:txBody>
+                  <a:tcPr marL="68580" marR="68580" marT="0" marB="0" anchor="ctr">
+                    <a:lnL w="12700" cap="flat" cmpd="sng" algn="ctr">
+                      <a:solidFill>
+                        <a:srgbClr val="000000"/>
+                      </a:solidFill>
+                      <a:prstDash val="solid"/>
+                      <a:round/>
+                      <a:headEnd type="none" w="med" len="med"/>
+                      <a:tailEnd type="none" w="med" len="med"/>
+                    </a:lnL>
+                    <a:lnR w="12700" cap="flat" cmpd="sng" algn="ctr">
+                      <a:solidFill>
+                        <a:srgbClr val="000000"/>
+                      </a:solidFill>
+                      <a:prstDash val="solid"/>
+                      <a:round/>
+                      <a:headEnd type="none" w="med" len="med"/>
+                      <a:tailEnd type="none" w="med" len="med"/>
+                    </a:lnR>
+                    <a:lnT w="12700" cap="flat" cmpd="sng" algn="ctr">
+                      <a:solidFill>
+                        <a:srgbClr val="000000"/>
+                      </a:solidFill>
+                      <a:prstDash val="solid"/>
+                      <a:round/>
+                      <a:headEnd type="none" w="med" len="med"/>
+                      <a:tailEnd type="none" w="med" len="med"/>
+                    </a:lnT>
+                    <a:lnB w="12700" cap="flat" cmpd="sng" algn="ctr">
+                      <a:solidFill>
+                        <a:srgbClr val="000000"/>
+                      </a:solidFill>
+                      <a:prstDash val="solid"/>
+                      <a:round/>
+                      <a:headEnd type="none" w="med" len="med"/>
+                      <a:tailEnd type="none" w="med" len="med"/>
+                    </a:lnB>
+                    <a:solidFill>
+                      <a:srgbClr val="FFFFFF"/>
+                    </a:solidFill>
+                  </a:tcPr>
+                </a:tc>
+                <a:extLst>
+                  <a:ext uri="{0D108BD9-81ED-4DB2-BD59-A6C34878D82A}">
+                    <a16:rowId xmlns:a16="http://schemas.microsoft.com/office/drawing/2014/main" val="4189663783"/>
+                  </a:ext>
+                </a:extLst>
+              </a:tr>
+              <a:tr h="332105">
+                <a:tc>
+                  <a:txBody>
+                    <a:bodyPr/>
+                    <a:lstStyle/>
+                    <a:p>
+                      <a:pPr indent="140335">
+                        <a:lnSpc>
+                          <a:spcPct val="115000"/>
+                        </a:lnSpc>
+                        <a:spcAft>
+                          <a:spcPts val="800"/>
+                        </a:spcAft>
+                        <a:buNone/>
+                      </a:pPr>
+                      <a:r>
+                        <a:rPr lang="en-US" sz="1600" b="1" kern="100">
+                          <a:solidFill>
+                            <a:srgbClr val="000000"/>
+                          </a:solidFill>
+                          <a:effectLst/>
+                          <a:latin typeface="Consolas" panose="020B0609020204030204" pitchFamily="49" charset="0"/>
+                          <a:ea typeface="Times New Roman" panose="02020603050405020304" pitchFamily="18" charset="0"/>
+                          <a:cs typeface="Consolas" panose="020B0609020204030204" pitchFamily="49" charset="0"/>
+                        </a:rPr>
+                        <a:t>1100 + 1110</a:t>
+                      </a:r>
+                      <a:endParaRPr lang="en-US" sz="1800" kern="100">
+                        <a:effectLst/>
+                        <a:latin typeface="Aptos" panose="020B0004020202020204" pitchFamily="34" charset="0"/>
+                        <a:ea typeface="DengXian" panose="02010600030101010101" pitchFamily="2" charset="-122"/>
+                        <a:cs typeface="Times New Roman" panose="02020603050405020304" pitchFamily="18" charset="0"/>
+                      </a:endParaRPr>
+                    </a:p>
+                  </a:txBody>
+                  <a:tcPr marL="68580" marR="68580" marT="0" marB="0" anchor="ctr">
+                    <a:lnL w="12700" cap="flat" cmpd="sng" algn="ctr">
+                      <a:solidFill>
+                        <a:srgbClr val="000000"/>
+                      </a:solidFill>
+                      <a:prstDash val="solid"/>
+                      <a:round/>
+                      <a:headEnd type="none" w="med" len="med"/>
+                      <a:tailEnd type="none" w="med" len="med"/>
+                    </a:lnL>
+                    <a:lnR w="12700" cap="flat" cmpd="sng" algn="ctr">
+                      <a:solidFill>
+                        <a:srgbClr val="000000"/>
+                      </a:solidFill>
+                      <a:prstDash val="solid"/>
+                      <a:round/>
+                      <a:headEnd type="none" w="med" len="med"/>
+                      <a:tailEnd type="none" w="med" len="med"/>
+                    </a:lnR>
+                    <a:lnT w="12700" cap="flat" cmpd="sng" algn="ctr">
+                      <a:solidFill>
+                        <a:srgbClr val="000000"/>
+                      </a:solidFill>
+                      <a:prstDash val="solid"/>
+                      <a:round/>
+                      <a:headEnd type="none" w="med" len="med"/>
+                      <a:tailEnd type="none" w="med" len="med"/>
+                    </a:lnT>
+                    <a:lnB w="12700" cap="flat" cmpd="sng" algn="ctr">
+                      <a:solidFill>
+                        <a:srgbClr val="000000"/>
+                      </a:solidFill>
+                      <a:prstDash val="solid"/>
+                      <a:round/>
+                      <a:headEnd type="none" w="med" len="med"/>
+                      <a:tailEnd type="none" w="med" len="med"/>
+                    </a:lnB>
+                    <a:solidFill>
+                      <a:srgbClr val="FFFFFF"/>
+                    </a:solidFill>
+                  </a:tcPr>
+                </a:tc>
+                <a:tc>
+                  <a:txBody>
+                    <a:bodyPr/>
+                    <a:lstStyle/>
+                    <a:p>
+                      <a:pPr indent="140335">
+                        <a:lnSpc>
+                          <a:spcPct val="115000"/>
+                        </a:lnSpc>
+                        <a:spcAft>
+                          <a:spcPts val="800"/>
+                        </a:spcAft>
+                        <a:buNone/>
+                      </a:pPr>
+                      <a:r>
+                        <a:rPr lang="en-US" sz="1600" b="1" kern="100">
+                          <a:solidFill>
+                            <a:srgbClr val="000000"/>
+                          </a:solidFill>
+                          <a:effectLst/>
+                          <a:latin typeface="Consolas" panose="020B0609020204030204" pitchFamily="49" charset="0"/>
+                          <a:ea typeface="Times New Roman" panose="02020603050405020304" pitchFamily="18" charset="0"/>
+                          <a:cs typeface="Consolas" panose="020B0609020204030204" pitchFamily="49" charset="0"/>
+                        </a:rPr>
+                        <a:t>1010</a:t>
+                      </a:r>
+                      <a:endParaRPr lang="en-US" sz="1800" kern="100">
+                        <a:effectLst/>
+                        <a:latin typeface="Aptos" panose="020B0004020202020204" pitchFamily="34" charset="0"/>
+                        <a:ea typeface="DengXian" panose="02010600030101010101" pitchFamily="2" charset="-122"/>
+                        <a:cs typeface="Times New Roman" panose="02020603050405020304" pitchFamily="18" charset="0"/>
+                      </a:endParaRPr>
+                    </a:p>
+                  </a:txBody>
+                  <a:tcPr marL="68580" marR="68580" marT="0" marB="0" anchor="ctr">
+                    <a:lnL w="12700" cap="flat" cmpd="sng" algn="ctr">
+                      <a:solidFill>
+                        <a:srgbClr val="000000"/>
+                      </a:solidFill>
+                      <a:prstDash val="solid"/>
+                      <a:round/>
+                      <a:headEnd type="none" w="med" len="med"/>
+                      <a:tailEnd type="none" w="med" len="med"/>
+                    </a:lnL>
+                    <a:lnR w="12700" cap="flat" cmpd="sng" algn="ctr">
+                      <a:solidFill>
+                        <a:srgbClr val="000000"/>
+                      </a:solidFill>
+                      <a:prstDash val="solid"/>
+                      <a:round/>
+                      <a:headEnd type="none" w="med" len="med"/>
+                      <a:tailEnd type="none" w="med" len="med"/>
+                    </a:lnR>
+                    <a:lnT w="12700" cap="flat" cmpd="sng" algn="ctr">
+                      <a:solidFill>
+                        <a:srgbClr val="000000"/>
+                      </a:solidFill>
+                      <a:prstDash val="solid"/>
+                      <a:round/>
+                      <a:headEnd type="none" w="med" len="med"/>
+                      <a:tailEnd type="none" w="med" len="med"/>
+                    </a:lnT>
+                    <a:lnB w="12700" cap="flat" cmpd="sng" algn="ctr">
+                      <a:solidFill>
+                        <a:srgbClr val="000000"/>
+                      </a:solidFill>
+                      <a:prstDash val="solid"/>
+                      <a:round/>
+                      <a:headEnd type="none" w="med" len="med"/>
+                      <a:tailEnd type="none" w="med" len="med"/>
+                    </a:lnB>
+                    <a:solidFill>
+                      <a:srgbClr val="FFFFFF"/>
+                    </a:solidFill>
+                  </a:tcPr>
+                </a:tc>
+                <a:tc>
+                  <a:txBody>
+                    <a:bodyPr/>
+                    <a:lstStyle/>
+                    <a:p>
+                      <a:pPr indent="140335">
+                        <a:lnSpc>
+                          <a:spcPct val="115000"/>
+                        </a:lnSpc>
+                        <a:spcAft>
+                          <a:spcPts val="800"/>
+                        </a:spcAft>
+                        <a:buNone/>
+                      </a:pPr>
+                      <a:endParaRPr lang="en-US" sz="1800" kern="100">
+                        <a:effectLst/>
+                        <a:latin typeface="Aptos" panose="020B0004020202020204" pitchFamily="34" charset="0"/>
+                        <a:ea typeface="DengXian" panose="02010600030101010101" pitchFamily="2" charset="-122"/>
+                        <a:cs typeface="Times New Roman" panose="02020603050405020304" pitchFamily="18" charset="0"/>
+                      </a:endParaRPr>
+                    </a:p>
+                  </a:txBody>
+                  <a:tcPr marL="68580" marR="68580" marT="0" marB="0" anchor="ctr">
+                    <a:lnL w="12700" cap="flat" cmpd="sng" algn="ctr">
+                      <a:solidFill>
+                        <a:srgbClr val="000000"/>
+                      </a:solidFill>
+                      <a:prstDash val="solid"/>
+                      <a:round/>
+                      <a:headEnd type="none" w="med" len="med"/>
+                      <a:tailEnd type="none" w="med" len="med"/>
+                    </a:lnL>
+                    <a:lnR w="12700" cap="flat" cmpd="sng" algn="ctr">
+                      <a:solidFill>
+                        <a:srgbClr val="000000"/>
+                      </a:solidFill>
+                      <a:prstDash val="solid"/>
+                      <a:round/>
+                      <a:headEnd type="none" w="med" len="med"/>
+                      <a:tailEnd type="none" w="med" len="med"/>
+                    </a:lnR>
+                    <a:lnT w="12700" cap="flat" cmpd="sng" algn="ctr">
+                      <a:solidFill>
+                        <a:srgbClr val="000000"/>
+                      </a:solidFill>
+                      <a:prstDash val="solid"/>
+                      <a:round/>
+                      <a:headEnd type="none" w="med" len="med"/>
+                      <a:tailEnd type="none" w="med" len="med"/>
+                    </a:lnT>
+                    <a:lnB w="12700" cap="flat" cmpd="sng" algn="ctr">
+                      <a:solidFill>
+                        <a:srgbClr val="000000"/>
+                      </a:solidFill>
+                      <a:prstDash val="solid"/>
+                      <a:round/>
+                      <a:headEnd type="none" w="med" len="med"/>
+                      <a:tailEnd type="none" w="med" len="med"/>
+                    </a:lnB>
+                    <a:solidFill>
+                      <a:srgbClr val="FFFFFF"/>
+                    </a:solidFill>
+                  </a:tcPr>
+                </a:tc>
+                <a:tc>
+                  <a:txBody>
+                    <a:bodyPr/>
+                    <a:lstStyle/>
+                    <a:p>
+                      <a:pPr indent="140335">
+                        <a:lnSpc>
+                          <a:spcPct val="115000"/>
+                        </a:lnSpc>
+                        <a:spcAft>
+                          <a:spcPts val="800"/>
+                        </a:spcAft>
+                        <a:buNone/>
+                      </a:pPr>
+                      <a:endParaRPr lang="en-US" sz="1800" kern="100">
+                        <a:effectLst/>
+                        <a:latin typeface="Aptos" panose="020B0004020202020204" pitchFamily="34" charset="0"/>
+                        <a:ea typeface="DengXian" panose="02010600030101010101" pitchFamily="2" charset="-122"/>
+                        <a:cs typeface="Times New Roman" panose="02020603050405020304" pitchFamily="18" charset="0"/>
+                      </a:endParaRPr>
+                    </a:p>
+                  </a:txBody>
+                  <a:tcPr marL="68580" marR="68580" marT="0" marB="0" anchor="ctr">
+                    <a:lnL w="12700" cap="flat" cmpd="sng" algn="ctr">
+                      <a:solidFill>
+                        <a:srgbClr val="000000"/>
+                      </a:solidFill>
+                      <a:prstDash val="solid"/>
+                      <a:round/>
+                      <a:headEnd type="none" w="med" len="med"/>
+                      <a:tailEnd type="none" w="med" len="med"/>
+                    </a:lnL>
+                    <a:lnR w="12700" cap="flat" cmpd="sng" algn="ctr">
+                      <a:solidFill>
+                        <a:srgbClr val="000000"/>
+                      </a:solidFill>
+                      <a:prstDash val="solid"/>
+                      <a:round/>
+                      <a:headEnd type="none" w="med" len="med"/>
+                      <a:tailEnd type="none" w="med" len="med"/>
+                    </a:lnR>
+                    <a:lnT w="12700" cap="flat" cmpd="sng" algn="ctr">
+                      <a:solidFill>
+                        <a:srgbClr val="000000"/>
+                      </a:solidFill>
+                      <a:prstDash val="solid"/>
+                      <a:round/>
+                      <a:headEnd type="none" w="med" len="med"/>
+                      <a:tailEnd type="none" w="med" len="med"/>
+                    </a:lnT>
+                    <a:lnB w="12700" cap="flat" cmpd="sng" algn="ctr">
+                      <a:solidFill>
+                        <a:srgbClr val="000000"/>
+                      </a:solidFill>
+                      <a:prstDash val="solid"/>
+                      <a:round/>
+                      <a:headEnd type="none" w="med" len="med"/>
+                      <a:tailEnd type="none" w="med" len="med"/>
+                    </a:lnB>
+                    <a:solidFill>
+                      <a:srgbClr val="FFFFFF"/>
+                    </a:solidFill>
+                  </a:tcPr>
+                </a:tc>
+                <a:tc>
+                  <a:txBody>
+                    <a:bodyPr/>
+                    <a:lstStyle/>
+                    <a:p>
+                      <a:pPr indent="140335">
+                        <a:lnSpc>
+                          <a:spcPct val="115000"/>
+                        </a:lnSpc>
+                        <a:spcAft>
+                          <a:spcPts val="800"/>
+                        </a:spcAft>
+                        <a:buNone/>
+                      </a:pPr>
+                      <a:endParaRPr lang="en-US" sz="1800" kern="100" dirty="0">
+                        <a:effectLst/>
+                        <a:latin typeface="Aptos" panose="020B0004020202020204" pitchFamily="34" charset="0"/>
+                        <a:ea typeface="DengXian" panose="02010600030101010101" pitchFamily="2" charset="-122"/>
+                        <a:cs typeface="Times New Roman" panose="02020603050405020304" pitchFamily="18" charset="0"/>
+                      </a:endParaRPr>
+                    </a:p>
+                  </a:txBody>
+                  <a:tcPr marL="68580" marR="68580" marT="0" marB="0" anchor="ctr">
+                    <a:lnL w="12700" cap="flat" cmpd="sng" algn="ctr">
+                      <a:solidFill>
+                        <a:srgbClr val="000000"/>
+                      </a:solidFill>
+                      <a:prstDash val="solid"/>
+                      <a:round/>
+                      <a:headEnd type="none" w="med" len="med"/>
+                      <a:tailEnd type="none" w="med" len="med"/>
+                    </a:lnL>
+                    <a:lnR w="12700" cap="flat" cmpd="sng" algn="ctr">
+                      <a:solidFill>
+                        <a:srgbClr val="000000"/>
+                      </a:solidFill>
+                      <a:prstDash val="solid"/>
+                      <a:round/>
+                      <a:headEnd type="none" w="med" len="med"/>
+                      <a:tailEnd type="none" w="med" len="med"/>
+                    </a:lnR>
+                    <a:lnT w="12700" cap="flat" cmpd="sng" algn="ctr">
+                      <a:solidFill>
+                        <a:srgbClr val="000000"/>
+                      </a:solidFill>
+                      <a:prstDash val="solid"/>
+                      <a:round/>
+                      <a:headEnd type="none" w="med" len="med"/>
+                      <a:tailEnd type="none" w="med" len="med"/>
+                    </a:lnT>
+                    <a:lnB w="12700" cap="flat" cmpd="sng" algn="ctr">
+                      <a:solidFill>
+                        <a:srgbClr val="000000"/>
+                      </a:solidFill>
+                      <a:prstDash val="solid"/>
+                      <a:round/>
+                      <a:headEnd type="none" w="med" len="med"/>
+                      <a:tailEnd type="none" w="med" len="med"/>
+                    </a:lnB>
+                    <a:solidFill>
+                      <a:srgbClr val="FFFFFF"/>
+                    </a:solidFill>
+                  </a:tcPr>
+                </a:tc>
+                <a:extLst>
+                  <a:ext uri="{0D108BD9-81ED-4DB2-BD59-A6C34878D82A}">
+                    <a16:rowId xmlns:a16="http://schemas.microsoft.com/office/drawing/2014/main" val="4096703682"/>
+                  </a:ext>
+                </a:extLst>
+              </a:tr>
+              <a:tr h="332105">
+                <a:tc>
+                  <a:txBody>
+                    <a:bodyPr/>
+                    <a:lstStyle/>
+                    <a:p>
+                      <a:pPr indent="140335">
+                        <a:lnSpc>
+                          <a:spcPct val="115000"/>
+                        </a:lnSpc>
+                        <a:spcAft>
+                          <a:spcPts val="800"/>
+                        </a:spcAft>
+                        <a:buNone/>
+                      </a:pPr>
+                      <a:r>
+                        <a:rPr lang="en-US" sz="1600" b="1" kern="100">
+                          <a:solidFill>
+                            <a:srgbClr val="000000"/>
+                          </a:solidFill>
+                          <a:effectLst/>
+                          <a:latin typeface="Consolas" panose="020B0609020204030204" pitchFamily="49" charset="0"/>
+                          <a:ea typeface="Times New Roman" panose="02020603050405020304" pitchFamily="18" charset="0"/>
+                          <a:cs typeface="Consolas" panose="020B0609020204030204" pitchFamily="49" charset="0"/>
+                        </a:rPr>
+                        <a:t>1100 + 1010</a:t>
+                      </a:r>
+                      <a:endParaRPr lang="en-US" sz="1800" kern="100">
+                        <a:effectLst/>
+                        <a:latin typeface="Aptos" panose="020B0004020202020204" pitchFamily="34" charset="0"/>
+                        <a:ea typeface="DengXian" panose="02010600030101010101" pitchFamily="2" charset="-122"/>
+                        <a:cs typeface="Times New Roman" panose="02020603050405020304" pitchFamily="18" charset="0"/>
+                      </a:endParaRPr>
+                    </a:p>
+                  </a:txBody>
+                  <a:tcPr marL="68580" marR="68580" marT="0" marB="0" anchor="ctr">
+                    <a:lnL w="12700" cap="flat" cmpd="sng" algn="ctr">
+                      <a:solidFill>
+                        <a:srgbClr val="000000"/>
+                      </a:solidFill>
+                      <a:prstDash val="solid"/>
+                      <a:round/>
+                      <a:headEnd type="none" w="med" len="med"/>
+                      <a:tailEnd type="none" w="med" len="med"/>
+                    </a:lnL>
+                    <a:lnR w="12700" cap="flat" cmpd="sng" algn="ctr">
+                      <a:solidFill>
+                        <a:srgbClr val="000000"/>
+                      </a:solidFill>
+                      <a:prstDash val="solid"/>
+                      <a:round/>
+                      <a:headEnd type="none" w="med" len="med"/>
+                      <a:tailEnd type="none" w="med" len="med"/>
+                    </a:lnR>
+                    <a:lnT w="12700" cap="flat" cmpd="sng" algn="ctr">
+                      <a:solidFill>
+                        <a:srgbClr val="000000"/>
+                      </a:solidFill>
+                      <a:prstDash val="solid"/>
+                      <a:round/>
+                      <a:headEnd type="none" w="med" len="med"/>
+                      <a:tailEnd type="none" w="med" len="med"/>
+                    </a:lnT>
+                    <a:lnB w="12700" cap="flat" cmpd="sng" algn="ctr">
+                      <a:solidFill>
+                        <a:srgbClr val="000000"/>
+                      </a:solidFill>
+                      <a:prstDash val="solid"/>
+                      <a:round/>
+                      <a:headEnd type="none" w="med" len="med"/>
+                      <a:tailEnd type="none" w="med" len="med"/>
+                    </a:lnB>
+                    <a:solidFill>
+                      <a:srgbClr val="FFFFFF"/>
+                    </a:solidFill>
+                  </a:tcPr>
+                </a:tc>
+                <a:tc>
+                  <a:txBody>
+                    <a:bodyPr/>
+                    <a:lstStyle/>
+                    <a:p>
+                      <a:pPr indent="140335">
+                        <a:lnSpc>
+                          <a:spcPct val="115000"/>
+                        </a:lnSpc>
+                        <a:spcAft>
+                          <a:spcPts val="800"/>
+                        </a:spcAft>
+                        <a:buNone/>
+                      </a:pPr>
+                      <a:r>
+                        <a:rPr lang="en-US" sz="1600" b="1" kern="100">
+                          <a:solidFill>
+                            <a:srgbClr val="000000"/>
+                          </a:solidFill>
+                          <a:effectLst/>
+                          <a:latin typeface="Consolas" panose="020B0609020204030204" pitchFamily="49" charset="0"/>
+                          <a:ea typeface="Times New Roman" panose="02020603050405020304" pitchFamily="18" charset="0"/>
+                          <a:cs typeface="Consolas" panose="020B0609020204030204" pitchFamily="49" charset="0"/>
+                        </a:rPr>
+                        <a:t>0110</a:t>
+                      </a:r>
+                      <a:endParaRPr lang="en-US" sz="1800" kern="100">
+                        <a:effectLst/>
+                        <a:latin typeface="Aptos" panose="020B0004020202020204" pitchFamily="34" charset="0"/>
+                        <a:ea typeface="DengXian" panose="02010600030101010101" pitchFamily="2" charset="-122"/>
+                        <a:cs typeface="Times New Roman" panose="02020603050405020304" pitchFamily="18" charset="0"/>
+                      </a:endParaRPr>
+                    </a:p>
+                  </a:txBody>
+                  <a:tcPr marL="68580" marR="68580" marT="0" marB="0" anchor="ctr">
+                    <a:lnL w="12700" cap="flat" cmpd="sng" algn="ctr">
+                      <a:solidFill>
+                        <a:srgbClr val="000000"/>
+                      </a:solidFill>
+                      <a:prstDash val="solid"/>
+                      <a:round/>
+                      <a:headEnd type="none" w="med" len="med"/>
+                      <a:tailEnd type="none" w="med" len="med"/>
+                    </a:lnL>
+                    <a:lnR w="12700" cap="flat" cmpd="sng" algn="ctr">
+                      <a:solidFill>
+                        <a:srgbClr val="000000"/>
+                      </a:solidFill>
+                      <a:prstDash val="solid"/>
+                      <a:round/>
+                      <a:headEnd type="none" w="med" len="med"/>
+                      <a:tailEnd type="none" w="med" len="med"/>
+                    </a:lnR>
+                    <a:lnT w="12700" cap="flat" cmpd="sng" algn="ctr">
+                      <a:solidFill>
+                        <a:srgbClr val="000000"/>
+                      </a:solidFill>
+                      <a:prstDash val="solid"/>
+                      <a:round/>
+                      <a:headEnd type="none" w="med" len="med"/>
+                      <a:tailEnd type="none" w="med" len="med"/>
+                    </a:lnT>
+                    <a:lnB w="12700" cap="flat" cmpd="sng" algn="ctr">
+                      <a:solidFill>
+                        <a:srgbClr val="000000"/>
+                      </a:solidFill>
+                      <a:prstDash val="solid"/>
+                      <a:round/>
+                      <a:headEnd type="none" w="med" len="med"/>
+                      <a:tailEnd type="none" w="med" len="med"/>
+                    </a:lnB>
+                    <a:solidFill>
+                      <a:srgbClr val="FFFFFF"/>
+                    </a:solidFill>
+                  </a:tcPr>
+                </a:tc>
+                <a:tc>
+                  <a:txBody>
+                    <a:bodyPr/>
+                    <a:lstStyle/>
+                    <a:p>
+                      <a:pPr indent="140335">
+                        <a:lnSpc>
+                          <a:spcPct val="115000"/>
+                        </a:lnSpc>
+                        <a:spcAft>
+                          <a:spcPts val="800"/>
+                        </a:spcAft>
+                        <a:buNone/>
+                      </a:pPr>
+                      <a:endParaRPr lang="en-US" sz="1800" kern="100">
+                        <a:effectLst/>
+                        <a:latin typeface="Aptos" panose="020B0004020202020204" pitchFamily="34" charset="0"/>
+                        <a:ea typeface="DengXian" panose="02010600030101010101" pitchFamily="2" charset="-122"/>
+                        <a:cs typeface="Times New Roman" panose="02020603050405020304" pitchFamily="18" charset="0"/>
+                      </a:endParaRPr>
+                    </a:p>
+                  </a:txBody>
+                  <a:tcPr marL="68580" marR="68580" marT="0" marB="0" anchor="ctr">
+                    <a:lnL w="12700" cap="flat" cmpd="sng" algn="ctr">
+                      <a:solidFill>
+                        <a:srgbClr val="000000"/>
+                      </a:solidFill>
+                      <a:prstDash val="solid"/>
+                      <a:round/>
+                      <a:headEnd type="none" w="med" len="med"/>
+                      <a:tailEnd type="none" w="med" len="med"/>
+                    </a:lnL>
+                    <a:lnR w="12700" cap="flat" cmpd="sng" algn="ctr">
+                      <a:solidFill>
+                        <a:srgbClr val="000000"/>
+                      </a:solidFill>
+                      <a:prstDash val="solid"/>
+                      <a:round/>
+                      <a:headEnd type="none" w="med" len="med"/>
+                      <a:tailEnd type="none" w="med" len="med"/>
+                    </a:lnR>
+                    <a:lnT w="12700" cap="flat" cmpd="sng" algn="ctr">
+                      <a:solidFill>
+                        <a:srgbClr val="000000"/>
+                      </a:solidFill>
+                      <a:prstDash val="solid"/>
+                      <a:round/>
+                      <a:headEnd type="none" w="med" len="med"/>
+                      <a:tailEnd type="none" w="med" len="med"/>
+                    </a:lnT>
+                    <a:lnB w="12700" cap="flat" cmpd="sng" algn="ctr">
+                      <a:solidFill>
+                        <a:srgbClr val="000000"/>
+                      </a:solidFill>
+                      <a:prstDash val="solid"/>
+                      <a:round/>
+                      <a:headEnd type="none" w="med" len="med"/>
+                      <a:tailEnd type="none" w="med" len="med"/>
+                    </a:lnB>
+                    <a:solidFill>
+                      <a:srgbClr val="FFFFFF"/>
+                    </a:solidFill>
+                  </a:tcPr>
+                </a:tc>
+                <a:tc>
+                  <a:txBody>
+                    <a:bodyPr/>
+                    <a:lstStyle/>
+                    <a:p>
+                      <a:pPr indent="140335">
+                        <a:lnSpc>
+                          <a:spcPct val="115000"/>
+                        </a:lnSpc>
+                        <a:spcAft>
+                          <a:spcPts val="800"/>
+                        </a:spcAft>
+                        <a:buNone/>
+                      </a:pPr>
+                      <a:endParaRPr lang="en-US" sz="1800" kern="100">
+                        <a:effectLst/>
+                        <a:latin typeface="Aptos" panose="020B0004020202020204" pitchFamily="34" charset="0"/>
+                        <a:ea typeface="DengXian" panose="02010600030101010101" pitchFamily="2" charset="-122"/>
+                        <a:cs typeface="Times New Roman" panose="02020603050405020304" pitchFamily="18" charset="0"/>
+                      </a:endParaRPr>
+                    </a:p>
+                  </a:txBody>
+                  <a:tcPr marL="68580" marR="68580" marT="0" marB="0" anchor="ctr">
+                    <a:lnL w="12700" cap="flat" cmpd="sng" algn="ctr">
+                      <a:solidFill>
+                        <a:srgbClr val="000000"/>
+                      </a:solidFill>
+                      <a:prstDash val="solid"/>
+                      <a:round/>
+                      <a:headEnd type="none" w="med" len="med"/>
+                      <a:tailEnd type="none" w="med" len="med"/>
+                    </a:lnL>
+                    <a:lnR w="12700" cap="flat" cmpd="sng" algn="ctr">
+                      <a:solidFill>
+                        <a:srgbClr val="000000"/>
+                      </a:solidFill>
+                      <a:prstDash val="solid"/>
+                      <a:round/>
+                      <a:headEnd type="none" w="med" len="med"/>
+                      <a:tailEnd type="none" w="med" len="med"/>
+                    </a:lnR>
+                    <a:lnT w="12700" cap="flat" cmpd="sng" algn="ctr">
+                      <a:solidFill>
+                        <a:srgbClr val="000000"/>
+                      </a:solidFill>
+                      <a:prstDash val="solid"/>
+                      <a:round/>
+                      <a:headEnd type="none" w="med" len="med"/>
+                      <a:tailEnd type="none" w="med" len="med"/>
+                    </a:lnT>
+                    <a:lnB w="12700" cap="flat" cmpd="sng" algn="ctr">
+                      <a:solidFill>
+                        <a:srgbClr val="000000"/>
+                      </a:solidFill>
+                      <a:prstDash val="solid"/>
+                      <a:round/>
+                      <a:headEnd type="none" w="med" len="med"/>
+                      <a:tailEnd type="none" w="med" len="med"/>
+                    </a:lnB>
+                    <a:solidFill>
+                      <a:srgbClr val="FFFFFF"/>
+                    </a:solidFill>
+                  </a:tcPr>
+                </a:tc>
+                <a:tc>
+                  <a:txBody>
+                    <a:bodyPr/>
+                    <a:lstStyle/>
+                    <a:p>
+                      <a:pPr indent="140335">
+                        <a:lnSpc>
+                          <a:spcPct val="115000"/>
+                        </a:lnSpc>
+                        <a:spcAft>
+                          <a:spcPts val="800"/>
+                        </a:spcAft>
+                        <a:buNone/>
+                      </a:pPr>
+                      <a:endParaRPr lang="en-US" sz="1800" kern="100" dirty="0">
+                        <a:effectLst/>
+                        <a:latin typeface="Aptos" panose="020B0004020202020204" pitchFamily="34" charset="0"/>
+                        <a:ea typeface="DengXian" panose="02010600030101010101" pitchFamily="2" charset="-122"/>
+                        <a:cs typeface="Times New Roman" panose="02020603050405020304" pitchFamily="18" charset="0"/>
+                      </a:endParaRPr>
+                    </a:p>
+                  </a:txBody>
+                  <a:tcPr marL="68580" marR="68580" marT="0" marB="0" anchor="ctr">
+                    <a:lnL w="12700" cap="flat" cmpd="sng" algn="ctr">
+                      <a:solidFill>
+                        <a:srgbClr val="000000"/>
+                      </a:solidFill>
+                      <a:prstDash val="solid"/>
+                      <a:round/>
+                      <a:headEnd type="none" w="med" len="med"/>
+                      <a:tailEnd type="none" w="med" len="med"/>
+                    </a:lnL>
+                    <a:lnR w="12700" cap="flat" cmpd="sng" algn="ctr">
+                      <a:solidFill>
+                        <a:srgbClr val="000000"/>
+                      </a:solidFill>
+                      <a:prstDash val="solid"/>
+                      <a:round/>
+                      <a:headEnd type="none" w="med" len="med"/>
+                      <a:tailEnd type="none" w="med" len="med"/>
+                    </a:lnR>
+                    <a:lnT w="12700" cap="flat" cmpd="sng" algn="ctr">
+                      <a:solidFill>
+                        <a:srgbClr val="000000"/>
+                      </a:solidFill>
+                      <a:prstDash val="solid"/>
+                      <a:round/>
+                      <a:headEnd type="none" w="med" len="med"/>
+                      <a:tailEnd type="none" w="med" len="med"/>
+                    </a:lnT>
+                    <a:lnB w="12700" cap="flat" cmpd="sng" algn="ctr">
+                      <a:solidFill>
+                        <a:srgbClr val="000000"/>
+                      </a:solidFill>
+                      <a:prstDash val="solid"/>
+                      <a:round/>
+                      <a:headEnd type="none" w="med" len="med"/>
+                      <a:tailEnd type="none" w="med" len="med"/>
+                    </a:lnB>
+                    <a:solidFill>
+                      <a:srgbClr val="FFFFFF"/>
+                    </a:solidFill>
+                  </a:tcPr>
+                </a:tc>
+                <a:extLst>
+                  <a:ext uri="{0D108BD9-81ED-4DB2-BD59-A6C34878D82A}">
+                    <a16:rowId xmlns:a16="http://schemas.microsoft.com/office/drawing/2014/main" val="2157277809"/>
+                  </a:ext>
+                </a:extLst>
+              </a:tr>
+              <a:tr h="332105">
+                <a:tc>
+                  <a:txBody>
+                    <a:bodyPr/>
+                    <a:lstStyle/>
+                    <a:p>
+                      <a:pPr indent="140335">
+                        <a:lnSpc>
+                          <a:spcPct val="115000"/>
+                        </a:lnSpc>
+                        <a:spcAft>
+                          <a:spcPts val="800"/>
+                        </a:spcAft>
+                        <a:buNone/>
+                      </a:pPr>
+                      <a:r>
+                        <a:rPr lang="en-US" sz="1600" b="1" kern="100">
+                          <a:solidFill>
+                            <a:srgbClr val="000000"/>
+                          </a:solidFill>
+                          <a:effectLst/>
+                          <a:latin typeface="Consolas" panose="020B0609020204030204" pitchFamily="49" charset="0"/>
+                          <a:ea typeface="Times New Roman" panose="02020603050405020304" pitchFamily="18" charset="0"/>
+                          <a:cs typeface="Consolas" panose="020B0609020204030204" pitchFamily="49" charset="0"/>
+                        </a:rPr>
+                        <a:t>0100 - 0010</a:t>
+                      </a:r>
+                      <a:endParaRPr lang="en-US" sz="1800" kern="100">
+                        <a:effectLst/>
+                        <a:latin typeface="Aptos" panose="020B0004020202020204" pitchFamily="34" charset="0"/>
+                        <a:ea typeface="DengXian" panose="02010600030101010101" pitchFamily="2" charset="-122"/>
+                        <a:cs typeface="Times New Roman" panose="02020603050405020304" pitchFamily="18" charset="0"/>
+                      </a:endParaRPr>
+                    </a:p>
+                  </a:txBody>
+                  <a:tcPr marL="68580" marR="68580" marT="0" marB="0" anchor="ctr">
+                    <a:lnL w="12700" cap="flat" cmpd="sng" algn="ctr">
+                      <a:solidFill>
+                        <a:srgbClr val="000000"/>
+                      </a:solidFill>
+                      <a:prstDash val="solid"/>
+                      <a:round/>
+                      <a:headEnd type="none" w="med" len="med"/>
+                      <a:tailEnd type="none" w="med" len="med"/>
+                    </a:lnL>
+                    <a:lnR w="12700" cap="flat" cmpd="sng" algn="ctr">
+                      <a:solidFill>
+                        <a:srgbClr val="000000"/>
+                      </a:solidFill>
+                      <a:prstDash val="solid"/>
+                      <a:round/>
+                      <a:headEnd type="none" w="med" len="med"/>
+                      <a:tailEnd type="none" w="med" len="med"/>
+                    </a:lnR>
+                    <a:lnT w="12700" cap="flat" cmpd="sng" algn="ctr">
+                      <a:solidFill>
+                        <a:srgbClr val="000000"/>
+                      </a:solidFill>
+                      <a:prstDash val="solid"/>
+                      <a:round/>
+                      <a:headEnd type="none" w="med" len="med"/>
+                      <a:tailEnd type="none" w="med" len="med"/>
+                    </a:lnT>
+                    <a:lnB w="12700" cap="flat" cmpd="sng" algn="ctr">
+                      <a:solidFill>
+                        <a:srgbClr val="000000"/>
+                      </a:solidFill>
+                      <a:prstDash val="solid"/>
+                      <a:round/>
+                      <a:headEnd type="none" w="med" len="med"/>
+                      <a:tailEnd type="none" w="med" len="med"/>
+                    </a:lnB>
+                    <a:solidFill>
+                      <a:srgbClr val="FFFFFF"/>
+                    </a:solidFill>
+                  </a:tcPr>
+                </a:tc>
+                <a:tc>
+                  <a:txBody>
+                    <a:bodyPr/>
+                    <a:lstStyle/>
+                    <a:p>
+                      <a:pPr indent="140335">
+                        <a:lnSpc>
+                          <a:spcPct val="115000"/>
+                        </a:lnSpc>
+                        <a:spcAft>
+                          <a:spcPts val="800"/>
+                        </a:spcAft>
+                        <a:buNone/>
+                      </a:pPr>
+                      <a:r>
+                        <a:rPr lang="en-US" sz="1600" b="1" kern="100">
+                          <a:solidFill>
+                            <a:srgbClr val="000000"/>
+                          </a:solidFill>
+                          <a:effectLst/>
+                          <a:latin typeface="Consolas" panose="020B0609020204030204" pitchFamily="49" charset="0"/>
+                          <a:ea typeface="Times New Roman" panose="02020603050405020304" pitchFamily="18" charset="0"/>
+                          <a:cs typeface="Consolas" panose="020B0609020204030204" pitchFamily="49" charset="0"/>
+                        </a:rPr>
+                        <a:t>0010</a:t>
+                      </a:r>
+                      <a:endParaRPr lang="en-US" sz="1800" kern="100">
+                        <a:effectLst/>
+                        <a:latin typeface="Aptos" panose="020B0004020202020204" pitchFamily="34" charset="0"/>
+                        <a:ea typeface="DengXian" panose="02010600030101010101" pitchFamily="2" charset="-122"/>
+                        <a:cs typeface="Times New Roman" panose="02020603050405020304" pitchFamily="18" charset="0"/>
+                      </a:endParaRPr>
+                    </a:p>
+                  </a:txBody>
+                  <a:tcPr marL="68580" marR="68580" marT="0" marB="0" anchor="ctr">
+                    <a:lnL w="12700" cap="flat" cmpd="sng" algn="ctr">
+                      <a:solidFill>
+                        <a:srgbClr val="000000"/>
+                      </a:solidFill>
+                      <a:prstDash val="solid"/>
+                      <a:round/>
+                      <a:headEnd type="none" w="med" len="med"/>
+                      <a:tailEnd type="none" w="med" len="med"/>
+                    </a:lnL>
+                    <a:lnR w="12700" cap="flat" cmpd="sng" algn="ctr">
+                      <a:solidFill>
+                        <a:srgbClr val="000000"/>
+                      </a:solidFill>
+                      <a:prstDash val="solid"/>
+                      <a:round/>
+                      <a:headEnd type="none" w="med" len="med"/>
+                      <a:tailEnd type="none" w="med" len="med"/>
+                    </a:lnR>
+                    <a:lnT w="12700" cap="flat" cmpd="sng" algn="ctr">
+                      <a:solidFill>
+                        <a:srgbClr val="000000"/>
+                      </a:solidFill>
+                      <a:prstDash val="solid"/>
+                      <a:round/>
+                      <a:headEnd type="none" w="med" len="med"/>
+                      <a:tailEnd type="none" w="med" len="med"/>
+                    </a:lnT>
+                    <a:lnB w="12700" cap="flat" cmpd="sng" algn="ctr">
+                      <a:solidFill>
+                        <a:srgbClr val="000000"/>
+                      </a:solidFill>
+                      <a:prstDash val="solid"/>
+                      <a:round/>
+                      <a:headEnd type="none" w="med" len="med"/>
+                      <a:tailEnd type="none" w="med" len="med"/>
+                    </a:lnB>
+                    <a:solidFill>
+                      <a:srgbClr val="FFFFFF"/>
+                    </a:solidFill>
+                  </a:tcPr>
+                </a:tc>
+                <a:tc>
+                  <a:txBody>
+                    <a:bodyPr/>
+                    <a:lstStyle/>
+                    <a:p>
+                      <a:pPr indent="140335">
+                        <a:lnSpc>
+                          <a:spcPct val="115000"/>
+                        </a:lnSpc>
+                        <a:spcAft>
+                          <a:spcPts val="800"/>
+                        </a:spcAft>
+                        <a:buNone/>
+                      </a:pPr>
+                      <a:endParaRPr lang="en-US" sz="1800" kern="100">
+                        <a:effectLst/>
+                        <a:latin typeface="Aptos" panose="020B0004020202020204" pitchFamily="34" charset="0"/>
+                        <a:ea typeface="DengXian" panose="02010600030101010101" pitchFamily="2" charset="-122"/>
+                        <a:cs typeface="Times New Roman" panose="02020603050405020304" pitchFamily="18" charset="0"/>
+                      </a:endParaRPr>
+                    </a:p>
+                  </a:txBody>
+                  <a:tcPr marL="68580" marR="68580" marT="0" marB="0" anchor="ctr">
+                    <a:lnL w="12700" cap="flat" cmpd="sng" algn="ctr">
+                      <a:solidFill>
+                        <a:srgbClr val="000000"/>
+                      </a:solidFill>
+                      <a:prstDash val="solid"/>
+                      <a:round/>
+                      <a:headEnd type="none" w="med" len="med"/>
+                      <a:tailEnd type="none" w="med" len="med"/>
+                    </a:lnL>
+                    <a:lnR w="12700" cap="flat" cmpd="sng" algn="ctr">
+                      <a:solidFill>
+                        <a:srgbClr val="000000"/>
+                      </a:solidFill>
+                      <a:prstDash val="solid"/>
+                      <a:round/>
+                      <a:headEnd type="none" w="med" len="med"/>
+                      <a:tailEnd type="none" w="med" len="med"/>
+                    </a:lnR>
+                    <a:lnT w="12700" cap="flat" cmpd="sng" algn="ctr">
+                      <a:solidFill>
+                        <a:srgbClr val="000000"/>
+                      </a:solidFill>
+                      <a:prstDash val="solid"/>
+                      <a:round/>
+                      <a:headEnd type="none" w="med" len="med"/>
+                      <a:tailEnd type="none" w="med" len="med"/>
+                    </a:lnT>
+                    <a:lnB w="12700" cap="flat" cmpd="sng" algn="ctr">
+                      <a:solidFill>
+                        <a:srgbClr val="000000"/>
+                      </a:solidFill>
+                      <a:prstDash val="solid"/>
+                      <a:round/>
+                      <a:headEnd type="none" w="med" len="med"/>
+                      <a:tailEnd type="none" w="med" len="med"/>
+                    </a:lnB>
+                    <a:solidFill>
+                      <a:srgbClr val="FFFFFF"/>
+                    </a:solidFill>
+                  </a:tcPr>
+                </a:tc>
+                <a:tc>
+                  <a:txBody>
+                    <a:bodyPr/>
+                    <a:lstStyle/>
+                    <a:p>
+                      <a:pPr indent="140335">
+                        <a:lnSpc>
+                          <a:spcPct val="115000"/>
+                        </a:lnSpc>
+                        <a:spcAft>
+                          <a:spcPts val="800"/>
+                        </a:spcAft>
+                        <a:buNone/>
+                      </a:pPr>
+                      <a:endParaRPr lang="en-US" sz="1800" kern="100">
+                        <a:effectLst/>
+                        <a:latin typeface="Aptos" panose="020B0004020202020204" pitchFamily="34" charset="0"/>
+                        <a:ea typeface="DengXian" panose="02010600030101010101" pitchFamily="2" charset="-122"/>
+                        <a:cs typeface="Times New Roman" panose="02020603050405020304" pitchFamily="18" charset="0"/>
+                      </a:endParaRPr>
+                    </a:p>
+                  </a:txBody>
+                  <a:tcPr marL="68580" marR="68580" marT="0" marB="0" anchor="ctr">
+                    <a:lnL w="12700" cap="flat" cmpd="sng" algn="ctr">
+                      <a:solidFill>
+                        <a:srgbClr val="000000"/>
+                      </a:solidFill>
+                      <a:prstDash val="solid"/>
+                      <a:round/>
+                      <a:headEnd type="none" w="med" len="med"/>
+                      <a:tailEnd type="none" w="med" len="med"/>
+                    </a:lnL>
+                    <a:lnR w="12700" cap="flat" cmpd="sng" algn="ctr">
+                      <a:solidFill>
+                        <a:srgbClr val="000000"/>
+                      </a:solidFill>
+                      <a:prstDash val="solid"/>
+                      <a:round/>
+                      <a:headEnd type="none" w="med" len="med"/>
+                      <a:tailEnd type="none" w="med" len="med"/>
+                    </a:lnR>
+                    <a:lnT w="12700" cap="flat" cmpd="sng" algn="ctr">
+                      <a:solidFill>
+                        <a:srgbClr val="000000"/>
+                      </a:solidFill>
+                      <a:prstDash val="solid"/>
+                      <a:round/>
+                      <a:headEnd type="none" w="med" len="med"/>
+                      <a:tailEnd type="none" w="med" len="med"/>
+                    </a:lnT>
+                    <a:lnB w="12700" cap="flat" cmpd="sng" algn="ctr">
+                      <a:solidFill>
+                        <a:srgbClr val="000000"/>
+                      </a:solidFill>
+                      <a:prstDash val="solid"/>
+                      <a:round/>
+                      <a:headEnd type="none" w="med" len="med"/>
+                      <a:tailEnd type="none" w="med" len="med"/>
+                    </a:lnB>
+                    <a:solidFill>
+                      <a:srgbClr val="FFFFFF"/>
+                    </a:solidFill>
+                  </a:tcPr>
+                </a:tc>
+                <a:tc>
+                  <a:txBody>
+                    <a:bodyPr/>
+                    <a:lstStyle/>
+                    <a:p>
+                      <a:pPr indent="140335">
+                        <a:lnSpc>
+                          <a:spcPct val="115000"/>
+                        </a:lnSpc>
+                        <a:spcAft>
+                          <a:spcPts val="800"/>
+                        </a:spcAft>
+                        <a:buNone/>
+                      </a:pPr>
+                      <a:endParaRPr lang="en-US" sz="1800" kern="100" dirty="0">
+                        <a:effectLst/>
+                        <a:latin typeface="Aptos" panose="020B0004020202020204" pitchFamily="34" charset="0"/>
+                        <a:ea typeface="DengXian" panose="02010600030101010101" pitchFamily="2" charset="-122"/>
+                        <a:cs typeface="Times New Roman" panose="02020603050405020304" pitchFamily="18" charset="0"/>
+                      </a:endParaRPr>
+                    </a:p>
+                  </a:txBody>
+                  <a:tcPr marL="68580" marR="68580" marT="0" marB="0" anchor="ctr">
+                    <a:lnL w="12700" cap="flat" cmpd="sng" algn="ctr">
+                      <a:solidFill>
+                        <a:srgbClr val="000000"/>
+                      </a:solidFill>
+                      <a:prstDash val="solid"/>
+                      <a:round/>
+                      <a:headEnd type="none" w="med" len="med"/>
+                      <a:tailEnd type="none" w="med" len="med"/>
+                    </a:lnL>
+                    <a:lnR w="12700" cap="flat" cmpd="sng" algn="ctr">
+                      <a:solidFill>
+                        <a:srgbClr val="000000"/>
+                      </a:solidFill>
+                      <a:prstDash val="solid"/>
+                      <a:round/>
+                      <a:headEnd type="none" w="med" len="med"/>
+                      <a:tailEnd type="none" w="med" len="med"/>
+                    </a:lnR>
+                    <a:lnT w="12700" cap="flat" cmpd="sng" algn="ctr">
+                      <a:solidFill>
+                        <a:srgbClr val="000000"/>
+                      </a:solidFill>
+                      <a:prstDash val="solid"/>
+                      <a:round/>
+                      <a:headEnd type="none" w="med" len="med"/>
+                      <a:tailEnd type="none" w="med" len="med"/>
+                    </a:lnT>
+                    <a:lnB w="12700" cap="flat" cmpd="sng" algn="ctr">
+                      <a:solidFill>
+                        <a:srgbClr val="000000"/>
+                      </a:solidFill>
+                      <a:prstDash val="solid"/>
+                      <a:round/>
+                      <a:headEnd type="none" w="med" len="med"/>
+                      <a:tailEnd type="none" w="med" len="med"/>
+                    </a:lnB>
+                    <a:solidFill>
+                      <a:srgbClr val="FFFFFF"/>
+                    </a:solidFill>
+                  </a:tcPr>
+                </a:tc>
+                <a:extLst>
+                  <a:ext uri="{0D108BD9-81ED-4DB2-BD59-A6C34878D82A}">
+                    <a16:rowId xmlns:a16="http://schemas.microsoft.com/office/drawing/2014/main" val="584716115"/>
+                  </a:ext>
+                </a:extLst>
+              </a:tr>
+              <a:tr h="332105">
+                <a:tc>
+                  <a:txBody>
+                    <a:bodyPr/>
+                    <a:lstStyle/>
+                    <a:p>
+                      <a:pPr indent="140335">
+                        <a:lnSpc>
+                          <a:spcPct val="115000"/>
+                        </a:lnSpc>
+                        <a:spcAft>
+                          <a:spcPts val="800"/>
+                        </a:spcAft>
+                        <a:buNone/>
+                      </a:pPr>
+                      <a:r>
+                        <a:rPr lang="en-US" sz="1600" b="1" kern="100">
+                          <a:solidFill>
+                            <a:srgbClr val="000000"/>
+                          </a:solidFill>
+                          <a:effectLst/>
+                          <a:latin typeface="Consolas" panose="020B0609020204030204" pitchFamily="49" charset="0"/>
+                          <a:ea typeface="Times New Roman" panose="02020603050405020304" pitchFamily="18" charset="0"/>
+                          <a:cs typeface="Consolas" panose="020B0609020204030204" pitchFamily="49" charset="0"/>
+                        </a:rPr>
+                        <a:t>0100 - 0110</a:t>
+                      </a:r>
+                      <a:endParaRPr lang="en-US" sz="1800" kern="100">
+                        <a:effectLst/>
+                        <a:latin typeface="Aptos" panose="020B0004020202020204" pitchFamily="34" charset="0"/>
+                        <a:ea typeface="DengXian" panose="02010600030101010101" pitchFamily="2" charset="-122"/>
+                        <a:cs typeface="Times New Roman" panose="02020603050405020304" pitchFamily="18" charset="0"/>
+                      </a:endParaRPr>
+                    </a:p>
+                  </a:txBody>
+                  <a:tcPr marL="68580" marR="68580" marT="0" marB="0" anchor="ctr">
+                    <a:lnL w="12700" cap="flat" cmpd="sng" algn="ctr">
+                      <a:solidFill>
+                        <a:srgbClr val="000000"/>
+                      </a:solidFill>
+                      <a:prstDash val="solid"/>
+                      <a:round/>
+                      <a:headEnd type="none" w="med" len="med"/>
+                      <a:tailEnd type="none" w="med" len="med"/>
+                    </a:lnL>
+                    <a:lnR w="12700" cap="flat" cmpd="sng" algn="ctr">
+                      <a:solidFill>
+                        <a:srgbClr val="000000"/>
+                      </a:solidFill>
+                      <a:prstDash val="solid"/>
+                      <a:round/>
+                      <a:headEnd type="none" w="med" len="med"/>
+                      <a:tailEnd type="none" w="med" len="med"/>
+                    </a:lnR>
+                    <a:lnT w="12700" cap="flat" cmpd="sng" algn="ctr">
+                      <a:solidFill>
+                        <a:srgbClr val="000000"/>
+                      </a:solidFill>
+                      <a:prstDash val="solid"/>
+                      <a:round/>
+                      <a:headEnd type="none" w="med" len="med"/>
+                      <a:tailEnd type="none" w="med" len="med"/>
+                    </a:lnT>
+                    <a:lnB w="12700" cap="flat" cmpd="sng" algn="ctr">
+                      <a:solidFill>
+                        <a:srgbClr val="000000"/>
+                      </a:solidFill>
+                      <a:prstDash val="solid"/>
+                      <a:round/>
+                      <a:headEnd type="none" w="med" len="med"/>
+                      <a:tailEnd type="none" w="med" len="med"/>
+                    </a:lnB>
+                    <a:solidFill>
+                      <a:srgbClr val="FFFFFF"/>
+                    </a:solidFill>
+                  </a:tcPr>
+                </a:tc>
+                <a:tc>
+                  <a:txBody>
+                    <a:bodyPr/>
+                    <a:lstStyle/>
+                    <a:p>
+                      <a:pPr indent="140335">
+                        <a:lnSpc>
+                          <a:spcPct val="115000"/>
+                        </a:lnSpc>
+                        <a:spcAft>
+                          <a:spcPts val="800"/>
+                        </a:spcAft>
+                        <a:buNone/>
+                      </a:pPr>
+                      <a:r>
+                        <a:rPr lang="en-US" sz="1600" b="1" kern="100">
+                          <a:solidFill>
+                            <a:srgbClr val="000000"/>
+                          </a:solidFill>
+                          <a:effectLst/>
+                          <a:latin typeface="Consolas" panose="020B0609020204030204" pitchFamily="49" charset="0"/>
+                          <a:ea typeface="Times New Roman" panose="02020603050405020304" pitchFamily="18" charset="0"/>
+                          <a:cs typeface="Consolas" panose="020B0609020204030204" pitchFamily="49" charset="0"/>
+                        </a:rPr>
+                        <a:t>1110</a:t>
+                      </a:r>
+                      <a:endParaRPr lang="en-US" sz="1800" kern="100">
+                        <a:effectLst/>
+                        <a:latin typeface="Aptos" panose="020B0004020202020204" pitchFamily="34" charset="0"/>
+                        <a:ea typeface="DengXian" panose="02010600030101010101" pitchFamily="2" charset="-122"/>
+                        <a:cs typeface="Times New Roman" panose="02020603050405020304" pitchFamily="18" charset="0"/>
+                      </a:endParaRPr>
+                    </a:p>
+                  </a:txBody>
+                  <a:tcPr marL="68580" marR="68580" marT="0" marB="0" anchor="ctr">
+                    <a:lnL w="12700" cap="flat" cmpd="sng" algn="ctr">
+                      <a:solidFill>
+                        <a:srgbClr val="000000"/>
+                      </a:solidFill>
+                      <a:prstDash val="solid"/>
+                      <a:round/>
+                      <a:headEnd type="none" w="med" len="med"/>
+                      <a:tailEnd type="none" w="med" len="med"/>
+                    </a:lnL>
+                    <a:lnR w="12700" cap="flat" cmpd="sng" algn="ctr">
+                      <a:solidFill>
+                        <a:srgbClr val="000000"/>
+                      </a:solidFill>
+                      <a:prstDash val="solid"/>
+                      <a:round/>
+                      <a:headEnd type="none" w="med" len="med"/>
+                      <a:tailEnd type="none" w="med" len="med"/>
+                    </a:lnR>
+                    <a:lnT w="12700" cap="flat" cmpd="sng" algn="ctr">
+                      <a:solidFill>
+                        <a:srgbClr val="000000"/>
+                      </a:solidFill>
+                      <a:prstDash val="solid"/>
+                      <a:round/>
+                      <a:headEnd type="none" w="med" len="med"/>
+                      <a:tailEnd type="none" w="med" len="med"/>
+                    </a:lnT>
+                    <a:lnB w="12700" cap="flat" cmpd="sng" algn="ctr">
+                      <a:solidFill>
+                        <a:srgbClr val="000000"/>
+                      </a:solidFill>
+                      <a:prstDash val="solid"/>
+                      <a:round/>
+                      <a:headEnd type="none" w="med" len="med"/>
+                      <a:tailEnd type="none" w="med" len="med"/>
+                    </a:lnB>
+                    <a:solidFill>
+                      <a:srgbClr val="FFFFFF"/>
+                    </a:solidFill>
+                  </a:tcPr>
+                </a:tc>
+                <a:tc>
+                  <a:txBody>
+                    <a:bodyPr/>
+                    <a:lstStyle/>
+                    <a:p>
+                      <a:pPr indent="140335">
+                        <a:lnSpc>
+                          <a:spcPct val="115000"/>
+                        </a:lnSpc>
+                        <a:spcAft>
+                          <a:spcPts val="800"/>
+                        </a:spcAft>
+                        <a:buNone/>
+                      </a:pPr>
+                      <a:endParaRPr lang="en-US" sz="1800" kern="100">
+                        <a:effectLst/>
+                        <a:latin typeface="Aptos" panose="020B0004020202020204" pitchFamily="34" charset="0"/>
+                        <a:ea typeface="DengXian" panose="02010600030101010101" pitchFamily="2" charset="-122"/>
+                        <a:cs typeface="Times New Roman" panose="02020603050405020304" pitchFamily="18" charset="0"/>
+                      </a:endParaRPr>
+                    </a:p>
+                  </a:txBody>
+                  <a:tcPr marL="68580" marR="68580" marT="0" marB="0" anchor="ctr">
+                    <a:lnL w="12700" cap="flat" cmpd="sng" algn="ctr">
+                      <a:solidFill>
+                        <a:srgbClr val="000000"/>
+                      </a:solidFill>
+                      <a:prstDash val="solid"/>
+                      <a:round/>
+                      <a:headEnd type="none" w="med" len="med"/>
+                      <a:tailEnd type="none" w="med" len="med"/>
+                    </a:lnL>
+                    <a:lnR w="12700" cap="flat" cmpd="sng" algn="ctr">
+                      <a:solidFill>
+                        <a:srgbClr val="000000"/>
+                      </a:solidFill>
+                      <a:prstDash val="solid"/>
+                      <a:round/>
+                      <a:headEnd type="none" w="med" len="med"/>
+                      <a:tailEnd type="none" w="med" len="med"/>
+                    </a:lnR>
+                    <a:lnT w="12700" cap="flat" cmpd="sng" algn="ctr">
+                      <a:solidFill>
+                        <a:srgbClr val="000000"/>
+                      </a:solidFill>
+                      <a:prstDash val="solid"/>
+                      <a:round/>
+                      <a:headEnd type="none" w="med" len="med"/>
+                      <a:tailEnd type="none" w="med" len="med"/>
+                    </a:lnT>
+                    <a:lnB w="12700" cap="flat" cmpd="sng" algn="ctr">
+                      <a:solidFill>
+                        <a:srgbClr val="000000"/>
+                      </a:solidFill>
+                      <a:prstDash val="solid"/>
+                      <a:round/>
+                      <a:headEnd type="none" w="med" len="med"/>
+                      <a:tailEnd type="none" w="med" len="med"/>
+                    </a:lnB>
+                    <a:solidFill>
+                      <a:srgbClr val="FFFFFF"/>
+                    </a:solidFill>
+                  </a:tcPr>
+                </a:tc>
+                <a:tc>
+                  <a:txBody>
+                    <a:bodyPr/>
+                    <a:lstStyle/>
+                    <a:p>
+                      <a:pPr indent="140335">
+                        <a:lnSpc>
+                          <a:spcPct val="115000"/>
+                        </a:lnSpc>
+                        <a:spcAft>
+                          <a:spcPts val="800"/>
+                        </a:spcAft>
+                        <a:buNone/>
+                      </a:pPr>
+                      <a:endParaRPr lang="en-US" sz="1800" kern="100">
+                        <a:effectLst/>
+                        <a:latin typeface="Aptos" panose="020B0004020202020204" pitchFamily="34" charset="0"/>
+                        <a:ea typeface="DengXian" panose="02010600030101010101" pitchFamily="2" charset="-122"/>
+                        <a:cs typeface="Times New Roman" panose="02020603050405020304" pitchFamily="18" charset="0"/>
+                      </a:endParaRPr>
+                    </a:p>
+                  </a:txBody>
+                  <a:tcPr marL="68580" marR="68580" marT="0" marB="0" anchor="ctr">
+                    <a:lnL w="12700" cap="flat" cmpd="sng" algn="ctr">
+                      <a:solidFill>
+                        <a:srgbClr val="000000"/>
+                      </a:solidFill>
+                      <a:prstDash val="solid"/>
+                      <a:round/>
+                      <a:headEnd type="none" w="med" len="med"/>
+                      <a:tailEnd type="none" w="med" len="med"/>
+                    </a:lnL>
+                    <a:lnR w="12700" cap="flat" cmpd="sng" algn="ctr">
+                      <a:solidFill>
+                        <a:srgbClr val="000000"/>
+                      </a:solidFill>
+                      <a:prstDash val="solid"/>
+                      <a:round/>
+                      <a:headEnd type="none" w="med" len="med"/>
+                      <a:tailEnd type="none" w="med" len="med"/>
+                    </a:lnR>
+                    <a:lnT w="12700" cap="flat" cmpd="sng" algn="ctr">
+                      <a:solidFill>
+                        <a:srgbClr val="000000"/>
+                      </a:solidFill>
+                      <a:prstDash val="solid"/>
+                      <a:round/>
+                      <a:headEnd type="none" w="med" len="med"/>
+                      <a:tailEnd type="none" w="med" len="med"/>
+                    </a:lnT>
+                    <a:lnB w="12700" cap="flat" cmpd="sng" algn="ctr">
+                      <a:solidFill>
+                        <a:srgbClr val="000000"/>
+                      </a:solidFill>
+                      <a:prstDash val="solid"/>
+                      <a:round/>
+                      <a:headEnd type="none" w="med" len="med"/>
+                      <a:tailEnd type="none" w="med" len="med"/>
+                    </a:lnB>
+                    <a:solidFill>
+                      <a:srgbClr val="FFFFFF"/>
+                    </a:solidFill>
+                  </a:tcPr>
+                </a:tc>
+                <a:tc>
+                  <a:txBody>
+                    <a:bodyPr/>
+                    <a:lstStyle/>
+                    <a:p>
+                      <a:pPr indent="140335">
+                        <a:lnSpc>
+                          <a:spcPct val="115000"/>
+                        </a:lnSpc>
+                        <a:spcAft>
+                          <a:spcPts val="800"/>
+                        </a:spcAft>
+                        <a:buNone/>
+                      </a:pPr>
+                      <a:endParaRPr lang="en-US" sz="1800" kern="100" dirty="0">
+                        <a:effectLst/>
+                        <a:latin typeface="Aptos" panose="020B0004020202020204" pitchFamily="34" charset="0"/>
+                        <a:ea typeface="DengXian" panose="02010600030101010101" pitchFamily="2" charset="-122"/>
+                        <a:cs typeface="Times New Roman" panose="02020603050405020304" pitchFamily="18" charset="0"/>
+                      </a:endParaRPr>
+                    </a:p>
+                  </a:txBody>
+                  <a:tcPr marL="68580" marR="68580" marT="0" marB="0" anchor="ctr">
+                    <a:lnL w="12700" cap="flat" cmpd="sng" algn="ctr">
+                      <a:solidFill>
+                        <a:srgbClr val="000000"/>
+                      </a:solidFill>
+                      <a:prstDash val="solid"/>
+                      <a:round/>
+                      <a:headEnd type="none" w="med" len="med"/>
+                      <a:tailEnd type="none" w="med" len="med"/>
+                    </a:lnL>
+                    <a:lnR w="12700" cap="flat" cmpd="sng" algn="ctr">
+                      <a:solidFill>
+                        <a:srgbClr val="000000"/>
+                      </a:solidFill>
+                      <a:prstDash val="solid"/>
+                      <a:round/>
+                      <a:headEnd type="none" w="med" len="med"/>
+                      <a:tailEnd type="none" w="med" len="med"/>
+                    </a:lnR>
+                    <a:lnT w="12700" cap="flat" cmpd="sng" algn="ctr">
+                      <a:solidFill>
+                        <a:srgbClr val="000000"/>
+                      </a:solidFill>
+                      <a:prstDash val="solid"/>
+                      <a:round/>
+                      <a:headEnd type="none" w="med" len="med"/>
+                      <a:tailEnd type="none" w="med" len="med"/>
+                    </a:lnT>
+                    <a:lnB w="12700" cap="flat" cmpd="sng" algn="ctr">
+                      <a:solidFill>
+                        <a:srgbClr val="000000"/>
+                      </a:solidFill>
+                      <a:prstDash val="solid"/>
+                      <a:round/>
+                      <a:headEnd type="none" w="med" len="med"/>
+                      <a:tailEnd type="none" w="med" len="med"/>
+                    </a:lnB>
+                    <a:solidFill>
+                      <a:srgbClr val="FFFFFF"/>
+                    </a:solidFill>
+                  </a:tcPr>
+                </a:tc>
+                <a:extLst>
+                  <a:ext uri="{0D108BD9-81ED-4DB2-BD59-A6C34878D82A}">
+                    <a16:rowId xmlns:a16="http://schemas.microsoft.com/office/drawing/2014/main" val="3363010056"/>
+                  </a:ext>
+                </a:extLst>
+              </a:tr>
+              <a:tr h="332105">
+                <a:tc>
+                  <a:txBody>
+                    <a:bodyPr/>
+                    <a:lstStyle/>
+                    <a:p>
+                      <a:pPr indent="140335">
+                        <a:lnSpc>
+                          <a:spcPct val="115000"/>
+                        </a:lnSpc>
+                        <a:spcAft>
+                          <a:spcPts val="800"/>
+                        </a:spcAft>
+                        <a:buNone/>
+                      </a:pPr>
+                      <a:r>
+                        <a:rPr lang="en-US" sz="1600" b="1" kern="100">
+                          <a:solidFill>
+                            <a:srgbClr val="000000"/>
+                          </a:solidFill>
+                          <a:effectLst/>
+                          <a:latin typeface="Consolas" panose="020B0609020204030204" pitchFamily="49" charset="0"/>
+                          <a:ea typeface="Times New Roman" panose="02020603050405020304" pitchFamily="18" charset="0"/>
+                          <a:cs typeface="Consolas" panose="020B0609020204030204" pitchFamily="49" charset="0"/>
+                        </a:rPr>
+                        <a:t>1100 - 0110</a:t>
+                      </a:r>
+                      <a:endParaRPr lang="en-US" sz="1800" kern="100">
+                        <a:effectLst/>
+                        <a:latin typeface="Aptos" panose="020B0004020202020204" pitchFamily="34" charset="0"/>
+                        <a:ea typeface="DengXian" panose="02010600030101010101" pitchFamily="2" charset="-122"/>
+                        <a:cs typeface="Times New Roman" panose="02020603050405020304" pitchFamily="18" charset="0"/>
+                      </a:endParaRPr>
+                    </a:p>
+                  </a:txBody>
+                  <a:tcPr marL="68580" marR="68580" marT="0" marB="0" anchor="ctr">
+                    <a:lnL w="12700" cap="flat" cmpd="sng" algn="ctr">
+                      <a:solidFill>
+                        <a:srgbClr val="000000"/>
+                      </a:solidFill>
+                      <a:prstDash val="solid"/>
+                      <a:round/>
+                      <a:headEnd type="none" w="med" len="med"/>
+                      <a:tailEnd type="none" w="med" len="med"/>
+                    </a:lnL>
+                    <a:lnR w="12700" cap="flat" cmpd="sng" algn="ctr">
+                      <a:solidFill>
+                        <a:srgbClr val="000000"/>
+                      </a:solidFill>
+                      <a:prstDash val="solid"/>
+                      <a:round/>
+                      <a:headEnd type="none" w="med" len="med"/>
+                      <a:tailEnd type="none" w="med" len="med"/>
+                    </a:lnR>
+                    <a:lnT w="12700" cap="flat" cmpd="sng" algn="ctr">
+                      <a:solidFill>
+                        <a:srgbClr val="000000"/>
+                      </a:solidFill>
+                      <a:prstDash val="solid"/>
+                      <a:round/>
+                      <a:headEnd type="none" w="med" len="med"/>
+                      <a:tailEnd type="none" w="med" len="med"/>
+                    </a:lnT>
+                    <a:lnB w="12700" cap="flat" cmpd="sng" algn="ctr">
+                      <a:solidFill>
+                        <a:srgbClr val="000000"/>
+                      </a:solidFill>
+                      <a:prstDash val="solid"/>
+                      <a:round/>
+                      <a:headEnd type="none" w="med" len="med"/>
+                      <a:tailEnd type="none" w="med" len="med"/>
+                    </a:lnB>
+                    <a:solidFill>
+                      <a:srgbClr val="FFFFFF"/>
+                    </a:solidFill>
+                  </a:tcPr>
+                </a:tc>
+                <a:tc>
+                  <a:txBody>
+                    <a:bodyPr/>
+                    <a:lstStyle/>
+                    <a:p>
+                      <a:pPr indent="140335">
+                        <a:lnSpc>
+                          <a:spcPct val="115000"/>
+                        </a:lnSpc>
+                        <a:spcAft>
+                          <a:spcPts val="800"/>
+                        </a:spcAft>
+                        <a:buNone/>
+                      </a:pPr>
+                      <a:r>
+                        <a:rPr lang="en-US" sz="1600" b="1" kern="100">
+                          <a:solidFill>
+                            <a:srgbClr val="000000"/>
+                          </a:solidFill>
+                          <a:effectLst/>
+                          <a:latin typeface="Consolas" panose="020B0609020204030204" pitchFamily="49" charset="0"/>
+                          <a:ea typeface="Times New Roman" panose="02020603050405020304" pitchFamily="18" charset="0"/>
+                          <a:cs typeface="Consolas" panose="020B0609020204030204" pitchFamily="49" charset="0"/>
+                        </a:rPr>
+                        <a:t>0110</a:t>
+                      </a:r>
+                      <a:endParaRPr lang="en-US" sz="1800" kern="100">
+                        <a:effectLst/>
+                        <a:latin typeface="Aptos" panose="020B0004020202020204" pitchFamily="34" charset="0"/>
+                        <a:ea typeface="DengXian" panose="02010600030101010101" pitchFamily="2" charset="-122"/>
+                        <a:cs typeface="Times New Roman" panose="02020603050405020304" pitchFamily="18" charset="0"/>
+                      </a:endParaRPr>
+                    </a:p>
+                  </a:txBody>
+                  <a:tcPr marL="68580" marR="68580" marT="0" marB="0" anchor="ctr">
+                    <a:lnL w="12700" cap="flat" cmpd="sng" algn="ctr">
+                      <a:solidFill>
+                        <a:srgbClr val="000000"/>
+                      </a:solidFill>
+                      <a:prstDash val="solid"/>
+                      <a:round/>
+                      <a:headEnd type="none" w="med" len="med"/>
+                      <a:tailEnd type="none" w="med" len="med"/>
+                    </a:lnL>
+                    <a:lnR w="12700" cap="flat" cmpd="sng" algn="ctr">
+                      <a:solidFill>
+                        <a:srgbClr val="000000"/>
+                      </a:solidFill>
+                      <a:prstDash val="solid"/>
+                      <a:round/>
+                      <a:headEnd type="none" w="med" len="med"/>
+                      <a:tailEnd type="none" w="med" len="med"/>
+                    </a:lnR>
+                    <a:lnT w="12700" cap="flat" cmpd="sng" algn="ctr">
+                      <a:solidFill>
+                        <a:srgbClr val="000000"/>
+                      </a:solidFill>
+                      <a:prstDash val="solid"/>
+                      <a:round/>
+                      <a:headEnd type="none" w="med" len="med"/>
+                      <a:tailEnd type="none" w="med" len="med"/>
+                    </a:lnT>
+                    <a:lnB w="12700" cap="flat" cmpd="sng" algn="ctr">
+                      <a:solidFill>
+                        <a:srgbClr val="000000"/>
+                      </a:solidFill>
+                      <a:prstDash val="solid"/>
+                      <a:round/>
+                      <a:headEnd type="none" w="med" len="med"/>
+                      <a:tailEnd type="none" w="med" len="med"/>
+                    </a:lnB>
+                    <a:solidFill>
+                      <a:srgbClr val="FFFFFF"/>
+                    </a:solidFill>
+                  </a:tcPr>
+                </a:tc>
+                <a:tc>
+                  <a:txBody>
+                    <a:bodyPr/>
+                    <a:lstStyle/>
+                    <a:p>
+                      <a:pPr indent="140335">
+                        <a:lnSpc>
+                          <a:spcPct val="115000"/>
+                        </a:lnSpc>
+                        <a:spcAft>
+                          <a:spcPts val="800"/>
+                        </a:spcAft>
+                        <a:buNone/>
+                      </a:pPr>
+                      <a:endParaRPr lang="en-US" sz="1800" kern="100">
+                        <a:effectLst/>
+                        <a:latin typeface="Aptos" panose="020B0004020202020204" pitchFamily="34" charset="0"/>
+                        <a:ea typeface="DengXian" panose="02010600030101010101" pitchFamily="2" charset="-122"/>
+                        <a:cs typeface="Times New Roman" panose="02020603050405020304" pitchFamily="18" charset="0"/>
+                      </a:endParaRPr>
+                    </a:p>
+                  </a:txBody>
+                  <a:tcPr marL="68580" marR="68580" marT="0" marB="0" anchor="ctr">
+                    <a:lnL w="12700" cap="flat" cmpd="sng" algn="ctr">
+                      <a:solidFill>
+                        <a:srgbClr val="000000"/>
+                      </a:solidFill>
+                      <a:prstDash val="solid"/>
+                      <a:round/>
+                      <a:headEnd type="none" w="med" len="med"/>
+                      <a:tailEnd type="none" w="med" len="med"/>
+                    </a:lnL>
+                    <a:lnR w="12700" cap="flat" cmpd="sng" algn="ctr">
+                      <a:solidFill>
+                        <a:srgbClr val="000000"/>
+                      </a:solidFill>
+                      <a:prstDash val="solid"/>
+                      <a:round/>
+                      <a:headEnd type="none" w="med" len="med"/>
+                      <a:tailEnd type="none" w="med" len="med"/>
+                    </a:lnR>
+                    <a:lnT w="12700" cap="flat" cmpd="sng" algn="ctr">
+                      <a:solidFill>
+                        <a:srgbClr val="000000"/>
+                      </a:solidFill>
+                      <a:prstDash val="solid"/>
+                      <a:round/>
+                      <a:headEnd type="none" w="med" len="med"/>
+                      <a:tailEnd type="none" w="med" len="med"/>
+                    </a:lnT>
+                    <a:lnB w="12700" cap="flat" cmpd="sng" algn="ctr">
+                      <a:solidFill>
+                        <a:srgbClr val="000000"/>
+                      </a:solidFill>
+                      <a:prstDash val="solid"/>
+                      <a:round/>
+                      <a:headEnd type="none" w="med" len="med"/>
+                      <a:tailEnd type="none" w="med" len="med"/>
+                    </a:lnB>
+                    <a:solidFill>
+                      <a:srgbClr val="FFFFFF"/>
+                    </a:solidFill>
+                  </a:tcPr>
+                </a:tc>
+                <a:tc>
+                  <a:txBody>
+                    <a:bodyPr/>
+                    <a:lstStyle/>
+                    <a:p>
+                      <a:pPr indent="140335">
+                        <a:lnSpc>
+                          <a:spcPct val="115000"/>
+                        </a:lnSpc>
+                        <a:spcAft>
+                          <a:spcPts val="800"/>
+                        </a:spcAft>
+                        <a:buNone/>
+                      </a:pPr>
+                      <a:endParaRPr lang="en-US" sz="1800" kern="100">
+                        <a:effectLst/>
+                        <a:latin typeface="Aptos" panose="020B0004020202020204" pitchFamily="34" charset="0"/>
+                        <a:ea typeface="DengXian" panose="02010600030101010101" pitchFamily="2" charset="-122"/>
+                        <a:cs typeface="Times New Roman" panose="02020603050405020304" pitchFamily="18" charset="0"/>
+                      </a:endParaRPr>
+                    </a:p>
+                  </a:txBody>
+                  <a:tcPr marL="68580" marR="68580" marT="0" marB="0" anchor="ctr">
+                    <a:lnL w="12700" cap="flat" cmpd="sng" algn="ctr">
+                      <a:solidFill>
+                        <a:srgbClr val="000000"/>
+                      </a:solidFill>
+                      <a:prstDash val="solid"/>
+                      <a:round/>
+                      <a:headEnd type="none" w="med" len="med"/>
+                      <a:tailEnd type="none" w="med" len="med"/>
+                    </a:lnL>
+                    <a:lnR w="12700" cap="flat" cmpd="sng" algn="ctr">
+                      <a:solidFill>
+                        <a:srgbClr val="000000"/>
+                      </a:solidFill>
+                      <a:prstDash val="solid"/>
+                      <a:round/>
+                      <a:headEnd type="none" w="med" len="med"/>
+                      <a:tailEnd type="none" w="med" len="med"/>
+                    </a:lnR>
+                    <a:lnT w="12700" cap="flat" cmpd="sng" algn="ctr">
+                      <a:solidFill>
+                        <a:srgbClr val="000000"/>
+                      </a:solidFill>
+                      <a:prstDash val="solid"/>
+                      <a:round/>
+                      <a:headEnd type="none" w="med" len="med"/>
+                      <a:tailEnd type="none" w="med" len="med"/>
+                    </a:lnT>
+                    <a:lnB w="12700" cap="flat" cmpd="sng" algn="ctr">
+                      <a:solidFill>
+                        <a:srgbClr val="000000"/>
+                      </a:solidFill>
+                      <a:prstDash val="solid"/>
+                      <a:round/>
+                      <a:headEnd type="none" w="med" len="med"/>
+                      <a:tailEnd type="none" w="med" len="med"/>
+                    </a:lnB>
+                    <a:solidFill>
+                      <a:srgbClr val="FFFFFF"/>
+                    </a:solidFill>
+                  </a:tcPr>
+                </a:tc>
+                <a:tc>
+                  <a:txBody>
+                    <a:bodyPr/>
+                    <a:lstStyle/>
+                    <a:p>
+                      <a:pPr indent="140335">
+                        <a:lnSpc>
+                          <a:spcPct val="115000"/>
+                        </a:lnSpc>
+                        <a:spcAft>
+                          <a:spcPts val="800"/>
+                        </a:spcAft>
+                        <a:buNone/>
+                      </a:pPr>
+                      <a:endParaRPr lang="en-US" sz="1800" kern="100" dirty="0">
+                        <a:effectLst/>
+                        <a:latin typeface="Aptos" panose="020B0004020202020204" pitchFamily="34" charset="0"/>
+                        <a:ea typeface="DengXian" panose="02010600030101010101" pitchFamily="2" charset="-122"/>
+                        <a:cs typeface="Times New Roman" panose="02020603050405020304" pitchFamily="18" charset="0"/>
+                      </a:endParaRPr>
+                    </a:p>
+                  </a:txBody>
+                  <a:tcPr marL="68580" marR="68580" marT="0" marB="0" anchor="ctr">
+                    <a:lnL w="12700" cap="flat" cmpd="sng" algn="ctr">
+                      <a:solidFill>
+                        <a:srgbClr val="000000"/>
+                      </a:solidFill>
+                      <a:prstDash val="solid"/>
+                      <a:round/>
+                      <a:headEnd type="none" w="med" len="med"/>
+                      <a:tailEnd type="none" w="med" len="med"/>
+                    </a:lnL>
+                    <a:lnR w="12700" cap="flat" cmpd="sng" algn="ctr">
+                      <a:solidFill>
+                        <a:srgbClr val="000000"/>
+                      </a:solidFill>
+                      <a:prstDash val="solid"/>
+                      <a:round/>
+                      <a:headEnd type="none" w="med" len="med"/>
+                      <a:tailEnd type="none" w="med" len="med"/>
+                    </a:lnR>
+                    <a:lnT w="12700" cap="flat" cmpd="sng" algn="ctr">
+                      <a:solidFill>
+                        <a:srgbClr val="000000"/>
+                      </a:solidFill>
+                      <a:prstDash val="solid"/>
+                      <a:round/>
+                      <a:headEnd type="none" w="med" len="med"/>
+                      <a:tailEnd type="none" w="med" len="med"/>
+                    </a:lnT>
+                    <a:lnB w="12700" cap="flat" cmpd="sng" algn="ctr">
+                      <a:solidFill>
+                        <a:srgbClr val="000000"/>
+                      </a:solidFill>
+                      <a:prstDash val="solid"/>
+                      <a:round/>
+                      <a:headEnd type="none" w="med" len="med"/>
+                      <a:tailEnd type="none" w="med" len="med"/>
+                    </a:lnB>
+                    <a:solidFill>
+                      <a:srgbClr val="FFFFFF"/>
+                    </a:solidFill>
+                  </a:tcPr>
+                </a:tc>
+                <a:extLst>
+                  <a:ext uri="{0D108BD9-81ED-4DB2-BD59-A6C34878D82A}">
+                    <a16:rowId xmlns:a16="http://schemas.microsoft.com/office/drawing/2014/main" val="1670228422"/>
+                  </a:ext>
+                </a:extLst>
+              </a:tr>
+              <a:tr h="332105">
+                <a:tc>
+                  <a:txBody>
+                    <a:bodyPr/>
+                    <a:lstStyle/>
+                    <a:p>
+                      <a:pPr indent="140335">
+                        <a:lnSpc>
+                          <a:spcPct val="115000"/>
+                        </a:lnSpc>
+                        <a:spcAft>
+                          <a:spcPts val="800"/>
+                        </a:spcAft>
+                        <a:buNone/>
+                      </a:pPr>
+                      <a:r>
+                        <a:rPr lang="en-US" sz="1600" b="1" kern="100">
+                          <a:solidFill>
+                            <a:srgbClr val="000000"/>
+                          </a:solidFill>
+                          <a:effectLst/>
+                          <a:latin typeface="Consolas" panose="020B0609020204030204" pitchFamily="49" charset="0"/>
+                          <a:ea typeface="Times New Roman" panose="02020603050405020304" pitchFamily="18" charset="0"/>
+                          <a:cs typeface="Consolas" panose="020B0609020204030204" pitchFamily="49" charset="0"/>
+                        </a:rPr>
+                        <a:t>0100 - 1110</a:t>
+                      </a:r>
+                      <a:endParaRPr lang="en-US" sz="1800" kern="100">
+                        <a:effectLst/>
+                        <a:latin typeface="Aptos" panose="020B0004020202020204" pitchFamily="34" charset="0"/>
+                        <a:ea typeface="DengXian" panose="02010600030101010101" pitchFamily="2" charset="-122"/>
+                        <a:cs typeface="Times New Roman" panose="02020603050405020304" pitchFamily="18" charset="0"/>
+                      </a:endParaRPr>
+                    </a:p>
+                  </a:txBody>
+                  <a:tcPr marL="68580" marR="68580" marT="0" marB="0" anchor="ctr">
+                    <a:lnL w="12700" cap="flat" cmpd="sng" algn="ctr">
+                      <a:solidFill>
+                        <a:srgbClr val="000000"/>
+                      </a:solidFill>
+                      <a:prstDash val="solid"/>
+                      <a:round/>
+                      <a:headEnd type="none" w="med" len="med"/>
+                      <a:tailEnd type="none" w="med" len="med"/>
+                    </a:lnL>
+                    <a:lnR w="12700" cap="flat" cmpd="sng" algn="ctr">
+                      <a:solidFill>
+                        <a:srgbClr val="000000"/>
+                      </a:solidFill>
+                      <a:prstDash val="solid"/>
+                      <a:round/>
+                      <a:headEnd type="none" w="med" len="med"/>
+                      <a:tailEnd type="none" w="med" len="med"/>
+                    </a:lnR>
+                    <a:lnT w="12700" cap="flat" cmpd="sng" algn="ctr">
+                      <a:solidFill>
+                        <a:srgbClr val="000000"/>
+                      </a:solidFill>
+                      <a:prstDash val="solid"/>
+                      <a:round/>
+                      <a:headEnd type="none" w="med" len="med"/>
+                      <a:tailEnd type="none" w="med" len="med"/>
+                    </a:lnT>
+                    <a:lnB w="12700" cap="flat" cmpd="sng" algn="ctr">
+                      <a:solidFill>
+                        <a:srgbClr val="000000"/>
+                      </a:solidFill>
+                      <a:prstDash val="solid"/>
+                      <a:round/>
+                      <a:headEnd type="none" w="med" len="med"/>
+                      <a:tailEnd type="none" w="med" len="med"/>
+                    </a:lnB>
+                    <a:solidFill>
+                      <a:srgbClr val="FFFFFF"/>
+                    </a:solidFill>
+                  </a:tcPr>
+                </a:tc>
+                <a:tc>
+                  <a:txBody>
+                    <a:bodyPr/>
+                    <a:lstStyle/>
+                    <a:p>
+                      <a:pPr indent="140335">
+                        <a:lnSpc>
+                          <a:spcPct val="115000"/>
+                        </a:lnSpc>
+                        <a:spcAft>
+                          <a:spcPts val="800"/>
+                        </a:spcAft>
+                        <a:buNone/>
+                      </a:pPr>
+                      <a:r>
+                        <a:rPr lang="en-US" sz="1600" b="1" kern="100">
+                          <a:solidFill>
+                            <a:srgbClr val="000000"/>
+                          </a:solidFill>
+                          <a:effectLst/>
+                          <a:latin typeface="Consolas" panose="020B0609020204030204" pitchFamily="49" charset="0"/>
+                          <a:ea typeface="Times New Roman" panose="02020603050405020304" pitchFamily="18" charset="0"/>
+                          <a:cs typeface="Consolas" panose="020B0609020204030204" pitchFamily="49" charset="0"/>
+                        </a:rPr>
+                        <a:t>0110</a:t>
+                      </a:r>
+                      <a:endParaRPr lang="en-US" sz="1800" kern="100">
+                        <a:effectLst/>
+                        <a:latin typeface="Aptos" panose="020B0004020202020204" pitchFamily="34" charset="0"/>
+                        <a:ea typeface="DengXian" panose="02010600030101010101" pitchFamily="2" charset="-122"/>
+                        <a:cs typeface="Times New Roman" panose="02020603050405020304" pitchFamily="18" charset="0"/>
+                      </a:endParaRPr>
+                    </a:p>
+                  </a:txBody>
+                  <a:tcPr marL="68580" marR="68580" marT="0" marB="0" anchor="ctr">
+                    <a:lnL w="12700" cap="flat" cmpd="sng" algn="ctr">
+                      <a:solidFill>
+                        <a:srgbClr val="000000"/>
+                      </a:solidFill>
+                      <a:prstDash val="solid"/>
+                      <a:round/>
+                      <a:headEnd type="none" w="med" len="med"/>
+                      <a:tailEnd type="none" w="med" len="med"/>
+                    </a:lnL>
+                    <a:lnR w="12700" cap="flat" cmpd="sng" algn="ctr">
+                      <a:solidFill>
+                        <a:srgbClr val="000000"/>
+                      </a:solidFill>
+                      <a:prstDash val="solid"/>
+                      <a:round/>
+                      <a:headEnd type="none" w="med" len="med"/>
+                      <a:tailEnd type="none" w="med" len="med"/>
+                    </a:lnR>
+                    <a:lnT w="12700" cap="flat" cmpd="sng" algn="ctr">
+                      <a:solidFill>
+                        <a:srgbClr val="000000"/>
+                      </a:solidFill>
+                      <a:prstDash val="solid"/>
+                      <a:round/>
+                      <a:headEnd type="none" w="med" len="med"/>
+                      <a:tailEnd type="none" w="med" len="med"/>
+                    </a:lnT>
+                    <a:lnB w="12700" cap="flat" cmpd="sng" algn="ctr">
+                      <a:solidFill>
+                        <a:srgbClr val="000000"/>
+                      </a:solidFill>
+                      <a:prstDash val="solid"/>
+                      <a:round/>
+                      <a:headEnd type="none" w="med" len="med"/>
+                      <a:tailEnd type="none" w="med" len="med"/>
+                    </a:lnB>
+                    <a:solidFill>
+                      <a:srgbClr val="FFFFFF"/>
+                    </a:solidFill>
+                  </a:tcPr>
+                </a:tc>
+                <a:tc>
+                  <a:txBody>
+                    <a:bodyPr/>
+                    <a:lstStyle/>
+                    <a:p>
+                      <a:pPr indent="140335">
+                        <a:lnSpc>
+                          <a:spcPct val="115000"/>
+                        </a:lnSpc>
+                        <a:spcAft>
+                          <a:spcPts val="800"/>
+                        </a:spcAft>
+                        <a:buNone/>
+                      </a:pPr>
+                      <a:endParaRPr lang="en-US" sz="1800" kern="100">
+                        <a:effectLst/>
+                        <a:latin typeface="Aptos" panose="020B0004020202020204" pitchFamily="34" charset="0"/>
+                        <a:ea typeface="DengXian" panose="02010600030101010101" pitchFamily="2" charset="-122"/>
+                        <a:cs typeface="Times New Roman" panose="02020603050405020304" pitchFamily="18" charset="0"/>
+                      </a:endParaRPr>
+                    </a:p>
+                  </a:txBody>
+                  <a:tcPr marL="68580" marR="68580" marT="0" marB="0" anchor="ctr">
+                    <a:lnL w="12700" cap="flat" cmpd="sng" algn="ctr">
+                      <a:solidFill>
+                        <a:srgbClr val="000000"/>
+                      </a:solidFill>
+                      <a:prstDash val="solid"/>
+                      <a:round/>
+                      <a:headEnd type="none" w="med" len="med"/>
+                      <a:tailEnd type="none" w="med" len="med"/>
+                    </a:lnL>
+                    <a:lnR w="12700" cap="flat" cmpd="sng" algn="ctr">
+                      <a:solidFill>
+                        <a:srgbClr val="000000"/>
+                      </a:solidFill>
+                      <a:prstDash val="solid"/>
+                      <a:round/>
+                      <a:headEnd type="none" w="med" len="med"/>
+                      <a:tailEnd type="none" w="med" len="med"/>
+                    </a:lnR>
+                    <a:lnT w="12700" cap="flat" cmpd="sng" algn="ctr">
+                      <a:solidFill>
+                        <a:srgbClr val="000000"/>
+                      </a:solidFill>
+                      <a:prstDash val="solid"/>
+                      <a:round/>
+                      <a:headEnd type="none" w="med" len="med"/>
+                      <a:tailEnd type="none" w="med" len="med"/>
+                    </a:lnT>
+                    <a:lnB w="12700" cap="flat" cmpd="sng" algn="ctr">
+                      <a:solidFill>
+                        <a:srgbClr val="000000"/>
+                      </a:solidFill>
+                      <a:prstDash val="solid"/>
+                      <a:round/>
+                      <a:headEnd type="none" w="med" len="med"/>
+                      <a:tailEnd type="none" w="med" len="med"/>
+                    </a:lnB>
+                    <a:solidFill>
+                      <a:srgbClr val="FFFFFF"/>
+                    </a:solidFill>
+                  </a:tcPr>
+                </a:tc>
+                <a:tc>
+                  <a:txBody>
+                    <a:bodyPr/>
+                    <a:lstStyle/>
+                    <a:p>
+                      <a:pPr indent="140335">
+                        <a:lnSpc>
+                          <a:spcPct val="115000"/>
+                        </a:lnSpc>
+                        <a:spcAft>
+                          <a:spcPts val="800"/>
+                        </a:spcAft>
+                        <a:buNone/>
+                      </a:pPr>
+                      <a:endParaRPr lang="en-US" sz="1800" kern="100">
+                        <a:effectLst/>
+                        <a:latin typeface="Aptos" panose="020B0004020202020204" pitchFamily="34" charset="0"/>
+                        <a:ea typeface="DengXian" panose="02010600030101010101" pitchFamily="2" charset="-122"/>
+                        <a:cs typeface="Times New Roman" panose="02020603050405020304" pitchFamily="18" charset="0"/>
+                      </a:endParaRPr>
+                    </a:p>
+                  </a:txBody>
+                  <a:tcPr marL="68580" marR="68580" marT="0" marB="0" anchor="ctr">
+                    <a:lnL w="12700" cap="flat" cmpd="sng" algn="ctr">
+                      <a:solidFill>
+                        <a:srgbClr val="000000"/>
+                      </a:solidFill>
+                      <a:prstDash val="solid"/>
+                      <a:round/>
+                      <a:headEnd type="none" w="med" len="med"/>
+                      <a:tailEnd type="none" w="med" len="med"/>
+                    </a:lnL>
+                    <a:lnR w="12700" cap="flat" cmpd="sng" algn="ctr">
+                      <a:solidFill>
+                        <a:srgbClr val="000000"/>
+                      </a:solidFill>
+                      <a:prstDash val="solid"/>
+                      <a:round/>
+                      <a:headEnd type="none" w="med" len="med"/>
+                      <a:tailEnd type="none" w="med" len="med"/>
+                    </a:lnR>
+                    <a:lnT w="12700" cap="flat" cmpd="sng" algn="ctr">
+                      <a:solidFill>
+                        <a:srgbClr val="000000"/>
+                      </a:solidFill>
+                      <a:prstDash val="solid"/>
+                      <a:round/>
+                      <a:headEnd type="none" w="med" len="med"/>
+                      <a:tailEnd type="none" w="med" len="med"/>
+                    </a:lnT>
+                    <a:lnB w="12700" cap="flat" cmpd="sng" algn="ctr">
+                      <a:solidFill>
+                        <a:srgbClr val="000000"/>
+                      </a:solidFill>
+                      <a:prstDash val="solid"/>
+                      <a:round/>
+                      <a:headEnd type="none" w="med" len="med"/>
+                      <a:tailEnd type="none" w="med" len="med"/>
+                    </a:lnB>
+                    <a:solidFill>
+                      <a:srgbClr val="FFFFFF"/>
+                    </a:solidFill>
+                  </a:tcPr>
+                </a:tc>
+                <a:tc>
+                  <a:txBody>
+                    <a:bodyPr/>
+                    <a:lstStyle/>
+                    <a:p>
+                      <a:pPr indent="140335">
+                        <a:lnSpc>
+                          <a:spcPct val="115000"/>
+                        </a:lnSpc>
+                        <a:spcAft>
+                          <a:spcPts val="800"/>
+                        </a:spcAft>
+                        <a:buNone/>
+                      </a:pPr>
+                      <a:endParaRPr lang="en-US" sz="1800" kern="100" dirty="0">
+                        <a:effectLst/>
+                        <a:latin typeface="Aptos" panose="020B0004020202020204" pitchFamily="34" charset="0"/>
+                        <a:ea typeface="DengXian" panose="02010600030101010101" pitchFamily="2" charset="-122"/>
+                        <a:cs typeface="Times New Roman" panose="02020603050405020304" pitchFamily="18" charset="0"/>
+                      </a:endParaRPr>
+                    </a:p>
+                  </a:txBody>
+                  <a:tcPr marL="68580" marR="68580" marT="0" marB="0" anchor="ctr">
+                    <a:lnL w="12700" cap="flat" cmpd="sng" algn="ctr">
+                      <a:solidFill>
+                        <a:srgbClr val="000000"/>
+                      </a:solidFill>
+                      <a:prstDash val="solid"/>
+                      <a:round/>
+                      <a:headEnd type="none" w="med" len="med"/>
+                      <a:tailEnd type="none" w="med" len="med"/>
+                    </a:lnL>
+                    <a:lnR w="12700" cap="flat" cmpd="sng" algn="ctr">
+                      <a:solidFill>
+                        <a:srgbClr val="000000"/>
+                      </a:solidFill>
+                      <a:prstDash val="solid"/>
+                      <a:round/>
+                      <a:headEnd type="none" w="med" len="med"/>
+                      <a:tailEnd type="none" w="med" len="med"/>
+                    </a:lnR>
+                    <a:lnT w="12700" cap="flat" cmpd="sng" algn="ctr">
+                      <a:solidFill>
+                        <a:srgbClr val="000000"/>
+                      </a:solidFill>
+                      <a:prstDash val="solid"/>
+                      <a:round/>
+                      <a:headEnd type="none" w="med" len="med"/>
+                      <a:tailEnd type="none" w="med" len="med"/>
+                    </a:lnT>
+                    <a:lnB w="12700" cap="flat" cmpd="sng" algn="ctr">
+                      <a:solidFill>
+                        <a:srgbClr val="000000"/>
+                      </a:solidFill>
+                      <a:prstDash val="solid"/>
+                      <a:round/>
+                      <a:headEnd type="none" w="med" len="med"/>
+                      <a:tailEnd type="none" w="med" len="med"/>
+                    </a:lnB>
+                    <a:solidFill>
+                      <a:srgbClr val="FFFFFF"/>
+                    </a:solidFill>
+                  </a:tcPr>
+                </a:tc>
+                <a:extLst>
+                  <a:ext uri="{0D108BD9-81ED-4DB2-BD59-A6C34878D82A}">
+                    <a16:rowId xmlns:a16="http://schemas.microsoft.com/office/drawing/2014/main" val="1526810937"/>
+                  </a:ext>
+                </a:extLst>
+              </a:tr>
+            </a:tbl>
+          </a:graphicData>
+        </a:graphic>
+      </p:graphicFrame>
+      <p:sp>
+        <p:nvSpPr>
+          <p:cNvPr id="7" name="Content Placeholder 3">
+            <a:extLst>
+              <a:ext uri="{FF2B5EF4-FFF2-40B4-BE49-F238E27FC236}">
+                <a16:creationId xmlns:a16="http://schemas.microsoft.com/office/drawing/2014/main" id="{4B89EF58-E7D7-52A9-B76A-D6754B4BB133}"/>
+              </a:ext>
+            </a:extLst>
+          </p:cNvPr>
+          <p:cNvSpPr>
+            <a:spLocks noGrp="1"/>
+          </p:cNvSpPr>
+          <p:nvPr>
+            <p:ph sz="quarter" idx="1"/>
+          </p:nvPr>
+        </p:nvSpPr>
+        <p:spPr>
+          <a:xfrm>
+            <a:off x="457200" y="1219200"/>
+            <a:ext cx="8229600" cy="4937760"/>
+          </a:xfrm>
+        </p:spPr>
+        <p:txBody>
+          <a:bodyPr/>
+          <a:lstStyle/>
+          <a:p>
+            <a:r>
+              <a:rPr lang="en-US" dirty="0"/>
+              <a:t>For a 4-bit system, calculate the result of summation, setting C and V flags</a:t>
+            </a:r>
+          </a:p>
+        </p:txBody>
+      </p:sp>
+    </p:spTree>
+    <p:extLst>
+      <p:ext uri="{BB962C8B-B14F-4D97-AF65-F5344CB8AC3E}">
+        <p14:creationId xmlns:p14="http://schemas.microsoft.com/office/powerpoint/2010/main" val="3350438353"/>
+      </p:ext>
+    </p:extLst>
+  </p:cSld>
+  <p:clrMapOvr>
+    <a:masterClrMapping/>
+  </p:clrMapOvr>
+</p:sld>
+</file>
+
+<file path=ppt/slides/slide2.xml><?xml version="1.0" encoding="utf-8"?>
+<p:sld xmlns:a="http://schemas.openxmlformats.org/drawingml/2006/main" xmlns:r="http://schemas.openxmlformats.org/officeDocument/2006/relationships" xmlns:p="http://schemas.openxmlformats.org/presentationml/2006/main">
+  <p:cSld>
+    <p:spTree>
+      <p:nvGrpSpPr>
+        <p:cNvPr id="1" name=""/>
+        <p:cNvGrpSpPr/>
+        <p:nvPr/>
+      </p:nvGrpSpPr>
+      <p:grpSpPr>
+        <a:xfrm>
+          <a:off x="0" y="0"/>
+          <a:ext cx="0" cy="0"/>
+          <a:chOff x="0" y="0"/>
+          <a:chExt cx="0" cy="0"/>
+        </a:xfrm>
+      </p:grpSpPr>
+      <p:sp>
+        <p:nvSpPr>
+          <p:cNvPr id="2" name="Title 1">
+            <a:extLst>
+              <a:ext uri="{FF2B5EF4-FFF2-40B4-BE49-F238E27FC236}">
+                <a16:creationId xmlns:a16="http://schemas.microsoft.com/office/drawing/2014/main" id="{6BA372BA-4E36-5939-EA5D-65E91EDB30B3}"/>
+              </a:ext>
+            </a:extLst>
+          </p:cNvPr>
+          <p:cNvSpPr>
+            <a:spLocks noGrp="1"/>
+          </p:cNvSpPr>
+          <p:nvPr>
+            <p:ph type="title"/>
+          </p:nvPr>
+        </p:nvSpPr>
+        <p:spPr/>
+        <p:txBody>
+          <a:bodyPr/>
+          <a:lstStyle/>
+          <a:p>
+            <a:r>
+              <a:rPr lang="en-US" dirty="0"/>
+              <a:t>Bit Manipulations</a:t>
+            </a:r>
+          </a:p>
+        </p:txBody>
+      </p:sp>
+      <p:sp>
+        <p:nvSpPr>
+          <p:cNvPr id="3" name="Slide Number Placeholder 2">
+            <a:extLst>
+              <a:ext uri="{FF2B5EF4-FFF2-40B4-BE49-F238E27FC236}">
+                <a16:creationId xmlns:a16="http://schemas.microsoft.com/office/drawing/2014/main" id="{4B2DE8FE-731E-0AC7-29AB-17D9745E19A1}"/>
+              </a:ext>
+            </a:extLst>
+          </p:cNvPr>
+          <p:cNvSpPr>
+            <a:spLocks noGrp="1"/>
+          </p:cNvSpPr>
+          <p:nvPr>
+            <p:ph type="sldNum" sz="quarter" idx="12"/>
+          </p:nvPr>
+        </p:nvSpPr>
+        <p:spPr/>
+        <p:txBody>
+          <a:bodyPr/>
+          <a:lstStyle/>
+          <a:p>
+            <a:fld id="{EA7C8D44-3667-46F6-9772-CC52308E2A7F}" type="slidenum">
+              <a:rPr kumimoji="0" lang="en-US" smtClean="0"/>
+              <a:pPr/>
+              <a:t>2</a:t>
+            </a:fld>
+            <a:endParaRPr kumimoji="0" lang="en-US" dirty="0"/>
+          </a:p>
+        </p:txBody>
+      </p:sp>
+      <p:sp>
+        <p:nvSpPr>
+          <p:cNvPr id="4" name="Content Placeholder 3">
+            <a:extLst>
+              <a:ext uri="{FF2B5EF4-FFF2-40B4-BE49-F238E27FC236}">
+                <a16:creationId xmlns:a16="http://schemas.microsoft.com/office/drawing/2014/main" id="{0DBB9D86-D583-CABE-4B85-A5314A655FCE}"/>
+              </a:ext>
+            </a:extLst>
+          </p:cNvPr>
+          <p:cNvSpPr>
+            <a:spLocks noGrp="1"/>
+          </p:cNvSpPr>
+          <p:nvPr>
+            <p:ph sz="quarter" idx="1"/>
+          </p:nvPr>
+        </p:nvSpPr>
+        <p:spPr/>
+        <p:txBody>
+          <a:bodyPr>
+            <a:normAutofit/>
+          </a:bodyPr>
+          <a:lstStyle/>
+          <a:p>
+            <a:r>
+              <a:rPr lang="pt-BR" dirty="0"/>
+              <a:t>Compute register values after each instruction</a:t>
+            </a:r>
+          </a:p>
+          <a:p>
+            <a:r>
+              <a:rPr lang="pt-BR" dirty="0"/>
+              <a:t>MOV R0, #0xABC</a:t>
+            </a:r>
+          </a:p>
+          <a:p>
+            <a:r>
+              <a:rPr lang="pt-BR" dirty="0"/>
+              <a:t>MOV R1, #0xDEF</a:t>
+            </a:r>
+          </a:p>
+          <a:p>
+            <a:r>
+              <a:rPr lang="pt-BR" dirty="0"/>
+              <a:t>AND R2, R0, R1</a:t>
+            </a:r>
+          </a:p>
+          <a:p>
+            <a:r>
+              <a:rPr lang="pt-BR" dirty="0"/>
+              <a:t>ORR R3, R0, R1</a:t>
+            </a:r>
+          </a:p>
+          <a:p>
+            <a:r>
+              <a:rPr lang="pt-BR" dirty="0"/>
+              <a:t>EOR R4, R0, R1</a:t>
+            </a:r>
+          </a:p>
+          <a:p>
+            <a:r>
+              <a:rPr lang="pt-BR" dirty="0"/>
+              <a:t>ORN R5, R0, R1</a:t>
+            </a:r>
+          </a:p>
+          <a:p>
+            <a:r>
+              <a:rPr lang="pt-BR" dirty="0"/>
+              <a:t>BIC r6, R0, R1</a:t>
+            </a:r>
+            <a:endParaRPr lang="en-US" dirty="0"/>
+          </a:p>
+        </p:txBody>
+      </p:sp>
+    </p:spTree>
+    <p:extLst>
+      <p:ext uri="{BB962C8B-B14F-4D97-AF65-F5344CB8AC3E}">
+        <p14:creationId xmlns:p14="http://schemas.microsoft.com/office/powerpoint/2010/main" val="1248622466"/>
       </p:ext>
     </p:extLst>
   </p:cSld>

--- a/PPTs/Ch4_ARM_Arithmetic_Logic_Exercises.pptx
+++ b/PPTs/Ch4_ARM_Arithmetic_Logic_Exercises.pptx
@@ -149,7 +149,7 @@
 <file path=ppt/revisionInfo.xml><?xml version="1.0" encoding="utf-8"?>
 <p1510:revInfo xmlns:a="http://schemas.openxmlformats.org/drawingml/2006/main" xmlns:r="http://schemas.openxmlformats.org/officeDocument/2006/relationships" xmlns:p1510="http://schemas.microsoft.com/office/powerpoint/2015/10/main">
   <p1510:revLst>
-    <p1510:client id="{191F7D32-A5D4-44C8-A28D-1F95E29E1B1E}" v="6" dt="2025-10-09T21:59:09.370"/>
+    <p1510:client id="{191F7D32-A5D4-44C8-A28D-1F95E29E1B1E}" v="7" dt="2025-10-14T22:47:17.650"/>
   </p1510:revLst>
 </p1510:revInfo>
 </file>
@@ -158,8 +158,8 @@
 <pc:chgInfo xmlns:a="http://schemas.openxmlformats.org/drawingml/2006/main" xmlns:r="http://schemas.openxmlformats.org/officeDocument/2006/relationships" xmlns:ac="http://schemas.microsoft.com/office/drawing/2013/main/command" xmlns:pc="http://schemas.microsoft.com/office/powerpoint/2013/main/command">
   <pc:docChgLst>
     <pc:chgData name="Zonghua Gu" userId="9a7e1853e1951ef5" providerId="LiveId" clId="{CF1FAA12-072C-4ED5-BA76-0FFFAEFDB88A}"/>
-    <pc:docChg chg="addSld delSld modSld">
-      <pc:chgData name="Zonghua Gu" userId="9a7e1853e1951ef5" providerId="LiveId" clId="{CF1FAA12-072C-4ED5-BA76-0FFFAEFDB88A}" dt="2025-10-09T21:59:09.370" v="34" actId="1076"/>
+    <pc:docChg chg="undo custSel addSld delSld modSld">
+      <pc:chgData name="Zonghua Gu" userId="9a7e1853e1951ef5" providerId="LiveId" clId="{CF1FAA12-072C-4ED5-BA76-0FFFAEFDB88A}" dt="2025-10-14T23:02:37.235" v="227" actId="20577"/>
       <pc:docMkLst>
         <pc:docMk/>
       </pc:docMkLst>
@@ -412,12 +412,28 @@
           <pc:sldMk cId="3345466133" sldId="579"/>
         </pc:sldMkLst>
       </pc:sldChg>
-      <pc:sldChg chg="add">
-        <pc:chgData name="Zonghua Gu" userId="9a7e1853e1951ef5" providerId="LiveId" clId="{CF1FAA12-072C-4ED5-BA76-0FFFAEFDB88A}" dt="2025-10-07T21:13:00.992" v="26"/>
+      <pc:sldChg chg="modSp add mod">
+        <pc:chgData name="Zonghua Gu" userId="9a7e1853e1951ef5" providerId="LiveId" clId="{CF1FAA12-072C-4ED5-BA76-0FFFAEFDB88A}" dt="2025-10-14T23:02:37.235" v="227" actId="20577"/>
         <pc:sldMkLst>
           <pc:docMk/>
           <pc:sldMk cId="3350438353" sldId="587"/>
         </pc:sldMkLst>
+        <pc:spChg chg="mod">
+          <ac:chgData name="Zonghua Gu" userId="9a7e1853e1951ef5" providerId="LiveId" clId="{CF1FAA12-072C-4ED5-BA76-0FFFAEFDB88A}" dt="2025-10-14T22:45:46.749" v="142" actId="27636"/>
+          <ac:spMkLst>
+            <pc:docMk/>
+            <pc:sldMk cId="3350438353" sldId="587"/>
+            <ac:spMk id="7" creationId="{4B89EF58-E7D7-52A9-B76A-D6754B4BB133}"/>
+          </ac:spMkLst>
+        </pc:spChg>
+        <pc:graphicFrameChg chg="mod modGraphic">
+          <ac:chgData name="Zonghua Gu" userId="9a7e1853e1951ef5" providerId="LiveId" clId="{CF1FAA12-072C-4ED5-BA76-0FFFAEFDB88A}" dt="2025-10-14T23:02:37.235" v="227" actId="20577"/>
+          <ac:graphicFrameMkLst>
+            <pc:docMk/>
+            <pc:sldMk cId="3350438353" sldId="587"/>
+            <ac:graphicFrameMk id="6" creationId="{B0565DDE-CFDA-64B0-7C1A-5C1F5D8B93A0}"/>
+          </ac:graphicFrameMkLst>
+        </pc:graphicFrameChg>
       </pc:sldChg>
       <pc:sldChg chg="add">
         <pc:chgData name="Zonghua Gu" userId="9a7e1853e1951ef5" providerId="LiveId" clId="{CF1FAA12-072C-4ED5-BA76-0FFFAEFDB88A}" dt="2025-10-08T01:22:31.330" v="29"/>
@@ -573,7 +589,7 @@
             <a:fld id="{3AC3A17A-95E8-4381-B66B-5D6DE2B3048A}" type="datetimeFigureOut">
               <a:rPr lang="en-US" smtClean="0"/>
               <a:pPr/>
-              <a:t>10/9/2025</a:t>
+              <a:t>10/14/2025</a:t>
             </a:fld>
             <a:endParaRPr lang="en-US"/>
           </a:p>
@@ -3159,7 +3175,7 @@
             <a:fld id="{966FEA0E-C2DF-4252-97AD-54F2B7E07EAC}" type="datetime1">
               <a:rPr lang="en-US" smtClean="0"/>
               <a:pPr eaLnBrk="1" latinLnBrk="0" hangingPunct="1"/>
-              <a:t>10/9/2025</a:t>
+              <a:t>10/14/2025</a:t>
             </a:fld>
             <a:endParaRPr lang="en-US" sz="1600" dirty="0"/>
           </a:p>
@@ -3520,7 +3536,7 @@
             <a:fld id="{69EF9524-0CAA-4F98-BAC2-CE6B712F5E94}" type="datetime1">
               <a:rPr lang="en-US" smtClean="0"/>
               <a:pPr eaLnBrk="1" latinLnBrk="0" hangingPunct="1"/>
-              <a:t>10/9/2025</a:t>
+              <a:t>10/14/2025</a:t>
             </a:fld>
             <a:endParaRPr lang="en-US"/>
           </a:p>
@@ -3697,7 +3713,7 @@
             <a:fld id="{CB20516D-6F89-4C89-8307-32A716E22875}" type="datetime1">
               <a:rPr lang="en-US" smtClean="0"/>
               <a:pPr eaLnBrk="1" latinLnBrk="0" hangingPunct="1"/>
-              <a:t>10/9/2025</a:t>
+              <a:t>10/14/2025</a:t>
             </a:fld>
             <a:endParaRPr lang="en-US"/>
           </a:p>
@@ -3934,7 +3950,7 @@
             <a:fld id="{0CD88620-7329-4FC3-B65D-4EA691138F1B}" type="datetime1">
               <a:rPr lang="en-US" smtClean="0"/>
               <a:pPr eaLnBrk="1" latinLnBrk="0" hangingPunct="1"/>
-              <a:t>10/9/2025</a:t>
+              <a:t>10/14/2025</a:t>
             </a:fld>
             <a:endParaRPr lang="en-US" dirty="0"/>
           </a:p>
@@ -4205,7 +4221,7 @@
             <a:fld id="{0E46F3A1-5653-427D-9F78-56077401431A}" type="datetime1">
               <a:rPr lang="en-US" smtClean="0"/>
               <a:pPr eaLnBrk="1" latinLnBrk="0" hangingPunct="1"/>
-              <a:t>10/9/2025</a:t>
+              <a:t>10/14/2025</a:t>
             </a:fld>
             <a:endParaRPr lang="en-US" dirty="0"/>
           </a:p>
@@ -4427,7 +4443,7 @@
             <a:fld id="{CB67FC03-415A-45F0-B002-DF181377F7DC}" type="datetime1">
               <a:rPr lang="en-US" smtClean="0"/>
               <a:pPr eaLnBrk="1" latinLnBrk="0" hangingPunct="1"/>
-              <a:t>10/9/2025</a:t>
+              <a:t>10/14/2025</a:t>
             </a:fld>
             <a:endParaRPr lang="en-US"/>
           </a:p>
@@ -4781,7 +4797,7 @@
             <a:fld id="{1B6FC726-A0B4-4FC7-90F5-F17415A5C1A3}" type="datetime1">
               <a:rPr lang="en-US" smtClean="0"/>
               <a:pPr eaLnBrk="1" latinLnBrk="0" hangingPunct="1"/>
-              <a:t>10/9/2025</a:t>
+              <a:t>10/14/2025</a:t>
             </a:fld>
             <a:endParaRPr lang="en-US"/>
           </a:p>
@@ -5015,7 +5031,7 @@
             <a:fld id="{BE217211-C3F9-4892-9CC3-C7105638567D}" type="datetime1">
               <a:rPr lang="en-US" smtClean="0"/>
               <a:pPr eaLnBrk="1" latinLnBrk="0" hangingPunct="1"/>
-              <a:t>10/9/2025</a:t>
+              <a:t>10/14/2025</a:t>
             </a:fld>
             <a:endParaRPr lang="en-US"/>
           </a:p>
@@ -5158,7 +5174,7 @@
             <a:fld id="{BA713E6A-6B26-4373-A75B-EF395DC64F9E}" type="datetime1">
               <a:rPr lang="en-US" smtClean="0"/>
               <a:pPr eaLnBrk="1" latinLnBrk="0" hangingPunct="1"/>
-              <a:t>10/9/2025</a:t>
+              <a:t>10/14/2025</a:t>
             </a:fld>
             <a:endParaRPr lang="en-US"/>
           </a:p>
@@ -5437,7 +5453,7 @@
             <a:fld id="{57EB41EF-4260-415A-8DD6-FEDCC46E7EFC}" type="datetime1">
               <a:rPr lang="en-US" smtClean="0"/>
               <a:pPr eaLnBrk="1" latinLnBrk="0" hangingPunct="1"/>
-              <a:t>10/9/2025</a:t>
+              <a:t>10/14/2025</a:t>
             </a:fld>
             <a:endParaRPr lang="en-US"/>
           </a:p>
@@ -5846,7 +5862,7 @@
             <a:fld id="{6BDA80A0-06CC-4492-94A0-E8516751045E}" type="datetime1">
               <a:rPr lang="en-US" smtClean="0"/>
               <a:pPr eaLnBrk="1" latinLnBrk="0" hangingPunct="1"/>
-              <a:t>10/9/2025</a:t>
+              <a:t>10/14/2025</a:t>
             </a:fld>
             <a:endParaRPr lang="en-US"/>
           </a:p>
@@ -6185,7 +6201,7 @@
             <a:fld id="{A25B5B4B-57EE-495D-8E74-A657CFD8BB6C}" type="datetime1">
               <a:rPr lang="en-US" smtClean="0"/>
               <a:pPr eaLnBrk="1" latinLnBrk="0" hangingPunct="1"/>
-              <a:t>10/9/2025</a:t>
+              <a:t>10/14/2025</a:t>
             </a:fld>
             <a:endParaRPr lang="en-US" sz="1400" dirty="0">
               <a:solidFill>
@@ -9742,46 +9758,52 @@
           <p:cNvGraphicFramePr>
             <a:graphicFrameLocks noGrp="1"/>
           </p:cNvGraphicFramePr>
-          <p:nvPr/>
+          <p:nvPr>
+            <p:extLst>
+              <p:ext uri="{D42A27DB-BD31-4B8C-83A1-F6EECF244321}">
+                <p14:modId xmlns:p14="http://schemas.microsoft.com/office/powerpoint/2010/main" val="1637422399"/>
+              </p:ext>
+            </p:extLst>
+          </p:nvPr>
         </p:nvGraphicFramePr>
         <p:xfrm>
-          <a:off x="1094263" y="2333942"/>
-          <a:ext cx="6955473" cy="3304858"/>
+          <a:off x="838200" y="1219200"/>
+          <a:ext cx="7976584" cy="5539678"/>
         </p:xfrm>
         <a:graphic>
           <a:graphicData uri="http://schemas.openxmlformats.org/drawingml/2006/table">
             <a:tbl>
               <a:tblPr firstRow="1" bandRow="1"/>
               <a:tblGrid>
-                <a:gridCol w="1702524">
+                <a:gridCol w="1952466">
                   <a:extLst>
                     <a:ext uri="{9D8B030D-6E8A-4147-A177-3AD203B41FA5}">
                       <a16:colId xmlns:a16="http://schemas.microsoft.com/office/drawing/2014/main" val="2359662815"/>
                     </a:ext>
                   </a:extLst>
                 </a:gridCol>
-                <a:gridCol w="1144345">
+                <a:gridCol w="1312343">
                   <a:extLst>
                     <a:ext uri="{9D8B030D-6E8A-4147-A177-3AD203B41FA5}">
                       <a16:colId xmlns:a16="http://schemas.microsoft.com/office/drawing/2014/main" val="1212662852"/>
                     </a:ext>
                   </a:extLst>
                 </a:gridCol>
-                <a:gridCol w="1173887">
+                <a:gridCol w="712259">
                   <a:extLst>
                     <a:ext uri="{9D8B030D-6E8A-4147-A177-3AD203B41FA5}">
                       <a16:colId xmlns:a16="http://schemas.microsoft.com/office/drawing/2014/main" val="4290731535"/>
                     </a:ext>
                   </a:extLst>
                 </a:gridCol>
-                <a:gridCol w="1191767">
+                <a:gridCol w="720489">
                   <a:extLst>
                     <a:ext uri="{9D8B030D-6E8A-4147-A177-3AD203B41FA5}">
                       <a16:colId xmlns:a16="http://schemas.microsoft.com/office/drawing/2014/main" val="4234417883"/>
                     </a:ext>
                   </a:extLst>
                 </a:gridCol>
-                <a:gridCol w="1742950">
+                <a:gridCol w="3279027">
                   <a:extLst>
                     <a:ext uri="{9D8B030D-6E8A-4147-A177-3AD203B41FA5}">
                       <a16:colId xmlns:a16="http://schemas.microsoft.com/office/drawing/2014/main" val="1819084519"/>
@@ -10297,7 +10319,7 @@
                         <a:buNone/>
                       </a:pPr>
                       <a:r>
-                        <a:rPr lang="en-US" sz="1600" b="1" kern="100">
+                        <a:rPr lang="en-US" sz="1600" b="1" kern="100" dirty="0">
                           <a:solidFill>
                             <a:srgbClr val="000000"/>
                           </a:solidFill>
@@ -10308,7 +10330,7 @@
                         </a:rPr>
                         <a:t>0110</a:t>
                       </a:r>
-                      <a:endParaRPr lang="en-US" sz="1800" kern="100">
+                      <a:endParaRPr lang="en-US" sz="1800" kern="100" dirty="0">
                         <a:effectLst/>
                         <a:latin typeface="Aptos" panose="020B0004020202020204" pitchFamily="34" charset="0"/>
                         <a:ea typeface="DengXian" panose="02010600030101010101" pitchFamily="2" charset="-122"/>
@@ -10372,12 +10394,15 @@
                         </a:spcAft>
                         <a:buNone/>
                       </a:pPr>
-                      <a:endParaRPr lang="en-US" sz="1800" kern="100" dirty="0">
-                        <a:effectLst/>
-                        <a:latin typeface="Aptos" panose="020B0004020202020204" pitchFamily="34" charset="0"/>
-                        <a:ea typeface="DengXian" panose="02010600030101010101" pitchFamily="2" charset="-122"/>
-                        <a:cs typeface="Times New Roman" panose="02020603050405020304" pitchFamily="18" charset="0"/>
-                      </a:endParaRPr>
+                      <a:r>
+                        <a:rPr lang="en-US" sz="1800" kern="100" dirty="0">
+                          <a:effectLst/>
+                          <a:latin typeface="Aptos" panose="020B0004020202020204" pitchFamily="34" charset="0"/>
+                          <a:ea typeface="DengXian" panose="02010600030101010101" pitchFamily="2" charset="-122"/>
+                          <a:cs typeface="Times New Roman" panose="02020603050405020304" pitchFamily="18" charset="0"/>
+                        </a:rPr>
+                        <a:t>0</a:t>
+                      </a:r>
                     </a:p>
                   </a:txBody>
                   <a:tcPr marL="68580" marR="68580" marT="0" marB="0" anchor="ctr">
@@ -10436,12 +10461,15 @@
                         </a:spcAft>
                         <a:buNone/>
                       </a:pPr>
-                      <a:endParaRPr lang="en-US" sz="1800" kern="100">
-                        <a:effectLst/>
-                        <a:latin typeface="Aptos" panose="020B0004020202020204" pitchFamily="34" charset="0"/>
-                        <a:ea typeface="DengXian" panose="02010600030101010101" pitchFamily="2" charset="-122"/>
-                        <a:cs typeface="Times New Roman" panose="02020603050405020304" pitchFamily="18" charset="0"/>
-                      </a:endParaRPr>
+                      <a:r>
+                        <a:rPr lang="en-US" sz="1800" kern="100" dirty="0">
+                          <a:effectLst/>
+                          <a:latin typeface="Aptos" panose="020B0004020202020204" pitchFamily="34" charset="0"/>
+                          <a:ea typeface="DengXian" panose="02010600030101010101" pitchFamily="2" charset="-122"/>
+                          <a:cs typeface="Times New Roman" panose="02020603050405020304" pitchFamily="18" charset="0"/>
+                        </a:rPr>
+                        <a:t>0</a:t>
+                      </a:r>
                     </a:p>
                   </a:txBody>
                   <a:tcPr marL="68580" marR="68580" marT="0" marB="0" anchor="ctr">
@@ -10500,12 +10528,15 @@
                         </a:spcAft>
                         <a:buNone/>
                       </a:pPr>
-                      <a:endParaRPr lang="en-US" sz="1800" kern="100" dirty="0">
-                        <a:effectLst/>
-                        <a:latin typeface="Aptos" panose="020B0004020202020204" pitchFamily="34" charset="0"/>
-                        <a:ea typeface="DengXian" panose="02010600030101010101" pitchFamily="2" charset="-122"/>
-                        <a:cs typeface="Times New Roman" panose="02020603050405020304" pitchFamily="18" charset="0"/>
-                      </a:endParaRPr>
+                      <a:r>
+                        <a:rPr lang="en-US" sz="1800" kern="100" dirty="0">
+                          <a:effectLst/>
+                          <a:latin typeface="Aptos" panose="020B0004020202020204" pitchFamily="34" charset="0"/>
+                          <a:ea typeface="DengXian" panose="02010600030101010101" pitchFamily="2" charset="-122"/>
+                          <a:cs typeface="Times New Roman" panose="02020603050405020304" pitchFamily="18" charset="0"/>
+                        </a:rPr>
+                        <a:t>Y / Y</a:t>
+                      </a:r>
                     </a:p>
                   </a:txBody>
                   <a:tcPr marL="68580" marR="68580" marT="0" marB="0" anchor="ctr">
@@ -10648,23 +10679,14 @@
                         <a:buNone/>
                       </a:pPr>
                       <a:r>
-                        <a:rPr lang="en-US" sz="1600" b="1" kern="100">
-                          <a:solidFill>
-                            <a:srgbClr val="000000"/>
-                          </a:solidFill>
+                        <a:rPr lang="en-US" sz="1800" kern="100" dirty="0">
                           <a:effectLst/>
-                          <a:latin typeface="Consolas" panose="020B0609020204030204" pitchFamily="49" charset="0"/>
-                          <a:ea typeface="Times New Roman" panose="02020603050405020304" pitchFamily="18" charset="0"/>
-                          <a:cs typeface="Consolas" panose="020B0609020204030204" pitchFamily="49" charset="0"/>
+                          <a:latin typeface="Aptos" panose="020B0004020202020204" pitchFamily="34" charset="0"/>
+                          <a:ea typeface="DengXian" panose="02010600030101010101" pitchFamily="2" charset="-122"/>
+                          <a:cs typeface="Times New Roman" panose="02020603050405020304" pitchFamily="18" charset="0"/>
                         </a:rPr>
                         <a:t>1010</a:t>
                       </a:r>
-                      <a:endParaRPr lang="en-US" sz="1800" kern="100">
-                        <a:effectLst/>
-                        <a:latin typeface="Aptos" panose="020B0004020202020204" pitchFamily="34" charset="0"/>
-                        <a:ea typeface="DengXian" panose="02010600030101010101" pitchFamily="2" charset="-122"/>
-                        <a:cs typeface="Times New Roman" panose="02020603050405020304" pitchFamily="18" charset="0"/>
-                      </a:endParaRPr>
                     </a:p>
                   </a:txBody>
                   <a:tcPr marL="68580" marR="68580" marT="0" marB="0" anchor="ctr">
@@ -10723,12 +10745,15 @@
                         </a:spcAft>
                         <a:buNone/>
                       </a:pPr>
-                      <a:endParaRPr lang="en-US" sz="1800" kern="100">
-                        <a:effectLst/>
-                        <a:latin typeface="Aptos" panose="020B0004020202020204" pitchFamily="34" charset="0"/>
-                        <a:ea typeface="DengXian" panose="02010600030101010101" pitchFamily="2" charset="-122"/>
-                        <a:cs typeface="Times New Roman" panose="02020603050405020304" pitchFamily="18" charset="0"/>
-                      </a:endParaRPr>
+                      <a:r>
+                        <a:rPr lang="en-US" sz="1800" kern="100" dirty="0">
+                          <a:effectLst/>
+                          <a:latin typeface="Aptos" panose="020B0004020202020204" pitchFamily="34" charset="0"/>
+                          <a:ea typeface="DengXian" panose="02010600030101010101" pitchFamily="2" charset="-122"/>
+                          <a:cs typeface="Times New Roman" panose="02020603050405020304" pitchFamily="18" charset="0"/>
+                        </a:rPr>
+                        <a:t>0</a:t>
+                      </a:r>
                     </a:p>
                   </a:txBody>
                   <a:tcPr marL="68580" marR="68580" marT="0" marB="0" anchor="ctr">
@@ -10787,12 +10812,15 @@
                         </a:spcAft>
                         <a:buNone/>
                       </a:pPr>
-                      <a:endParaRPr lang="en-US" sz="1800" kern="100">
-                        <a:effectLst/>
-                        <a:latin typeface="Aptos" panose="020B0004020202020204" pitchFamily="34" charset="0"/>
-                        <a:ea typeface="DengXian" panose="02010600030101010101" pitchFamily="2" charset="-122"/>
-                        <a:cs typeface="Times New Roman" panose="02020603050405020304" pitchFamily="18" charset="0"/>
-                      </a:endParaRPr>
+                      <a:r>
+                        <a:rPr lang="en-US" sz="1800" kern="100" dirty="0">
+                          <a:effectLst/>
+                          <a:latin typeface="Aptos" panose="020B0004020202020204" pitchFamily="34" charset="0"/>
+                          <a:ea typeface="DengXian" panose="02010600030101010101" pitchFamily="2" charset="-122"/>
+                          <a:cs typeface="Times New Roman" panose="02020603050405020304" pitchFamily="18" charset="0"/>
+                        </a:rPr>
+                        <a:t>1</a:t>
+                      </a:r>
                     </a:p>
                   </a:txBody>
                   <a:tcPr marL="68580" marR="68580" marT="0" marB="0" anchor="ctr">
@@ -10851,12 +10879,15 @@
                         </a:spcAft>
                         <a:buNone/>
                       </a:pPr>
-                      <a:endParaRPr lang="en-US" sz="1800" kern="100" dirty="0">
-                        <a:effectLst/>
-                        <a:latin typeface="Aptos" panose="020B0004020202020204" pitchFamily="34" charset="0"/>
-                        <a:ea typeface="DengXian" panose="02010600030101010101" pitchFamily="2" charset="-122"/>
-                        <a:cs typeface="Times New Roman" panose="02020603050405020304" pitchFamily="18" charset="0"/>
-                      </a:endParaRPr>
+                      <a:r>
+                        <a:rPr lang="en-US" sz="1800" kern="100" dirty="0">
+                          <a:effectLst/>
+                          <a:latin typeface="Aptos" panose="020B0004020202020204" pitchFamily="34" charset="0"/>
+                          <a:ea typeface="DengXian" panose="02010600030101010101" pitchFamily="2" charset="-122"/>
+                          <a:cs typeface="Times New Roman" panose="02020603050405020304" pitchFamily="18" charset="0"/>
+                        </a:rPr>
+                        <a:t>Y / N</a:t>
+                      </a:r>
                     </a:p>
                   </a:txBody>
                   <a:tcPr marL="68580" marR="68580" marT="0" marB="0" anchor="ctr">
@@ -10999,23 +11030,14 @@
                         <a:buNone/>
                       </a:pPr>
                       <a:r>
-                        <a:rPr lang="en-US" sz="1600" b="1" kern="100">
-                          <a:solidFill>
-                            <a:srgbClr val="000000"/>
-                          </a:solidFill>
+                        <a:rPr lang="en-US" sz="1800" kern="100" dirty="0">
                           <a:effectLst/>
-                          <a:latin typeface="Consolas" panose="020B0609020204030204" pitchFamily="49" charset="0"/>
-                          <a:ea typeface="Times New Roman" panose="02020603050405020304" pitchFamily="18" charset="0"/>
-                          <a:cs typeface="Consolas" panose="020B0609020204030204" pitchFamily="49" charset="0"/>
+                          <a:latin typeface="Aptos" panose="020B0004020202020204" pitchFamily="34" charset="0"/>
+                          <a:ea typeface="DengXian" panose="02010600030101010101" pitchFamily="2" charset="-122"/>
+                          <a:cs typeface="Times New Roman" panose="02020603050405020304" pitchFamily="18" charset="0"/>
                         </a:rPr>
                         <a:t>1010</a:t>
                       </a:r>
-                      <a:endParaRPr lang="en-US" sz="1800" kern="100">
-                        <a:effectLst/>
-                        <a:latin typeface="Aptos" panose="020B0004020202020204" pitchFamily="34" charset="0"/>
-                        <a:ea typeface="DengXian" panose="02010600030101010101" pitchFamily="2" charset="-122"/>
-                        <a:cs typeface="Times New Roman" panose="02020603050405020304" pitchFamily="18" charset="0"/>
-                      </a:endParaRPr>
                     </a:p>
                   </a:txBody>
                   <a:tcPr marL="68580" marR="68580" marT="0" marB="0" anchor="ctr">
@@ -11074,12 +11096,15 @@
                         </a:spcAft>
                         <a:buNone/>
                       </a:pPr>
-                      <a:endParaRPr lang="en-US" sz="1800" kern="100">
-                        <a:effectLst/>
-                        <a:latin typeface="Aptos" panose="020B0004020202020204" pitchFamily="34" charset="0"/>
-                        <a:ea typeface="DengXian" panose="02010600030101010101" pitchFamily="2" charset="-122"/>
-                        <a:cs typeface="Times New Roman" panose="02020603050405020304" pitchFamily="18" charset="0"/>
-                      </a:endParaRPr>
+                      <a:r>
+                        <a:rPr lang="en-US" sz="1800" kern="100" dirty="0">
+                          <a:effectLst/>
+                          <a:latin typeface="Aptos" panose="020B0004020202020204" pitchFamily="34" charset="0"/>
+                          <a:ea typeface="DengXian" panose="02010600030101010101" pitchFamily="2" charset="-122"/>
+                          <a:cs typeface="Times New Roman" panose="02020603050405020304" pitchFamily="18" charset="0"/>
+                        </a:rPr>
+                        <a:t>1</a:t>
+                      </a:r>
                     </a:p>
                   </a:txBody>
                   <a:tcPr marL="68580" marR="68580" marT="0" marB="0" anchor="ctr">
@@ -11138,12 +11163,15 @@
                         </a:spcAft>
                         <a:buNone/>
                       </a:pPr>
-                      <a:endParaRPr lang="en-US" sz="1800" kern="100">
-                        <a:effectLst/>
-                        <a:latin typeface="Aptos" panose="020B0004020202020204" pitchFamily="34" charset="0"/>
-                        <a:ea typeface="DengXian" panose="02010600030101010101" pitchFamily="2" charset="-122"/>
-                        <a:cs typeface="Times New Roman" panose="02020603050405020304" pitchFamily="18" charset="0"/>
-                      </a:endParaRPr>
+                      <a:r>
+                        <a:rPr lang="en-US" sz="1800" kern="100" dirty="0">
+                          <a:effectLst/>
+                          <a:latin typeface="Aptos" panose="020B0004020202020204" pitchFamily="34" charset="0"/>
+                          <a:ea typeface="DengXian" panose="02010600030101010101" pitchFamily="2" charset="-122"/>
+                          <a:cs typeface="Times New Roman" panose="02020603050405020304" pitchFamily="18" charset="0"/>
+                        </a:rPr>
+                        <a:t>0</a:t>
+                      </a:r>
                     </a:p>
                   </a:txBody>
                   <a:tcPr marL="68580" marR="68580" marT="0" marB="0" anchor="ctr">
@@ -11202,12 +11230,55 @@
                         </a:spcAft>
                         <a:buNone/>
                       </a:pPr>
-                      <a:endParaRPr lang="en-US" sz="1800" kern="100" dirty="0">
-                        <a:effectLst/>
-                        <a:latin typeface="Aptos" panose="020B0004020202020204" pitchFamily="34" charset="0"/>
-                        <a:ea typeface="DengXian" panose="02010600030101010101" pitchFamily="2" charset="-122"/>
-                        <a:cs typeface="Times New Roman" panose="02020603050405020304" pitchFamily="18" charset="0"/>
-                      </a:endParaRPr>
+                      <a:r>
+                        <a:rPr lang="en-US" sz="1800" kern="100" dirty="0">
+                          <a:effectLst/>
+                          <a:latin typeface="Aptos" panose="020B0004020202020204" pitchFamily="34" charset="0"/>
+                          <a:ea typeface="DengXian" panose="02010600030101010101" pitchFamily="2" charset="-122"/>
+                          <a:cs typeface="Times New Roman" panose="02020603050405020304" pitchFamily="18" charset="0"/>
+                        </a:rPr>
+                        <a:t>N / Y </a:t>
+                      </a:r>
+                    </a:p>
+                    <a:p>
+                      <a:pPr indent="140335">
+                        <a:lnSpc>
+                          <a:spcPct val="115000"/>
+                        </a:lnSpc>
+                        <a:spcAft>
+                          <a:spcPts val="800"/>
+                        </a:spcAft>
+                        <a:buNone/>
+                      </a:pPr>
+                      <a:r>
+                        <a:rPr lang="en-US" sz="1800" kern="100" dirty="0">
+                          <a:effectLst/>
+                          <a:latin typeface="Aptos" panose="020B0004020202020204" pitchFamily="34" charset="0"/>
+                          <a:ea typeface="DengXian" panose="02010600030101010101" pitchFamily="2" charset="-122"/>
+                          <a:cs typeface="Times New Roman" panose="02020603050405020304" pitchFamily="18" charset="0"/>
+                        </a:rPr>
+                        <a:t>Unsigned add: 12+14=10  (GT 26)</a:t>
+                      </a:r>
+                    </a:p>
+                    <a:p>
+                      <a:pPr indent="140335">
+                        <a:lnSpc>
+                          <a:spcPct val="115000"/>
+                        </a:lnSpc>
+                        <a:spcAft>
+                          <a:spcPts val="800"/>
+                        </a:spcAft>
+                        <a:buNone/>
+                      </a:pPr>
+                      <a:r>
+                        <a:rPr lang="en-US" sz="1800" kern="100" dirty="0">
+                          <a:effectLst/>
+                          <a:latin typeface="Aptos" panose="020B0004020202020204" pitchFamily="34" charset="0"/>
+                          <a:ea typeface="DengXian" panose="02010600030101010101" pitchFamily="2" charset="-122"/>
+                          <a:cs typeface="Times New Roman" panose="02020603050405020304" pitchFamily="18" charset="0"/>
+                        </a:rPr>
+                        <a:t>Signed add: -4 – 2 = -6</a:t>
+                      </a:r>
                     </a:p>
                   </a:txBody>
                   <a:tcPr marL="68580" marR="68580" marT="0" marB="0" anchor="ctr">
@@ -11350,23 +11421,14 @@
                         <a:buNone/>
                       </a:pPr>
                       <a:r>
-                        <a:rPr lang="en-US" sz="1600" b="1" kern="100">
-                          <a:solidFill>
-                            <a:srgbClr val="000000"/>
-                          </a:solidFill>
+                        <a:rPr lang="en-US" sz="1800" kern="100" dirty="0">
                           <a:effectLst/>
-                          <a:latin typeface="Consolas" panose="020B0609020204030204" pitchFamily="49" charset="0"/>
-                          <a:ea typeface="Times New Roman" panose="02020603050405020304" pitchFamily="18" charset="0"/>
-                          <a:cs typeface="Consolas" panose="020B0609020204030204" pitchFamily="49" charset="0"/>
+                          <a:latin typeface="Aptos" panose="020B0004020202020204" pitchFamily="34" charset="0"/>
+                          <a:ea typeface="DengXian" panose="02010600030101010101" pitchFamily="2" charset="-122"/>
+                          <a:cs typeface="Times New Roman" panose="02020603050405020304" pitchFamily="18" charset="0"/>
                         </a:rPr>
                         <a:t>0110</a:t>
                       </a:r>
-                      <a:endParaRPr lang="en-US" sz="1800" kern="100">
-                        <a:effectLst/>
-                        <a:latin typeface="Aptos" panose="020B0004020202020204" pitchFamily="34" charset="0"/>
-                        <a:ea typeface="DengXian" panose="02010600030101010101" pitchFamily="2" charset="-122"/>
-                        <a:cs typeface="Times New Roman" panose="02020603050405020304" pitchFamily="18" charset="0"/>
-                      </a:endParaRPr>
                     </a:p>
                   </a:txBody>
                   <a:tcPr marL="68580" marR="68580" marT="0" marB="0" anchor="ctr">
@@ -11425,12 +11487,15 @@
                         </a:spcAft>
                         <a:buNone/>
                       </a:pPr>
-                      <a:endParaRPr lang="en-US" sz="1800" kern="100">
-                        <a:effectLst/>
-                        <a:latin typeface="Aptos" panose="020B0004020202020204" pitchFamily="34" charset="0"/>
-                        <a:ea typeface="DengXian" panose="02010600030101010101" pitchFamily="2" charset="-122"/>
-                        <a:cs typeface="Times New Roman" panose="02020603050405020304" pitchFamily="18" charset="0"/>
-                      </a:endParaRPr>
+                      <a:r>
+                        <a:rPr lang="en-US" sz="1800" kern="100" dirty="0">
+                          <a:effectLst/>
+                          <a:latin typeface="Aptos" panose="020B0004020202020204" pitchFamily="34" charset="0"/>
+                          <a:ea typeface="DengXian" panose="02010600030101010101" pitchFamily="2" charset="-122"/>
+                          <a:cs typeface="Times New Roman" panose="02020603050405020304" pitchFamily="18" charset="0"/>
+                        </a:rPr>
+                        <a:t>1</a:t>
+                      </a:r>
                     </a:p>
                   </a:txBody>
                   <a:tcPr marL="68580" marR="68580" marT="0" marB="0" anchor="ctr">
@@ -11489,12 +11554,15 @@
                         </a:spcAft>
                         <a:buNone/>
                       </a:pPr>
-                      <a:endParaRPr lang="en-US" sz="1800" kern="100">
-                        <a:effectLst/>
-                        <a:latin typeface="Aptos" panose="020B0004020202020204" pitchFamily="34" charset="0"/>
-                        <a:ea typeface="DengXian" panose="02010600030101010101" pitchFamily="2" charset="-122"/>
-                        <a:cs typeface="Times New Roman" panose="02020603050405020304" pitchFamily="18" charset="0"/>
-                      </a:endParaRPr>
+                      <a:r>
+                        <a:rPr lang="en-US" sz="1800" kern="100" dirty="0">
+                          <a:effectLst/>
+                          <a:latin typeface="Aptos" panose="020B0004020202020204" pitchFamily="34" charset="0"/>
+                          <a:ea typeface="DengXian" panose="02010600030101010101" pitchFamily="2" charset="-122"/>
+                          <a:cs typeface="Times New Roman" panose="02020603050405020304" pitchFamily="18" charset="0"/>
+                        </a:rPr>
+                        <a:t>1</a:t>
+                      </a:r>
                     </a:p>
                   </a:txBody>
                   <a:tcPr marL="68580" marR="68580" marT="0" marB="0" anchor="ctr">
@@ -11553,12 +11621,55 @@
                         </a:spcAft>
                         <a:buNone/>
                       </a:pPr>
-                      <a:endParaRPr lang="en-US" sz="1800" kern="100" dirty="0">
-                        <a:effectLst/>
-                        <a:latin typeface="Aptos" panose="020B0004020202020204" pitchFamily="34" charset="0"/>
-                        <a:ea typeface="DengXian" panose="02010600030101010101" pitchFamily="2" charset="-122"/>
-                        <a:cs typeface="Times New Roman" panose="02020603050405020304" pitchFamily="18" charset="0"/>
-                      </a:endParaRPr>
+                      <a:r>
+                        <a:rPr lang="en-US" sz="1800" kern="100" dirty="0">
+                          <a:effectLst/>
+                          <a:latin typeface="Aptos" panose="020B0004020202020204" pitchFamily="34" charset="0"/>
+                          <a:ea typeface="DengXian" panose="02010600030101010101" pitchFamily="2" charset="-122"/>
+                          <a:cs typeface="Times New Roman" panose="02020603050405020304" pitchFamily="18" charset="0"/>
+                        </a:rPr>
+                        <a:t>N / N</a:t>
+                      </a:r>
+                    </a:p>
+                    <a:p>
+                      <a:pPr indent="140335">
+                        <a:lnSpc>
+                          <a:spcPct val="115000"/>
+                        </a:lnSpc>
+                        <a:spcAft>
+                          <a:spcPts val="800"/>
+                        </a:spcAft>
+                        <a:buNone/>
+                      </a:pPr>
+                      <a:r>
+                        <a:rPr lang="en-US" sz="1800" kern="100" dirty="0">
+                          <a:effectLst/>
+                          <a:latin typeface="Aptos" panose="020B0004020202020204" pitchFamily="34" charset="0"/>
+                          <a:ea typeface="DengXian" panose="02010600030101010101" pitchFamily="2" charset="-122"/>
+                          <a:cs typeface="Times New Roman" panose="02020603050405020304" pitchFamily="18" charset="0"/>
+                        </a:rPr>
+                        <a:t>Unsigned add: 12+10=6  (GT 22)</a:t>
+                      </a:r>
+                    </a:p>
+                    <a:p>
+                      <a:pPr indent="140335">
+                        <a:lnSpc>
+                          <a:spcPct val="115000"/>
+                        </a:lnSpc>
+                        <a:spcAft>
+                          <a:spcPts val="800"/>
+                        </a:spcAft>
+                        <a:buNone/>
+                      </a:pPr>
+                      <a:r>
+                        <a:rPr lang="en-US" sz="1800" kern="100" dirty="0">
+                          <a:effectLst/>
+                          <a:latin typeface="Aptos" panose="020B0004020202020204" pitchFamily="34" charset="0"/>
+                          <a:ea typeface="DengXian" panose="02010600030101010101" pitchFamily="2" charset="-122"/>
+                          <a:cs typeface="Times New Roman" panose="02020603050405020304" pitchFamily="18" charset="0"/>
+                        </a:rPr>
+                        <a:t>Signed add: -4 –6 =  6 (GT -10)</a:t>
+                      </a:r>
                     </a:p>
                   </a:txBody>
                   <a:tcPr marL="68580" marR="68580" marT="0" marB="0" anchor="ctr">
@@ -11701,23 +11812,14 @@
                         <a:buNone/>
                       </a:pPr>
                       <a:r>
-                        <a:rPr lang="en-US" sz="1600" b="1" kern="100">
-                          <a:solidFill>
-                            <a:srgbClr val="000000"/>
-                          </a:solidFill>
+                        <a:rPr lang="en-US" sz="1800" kern="100" dirty="0">
                           <a:effectLst/>
-                          <a:latin typeface="Consolas" panose="020B0609020204030204" pitchFamily="49" charset="0"/>
-                          <a:ea typeface="Times New Roman" panose="02020603050405020304" pitchFamily="18" charset="0"/>
-                          <a:cs typeface="Consolas" panose="020B0609020204030204" pitchFamily="49" charset="0"/>
+                          <a:latin typeface="Aptos" panose="020B0004020202020204" pitchFamily="34" charset="0"/>
+                          <a:ea typeface="DengXian" panose="02010600030101010101" pitchFamily="2" charset="-122"/>
+                          <a:cs typeface="Times New Roman" panose="02020603050405020304" pitchFamily="18" charset="0"/>
                         </a:rPr>
                         <a:t>0010</a:t>
                       </a:r>
-                      <a:endParaRPr lang="en-US" sz="1800" kern="100">
-                        <a:effectLst/>
-                        <a:latin typeface="Aptos" panose="020B0004020202020204" pitchFamily="34" charset="0"/>
-                        <a:ea typeface="DengXian" panose="02010600030101010101" pitchFamily="2" charset="-122"/>
-                        <a:cs typeface="Times New Roman" panose="02020603050405020304" pitchFamily="18" charset="0"/>
-                      </a:endParaRPr>
                     </a:p>
                   </a:txBody>
                   <a:tcPr marL="68580" marR="68580" marT="0" marB="0" anchor="ctr">
@@ -11776,12 +11878,15 @@
                         </a:spcAft>
                         <a:buNone/>
                       </a:pPr>
-                      <a:endParaRPr lang="en-US" sz="1800" kern="100">
-                        <a:effectLst/>
-                        <a:latin typeface="Aptos" panose="020B0004020202020204" pitchFamily="34" charset="0"/>
-                        <a:ea typeface="DengXian" panose="02010600030101010101" pitchFamily="2" charset="-122"/>
-                        <a:cs typeface="Times New Roman" panose="02020603050405020304" pitchFamily="18" charset="0"/>
-                      </a:endParaRPr>
+                      <a:r>
+                        <a:rPr lang="en-US" sz="1800" kern="100" dirty="0">
+                          <a:effectLst/>
+                          <a:latin typeface="Aptos" panose="020B0004020202020204" pitchFamily="34" charset="0"/>
+                          <a:ea typeface="DengXian" panose="02010600030101010101" pitchFamily="2" charset="-122"/>
+                          <a:cs typeface="Times New Roman" panose="02020603050405020304" pitchFamily="18" charset="0"/>
+                        </a:rPr>
+                        <a:t>1</a:t>
+                      </a:r>
                     </a:p>
                   </a:txBody>
                   <a:tcPr marL="68580" marR="68580" marT="0" marB="0" anchor="ctr">
@@ -11840,12 +11945,15 @@
                         </a:spcAft>
                         <a:buNone/>
                       </a:pPr>
-                      <a:endParaRPr lang="en-US" sz="1800" kern="100">
-                        <a:effectLst/>
-                        <a:latin typeface="Aptos" panose="020B0004020202020204" pitchFamily="34" charset="0"/>
-                        <a:ea typeface="DengXian" panose="02010600030101010101" pitchFamily="2" charset="-122"/>
-                        <a:cs typeface="Times New Roman" panose="02020603050405020304" pitchFamily="18" charset="0"/>
-                      </a:endParaRPr>
+                      <a:r>
+                        <a:rPr lang="en-US" sz="1800" kern="100" dirty="0">
+                          <a:effectLst/>
+                          <a:latin typeface="Aptos" panose="020B0004020202020204" pitchFamily="34" charset="0"/>
+                          <a:ea typeface="DengXian" panose="02010600030101010101" pitchFamily="2" charset="-122"/>
+                          <a:cs typeface="Times New Roman" panose="02020603050405020304" pitchFamily="18" charset="0"/>
+                        </a:rPr>
+                        <a:t>0</a:t>
+                      </a:r>
                     </a:p>
                   </a:txBody>
                   <a:tcPr marL="68580" marR="68580" marT="0" marB="0" anchor="ctr">
@@ -11904,12 +12012,15 @@
                         </a:spcAft>
                         <a:buNone/>
                       </a:pPr>
-                      <a:endParaRPr lang="en-US" sz="1800" kern="100" dirty="0">
-                        <a:effectLst/>
-                        <a:latin typeface="Aptos" panose="020B0004020202020204" pitchFamily="34" charset="0"/>
-                        <a:ea typeface="DengXian" panose="02010600030101010101" pitchFamily="2" charset="-122"/>
-                        <a:cs typeface="Times New Roman" panose="02020603050405020304" pitchFamily="18" charset="0"/>
-                      </a:endParaRPr>
+                      <a:r>
+                        <a:rPr lang="en-US" sz="1800" kern="100" dirty="0">
+                          <a:effectLst/>
+                          <a:latin typeface="Aptos" panose="020B0004020202020204" pitchFamily="34" charset="0"/>
+                          <a:ea typeface="DengXian" panose="02010600030101010101" pitchFamily="2" charset="-122"/>
+                          <a:cs typeface="Times New Roman" panose="02020603050405020304" pitchFamily="18" charset="0"/>
+                        </a:rPr>
+                        <a:t>Y / Y</a:t>
+                      </a:r>
                     </a:p>
                   </a:txBody>
                   <a:tcPr marL="68580" marR="68580" marT="0" marB="0" anchor="ctr">
@@ -12051,19 +12162,7 @@
                         </a:spcAft>
                         <a:buNone/>
                       </a:pPr>
-                      <a:r>
-                        <a:rPr lang="en-US" sz="1600" b="1" kern="100">
-                          <a:solidFill>
-                            <a:srgbClr val="000000"/>
-                          </a:solidFill>
-                          <a:effectLst/>
-                          <a:latin typeface="Consolas" panose="020B0609020204030204" pitchFamily="49" charset="0"/>
-                          <a:ea typeface="Times New Roman" panose="02020603050405020304" pitchFamily="18" charset="0"/>
-                          <a:cs typeface="Consolas" panose="020B0609020204030204" pitchFamily="49" charset="0"/>
-                        </a:rPr>
-                        <a:t>1110</a:t>
-                      </a:r>
-                      <a:endParaRPr lang="en-US" sz="1800" kern="100">
+                      <a:endParaRPr lang="en-US" sz="1800" kern="100" dirty="0">
                         <a:effectLst/>
                         <a:latin typeface="Aptos" panose="020B0004020202020204" pitchFamily="34" charset="0"/>
                         <a:ea typeface="DengXian" panose="02010600030101010101" pitchFamily="2" charset="-122"/>
@@ -12403,23 +12502,14 @@
                         <a:buNone/>
                       </a:pPr>
                       <a:r>
-                        <a:rPr lang="en-US" sz="1600" b="1" kern="100">
-                          <a:solidFill>
-                            <a:srgbClr val="000000"/>
-                          </a:solidFill>
+                        <a:rPr lang="en-US" sz="1800" kern="100" dirty="0">
                           <a:effectLst/>
-                          <a:latin typeface="Consolas" panose="020B0609020204030204" pitchFamily="49" charset="0"/>
-                          <a:ea typeface="Times New Roman" panose="02020603050405020304" pitchFamily="18" charset="0"/>
-                          <a:cs typeface="Consolas" panose="020B0609020204030204" pitchFamily="49" charset="0"/>
+                          <a:latin typeface="Aptos" panose="020B0004020202020204" pitchFamily="34" charset="0"/>
+                          <a:ea typeface="DengXian" panose="02010600030101010101" pitchFamily="2" charset="-122"/>
+                          <a:cs typeface="Times New Roman" panose="02020603050405020304" pitchFamily="18" charset="0"/>
                         </a:rPr>
                         <a:t>0110</a:t>
                       </a:r>
-                      <a:endParaRPr lang="en-US" sz="1800" kern="100">
-                        <a:effectLst/>
-                        <a:latin typeface="Aptos" panose="020B0004020202020204" pitchFamily="34" charset="0"/>
-                        <a:ea typeface="DengXian" panose="02010600030101010101" pitchFamily="2" charset="-122"/>
-                        <a:cs typeface="Times New Roman" panose="02020603050405020304" pitchFamily="18" charset="0"/>
-                      </a:endParaRPr>
                     </a:p>
                   </a:txBody>
                   <a:tcPr marL="68580" marR="68580" marT="0" marB="0" anchor="ctr">
@@ -12478,12 +12568,15 @@
                         </a:spcAft>
                         <a:buNone/>
                       </a:pPr>
-                      <a:endParaRPr lang="en-US" sz="1800" kern="100">
-                        <a:effectLst/>
-                        <a:latin typeface="Aptos" panose="020B0004020202020204" pitchFamily="34" charset="0"/>
-                        <a:ea typeface="DengXian" panose="02010600030101010101" pitchFamily="2" charset="-122"/>
-                        <a:cs typeface="Times New Roman" panose="02020603050405020304" pitchFamily="18" charset="0"/>
-                      </a:endParaRPr>
+                      <a:r>
+                        <a:rPr lang="en-US" sz="1800" kern="100" dirty="0">
+                          <a:effectLst/>
+                          <a:latin typeface="Aptos" panose="020B0004020202020204" pitchFamily="34" charset="0"/>
+                          <a:ea typeface="DengXian" panose="02010600030101010101" pitchFamily="2" charset="-122"/>
+                          <a:cs typeface="Times New Roman" panose="02020603050405020304" pitchFamily="18" charset="0"/>
+                        </a:rPr>
+                        <a:t>1</a:t>
+                      </a:r>
                     </a:p>
                   </a:txBody>
                   <a:tcPr marL="68580" marR="68580" marT="0" marB="0" anchor="ctr">
@@ -12542,12 +12635,15 @@
                         </a:spcAft>
                         <a:buNone/>
                       </a:pPr>
-                      <a:endParaRPr lang="en-US" sz="1800" kern="100">
-                        <a:effectLst/>
-                        <a:latin typeface="Aptos" panose="020B0004020202020204" pitchFamily="34" charset="0"/>
-                        <a:ea typeface="DengXian" panose="02010600030101010101" pitchFamily="2" charset="-122"/>
-                        <a:cs typeface="Times New Roman" panose="02020603050405020304" pitchFamily="18" charset="0"/>
-                      </a:endParaRPr>
+                      <a:r>
+                        <a:rPr lang="en-US" sz="1800" kern="100" dirty="0">
+                          <a:effectLst/>
+                          <a:latin typeface="Aptos" panose="020B0004020202020204" pitchFamily="34" charset="0"/>
+                          <a:ea typeface="DengXian" panose="02010600030101010101" pitchFamily="2" charset="-122"/>
+                          <a:cs typeface="Times New Roman" panose="02020603050405020304" pitchFamily="18" charset="0"/>
+                        </a:rPr>
+                        <a:t>1</a:t>
+                      </a:r>
                     </a:p>
                   </a:txBody>
                   <a:tcPr marL="68580" marR="68580" marT="0" marB="0" anchor="ctr">
@@ -12606,12 +12702,15 @@
                         </a:spcAft>
                         <a:buNone/>
                       </a:pPr>
-                      <a:endParaRPr lang="en-US" sz="1800" kern="100" dirty="0">
-                        <a:effectLst/>
-                        <a:latin typeface="Aptos" panose="020B0004020202020204" pitchFamily="34" charset="0"/>
-                        <a:ea typeface="DengXian" panose="02010600030101010101" pitchFamily="2" charset="-122"/>
-                        <a:cs typeface="Times New Roman" panose="02020603050405020304" pitchFamily="18" charset="0"/>
-                      </a:endParaRPr>
+                      <a:r>
+                        <a:rPr lang="en-US" sz="1800" kern="100" dirty="0">
+                          <a:effectLst/>
+                          <a:latin typeface="Aptos" panose="020B0004020202020204" pitchFamily="34" charset="0"/>
+                          <a:ea typeface="DengXian" panose="02010600030101010101" pitchFamily="2" charset="-122"/>
+                          <a:cs typeface="Times New Roman" panose="02020603050405020304" pitchFamily="18" charset="0"/>
+                        </a:rPr>
+                        <a:t>Y / N</a:t>
+                      </a:r>
                     </a:p>
                   </a:txBody>
                   <a:tcPr marL="68580" marR="68580" marT="0" marB="0" anchor="ctr">
@@ -12754,23 +12853,14 @@
                         <a:buNone/>
                       </a:pPr>
                       <a:r>
-                        <a:rPr lang="en-US" sz="1600" b="1" kern="100">
-                          <a:solidFill>
-                            <a:srgbClr val="000000"/>
-                          </a:solidFill>
+                        <a:rPr lang="en-US" sz="1800" kern="100" dirty="0">
                           <a:effectLst/>
-                          <a:latin typeface="Consolas" panose="020B0609020204030204" pitchFamily="49" charset="0"/>
-                          <a:ea typeface="Times New Roman" panose="02020603050405020304" pitchFamily="18" charset="0"/>
-                          <a:cs typeface="Consolas" panose="020B0609020204030204" pitchFamily="49" charset="0"/>
+                          <a:latin typeface="Aptos" panose="020B0004020202020204" pitchFamily="34" charset="0"/>
+                          <a:ea typeface="DengXian" panose="02010600030101010101" pitchFamily="2" charset="-122"/>
+                          <a:cs typeface="Times New Roman" panose="02020603050405020304" pitchFamily="18" charset="0"/>
                         </a:rPr>
                         <a:t>0110</a:t>
                       </a:r>
-                      <a:endParaRPr lang="en-US" sz="1800" kern="100">
-                        <a:effectLst/>
-                        <a:latin typeface="Aptos" panose="020B0004020202020204" pitchFamily="34" charset="0"/>
-                        <a:ea typeface="DengXian" panose="02010600030101010101" pitchFamily="2" charset="-122"/>
-                        <a:cs typeface="Times New Roman" panose="02020603050405020304" pitchFamily="18" charset="0"/>
-                      </a:endParaRPr>
                     </a:p>
                   </a:txBody>
                   <a:tcPr marL="68580" marR="68580" marT="0" marB="0" anchor="ctr">
@@ -12829,12 +12919,15 @@
                         </a:spcAft>
                         <a:buNone/>
                       </a:pPr>
-                      <a:endParaRPr lang="en-US" sz="1800" kern="100">
-                        <a:effectLst/>
-                        <a:latin typeface="Aptos" panose="020B0004020202020204" pitchFamily="34" charset="0"/>
-                        <a:ea typeface="DengXian" panose="02010600030101010101" pitchFamily="2" charset="-122"/>
-                        <a:cs typeface="Times New Roman" panose="02020603050405020304" pitchFamily="18" charset="0"/>
-                      </a:endParaRPr>
+                      <a:r>
+                        <a:rPr lang="en-US" sz="1800" kern="100" dirty="0">
+                          <a:effectLst/>
+                          <a:latin typeface="Aptos" panose="020B0004020202020204" pitchFamily="34" charset="0"/>
+                          <a:ea typeface="DengXian" panose="02010600030101010101" pitchFamily="2" charset="-122"/>
+                          <a:cs typeface="Times New Roman" panose="02020603050405020304" pitchFamily="18" charset="0"/>
+                        </a:rPr>
+                        <a:t>0</a:t>
+                      </a:r>
                     </a:p>
                   </a:txBody>
                   <a:tcPr marL="68580" marR="68580" marT="0" marB="0" anchor="ctr">
@@ -12893,12 +12986,15 @@
                         </a:spcAft>
                         <a:buNone/>
                       </a:pPr>
-                      <a:endParaRPr lang="en-US" sz="1800" kern="100">
-                        <a:effectLst/>
-                        <a:latin typeface="Aptos" panose="020B0004020202020204" pitchFamily="34" charset="0"/>
-                        <a:ea typeface="DengXian" panose="02010600030101010101" pitchFamily="2" charset="-122"/>
-                        <a:cs typeface="Times New Roman" panose="02020603050405020304" pitchFamily="18" charset="0"/>
-                      </a:endParaRPr>
+                      <a:r>
+                        <a:rPr lang="en-US" sz="1800" kern="100" dirty="0">
+                          <a:effectLst/>
+                          <a:latin typeface="Aptos" panose="020B0004020202020204" pitchFamily="34" charset="0"/>
+                          <a:ea typeface="DengXian" panose="02010600030101010101" pitchFamily="2" charset="-122"/>
+                          <a:cs typeface="Times New Roman" panose="02020603050405020304" pitchFamily="18" charset="0"/>
+                        </a:rPr>
+                        <a:t>0</a:t>
+                      </a:r>
                     </a:p>
                   </a:txBody>
                   <a:tcPr marL="68580" marR="68580" marT="0" marB="0" anchor="ctr">
@@ -12957,6 +13053,15 @@
                         </a:spcAft>
                         <a:buNone/>
                       </a:pPr>
+                      <a:r>
+                        <a:rPr lang="en-US" sz="1800" kern="100">
+                          <a:effectLst/>
+                          <a:latin typeface="Aptos" panose="020B0004020202020204" pitchFamily="34" charset="0"/>
+                          <a:ea typeface="DengXian" panose="02010600030101010101" pitchFamily="2" charset="-122"/>
+                          <a:cs typeface="Times New Roman" panose="02020603050405020304" pitchFamily="18" charset="0"/>
+                        </a:rPr>
+                        <a:t>N / Y</a:t>
+                      </a:r>
                       <a:endParaRPr lang="en-US" sz="1800" kern="100" dirty="0">
                         <a:effectLst/>
                         <a:latin typeface="Aptos" panose="020B0004020202020204" pitchFamily="34" charset="0"/>
@@ -13036,11 +13141,13 @@
         <p:spPr>
           <a:xfrm>
             <a:off x="457200" y="1219200"/>
-            <a:ext cx="8229600" cy="4937760"/>
+            <a:ext cx="8229600" cy="365760"/>
           </a:xfrm>
         </p:spPr>
         <p:txBody>
-          <a:bodyPr/>
+          <a:bodyPr>
+            <a:normAutofit fontScale="77500" lnSpcReduction="20000"/>
+          </a:bodyPr>
           <a:lstStyle/>
           <a:p>
             <a:r>
@@ -14277,8 +14384,8 @@
           </a:graphicData>
         </a:graphic>
       </p:graphicFrame>
-      <mc:AlternateContent xmlns:mc="http://schemas.openxmlformats.org/markup-compatibility/2006">
-        <mc:Choice xmlns:p14="http://schemas.microsoft.com/office/powerpoint/2010/main" Requires="p14">
+      <mc:AlternateContent xmlns:mc="http://schemas.openxmlformats.org/markup-compatibility/2006" xmlns:p14="http://schemas.microsoft.com/office/powerpoint/2010/main">
+        <mc:Choice Requires="p14">
           <p:contentPart p14:bwMode="auto" r:id="rId3">
             <p14:nvContentPartPr>
               <p14:cNvPr id="5" name="Ink 4">
@@ -14297,7 +14404,7 @@
             </p14:xfrm>
           </p:contentPart>
         </mc:Choice>
-        <mc:Fallback>
+        <mc:Fallback xmlns="">
           <p:pic>
             <p:nvPicPr>
               <p:cNvPr id="5" name="Ink 4">
@@ -14328,8 +14435,8 @@
           </p:pic>
         </mc:Fallback>
       </mc:AlternateContent>
-      <mc:AlternateContent xmlns:mc="http://schemas.openxmlformats.org/markup-compatibility/2006">
-        <mc:Choice xmlns:p14="http://schemas.microsoft.com/office/powerpoint/2010/main" Requires="p14">
+      <mc:AlternateContent xmlns:mc="http://schemas.openxmlformats.org/markup-compatibility/2006" xmlns:p14="http://schemas.microsoft.com/office/powerpoint/2010/main">
+        <mc:Choice Requires="p14">
           <p:contentPart p14:bwMode="auto" r:id="rId5">
             <p14:nvContentPartPr>
               <p14:cNvPr id="6" name="Ink 5">
@@ -14348,7 +14455,7 @@
             </p14:xfrm>
           </p:contentPart>
         </mc:Choice>
-        <mc:Fallback>
+        <mc:Fallback xmlns="">
           <p:pic>
             <p:nvPicPr>
               <p:cNvPr id="6" name="Ink 5">

--- a/PPTs/Ch4_ARM_Arithmetic_Logic_Exercises.pptx
+++ b/PPTs/Ch4_ARM_Arithmetic_Logic_Exercises.pptx
@@ -5,7 +5,7 @@
     <p:sldMasterId id="2147483660" r:id="rId1"/>
   </p:sldMasterIdLst>
   <p:notesMasterIdLst>
-    <p:notesMasterId r:id="rId23"/>
+    <p:notesMasterId r:id="rId22"/>
   </p:notesMasterIdLst>
   <p:sldIdLst>
     <p:sldId id="256" r:id="rId2"/>
@@ -28,7 +28,6 @@
     <p:sldId id="357" r:id="rId19"/>
     <p:sldId id="384" r:id="rId20"/>
     <p:sldId id="589" r:id="rId21"/>
-    <p:sldId id="587" r:id="rId22"/>
   </p:sldIdLst>
   <p:sldSz cx="9144000" cy="6858000" type="screen4x3"/>
   <p:notesSz cx="6858000" cy="9144000"/>
@@ -159,7 +158,7 @@
   <pc:docChgLst>
     <pc:chgData name="Zonghua Gu" userId="9a7e1853e1951ef5" providerId="LiveId" clId="{CF1FAA12-072C-4ED5-BA76-0FFFAEFDB88A}"/>
     <pc:docChg chg="undo custSel addSld delSld modSld">
-      <pc:chgData name="Zonghua Gu" userId="9a7e1853e1951ef5" providerId="LiveId" clId="{CF1FAA12-072C-4ED5-BA76-0FFFAEFDB88A}" dt="2025-10-14T23:02:37.235" v="227" actId="20577"/>
+      <pc:chgData name="Zonghua Gu" userId="9a7e1853e1951ef5" providerId="LiveId" clId="{CF1FAA12-072C-4ED5-BA76-0FFFAEFDB88A}" dt="2025-10-16T23:18:31.366" v="228" actId="47"/>
       <pc:docMkLst>
         <pc:docMk/>
       </pc:docMkLst>
@@ -412,28 +411,12 @@
           <pc:sldMk cId="3345466133" sldId="579"/>
         </pc:sldMkLst>
       </pc:sldChg>
-      <pc:sldChg chg="modSp add mod">
-        <pc:chgData name="Zonghua Gu" userId="9a7e1853e1951ef5" providerId="LiveId" clId="{CF1FAA12-072C-4ED5-BA76-0FFFAEFDB88A}" dt="2025-10-14T23:02:37.235" v="227" actId="20577"/>
+      <pc:sldChg chg="modSp add del mod">
+        <pc:chgData name="Zonghua Gu" userId="9a7e1853e1951ef5" providerId="LiveId" clId="{CF1FAA12-072C-4ED5-BA76-0FFFAEFDB88A}" dt="2025-10-16T23:18:31.366" v="228" actId="47"/>
         <pc:sldMkLst>
           <pc:docMk/>
           <pc:sldMk cId="3350438353" sldId="587"/>
         </pc:sldMkLst>
-        <pc:spChg chg="mod">
-          <ac:chgData name="Zonghua Gu" userId="9a7e1853e1951ef5" providerId="LiveId" clId="{CF1FAA12-072C-4ED5-BA76-0FFFAEFDB88A}" dt="2025-10-14T22:45:46.749" v="142" actId="27636"/>
-          <ac:spMkLst>
-            <pc:docMk/>
-            <pc:sldMk cId="3350438353" sldId="587"/>
-            <ac:spMk id="7" creationId="{4B89EF58-E7D7-52A9-B76A-D6754B4BB133}"/>
-          </ac:spMkLst>
-        </pc:spChg>
-        <pc:graphicFrameChg chg="mod modGraphic">
-          <ac:chgData name="Zonghua Gu" userId="9a7e1853e1951ef5" providerId="LiveId" clId="{CF1FAA12-072C-4ED5-BA76-0FFFAEFDB88A}" dt="2025-10-14T23:02:37.235" v="227" actId="20577"/>
-          <ac:graphicFrameMkLst>
-            <pc:docMk/>
-            <pc:sldMk cId="3350438353" sldId="587"/>
-            <ac:graphicFrameMk id="6" creationId="{B0565DDE-CFDA-64B0-7C1A-5C1F5D8B93A0}"/>
-          </ac:graphicFrameMkLst>
-        </pc:graphicFrameChg>
       </pc:sldChg>
       <pc:sldChg chg="add">
         <pc:chgData name="Zonghua Gu" userId="9a7e1853e1951ef5" providerId="LiveId" clId="{CF1FAA12-072C-4ED5-BA76-0FFFAEFDB88A}" dt="2025-10-08T01:22:31.330" v="29"/>
@@ -589,7 +572,7 @@
             <a:fld id="{3AC3A17A-95E8-4381-B66B-5D6DE2B3048A}" type="datetimeFigureOut">
               <a:rPr lang="en-US" smtClean="0"/>
               <a:pPr/>
-              <a:t>10/14/2025</a:t>
+              <a:t>10/16/2025</a:t>
             </a:fld>
             <a:endParaRPr lang="en-US"/>
           </a:p>
@@ -3175,7 +3158,7 @@
             <a:fld id="{966FEA0E-C2DF-4252-97AD-54F2B7E07EAC}" type="datetime1">
               <a:rPr lang="en-US" smtClean="0"/>
               <a:pPr eaLnBrk="1" latinLnBrk="0" hangingPunct="1"/>
-              <a:t>10/14/2025</a:t>
+              <a:t>10/16/2025</a:t>
             </a:fld>
             <a:endParaRPr lang="en-US" sz="1600" dirty="0"/>
           </a:p>
@@ -3536,7 +3519,7 @@
             <a:fld id="{69EF9524-0CAA-4F98-BAC2-CE6B712F5E94}" type="datetime1">
               <a:rPr lang="en-US" smtClean="0"/>
               <a:pPr eaLnBrk="1" latinLnBrk="0" hangingPunct="1"/>
-              <a:t>10/14/2025</a:t>
+              <a:t>10/16/2025</a:t>
             </a:fld>
             <a:endParaRPr lang="en-US"/>
           </a:p>
@@ -3713,7 +3696,7 @@
             <a:fld id="{CB20516D-6F89-4C89-8307-32A716E22875}" type="datetime1">
               <a:rPr lang="en-US" smtClean="0"/>
               <a:pPr eaLnBrk="1" latinLnBrk="0" hangingPunct="1"/>
-              <a:t>10/14/2025</a:t>
+              <a:t>10/16/2025</a:t>
             </a:fld>
             <a:endParaRPr lang="en-US"/>
           </a:p>
@@ -3950,7 +3933,7 @@
             <a:fld id="{0CD88620-7329-4FC3-B65D-4EA691138F1B}" type="datetime1">
               <a:rPr lang="en-US" smtClean="0"/>
               <a:pPr eaLnBrk="1" latinLnBrk="0" hangingPunct="1"/>
-              <a:t>10/14/2025</a:t>
+              <a:t>10/16/2025</a:t>
             </a:fld>
             <a:endParaRPr lang="en-US" dirty="0"/>
           </a:p>
@@ -4221,7 +4204,7 @@
             <a:fld id="{0E46F3A1-5653-427D-9F78-56077401431A}" type="datetime1">
               <a:rPr lang="en-US" smtClean="0"/>
               <a:pPr eaLnBrk="1" latinLnBrk="0" hangingPunct="1"/>
-              <a:t>10/14/2025</a:t>
+              <a:t>10/16/2025</a:t>
             </a:fld>
             <a:endParaRPr lang="en-US" dirty="0"/>
           </a:p>
@@ -4443,7 +4426,7 @@
             <a:fld id="{CB67FC03-415A-45F0-B002-DF181377F7DC}" type="datetime1">
               <a:rPr lang="en-US" smtClean="0"/>
               <a:pPr eaLnBrk="1" latinLnBrk="0" hangingPunct="1"/>
-              <a:t>10/14/2025</a:t>
+              <a:t>10/16/2025</a:t>
             </a:fld>
             <a:endParaRPr lang="en-US"/>
           </a:p>
@@ -4797,7 +4780,7 @@
             <a:fld id="{1B6FC726-A0B4-4FC7-90F5-F17415A5C1A3}" type="datetime1">
               <a:rPr lang="en-US" smtClean="0"/>
               <a:pPr eaLnBrk="1" latinLnBrk="0" hangingPunct="1"/>
-              <a:t>10/14/2025</a:t>
+              <a:t>10/16/2025</a:t>
             </a:fld>
             <a:endParaRPr lang="en-US"/>
           </a:p>
@@ -5031,7 +5014,7 @@
             <a:fld id="{BE217211-C3F9-4892-9CC3-C7105638567D}" type="datetime1">
               <a:rPr lang="en-US" smtClean="0"/>
               <a:pPr eaLnBrk="1" latinLnBrk="0" hangingPunct="1"/>
-              <a:t>10/14/2025</a:t>
+              <a:t>10/16/2025</a:t>
             </a:fld>
             <a:endParaRPr lang="en-US"/>
           </a:p>
@@ -5174,7 +5157,7 @@
             <a:fld id="{BA713E6A-6B26-4373-A75B-EF395DC64F9E}" type="datetime1">
               <a:rPr lang="en-US" smtClean="0"/>
               <a:pPr eaLnBrk="1" latinLnBrk="0" hangingPunct="1"/>
-              <a:t>10/14/2025</a:t>
+              <a:t>10/16/2025</a:t>
             </a:fld>
             <a:endParaRPr lang="en-US"/>
           </a:p>
@@ -5453,7 +5436,7 @@
             <a:fld id="{57EB41EF-4260-415A-8DD6-FEDCC46E7EFC}" type="datetime1">
               <a:rPr lang="en-US" smtClean="0"/>
               <a:pPr eaLnBrk="1" latinLnBrk="0" hangingPunct="1"/>
-              <a:t>10/14/2025</a:t>
+              <a:t>10/16/2025</a:t>
             </a:fld>
             <a:endParaRPr lang="en-US"/>
           </a:p>
@@ -5862,7 +5845,7 @@
             <a:fld id="{6BDA80A0-06CC-4492-94A0-E8516751045E}" type="datetime1">
               <a:rPr lang="en-US" smtClean="0"/>
               <a:pPr eaLnBrk="1" latinLnBrk="0" hangingPunct="1"/>
-              <a:t>10/14/2025</a:t>
+              <a:t>10/16/2025</a:t>
             </a:fld>
             <a:endParaRPr lang="en-US"/>
           </a:p>
@@ -6201,7 +6184,7 @@
             <a:fld id="{A25B5B4B-57EE-495D-8E74-A657CFD8BB6C}" type="datetime1">
               <a:rPr lang="en-US" smtClean="0"/>
               <a:pPr eaLnBrk="1" latinLnBrk="0" hangingPunct="1"/>
-              <a:t>10/14/2025</a:t>
+              <a:t>10/16/2025</a:t>
             </a:fld>
             <a:endParaRPr lang="en-US" sz="1400" dirty="0">
               <a:solidFill>
@@ -9656,3511 +9639,6 @@
     <p:extLst>
       <p:ext uri="{BB962C8B-B14F-4D97-AF65-F5344CB8AC3E}">
         <p14:creationId xmlns:p14="http://schemas.microsoft.com/office/powerpoint/2010/main" val="3677126747"/>
-      </p:ext>
-    </p:extLst>
-  </p:cSld>
-  <p:clrMapOvr>
-    <a:masterClrMapping/>
-  </p:clrMapOvr>
-</p:sld>
-</file>
-
-<file path=ppt/slides/slide21.xml><?xml version="1.0" encoding="utf-8"?>
-<p:sld xmlns:a="http://schemas.openxmlformats.org/drawingml/2006/main" xmlns:r="http://schemas.openxmlformats.org/officeDocument/2006/relationships" xmlns:p="http://schemas.openxmlformats.org/presentationml/2006/main">
-  <p:cSld>
-    <p:spTree>
-      <p:nvGrpSpPr>
-        <p:cNvPr id="1" name="">
-          <a:extLst>
-            <a:ext uri="{FF2B5EF4-FFF2-40B4-BE49-F238E27FC236}">
-              <a16:creationId xmlns:a16="http://schemas.microsoft.com/office/drawing/2014/main" id="{733FE46E-21D3-BB71-D0EF-810E9660EA5D}"/>
-            </a:ext>
-          </a:extLst>
-        </p:cNvPr>
-        <p:cNvGrpSpPr/>
-        <p:nvPr/>
-      </p:nvGrpSpPr>
-      <p:grpSpPr>
-        <a:xfrm>
-          <a:off x="0" y="0"/>
-          <a:ext cx="0" cy="0"/>
-          <a:chOff x="0" y="0"/>
-          <a:chExt cx="0" cy="0"/>
-        </a:xfrm>
-      </p:grpSpPr>
-      <p:sp>
-        <p:nvSpPr>
-          <p:cNvPr id="2" name="Title 1">
-            <a:extLst>
-              <a:ext uri="{FF2B5EF4-FFF2-40B4-BE49-F238E27FC236}">
-                <a16:creationId xmlns:a16="http://schemas.microsoft.com/office/drawing/2014/main" id="{7FA9ABE5-E35E-9995-C450-C422553E96B1}"/>
-              </a:ext>
-            </a:extLst>
-          </p:cNvPr>
-          <p:cNvSpPr>
-            <a:spLocks noGrp="1"/>
-          </p:cNvSpPr>
-          <p:nvPr>
-            <p:ph type="title"/>
-          </p:nvPr>
-        </p:nvSpPr>
-        <p:spPr/>
-        <p:txBody>
-          <a:bodyPr/>
-          <a:lstStyle/>
-          <a:p>
-            <a:r>
-              <a:rPr lang="en-US" dirty="0"/>
-              <a:t>Addition &amp; Subtraction</a:t>
-            </a:r>
-          </a:p>
-        </p:txBody>
-      </p:sp>
-      <p:sp>
-        <p:nvSpPr>
-          <p:cNvPr id="3" name="Slide Number Placeholder 2">
-            <a:extLst>
-              <a:ext uri="{FF2B5EF4-FFF2-40B4-BE49-F238E27FC236}">
-                <a16:creationId xmlns:a16="http://schemas.microsoft.com/office/drawing/2014/main" id="{6CDC54EC-7E8A-1399-9BF2-5015E8B14A5D}"/>
-              </a:ext>
-            </a:extLst>
-          </p:cNvPr>
-          <p:cNvSpPr>
-            <a:spLocks noGrp="1"/>
-          </p:cNvSpPr>
-          <p:nvPr>
-            <p:ph type="sldNum" sz="quarter" idx="12"/>
-          </p:nvPr>
-        </p:nvSpPr>
-        <p:spPr/>
-        <p:txBody>
-          <a:bodyPr/>
-          <a:lstStyle/>
-          <a:p>
-            <a:fld id="{EA7C8D44-3667-46F6-9772-CC52308E2A7F}" type="slidenum">
-              <a:rPr kumimoji="0" lang="en-US" smtClean="0"/>
-              <a:pPr/>
-              <a:t>21</a:t>
-            </a:fld>
-            <a:endParaRPr kumimoji="0" lang="en-US" dirty="0"/>
-          </a:p>
-        </p:txBody>
-      </p:sp>
-      <p:graphicFrame>
-        <p:nvGraphicFramePr>
-          <p:cNvPr id="6" name="Table 5">
-            <a:extLst>
-              <a:ext uri="{FF2B5EF4-FFF2-40B4-BE49-F238E27FC236}">
-                <a16:creationId xmlns:a16="http://schemas.microsoft.com/office/drawing/2014/main" id="{B0565DDE-CFDA-64B0-7C1A-5C1F5D8B93A0}"/>
-              </a:ext>
-            </a:extLst>
-          </p:cNvPr>
-          <p:cNvGraphicFramePr>
-            <a:graphicFrameLocks noGrp="1"/>
-          </p:cNvGraphicFramePr>
-          <p:nvPr>
-            <p:extLst>
-              <p:ext uri="{D42A27DB-BD31-4B8C-83A1-F6EECF244321}">
-                <p14:modId xmlns:p14="http://schemas.microsoft.com/office/powerpoint/2010/main" val="1637422399"/>
-              </p:ext>
-            </p:extLst>
-          </p:nvPr>
-        </p:nvGraphicFramePr>
-        <p:xfrm>
-          <a:off x="838200" y="1219200"/>
-          <a:ext cx="7976584" cy="5539678"/>
-        </p:xfrm>
-        <a:graphic>
-          <a:graphicData uri="http://schemas.openxmlformats.org/drawingml/2006/table">
-            <a:tbl>
-              <a:tblPr firstRow="1" bandRow="1"/>
-              <a:tblGrid>
-                <a:gridCol w="1952466">
-                  <a:extLst>
-                    <a:ext uri="{9D8B030D-6E8A-4147-A177-3AD203B41FA5}">
-                      <a16:colId xmlns:a16="http://schemas.microsoft.com/office/drawing/2014/main" val="2359662815"/>
-                    </a:ext>
-                  </a:extLst>
-                </a:gridCol>
-                <a:gridCol w="1312343">
-                  <a:extLst>
-                    <a:ext uri="{9D8B030D-6E8A-4147-A177-3AD203B41FA5}">
-                      <a16:colId xmlns:a16="http://schemas.microsoft.com/office/drawing/2014/main" val="1212662852"/>
-                    </a:ext>
-                  </a:extLst>
-                </a:gridCol>
-                <a:gridCol w="712259">
-                  <a:extLst>
-                    <a:ext uri="{9D8B030D-6E8A-4147-A177-3AD203B41FA5}">
-                      <a16:colId xmlns:a16="http://schemas.microsoft.com/office/drawing/2014/main" val="4290731535"/>
-                    </a:ext>
-                  </a:extLst>
-                </a:gridCol>
-                <a:gridCol w="720489">
-                  <a:extLst>
-                    <a:ext uri="{9D8B030D-6E8A-4147-A177-3AD203B41FA5}">
-                      <a16:colId xmlns:a16="http://schemas.microsoft.com/office/drawing/2014/main" val="4234417883"/>
-                    </a:ext>
-                  </a:extLst>
-                </a:gridCol>
-                <a:gridCol w="3279027">
-                  <a:extLst>
-                    <a:ext uri="{9D8B030D-6E8A-4147-A177-3AD203B41FA5}">
-                      <a16:colId xmlns:a16="http://schemas.microsoft.com/office/drawing/2014/main" val="1819084519"/>
-                    </a:ext>
-                  </a:extLst>
-                </a:gridCol>
-              </a:tblGrid>
-              <a:tr h="332105">
-                <a:tc>
-                  <a:txBody>
-                    <a:bodyPr/>
-                    <a:lstStyle/>
-                    <a:p>
-                      <a:pPr indent="139700">
-                        <a:lnSpc>
-                          <a:spcPct val="115000"/>
-                        </a:lnSpc>
-                        <a:spcAft>
-                          <a:spcPts val="800"/>
-                        </a:spcAft>
-                        <a:buNone/>
-                      </a:pPr>
-                      <a:r>
-                        <a:rPr lang="en-US" sz="1600" kern="100">
-                          <a:solidFill>
-                            <a:srgbClr val="000000"/>
-                          </a:solidFill>
-                          <a:effectLst/>
-                          <a:latin typeface="Calibri" panose="020F0502020204030204" pitchFamily="34" charset="0"/>
-                          <a:ea typeface="Times New Roman" panose="02020603050405020304" pitchFamily="18" charset="0"/>
-                          <a:cs typeface="Times New Roman" panose="02020603050405020304" pitchFamily="18" charset="0"/>
-                        </a:rPr>
-                        <a:t>Expression</a:t>
-                      </a:r>
-                      <a:endParaRPr lang="en-US" sz="1800" kern="100">
-                        <a:effectLst/>
-                        <a:latin typeface="Aptos" panose="020B0004020202020204" pitchFamily="34" charset="0"/>
-                        <a:ea typeface="DengXian" panose="02010600030101010101" pitchFamily="2" charset="-122"/>
-                        <a:cs typeface="Times New Roman" panose="02020603050405020304" pitchFamily="18" charset="0"/>
-                      </a:endParaRPr>
-                    </a:p>
-                  </a:txBody>
-                  <a:tcPr marL="68580" marR="68580" marT="0" marB="0" anchor="ctr">
-                    <a:lnL w="12700" cap="flat" cmpd="sng" algn="ctr">
-                      <a:solidFill>
-                        <a:srgbClr val="000000"/>
-                      </a:solidFill>
-                      <a:prstDash val="solid"/>
-                      <a:round/>
-                      <a:headEnd type="none" w="med" len="med"/>
-                      <a:tailEnd type="none" w="med" len="med"/>
-                    </a:lnL>
-                    <a:lnR w="12700" cap="flat" cmpd="sng" algn="ctr">
-                      <a:solidFill>
-                        <a:srgbClr val="000000"/>
-                      </a:solidFill>
-                      <a:prstDash val="solid"/>
-                      <a:round/>
-                      <a:headEnd type="none" w="med" len="med"/>
-                      <a:tailEnd type="none" w="med" len="med"/>
-                    </a:lnR>
-                    <a:lnT w="12700" cap="flat" cmpd="sng" algn="ctr">
-                      <a:solidFill>
-                        <a:srgbClr val="000000"/>
-                      </a:solidFill>
-                      <a:prstDash val="solid"/>
-                      <a:round/>
-                      <a:headEnd type="none" w="med" len="med"/>
-                      <a:tailEnd type="none" w="med" len="med"/>
-                    </a:lnT>
-                    <a:lnB w="12700" cap="flat" cmpd="sng" algn="ctr">
-                      <a:solidFill>
-                        <a:srgbClr val="000000"/>
-                      </a:solidFill>
-                      <a:prstDash val="solid"/>
-                      <a:round/>
-                      <a:headEnd type="none" w="med" len="med"/>
-                      <a:tailEnd type="none" w="med" len="med"/>
-                    </a:lnB>
-                    <a:solidFill>
-                      <a:srgbClr val="FFFFFF"/>
-                    </a:solidFill>
-                  </a:tcPr>
-                </a:tc>
-                <a:tc>
-                  <a:txBody>
-                    <a:bodyPr/>
-                    <a:lstStyle/>
-                    <a:p>
-                      <a:pPr indent="139700">
-                        <a:lnSpc>
-                          <a:spcPct val="115000"/>
-                        </a:lnSpc>
-                        <a:spcAft>
-                          <a:spcPts val="800"/>
-                        </a:spcAft>
-                        <a:buNone/>
-                      </a:pPr>
-                      <a:r>
-                        <a:rPr lang="en-US" sz="1600" kern="100">
-                          <a:solidFill>
-                            <a:srgbClr val="000000"/>
-                          </a:solidFill>
-                          <a:effectLst/>
-                          <a:latin typeface="Calibri" panose="020F0502020204030204" pitchFamily="34" charset="0"/>
-                          <a:ea typeface="Times New Roman" panose="02020603050405020304" pitchFamily="18" charset="0"/>
-                          <a:cs typeface="Times New Roman" panose="02020603050405020304" pitchFamily="18" charset="0"/>
-                        </a:rPr>
-                        <a:t>Result</a:t>
-                      </a:r>
-                      <a:endParaRPr lang="en-US" sz="1800" kern="100">
-                        <a:effectLst/>
-                        <a:latin typeface="Aptos" panose="020B0004020202020204" pitchFamily="34" charset="0"/>
-                        <a:ea typeface="DengXian" panose="02010600030101010101" pitchFamily="2" charset="-122"/>
-                        <a:cs typeface="Times New Roman" panose="02020603050405020304" pitchFamily="18" charset="0"/>
-                      </a:endParaRPr>
-                    </a:p>
-                  </a:txBody>
-                  <a:tcPr marL="68580" marR="68580" marT="0" marB="0" anchor="ctr">
-                    <a:lnL w="12700" cap="flat" cmpd="sng" algn="ctr">
-                      <a:solidFill>
-                        <a:srgbClr val="000000"/>
-                      </a:solidFill>
-                      <a:prstDash val="solid"/>
-                      <a:round/>
-                      <a:headEnd type="none" w="med" len="med"/>
-                      <a:tailEnd type="none" w="med" len="med"/>
-                    </a:lnL>
-                    <a:lnR w="12700" cap="flat" cmpd="sng" algn="ctr">
-                      <a:solidFill>
-                        <a:srgbClr val="000000"/>
-                      </a:solidFill>
-                      <a:prstDash val="solid"/>
-                      <a:round/>
-                      <a:headEnd type="none" w="med" len="med"/>
-                      <a:tailEnd type="none" w="med" len="med"/>
-                    </a:lnR>
-                    <a:lnT w="12700" cap="flat" cmpd="sng" algn="ctr">
-                      <a:solidFill>
-                        <a:srgbClr val="000000"/>
-                      </a:solidFill>
-                      <a:prstDash val="solid"/>
-                      <a:round/>
-                      <a:headEnd type="none" w="med" len="med"/>
-                      <a:tailEnd type="none" w="med" len="med"/>
-                    </a:lnT>
-                    <a:lnB w="12700" cap="flat" cmpd="sng" algn="ctr">
-                      <a:solidFill>
-                        <a:srgbClr val="000000"/>
-                      </a:solidFill>
-                      <a:prstDash val="solid"/>
-                      <a:round/>
-                      <a:headEnd type="none" w="med" len="med"/>
-                      <a:tailEnd type="none" w="med" len="med"/>
-                    </a:lnB>
-                    <a:solidFill>
-                      <a:srgbClr val="FFFFFF"/>
-                    </a:solidFill>
-                  </a:tcPr>
-                </a:tc>
-                <a:tc>
-                  <a:txBody>
-                    <a:bodyPr/>
-                    <a:lstStyle/>
-                    <a:p>
-                      <a:pPr indent="139700">
-                        <a:lnSpc>
-                          <a:spcPct val="115000"/>
-                        </a:lnSpc>
-                        <a:spcAft>
-                          <a:spcPts val="800"/>
-                        </a:spcAft>
-                        <a:buNone/>
-                      </a:pPr>
-                      <a:r>
-                        <a:rPr lang="en-US" sz="1600" kern="100" dirty="0">
-                          <a:solidFill>
-                            <a:srgbClr val="000000"/>
-                          </a:solidFill>
-                          <a:effectLst/>
-                          <a:latin typeface="Calibri" panose="020F0502020204030204" pitchFamily="34" charset="0"/>
-                          <a:ea typeface="Times New Roman" panose="02020603050405020304" pitchFamily="18" charset="0"/>
-                          <a:cs typeface="Times New Roman" panose="02020603050405020304" pitchFamily="18" charset="0"/>
-                        </a:rPr>
-                        <a:t>C</a:t>
-                      </a:r>
-                      <a:endParaRPr lang="en-US" sz="1800" kern="100" dirty="0">
-                        <a:effectLst/>
-                        <a:latin typeface="Aptos" panose="020B0004020202020204" pitchFamily="34" charset="0"/>
-                        <a:ea typeface="DengXian" panose="02010600030101010101" pitchFamily="2" charset="-122"/>
-                        <a:cs typeface="Times New Roman" panose="02020603050405020304" pitchFamily="18" charset="0"/>
-                      </a:endParaRPr>
-                    </a:p>
-                  </a:txBody>
-                  <a:tcPr marL="68580" marR="68580" marT="0" marB="0" anchor="ctr">
-                    <a:lnL w="12700" cap="flat" cmpd="sng" algn="ctr">
-                      <a:solidFill>
-                        <a:srgbClr val="000000"/>
-                      </a:solidFill>
-                      <a:prstDash val="solid"/>
-                      <a:round/>
-                      <a:headEnd type="none" w="med" len="med"/>
-                      <a:tailEnd type="none" w="med" len="med"/>
-                    </a:lnL>
-                    <a:lnR w="12700" cap="flat" cmpd="sng" algn="ctr">
-                      <a:solidFill>
-                        <a:srgbClr val="000000"/>
-                      </a:solidFill>
-                      <a:prstDash val="solid"/>
-                      <a:round/>
-                      <a:headEnd type="none" w="med" len="med"/>
-                      <a:tailEnd type="none" w="med" len="med"/>
-                    </a:lnR>
-                    <a:lnT w="12700" cap="flat" cmpd="sng" algn="ctr">
-                      <a:solidFill>
-                        <a:srgbClr val="000000"/>
-                      </a:solidFill>
-                      <a:prstDash val="solid"/>
-                      <a:round/>
-                      <a:headEnd type="none" w="med" len="med"/>
-                      <a:tailEnd type="none" w="med" len="med"/>
-                    </a:lnT>
-                    <a:lnB w="12700" cap="flat" cmpd="sng" algn="ctr">
-                      <a:solidFill>
-                        <a:srgbClr val="000000"/>
-                      </a:solidFill>
-                      <a:prstDash val="solid"/>
-                      <a:round/>
-                      <a:headEnd type="none" w="med" len="med"/>
-                      <a:tailEnd type="none" w="med" len="med"/>
-                    </a:lnB>
-                    <a:solidFill>
-                      <a:srgbClr val="FFFFFF"/>
-                    </a:solidFill>
-                  </a:tcPr>
-                </a:tc>
-                <a:tc>
-                  <a:txBody>
-                    <a:bodyPr/>
-                    <a:lstStyle/>
-                    <a:p>
-                      <a:pPr>
-                        <a:lnSpc>
-                          <a:spcPct val="115000"/>
-                        </a:lnSpc>
-                        <a:spcAft>
-                          <a:spcPts val="800"/>
-                        </a:spcAft>
-                        <a:buNone/>
-                      </a:pPr>
-                      <a:r>
-                        <a:rPr lang="en-US" sz="1600" kern="100" dirty="0">
-                          <a:solidFill>
-                            <a:srgbClr val="000000"/>
-                          </a:solidFill>
-                          <a:effectLst/>
-                          <a:latin typeface="Aptos" panose="020B0004020202020204" pitchFamily="34" charset="0"/>
-                          <a:ea typeface="DengXian" panose="02010600030101010101" pitchFamily="2" charset="-122"/>
-                          <a:cs typeface="Times New Roman" panose="02020603050405020304" pitchFamily="18" charset="0"/>
-                        </a:rPr>
-                        <a:t>V</a:t>
-                      </a:r>
-                      <a:endParaRPr lang="en-US" sz="1800" kern="100" dirty="0">
-                        <a:effectLst/>
-                        <a:latin typeface="Aptos" panose="020B0004020202020204" pitchFamily="34" charset="0"/>
-                        <a:ea typeface="DengXian" panose="02010600030101010101" pitchFamily="2" charset="-122"/>
-                        <a:cs typeface="Times New Roman" panose="02020603050405020304" pitchFamily="18" charset="0"/>
-                      </a:endParaRPr>
-                    </a:p>
-                  </a:txBody>
-                  <a:tcPr marL="68580" marR="68580" marT="0" marB="0" anchor="ctr">
-                    <a:lnL w="12700" cap="flat" cmpd="sng" algn="ctr">
-                      <a:solidFill>
-                        <a:srgbClr val="000000"/>
-                      </a:solidFill>
-                      <a:prstDash val="solid"/>
-                      <a:round/>
-                      <a:headEnd type="none" w="med" len="med"/>
-                      <a:tailEnd type="none" w="med" len="med"/>
-                    </a:lnL>
-                    <a:lnR w="12700" cap="flat" cmpd="sng" algn="ctr">
-                      <a:solidFill>
-                        <a:srgbClr val="000000"/>
-                      </a:solidFill>
-                      <a:prstDash val="solid"/>
-                      <a:round/>
-                      <a:headEnd type="none" w="med" len="med"/>
-                      <a:tailEnd type="none" w="med" len="med"/>
-                    </a:lnR>
-                    <a:lnT w="12700" cap="flat" cmpd="sng" algn="ctr">
-                      <a:solidFill>
-                        <a:srgbClr val="000000"/>
-                      </a:solidFill>
-                      <a:prstDash val="solid"/>
-                      <a:round/>
-                      <a:headEnd type="none" w="med" len="med"/>
-                      <a:tailEnd type="none" w="med" len="med"/>
-                    </a:lnT>
-                    <a:lnB w="12700" cap="flat" cmpd="sng" algn="ctr">
-                      <a:solidFill>
-                        <a:srgbClr val="000000"/>
-                      </a:solidFill>
-                      <a:prstDash val="solid"/>
-                      <a:round/>
-                      <a:headEnd type="none" w="med" len="med"/>
-                      <a:tailEnd type="none" w="med" len="med"/>
-                    </a:lnB>
-                    <a:solidFill>
-                      <a:srgbClr val="FFFFFF"/>
-                    </a:solidFill>
-                  </a:tcPr>
-                </a:tc>
-                <a:tc>
-                  <a:txBody>
-                    <a:bodyPr/>
-                    <a:lstStyle/>
-                    <a:p>
-                      <a:pPr indent="139700">
-                        <a:lnSpc>
-                          <a:spcPct val="115000"/>
-                        </a:lnSpc>
-                        <a:spcAft>
-                          <a:spcPts val="800"/>
-                        </a:spcAft>
-                        <a:buNone/>
-                      </a:pPr>
-                      <a:r>
-                        <a:rPr lang="en-US" sz="1600" kern="100" dirty="0">
-                          <a:solidFill>
-                            <a:srgbClr val="000000"/>
-                          </a:solidFill>
-                          <a:effectLst/>
-                          <a:latin typeface="Calibri" panose="020F0502020204030204" pitchFamily="34" charset="0"/>
-                          <a:ea typeface="Times New Roman" panose="02020603050405020304" pitchFamily="18" charset="0"/>
-                          <a:cs typeface="Times New Roman" panose="02020603050405020304" pitchFamily="18" charset="0"/>
-                        </a:rPr>
-                        <a:t>Correct Result?</a:t>
-                      </a:r>
-                      <a:endParaRPr lang="en-US" sz="1800" kern="100" dirty="0">
-                        <a:effectLst/>
-                        <a:latin typeface="Aptos" panose="020B0004020202020204" pitchFamily="34" charset="0"/>
-                        <a:ea typeface="DengXian" panose="02010600030101010101" pitchFamily="2" charset="-122"/>
-                        <a:cs typeface="Times New Roman" panose="02020603050405020304" pitchFamily="18" charset="0"/>
-                      </a:endParaRPr>
-                    </a:p>
-                    <a:p>
-                      <a:pPr indent="139700">
-                        <a:lnSpc>
-                          <a:spcPct val="115000"/>
-                        </a:lnSpc>
-                        <a:spcAft>
-                          <a:spcPts val="800"/>
-                        </a:spcAft>
-                        <a:buNone/>
-                      </a:pPr>
-                      <a:r>
-                        <a:rPr lang="en-US" sz="1600" kern="100" dirty="0">
-                          <a:solidFill>
-                            <a:srgbClr val="000000"/>
-                          </a:solidFill>
-                          <a:effectLst/>
-                          <a:latin typeface="Calibri" panose="020F0502020204030204" pitchFamily="34" charset="0"/>
-                          <a:ea typeface="Times New Roman" panose="02020603050405020304" pitchFamily="18" charset="0"/>
-                          <a:cs typeface="Times New Roman" panose="02020603050405020304" pitchFamily="18" charset="0"/>
-                        </a:rPr>
-                        <a:t>Unsigned/Signed</a:t>
-                      </a:r>
-                      <a:endParaRPr lang="en-US" sz="1800" kern="100" dirty="0">
-                        <a:effectLst/>
-                        <a:latin typeface="Aptos" panose="020B0004020202020204" pitchFamily="34" charset="0"/>
-                        <a:ea typeface="DengXian" panose="02010600030101010101" pitchFamily="2" charset="-122"/>
-                        <a:cs typeface="Times New Roman" panose="02020603050405020304" pitchFamily="18" charset="0"/>
-                      </a:endParaRPr>
-                    </a:p>
-                  </a:txBody>
-                  <a:tcPr marL="68580" marR="68580" marT="0" marB="0" anchor="ctr">
-                    <a:lnL w="12700" cap="flat" cmpd="sng" algn="ctr">
-                      <a:solidFill>
-                        <a:srgbClr val="000000"/>
-                      </a:solidFill>
-                      <a:prstDash val="solid"/>
-                      <a:round/>
-                      <a:headEnd type="none" w="med" len="med"/>
-                      <a:tailEnd type="none" w="med" len="med"/>
-                    </a:lnL>
-                    <a:lnR w="12700" cap="flat" cmpd="sng" algn="ctr">
-                      <a:solidFill>
-                        <a:srgbClr val="000000"/>
-                      </a:solidFill>
-                      <a:prstDash val="solid"/>
-                      <a:round/>
-                      <a:headEnd type="none" w="med" len="med"/>
-                      <a:tailEnd type="none" w="med" len="med"/>
-                    </a:lnR>
-                    <a:lnT w="12700" cap="flat" cmpd="sng" algn="ctr">
-                      <a:solidFill>
-                        <a:srgbClr val="000000"/>
-                      </a:solidFill>
-                      <a:prstDash val="solid"/>
-                      <a:round/>
-                      <a:headEnd type="none" w="med" len="med"/>
-                      <a:tailEnd type="none" w="med" len="med"/>
-                    </a:lnT>
-                    <a:lnB w="12700" cap="flat" cmpd="sng" algn="ctr">
-                      <a:solidFill>
-                        <a:srgbClr val="000000"/>
-                      </a:solidFill>
-                      <a:prstDash val="solid"/>
-                      <a:round/>
-                      <a:headEnd type="none" w="med" len="med"/>
-                      <a:tailEnd type="none" w="med" len="med"/>
-                    </a:lnB>
-                    <a:solidFill>
-                      <a:srgbClr val="FFFFFF"/>
-                    </a:solidFill>
-                  </a:tcPr>
-                </a:tc>
-                <a:extLst>
-                  <a:ext uri="{0D108BD9-81ED-4DB2-BD59-A6C34878D82A}">
-                    <a16:rowId xmlns:a16="http://schemas.microsoft.com/office/drawing/2014/main" val="1062056900"/>
-                  </a:ext>
-                </a:extLst>
-              </a:tr>
-              <a:tr h="332105">
-                <a:tc>
-                  <a:txBody>
-                    <a:bodyPr/>
-                    <a:lstStyle/>
-                    <a:p>
-                      <a:pPr indent="140335">
-                        <a:lnSpc>
-                          <a:spcPct val="115000"/>
-                        </a:lnSpc>
-                        <a:spcAft>
-                          <a:spcPts val="800"/>
-                        </a:spcAft>
-                        <a:buNone/>
-                      </a:pPr>
-                      <a:r>
-                        <a:rPr lang="en-US" sz="1600" b="1" kern="100">
-                          <a:solidFill>
-                            <a:srgbClr val="000000"/>
-                          </a:solidFill>
-                          <a:effectLst/>
-                          <a:latin typeface="Consolas" panose="020B0609020204030204" pitchFamily="49" charset="0"/>
-                          <a:ea typeface="Times New Roman" panose="02020603050405020304" pitchFamily="18" charset="0"/>
-                          <a:cs typeface="Consolas" panose="020B0609020204030204" pitchFamily="49" charset="0"/>
-                        </a:rPr>
-                        <a:t>0100 + 0010</a:t>
-                      </a:r>
-                      <a:endParaRPr lang="en-US" sz="1800" kern="100">
-                        <a:effectLst/>
-                        <a:latin typeface="Aptos" panose="020B0004020202020204" pitchFamily="34" charset="0"/>
-                        <a:ea typeface="DengXian" panose="02010600030101010101" pitchFamily="2" charset="-122"/>
-                        <a:cs typeface="Times New Roman" panose="02020603050405020304" pitchFamily="18" charset="0"/>
-                      </a:endParaRPr>
-                    </a:p>
-                  </a:txBody>
-                  <a:tcPr marL="68580" marR="68580" marT="0" marB="0" anchor="ctr">
-                    <a:lnL w="12700" cap="flat" cmpd="sng" algn="ctr">
-                      <a:solidFill>
-                        <a:srgbClr val="000000"/>
-                      </a:solidFill>
-                      <a:prstDash val="solid"/>
-                      <a:round/>
-                      <a:headEnd type="none" w="med" len="med"/>
-                      <a:tailEnd type="none" w="med" len="med"/>
-                    </a:lnL>
-                    <a:lnR w="12700" cap="flat" cmpd="sng" algn="ctr">
-                      <a:solidFill>
-                        <a:srgbClr val="000000"/>
-                      </a:solidFill>
-                      <a:prstDash val="solid"/>
-                      <a:round/>
-                      <a:headEnd type="none" w="med" len="med"/>
-                      <a:tailEnd type="none" w="med" len="med"/>
-                    </a:lnR>
-                    <a:lnT w="12700" cap="flat" cmpd="sng" algn="ctr">
-                      <a:solidFill>
-                        <a:srgbClr val="000000"/>
-                      </a:solidFill>
-                      <a:prstDash val="solid"/>
-                      <a:round/>
-                      <a:headEnd type="none" w="med" len="med"/>
-                      <a:tailEnd type="none" w="med" len="med"/>
-                    </a:lnT>
-                    <a:lnB w="12700" cap="flat" cmpd="sng" algn="ctr">
-                      <a:solidFill>
-                        <a:srgbClr val="000000"/>
-                      </a:solidFill>
-                      <a:prstDash val="solid"/>
-                      <a:round/>
-                      <a:headEnd type="none" w="med" len="med"/>
-                      <a:tailEnd type="none" w="med" len="med"/>
-                    </a:lnB>
-                    <a:solidFill>
-                      <a:srgbClr val="FFFFFF"/>
-                    </a:solidFill>
-                  </a:tcPr>
-                </a:tc>
-                <a:tc>
-                  <a:txBody>
-                    <a:bodyPr/>
-                    <a:lstStyle/>
-                    <a:p>
-                      <a:pPr indent="140335">
-                        <a:lnSpc>
-                          <a:spcPct val="115000"/>
-                        </a:lnSpc>
-                        <a:spcAft>
-                          <a:spcPts val="800"/>
-                        </a:spcAft>
-                        <a:buNone/>
-                      </a:pPr>
-                      <a:r>
-                        <a:rPr lang="en-US" sz="1600" b="1" kern="100" dirty="0">
-                          <a:solidFill>
-                            <a:srgbClr val="000000"/>
-                          </a:solidFill>
-                          <a:effectLst/>
-                          <a:latin typeface="Consolas" panose="020B0609020204030204" pitchFamily="49" charset="0"/>
-                          <a:ea typeface="Times New Roman" panose="02020603050405020304" pitchFamily="18" charset="0"/>
-                          <a:cs typeface="Consolas" panose="020B0609020204030204" pitchFamily="49" charset="0"/>
-                        </a:rPr>
-                        <a:t>0110</a:t>
-                      </a:r>
-                      <a:endParaRPr lang="en-US" sz="1800" kern="100" dirty="0">
-                        <a:effectLst/>
-                        <a:latin typeface="Aptos" panose="020B0004020202020204" pitchFamily="34" charset="0"/>
-                        <a:ea typeface="DengXian" panose="02010600030101010101" pitchFamily="2" charset="-122"/>
-                        <a:cs typeface="Times New Roman" panose="02020603050405020304" pitchFamily="18" charset="0"/>
-                      </a:endParaRPr>
-                    </a:p>
-                  </a:txBody>
-                  <a:tcPr marL="68580" marR="68580" marT="0" marB="0" anchor="ctr">
-                    <a:lnL w="12700" cap="flat" cmpd="sng" algn="ctr">
-                      <a:solidFill>
-                        <a:srgbClr val="000000"/>
-                      </a:solidFill>
-                      <a:prstDash val="solid"/>
-                      <a:round/>
-                      <a:headEnd type="none" w="med" len="med"/>
-                      <a:tailEnd type="none" w="med" len="med"/>
-                    </a:lnL>
-                    <a:lnR w="12700" cap="flat" cmpd="sng" algn="ctr">
-                      <a:solidFill>
-                        <a:srgbClr val="000000"/>
-                      </a:solidFill>
-                      <a:prstDash val="solid"/>
-                      <a:round/>
-                      <a:headEnd type="none" w="med" len="med"/>
-                      <a:tailEnd type="none" w="med" len="med"/>
-                    </a:lnR>
-                    <a:lnT w="12700" cap="flat" cmpd="sng" algn="ctr">
-                      <a:solidFill>
-                        <a:srgbClr val="000000"/>
-                      </a:solidFill>
-                      <a:prstDash val="solid"/>
-                      <a:round/>
-                      <a:headEnd type="none" w="med" len="med"/>
-                      <a:tailEnd type="none" w="med" len="med"/>
-                    </a:lnT>
-                    <a:lnB w="12700" cap="flat" cmpd="sng" algn="ctr">
-                      <a:solidFill>
-                        <a:srgbClr val="000000"/>
-                      </a:solidFill>
-                      <a:prstDash val="solid"/>
-                      <a:round/>
-                      <a:headEnd type="none" w="med" len="med"/>
-                      <a:tailEnd type="none" w="med" len="med"/>
-                    </a:lnB>
-                    <a:solidFill>
-                      <a:srgbClr val="FFFFFF"/>
-                    </a:solidFill>
-                  </a:tcPr>
-                </a:tc>
-                <a:tc>
-                  <a:txBody>
-                    <a:bodyPr/>
-                    <a:lstStyle/>
-                    <a:p>
-                      <a:pPr indent="140335">
-                        <a:lnSpc>
-                          <a:spcPct val="115000"/>
-                        </a:lnSpc>
-                        <a:spcAft>
-                          <a:spcPts val="800"/>
-                        </a:spcAft>
-                        <a:buNone/>
-                      </a:pPr>
-                      <a:r>
-                        <a:rPr lang="en-US" sz="1800" kern="100" dirty="0">
-                          <a:effectLst/>
-                          <a:latin typeface="Aptos" panose="020B0004020202020204" pitchFamily="34" charset="0"/>
-                          <a:ea typeface="DengXian" panose="02010600030101010101" pitchFamily="2" charset="-122"/>
-                          <a:cs typeface="Times New Roman" panose="02020603050405020304" pitchFamily="18" charset="0"/>
-                        </a:rPr>
-                        <a:t>0</a:t>
-                      </a:r>
-                    </a:p>
-                  </a:txBody>
-                  <a:tcPr marL="68580" marR="68580" marT="0" marB="0" anchor="ctr">
-                    <a:lnL w="12700" cap="flat" cmpd="sng" algn="ctr">
-                      <a:solidFill>
-                        <a:srgbClr val="000000"/>
-                      </a:solidFill>
-                      <a:prstDash val="solid"/>
-                      <a:round/>
-                      <a:headEnd type="none" w="med" len="med"/>
-                      <a:tailEnd type="none" w="med" len="med"/>
-                    </a:lnL>
-                    <a:lnR w="12700" cap="flat" cmpd="sng" algn="ctr">
-                      <a:solidFill>
-                        <a:srgbClr val="000000"/>
-                      </a:solidFill>
-                      <a:prstDash val="solid"/>
-                      <a:round/>
-                      <a:headEnd type="none" w="med" len="med"/>
-                      <a:tailEnd type="none" w="med" len="med"/>
-                    </a:lnR>
-                    <a:lnT w="12700" cap="flat" cmpd="sng" algn="ctr">
-                      <a:solidFill>
-                        <a:srgbClr val="000000"/>
-                      </a:solidFill>
-                      <a:prstDash val="solid"/>
-                      <a:round/>
-                      <a:headEnd type="none" w="med" len="med"/>
-                      <a:tailEnd type="none" w="med" len="med"/>
-                    </a:lnT>
-                    <a:lnB w="12700" cap="flat" cmpd="sng" algn="ctr">
-                      <a:solidFill>
-                        <a:srgbClr val="000000"/>
-                      </a:solidFill>
-                      <a:prstDash val="solid"/>
-                      <a:round/>
-                      <a:headEnd type="none" w="med" len="med"/>
-                      <a:tailEnd type="none" w="med" len="med"/>
-                    </a:lnB>
-                    <a:solidFill>
-                      <a:srgbClr val="FFFFFF"/>
-                    </a:solidFill>
-                  </a:tcPr>
-                </a:tc>
-                <a:tc>
-                  <a:txBody>
-                    <a:bodyPr/>
-                    <a:lstStyle/>
-                    <a:p>
-                      <a:pPr indent="140335">
-                        <a:lnSpc>
-                          <a:spcPct val="115000"/>
-                        </a:lnSpc>
-                        <a:spcAft>
-                          <a:spcPts val="800"/>
-                        </a:spcAft>
-                        <a:buNone/>
-                      </a:pPr>
-                      <a:r>
-                        <a:rPr lang="en-US" sz="1800" kern="100" dirty="0">
-                          <a:effectLst/>
-                          <a:latin typeface="Aptos" panose="020B0004020202020204" pitchFamily="34" charset="0"/>
-                          <a:ea typeface="DengXian" panose="02010600030101010101" pitchFamily="2" charset="-122"/>
-                          <a:cs typeface="Times New Roman" panose="02020603050405020304" pitchFamily="18" charset="0"/>
-                        </a:rPr>
-                        <a:t>0</a:t>
-                      </a:r>
-                    </a:p>
-                  </a:txBody>
-                  <a:tcPr marL="68580" marR="68580" marT="0" marB="0" anchor="ctr">
-                    <a:lnL w="12700" cap="flat" cmpd="sng" algn="ctr">
-                      <a:solidFill>
-                        <a:srgbClr val="000000"/>
-                      </a:solidFill>
-                      <a:prstDash val="solid"/>
-                      <a:round/>
-                      <a:headEnd type="none" w="med" len="med"/>
-                      <a:tailEnd type="none" w="med" len="med"/>
-                    </a:lnL>
-                    <a:lnR w="12700" cap="flat" cmpd="sng" algn="ctr">
-                      <a:solidFill>
-                        <a:srgbClr val="000000"/>
-                      </a:solidFill>
-                      <a:prstDash val="solid"/>
-                      <a:round/>
-                      <a:headEnd type="none" w="med" len="med"/>
-                      <a:tailEnd type="none" w="med" len="med"/>
-                    </a:lnR>
-                    <a:lnT w="12700" cap="flat" cmpd="sng" algn="ctr">
-                      <a:solidFill>
-                        <a:srgbClr val="000000"/>
-                      </a:solidFill>
-                      <a:prstDash val="solid"/>
-                      <a:round/>
-                      <a:headEnd type="none" w="med" len="med"/>
-                      <a:tailEnd type="none" w="med" len="med"/>
-                    </a:lnT>
-                    <a:lnB w="12700" cap="flat" cmpd="sng" algn="ctr">
-                      <a:solidFill>
-                        <a:srgbClr val="000000"/>
-                      </a:solidFill>
-                      <a:prstDash val="solid"/>
-                      <a:round/>
-                      <a:headEnd type="none" w="med" len="med"/>
-                      <a:tailEnd type="none" w="med" len="med"/>
-                    </a:lnB>
-                    <a:solidFill>
-                      <a:srgbClr val="FFFFFF"/>
-                    </a:solidFill>
-                  </a:tcPr>
-                </a:tc>
-                <a:tc>
-                  <a:txBody>
-                    <a:bodyPr/>
-                    <a:lstStyle/>
-                    <a:p>
-                      <a:pPr indent="140335">
-                        <a:lnSpc>
-                          <a:spcPct val="115000"/>
-                        </a:lnSpc>
-                        <a:spcAft>
-                          <a:spcPts val="800"/>
-                        </a:spcAft>
-                        <a:buNone/>
-                      </a:pPr>
-                      <a:r>
-                        <a:rPr lang="en-US" sz="1800" kern="100" dirty="0">
-                          <a:effectLst/>
-                          <a:latin typeface="Aptos" panose="020B0004020202020204" pitchFamily="34" charset="0"/>
-                          <a:ea typeface="DengXian" panose="02010600030101010101" pitchFamily="2" charset="-122"/>
-                          <a:cs typeface="Times New Roman" panose="02020603050405020304" pitchFamily="18" charset="0"/>
-                        </a:rPr>
-                        <a:t>Y / Y</a:t>
-                      </a:r>
-                    </a:p>
-                  </a:txBody>
-                  <a:tcPr marL="68580" marR="68580" marT="0" marB="0" anchor="ctr">
-                    <a:lnL w="12700" cap="flat" cmpd="sng" algn="ctr">
-                      <a:solidFill>
-                        <a:srgbClr val="000000"/>
-                      </a:solidFill>
-                      <a:prstDash val="solid"/>
-                      <a:round/>
-                      <a:headEnd type="none" w="med" len="med"/>
-                      <a:tailEnd type="none" w="med" len="med"/>
-                    </a:lnL>
-                    <a:lnR w="12700" cap="flat" cmpd="sng" algn="ctr">
-                      <a:solidFill>
-                        <a:srgbClr val="000000"/>
-                      </a:solidFill>
-                      <a:prstDash val="solid"/>
-                      <a:round/>
-                      <a:headEnd type="none" w="med" len="med"/>
-                      <a:tailEnd type="none" w="med" len="med"/>
-                    </a:lnR>
-                    <a:lnT w="12700" cap="flat" cmpd="sng" algn="ctr">
-                      <a:solidFill>
-                        <a:srgbClr val="000000"/>
-                      </a:solidFill>
-                      <a:prstDash val="solid"/>
-                      <a:round/>
-                      <a:headEnd type="none" w="med" len="med"/>
-                      <a:tailEnd type="none" w="med" len="med"/>
-                    </a:lnT>
-                    <a:lnB w="12700" cap="flat" cmpd="sng" algn="ctr">
-                      <a:solidFill>
-                        <a:srgbClr val="000000"/>
-                      </a:solidFill>
-                      <a:prstDash val="solid"/>
-                      <a:round/>
-                      <a:headEnd type="none" w="med" len="med"/>
-                      <a:tailEnd type="none" w="med" len="med"/>
-                    </a:lnB>
-                    <a:solidFill>
-                      <a:srgbClr val="FFFFFF"/>
-                    </a:solidFill>
-                  </a:tcPr>
-                </a:tc>
-                <a:extLst>
-                  <a:ext uri="{0D108BD9-81ED-4DB2-BD59-A6C34878D82A}">
-                    <a16:rowId xmlns:a16="http://schemas.microsoft.com/office/drawing/2014/main" val="3994890508"/>
-                  </a:ext>
-                </a:extLst>
-              </a:tr>
-              <a:tr h="332105">
-                <a:tc>
-                  <a:txBody>
-                    <a:bodyPr/>
-                    <a:lstStyle/>
-                    <a:p>
-                      <a:pPr indent="140335">
-                        <a:lnSpc>
-                          <a:spcPct val="115000"/>
-                        </a:lnSpc>
-                        <a:spcAft>
-                          <a:spcPts val="800"/>
-                        </a:spcAft>
-                        <a:buNone/>
-                      </a:pPr>
-                      <a:r>
-                        <a:rPr lang="en-US" sz="1600" b="1" kern="100">
-                          <a:solidFill>
-                            <a:srgbClr val="000000"/>
-                          </a:solidFill>
-                          <a:effectLst/>
-                          <a:latin typeface="Consolas" panose="020B0609020204030204" pitchFamily="49" charset="0"/>
-                          <a:ea typeface="Times New Roman" panose="02020603050405020304" pitchFamily="18" charset="0"/>
-                          <a:cs typeface="Consolas" panose="020B0609020204030204" pitchFamily="49" charset="0"/>
-                        </a:rPr>
-                        <a:t>0100 + 0110</a:t>
-                      </a:r>
-                      <a:endParaRPr lang="en-US" sz="1800" kern="100">
-                        <a:effectLst/>
-                        <a:latin typeface="Aptos" panose="020B0004020202020204" pitchFamily="34" charset="0"/>
-                        <a:ea typeface="DengXian" panose="02010600030101010101" pitchFamily="2" charset="-122"/>
-                        <a:cs typeface="Times New Roman" panose="02020603050405020304" pitchFamily="18" charset="0"/>
-                      </a:endParaRPr>
-                    </a:p>
-                  </a:txBody>
-                  <a:tcPr marL="68580" marR="68580" marT="0" marB="0" anchor="ctr">
-                    <a:lnL w="12700" cap="flat" cmpd="sng" algn="ctr">
-                      <a:solidFill>
-                        <a:srgbClr val="000000"/>
-                      </a:solidFill>
-                      <a:prstDash val="solid"/>
-                      <a:round/>
-                      <a:headEnd type="none" w="med" len="med"/>
-                      <a:tailEnd type="none" w="med" len="med"/>
-                    </a:lnL>
-                    <a:lnR w="12700" cap="flat" cmpd="sng" algn="ctr">
-                      <a:solidFill>
-                        <a:srgbClr val="000000"/>
-                      </a:solidFill>
-                      <a:prstDash val="solid"/>
-                      <a:round/>
-                      <a:headEnd type="none" w="med" len="med"/>
-                      <a:tailEnd type="none" w="med" len="med"/>
-                    </a:lnR>
-                    <a:lnT w="12700" cap="flat" cmpd="sng" algn="ctr">
-                      <a:solidFill>
-                        <a:srgbClr val="000000"/>
-                      </a:solidFill>
-                      <a:prstDash val="solid"/>
-                      <a:round/>
-                      <a:headEnd type="none" w="med" len="med"/>
-                      <a:tailEnd type="none" w="med" len="med"/>
-                    </a:lnT>
-                    <a:lnB w="12700" cap="flat" cmpd="sng" algn="ctr">
-                      <a:solidFill>
-                        <a:srgbClr val="000000"/>
-                      </a:solidFill>
-                      <a:prstDash val="solid"/>
-                      <a:round/>
-                      <a:headEnd type="none" w="med" len="med"/>
-                      <a:tailEnd type="none" w="med" len="med"/>
-                    </a:lnB>
-                    <a:solidFill>
-                      <a:srgbClr val="FFFFFF"/>
-                    </a:solidFill>
-                  </a:tcPr>
-                </a:tc>
-                <a:tc>
-                  <a:txBody>
-                    <a:bodyPr/>
-                    <a:lstStyle/>
-                    <a:p>
-                      <a:pPr indent="140335">
-                        <a:lnSpc>
-                          <a:spcPct val="115000"/>
-                        </a:lnSpc>
-                        <a:spcAft>
-                          <a:spcPts val="800"/>
-                        </a:spcAft>
-                        <a:buNone/>
-                      </a:pPr>
-                      <a:r>
-                        <a:rPr lang="en-US" sz="1800" kern="100" dirty="0">
-                          <a:effectLst/>
-                          <a:latin typeface="Aptos" panose="020B0004020202020204" pitchFamily="34" charset="0"/>
-                          <a:ea typeface="DengXian" panose="02010600030101010101" pitchFamily="2" charset="-122"/>
-                          <a:cs typeface="Times New Roman" panose="02020603050405020304" pitchFamily="18" charset="0"/>
-                        </a:rPr>
-                        <a:t>1010</a:t>
-                      </a:r>
-                    </a:p>
-                  </a:txBody>
-                  <a:tcPr marL="68580" marR="68580" marT="0" marB="0" anchor="ctr">
-                    <a:lnL w="12700" cap="flat" cmpd="sng" algn="ctr">
-                      <a:solidFill>
-                        <a:srgbClr val="000000"/>
-                      </a:solidFill>
-                      <a:prstDash val="solid"/>
-                      <a:round/>
-                      <a:headEnd type="none" w="med" len="med"/>
-                      <a:tailEnd type="none" w="med" len="med"/>
-                    </a:lnL>
-                    <a:lnR w="12700" cap="flat" cmpd="sng" algn="ctr">
-                      <a:solidFill>
-                        <a:srgbClr val="000000"/>
-                      </a:solidFill>
-                      <a:prstDash val="solid"/>
-                      <a:round/>
-                      <a:headEnd type="none" w="med" len="med"/>
-                      <a:tailEnd type="none" w="med" len="med"/>
-                    </a:lnR>
-                    <a:lnT w="12700" cap="flat" cmpd="sng" algn="ctr">
-                      <a:solidFill>
-                        <a:srgbClr val="000000"/>
-                      </a:solidFill>
-                      <a:prstDash val="solid"/>
-                      <a:round/>
-                      <a:headEnd type="none" w="med" len="med"/>
-                      <a:tailEnd type="none" w="med" len="med"/>
-                    </a:lnT>
-                    <a:lnB w="12700" cap="flat" cmpd="sng" algn="ctr">
-                      <a:solidFill>
-                        <a:srgbClr val="000000"/>
-                      </a:solidFill>
-                      <a:prstDash val="solid"/>
-                      <a:round/>
-                      <a:headEnd type="none" w="med" len="med"/>
-                      <a:tailEnd type="none" w="med" len="med"/>
-                    </a:lnB>
-                    <a:solidFill>
-                      <a:srgbClr val="FFFFFF"/>
-                    </a:solidFill>
-                  </a:tcPr>
-                </a:tc>
-                <a:tc>
-                  <a:txBody>
-                    <a:bodyPr/>
-                    <a:lstStyle/>
-                    <a:p>
-                      <a:pPr indent="140335">
-                        <a:lnSpc>
-                          <a:spcPct val="115000"/>
-                        </a:lnSpc>
-                        <a:spcAft>
-                          <a:spcPts val="800"/>
-                        </a:spcAft>
-                        <a:buNone/>
-                      </a:pPr>
-                      <a:r>
-                        <a:rPr lang="en-US" sz="1800" kern="100" dirty="0">
-                          <a:effectLst/>
-                          <a:latin typeface="Aptos" panose="020B0004020202020204" pitchFamily="34" charset="0"/>
-                          <a:ea typeface="DengXian" panose="02010600030101010101" pitchFamily="2" charset="-122"/>
-                          <a:cs typeface="Times New Roman" panose="02020603050405020304" pitchFamily="18" charset="0"/>
-                        </a:rPr>
-                        <a:t>0</a:t>
-                      </a:r>
-                    </a:p>
-                  </a:txBody>
-                  <a:tcPr marL="68580" marR="68580" marT="0" marB="0" anchor="ctr">
-                    <a:lnL w="12700" cap="flat" cmpd="sng" algn="ctr">
-                      <a:solidFill>
-                        <a:srgbClr val="000000"/>
-                      </a:solidFill>
-                      <a:prstDash val="solid"/>
-                      <a:round/>
-                      <a:headEnd type="none" w="med" len="med"/>
-                      <a:tailEnd type="none" w="med" len="med"/>
-                    </a:lnL>
-                    <a:lnR w="12700" cap="flat" cmpd="sng" algn="ctr">
-                      <a:solidFill>
-                        <a:srgbClr val="000000"/>
-                      </a:solidFill>
-                      <a:prstDash val="solid"/>
-                      <a:round/>
-                      <a:headEnd type="none" w="med" len="med"/>
-                      <a:tailEnd type="none" w="med" len="med"/>
-                    </a:lnR>
-                    <a:lnT w="12700" cap="flat" cmpd="sng" algn="ctr">
-                      <a:solidFill>
-                        <a:srgbClr val="000000"/>
-                      </a:solidFill>
-                      <a:prstDash val="solid"/>
-                      <a:round/>
-                      <a:headEnd type="none" w="med" len="med"/>
-                      <a:tailEnd type="none" w="med" len="med"/>
-                    </a:lnT>
-                    <a:lnB w="12700" cap="flat" cmpd="sng" algn="ctr">
-                      <a:solidFill>
-                        <a:srgbClr val="000000"/>
-                      </a:solidFill>
-                      <a:prstDash val="solid"/>
-                      <a:round/>
-                      <a:headEnd type="none" w="med" len="med"/>
-                      <a:tailEnd type="none" w="med" len="med"/>
-                    </a:lnB>
-                    <a:solidFill>
-                      <a:srgbClr val="FFFFFF"/>
-                    </a:solidFill>
-                  </a:tcPr>
-                </a:tc>
-                <a:tc>
-                  <a:txBody>
-                    <a:bodyPr/>
-                    <a:lstStyle/>
-                    <a:p>
-                      <a:pPr indent="140335">
-                        <a:lnSpc>
-                          <a:spcPct val="115000"/>
-                        </a:lnSpc>
-                        <a:spcAft>
-                          <a:spcPts val="800"/>
-                        </a:spcAft>
-                        <a:buNone/>
-                      </a:pPr>
-                      <a:r>
-                        <a:rPr lang="en-US" sz="1800" kern="100" dirty="0">
-                          <a:effectLst/>
-                          <a:latin typeface="Aptos" panose="020B0004020202020204" pitchFamily="34" charset="0"/>
-                          <a:ea typeface="DengXian" panose="02010600030101010101" pitchFamily="2" charset="-122"/>
-                          <a:cs typeface="Times New Roman" panose="02020603050405020304" pitchFamily="18" charset="0"/>
-                        </a:rPr>
-                        <a:t>1</a:t>
-                      </a:r>
-                    </a:p>
-                  </a:txBody>
-                  <a:tcPr marL="68580" marR="68580" marT="0" marB="0" anchor="ctr">
-                    <a:lnL w="12700" cap="flat" cmpd="sng" algn="ctr">
-                      <a:solidFill>
-                        <a:srgbClr val="000000"/>
-                      </a:solidFill>
-                      <a:prstDash val="solid"/>
-                      <a:round/>
-                      <a:headEnd type="none" w="med" len="med"/>
-                      <a:tailEnd type="none" w="med" len="med"/>
-                    </a:lnL>
-                    <a:lnR w="12700" cap="flat" cmpd="sng" algn="ctr">
-                      <a:solidFill>
-                        <a:srgbClr val="000000"/>
-                      </a:solidFill>
-                      <a:prstDash val="solid"/>
-                      <a:round/>
-                      <a:headEnd type="none" w="med" len="med"/>
-                      <a:tailEnd type="none" w="med" len="med"/>
-                    </a:lnR>
-                    <a:lnT w="12700" cap="flat" cmpd="sng" algn="ctr">
-                      <a:solidFill>
-                        <a:srgbClr val="000000"/>
-                      </a:solidFill>
-                      <a:prstDash val="solid"/>
-                      <a:round/>
-                      <a:headEnd type="none" w="med" len="med"/>
-                      <a:tailEnd type="none" w="med" len="med"/>
-                    </a:lnT>
-                    <a:lnB w="12700" cap="flat" cmpd="sng" algn="ctr">
-                      <a:solidFill>
-                        <a:srgbClr val="000000"/>
-                      </a:solidFill>
-                      <a:prstDash val="solid"/>
-                      <a:round/>
-                      <a:headEnd type="none" w="med" len="med"/>
-                      <a:tailEnd type="none" w="med" len="med"/>
-                    </a:lnB>
-                    <a:solidFill>
-                      <a:srgbClr val="FFFFFF"/>
-                    </a:solidFill>
-                  </a:tcPr>
-                </a:tc>
-                <a:tc>
-                  <a:txBody>
-                    <a:bodyPr/>
-                    <a:lstStyle/>
-                    <a:p>
-                      <a:pPr indent="140335">
-                        <a:lnSpc>
-                          <a:spcPct val="115000"/>
-                        </a:lnSpc>
-                        <a:spcAft>
-                          <a:spcPts val="800"/>
-                        </a:spcAft>
-                        <a:buNone/>
-                      </a:pPr>
-                      <a:r>
-                        <a:rPr lang="en-US" sz="1800" kern="100" dirty="0">
-                          <a:effectLst/>
-                          <a:latin typeface="Aptos" panose="020B0004020202020204" pitchFamily="34" charset="0"/>
-                          <a:ea typeface="DengXian" panose="02010600030101010101" pitchFamily="2" charset="-122"/>
-                          <a:cs typeface="Times New Roman" panose="02020603050405020304" pitchFamily="18" charset="0"/>
-                        </a:rPr>
-                        <a:t>Y / N</a:t>
-                      </a:r>
-                    </a:p>
-                  </a:txBody>
-                  <a:tcPr marL="68580" marR="68580" marT="0" marB="0" anchor="ctr">
-                    <a:lnL w="12700" cap="flat" cmpd="sng" algn="ctr">
-                      <a:solidFill>
-                        <a:srgbClr val="000000"/>
-                      </a:solidFill>
-                      <a:prstDash val="solid"/>
-                      <a:round/>
-                      <a:headEnd type="none" w="med" len="med"/>
-                      <a:tailEnd type="none" w="med" len="med"/>
-                    </a:lnL>
-                    <a:lnR w="12700" cap="flat" cmpd="sng" algn="ctr">
-                      <a:solidFill>
-                        <a:srgbClr val="000000"/>
-                      </a:solidFill>
-                      <a:prstDash val="solid"/>
-                      <a:round/>
-                      <a:headEnd type="none" w="med" len="med"/>
-                      <a:tailEnd type="none" w="med" len="med"/>
-                    </a:lnR>
-                    <a:lnT w="12700" cap="flat" cmpd="sng" algn="ctr">
-                      <a:solidFill>
-                        <a:srgbClr val="000000"/>
-                      </a:solidFill>
-                      <a:prstDash val="solid"/>
-                      <a:round/>
-                      <a:headEnd type="none" w="med" len="med"/>
-                      <a:tailEnd type="none" w="med" len="med"/>
-                    </a:lnT>
-                    <a:lnB w="12700" cap="flat" cmpd="sng" algn="ctr">
-                      <a:solidFill>
-                        <a:srgbClr val="000000"/>
-                      </a:solidFill>
-                      <a:prstDash val="solid"/>
-                      <a:round/>
-                      <a:headEnd type="none" w="med" len="med"/>
-                      <a:tailEnd type="none" w="med" len="med"/>
-                    </a:lnB>
-                    <a:solidFill>
-                      <a:srgbClr val="FFFFFF"/>
-                    </a:solidFill>
-                  </a:tcPr>
-                </a:tc>
-                <a:extLst>
-                  <a:ext uri="{0D108BD9-81ED-4DB2-BD59-A6C34878D82A}">
-                    <a16:rowId xmlns:a16="http://schemas.microsoft.com/office/drawing/2014/main" val="4189663783"/>
-                  </a:ext>
-                </a:extLst>
-              </a:tr>
-              <a:tr h="332105">
-                <a:tc>
-                  <a:txBody>
-                    <a:bodyPr/>
-                    <a:lstStyle/>
-                    <a:p>
-                      <a:pPr indent="140335">
-                        <a:lnSpc>
-                          <a:spcPct val="115000"/>
-                        </a:lnSpc>
-                        <a:spcAft>
-                          <a:spcPts val="800"/>
-                        </a:spcAft>
-                        <a:buNone/>
-                      </a:pPr>
-                      <a:r>
-                        <a:rPr lang="en-US" sz="1600" b="1" kern="100">
-                          <a:solidFill>
-                            <a:srgbClr val="000000"/>
-                          </a:solidFill>
-                          <a:effectLst/>
-                          <a:latin typeface="Consolas" panose="020B0609020204030204" pitchFamily="49" charset="0"/>
-                          <a:ea typeface="Times New Roman" panose="02020603050405020304" pitchFamily="18" charset="0"/>
-                          <a:cs typeface="Consolas" panose="020B0609020204030204" pitchFamily="49" charset="0"/>
-                        </a:rPr>
-                        <a:t>1100 + 1110</a:t>
-                      </a:r>
-                      <a:endParaRPr lang="en-US" sz="1800" kern="100">
-                        <a:effectLst/>
-                        <a:latin typeface="Aptos" panose="020B0004020202020204" pitchFamily="34" charset="0"/>
-                        <a:ea typeface="DengXian" panose="02010600030101010101" pitchFamily="2" charset="-122"/>
-                        <a:cs typeface="Times New Roman" panose="02020603050405020304" pitchFamily="18" charset="0"/>
-                      </a:endParaRPr>
-                    </a:p>
-                  </a:txBody>
-                  <a:tcPr marL="68580" marR="68580" marT="0" marB="0" anchor="ctr">
-                    <a:lnL w="12700" cap="flat" cmpd="sng" algn="ctr">
-                      <a:solidFill>
-                        <a:srgbClr val="000000"/>
-                      </a:solidFill>
-                      <a:prstDash val="solid"/>
-                      <a:round/>
-                      <a:headEnd type="none" w="med" len="med"/>
-                      <a:tailEnd type="none" w="med" len="med"/>
-                    </a:lnL>
-                    <a:lnR w="12700" cap="flat" cmpd="sng" algn="ctr">
-                      <a:solidFill>
-                        <a:srgbClr val="000000"/>
-                      </a:solidFill>
-                      <a:prstDash val="solid"/>
-                      <a:round/>
-                      <a:headEnd type="none" w="med" len="med"/>
-                      <a:tailEnd type="none" w="med" len="med"/>
-                    </a:lnR>
-                    <a:lnT w="12700" cap="flat" cmpd="sng" algn="ctr">
-                      <a:solidFill>
-                        <a:srgbClr val="000000"/>
-                      </a:solidFill>
-                      <a:prstDash val="solid"/>
-                      <a:round/>
-                      <a:headEnd type="none" w="med" len="med"/>
-                      <a:tailEnd type="none" w="med" len="med"/>
-                    </a:lnT>
-                    <a:lnB w="12700" cap="flat" cmpd="sng" algn="ctr">
-                      <a:solidFill>
-                        <a:srgbClr val="000000"/>
-                      </a:solidFill>
-                      <a:prstDash val="solid"/>
-                      <a:round/>
-                      <a:headEnd type="none" w="med" len="med"/>
-                      <a:tailEnd type="none" w="med" len="med"/>
-                    </a:lnB>
-                    <a:solidFill>
-                      <a:srgbClr val="FFFFFF"/>
-                    </a:solidFill>
-                  </a:tcPr>
-                </a:tc>
-                <a:tc>
-                  <a:txBody>
-                    <a:bodyPr/>
-                    <a:lstStyle/>
-                    <a:p>
-                      <a:pPr indent="140335">
-                        <a:lnSpc>
-                          <a:spcPct val="115000"/>
-                        </a:lnSpc>
-                        <a:spcAft>
-                          <a:spcPts val="800"/>
-                        </a:spcAft>
-                        <a:buNone/>
-                      </a:pPr>
-                      <a:r>
-                        <a:rPr lang="en-US" sz="1800" kern="100" dirty="0">
-                          <a:effectLst/>
-                          <a:latin typeface="Aptos" panose="020B0004020202020204" pitchFamily="34" charset="0"/>
-                          <a:ea typeface="DengXian" panose="02010600030101010101" pitchFamily="2" charset="-122"/>
-                          <a:cs typeface="Times New Roman" panose="02020603050405020304" pitchFamily="18" charset="0"/>
-                        </a:rPr>
-                        <a:t>1010</a:t>
-                      </a:r>
-                    </a:p>
-                  </a:txBody>
-                  <a:tcPr marL="68580" marR="68580" marT="0" marB="0" anchor="ctr">
-                    <a:lnL w="12700" cap="flat" cmpd="sng" algn="ctr">
-                      <a:solidFill>
-                        <a:srgbClr val="000000"/>
-                      </a:solidFill>
-                      <a:prstDash val="solid"/>
-                      <a:round/>
-                      <a:headEnd type="none" w="med" len="med"/>
-                      <a:tailEnd type="none" w="med" len="med"/>
-                    </a:lnL>
-                    <a:lnR w="12700" cap="flat" cmpd="sng" algn="ctr">
-                      <a:solidFill>
-                        <a:srgbClr val="000000"/>
-                      </a:solidFill>
-                      <a:prstDash val="solid"/>
-                      <a:round/>
-                      <a:headEnd type="none" w="med" len="med"/>
-                      <a:tailEnd type="none" w="med" len="med"/>
-                    </a:lnR>
-                    <a:lnT w="12700" cap="flat" cmpd="sng" algn="ctr">
-                      <a:solidFill>
-                        <a:srgbClr val="000000"/>
-                      </a:solidFill>
-                      <a:prstDash val="solid"/>
-                      <a:round/>
-                      <a:headEnd type="none" w="med" len="med"/>
-                      <a:tailEnd type="none" w="med" len="med"/>
-                    </a:lnT>
-                    <a:lnB w="12700" cap="flat" cmpd="sng" algn="ctr">
-                      <a:solidFill>
-                        <a:srgbClr val="000000"/>
-                      </a:solidFill>
-                      <a:prstDash val="solid"/>
-                      <a:round/>
-                      <a:headEnd type="none" w="med" len="med"/>
-                      <a:tailEnd type="none" w="med" len="med"/>
-                    </a:lnB>
-                    <a:solidFill>
-                      <a:srgbClr val="FFFFFF"/>
-                    </a:solidFill>
-                  </a:tcPr>
-                </a:tc>
-                <a:tc>
-                  <a:txBody>
-                    <a:bodyPr/>
-                    <a:lstStyle/>
-                    <a:p>
-                      <a:pPr indent="140335">
-                        <a:lnSpc>
-                          <a:spcPct val="115000"/>
-                        </a:lnSpc>
-                        <a:spcAft>
-                          <a:spcPts val="800"/>
-                        </a:spcAft>
-                        <a:buNone/>
-                      </a:pPr>
-                      <a:r>
-                        <a:rPr lang="en-US" sz="1800" kern="100" dirty="0">
-                          <a:effectLst/>
-                          <a:latin typeface="Aptos" panose="020B0004020202020204" pitchFamily="34" charset="0"/>
-                          <a:ea typeface="DengXian" panose="02010600030101010101" pitchFamily="2" charset="-122"/>
-                          <a:cs typeface="Times New Roman" panose="02020603050405020304" pitchFamily="18" charset="0"/>
-                        </a:rPr>
-                        <a:t>1</a:t>
-                      </a:r>
-                    </a:p>
-                  </a:txBody>
-                  <a:tcPr marL="68580" marR="68580" marT="0" marB="0" anchor="ctr">
-                    <a:lnL w="12700" cap="flat" cmpd="sng" algn="ctr">
-                      <a:solidFill>
-                        <a:srgbClr val="000000"/>
-                      </a:solidFill>
-                      <a:prstDash val="solid"/>
-                      <a:round/>
-                      <a:headEnd type="none" w="med" len="med"/>
-                      <a:tailEnd type="none" w="med" len="med"/>
-                    </a:lnL>
-                    <a:lnR w="12700" cap="flat" cmpd="sng" algn="ctr">
-                      <a:solidFill>
-                        <a:srgbClr val="000000"/>
-                      </a:solidFill>
-                      <a:prstDash val="solid"/>
-                      <a:round/>
-                      <a:headEnd type="none" w="med" len="med"/>
-                      <a:tailEnd type="none" w="med" len="med"/>
-                    </a:lnR>
-                    <a:lnT w="12700" cap="flat" cmpd="sng" algn="ctr">
-                      <a:solidFill>
-                        <a:srgbClr val="000000"/>
-                      </a:solidFill>
-                      <a:prstDash val="solid"/>
-                      <a:round/>
-                      <a:headEnd type="none" w="med" len="med"/>
-                      <a:tailEnd type="none" w="med" len="med"/>
-                    </a:lnT>
-                    <a:lnB w="12700" cap="flat" cmpd="sng" algn="ctr">
-                      <a:solidFill>
-                        <a:srgbClr val="000000"/>
-                      </a:solidFill>
-                      <a:prstDash val="solid"/>
-                      <a:round/>
-                      <a:headEnd type="none" w="med" len="med"/>
-                      <a:tailEnd type="none" w="med" len="med"/>
-                    </a:lnB>
-                    <a:solidFill>
-                      <a:srgbClr val="FFFFFF"/>
-                    </a:solidFill>
-                  </a:tcPr>
-                </a:tc>
-                <a:tc>
-                  <a:txBody>
-                    <a:bodyPr/>
-                    <a:lstStyle/>
-                    <a:p>
-                      <a:pPr indent="140335">
-                        <a:lnSpc>
-                          <a:spcPct val="115000"/>
-                        </a:lnSpc>
-                        <a:spcAft>
-                          <a:spcPts val="800"/>
-                        </a:spcAft>
-                        <a:buNone/>
-                      </a:pPr>
-                      <a:r>
-                        <a:rPr lang="en-US" sz="1800" kern="100" dirty="0">
-                          <a:effectLst/>
-                          <a:latin typeface="Aptos" panose="020B0004020202020204" pitchFamily="34" charset="0"/>
-                          <a:ea typeface="DengXian" panose="02010600030101010101" pitchFamily="2" charset="-122"/>
-                          <a:cs typeface="Times New Roman" panose="02020603050405020304" pitchFamily="18" charset="0"/>
-                        </a:rPr>
-                        <a:t>0</a:t>
-                      </a:r>
-                    </a:p>
-                  </a:txBody>
-                  <a:tcPr marL="68580" marR="68580" marT="0" marB="0" anchor="ctr">
-                    <a:lnL w="12700" cap="flat" cmpd="sng" algn="ctr">
-                      <a:solidFill>
-                        <a:srgbClr val="000000"/>
-                      </a:solidFill>
-                      <a:prstDash val="solid"/>
-                      <a:round/>
-                      <a:headEnd type="none" w="med" len="med"/>
-                      <a:tailEnd type="none" w="med" len="med"/>
-                    </a:lnL>
-                    <a:lnR w="12700" cap="flat" cmpd="sng" algn="ctr">
-                      <a:solidFill>
-                        <a:srgbClr val="000000"/>
-                      </a:solidFill>
-                      <a:prstDash val="solid"/>
-                      <a:round/>
-                      <a:headEnd type="none" w="med" len="med"/>
-                      <a:tailEnd type="none" w="med" len="med"/>
-                    </a:lnR>
-                    <a:lnT w="12700" cap="flat" cmpd="sng" algn="ctr">
-                      <a:solidFill>
-                        <a:srgbClr val="000000"/>
-                      </a:solidFill>
-                      <a:prstDash val="solid"/>
-                      <a:round/>
-                      <a:headEnd type="none" w="med" len="med"/>
-                      <a:tailEnd type="none" w="med" len="med"/>
-                    </a:lnT>
-                    <a:lnB w="12700" cap="flat" cmpd="sng" algn="ctr">
-                      <a:solidFill>
-                        <a:srgbClr val="000000"/>
-                      </a:solidFill>
-                      <a:prstDash val="solid"/>
-                      <a:round/>
-                      <a:headEnd type="none" w="med" len="med"/>
-                      <a:tailEnd type="none" w="med" len="med"/>
-                    </a:lnB>
-                    <a:solidFill>
-                      <a:srgbClr val="FFFFFF"/>
-                    </a:solidFill>
-                  </a:tcPr>
-                </a:tc>
-                <a:tc>
-                  <a:txBody>
-                    <a:bodyPr/>
-                    <a:lstStyle/>
-                    <a:p>
-                      <a:pPr indent="140335">
-                        <a:lnSpc>
-                          <a:spcPct val="115000"/>
-                        </a:lnSpc>
-                        <a:spcAft>
-                          <a:spcPts val="800"/>
-                        </a:spcAft>
-                        <a:buNone/>
-                      </a:pPr>
-                      <a:r>
-                        <a:rPr lang="en-US" sz="1800" kern="100" dirty="0">
-                          <a:effectLst/>
-                          <a:latin typeface="Aptos" panose="020B0004020202020204" pitchFamily="34" charset="0"/>
-                          <a:ea typeface="DengXian" panose="02010600030101010101" pitchFamily="2" charset="-122"/>
-                          <a:cs typeface="Times New Roman" panose="02020603050405020304" pitchFamily="18" charset="0"/>
-                        </a:rPr>
-                        <a:t>N / Y </a:t>
-                      </a:r>
-                    </a:p>
-                    <a:p>
-                      <a:pPr indent="140335">
-                        <a:lnSpc>
-                          <a:spcPct val="115000"/>
-                        </a:lnSpc>
-                        <a:spcAft>
-                          <a:spcPts val="800"/>
-                        </a:spcAft>
-                        <a:buNone/>
-                      </a:pPr>
-                      <a:r>
-                        <a:rPr lang="en-US" sz="1800" kern="100" dirty="0">
-                          <a:effectLst/>
-                          <a:latin typeface="Aptos" panose="020B0004020202020204" pitchFamily="34" charset="0"/>
-                          <a:ea typeface="DengXian" panose="02010600030101010101" pitchFamily="2" charset="-122"/>
-                          <a:cs typeface="Times New Roman" panose="02020603050405020304" pitchFamily="18" charset="0"/>
-                        </a:rPr>
-                        <a:t>Unsigned add: 12+14=10  (GT 26)</a:t>
-                      </a:r>
-                    </a:p>
-                    <a:p>
-                      <a:pPr indent="140335">
-                        <a:lnSpc>
-                          <a:spcPct val="115000"/>
-                        </a:lnSpc>
-                        <a:spcAft>
-                          <a:spcPts val="800"/>
-                        </a:spcAft>
-                        <a:buNone/>
-                      </a:pPr>
-                      <a:r>
-                        <a:rPr lang="en-US" sz="1800" kern="100" dirty="0">
-                          <a:effectLst/>
-                          <a:latin typeface="Aptos" panose="020B0004020202020204" pitchFamily="34" charset="0"/>
-                          <a:ea typeface="DengXian" panose="02010600030101010101" pitchFamily="2" charset="-122"/>
-                          <a:cs typeface="Times New Roman" panose="02020603050405020304" pitchFamily="18" charset="0"/>
-                        </a:rPr>
-                        <a:t>Signed add: -4 – 2 = -6</a:t>
-                      </a:r>
-                    </a:p>
-                  </a:txBody>
-                  <a:tcPr marL="68580" marR="68580" marT="0" marB="0" anchor="ctr">
-                    <a:lnL w="12700" cap="flat" cmpd="sng" algn="ctr">
-                      <a:solidFill>
-                        <a:srgbClr val="000000"/>
-                      </a:solidFill>
-                      <a:prstDash val="solid"/>
-                      <a:round/>
-                      <a:headEnd type="none" w="med" len="med"/>
-                      <a:tailEnd type="none" w="med" len="med"/>
-                    </a:lnL>
-                    <a:lnR w="12700" cap="flat" cmpd="sng" algn="ctr">
-                      <a:solidFill>
-                        <a:srgbClr val="000000"/>
-                      </a:solidFill>
-                      <a:prstDash val="solid"/>
-                      <a:round/>
-                      <a:headEnd type="none" w="med" len="med"/>
-                      <a:tailEnd type="none" w="med" len="med"/>
-                    </a:lnR>
-                    <a:lnT w="12700" cap="flat" cmpd="sng" algn="ctr">
-                      <a:solidFill>
-                        <a:srgbClr val="000000"/>
-                      </a:solidFill>
-                      <a:prstDash val="solid"/>
-                      <a:round/>
-                      <a:headEnd type="none" w="med" len="med"/>
-                      <a:tailEnd type="none" w="med" len="med"/>
-                    </a:lnT>
-                    <a:lnB w="12700" cap="flat" cmpd="sng" algn="ctr">
-                      <a:solidFill>
-                        <a:srgbClr val="000000"/>
-                      </a:solidFill>
-                      <a:prstDash val="solid"/>
-                      <a:round/>
-                      <a:headEnd type="none" w="med" len="med"/>
-                      <a:tailEnd type="none" w="med" len="med"/>
-                    </a:lnB>
-                    <a:solidFill>
-                      <a:srgbClr val="FFFFFF"/>
-                    </a:solidFill>
-                  </a:tcPr>
-                </a:tc>
-                <a:extLst>
-                  <a:ext uri="{0D108BD9-81ED-4DB2-BD59-A6C34878D82A}">
-                    <a16:rowId xmlns:a16="http://schemas.microsoft.com/office/drawing/2014/main" val="4096703682"/>
-                  </a:ext>
-                </a:extLst>
-              </a:tr>
-              <a:tr h="332105">
-                <a:tc>
-                  <a:txBody>
-                    <a:bodyPr/>
-                    <a:lstStyle/>
-                    <a:p>
-                      <a:pPr indent="140335">
-                        <a:lnSpc>
-                          <a:spcPct val="115000"/>
-                        </a:lnSpc>
-                        <a:spcAft>
-                          <a:spcPts val="800"/>
-                        </a:spcAft>
-                        <a:buNone/>
-                      </a:pPr>
-                      <a:r>
-                        <a:rPr lang="en-US" sz="1600" b="1" kern="100">
-                          <a:solidFill>
-                            <a:srgbClr val="000000"/>
-                          </a:solidFill>
-                          <a:effectLst/>
-                          <a:latin typeface="Consolas" panose="020B0609020204030204" pitchFamily="49" charset="0"/>
-                          <a:ea typeface="Times New Roman" panose="02020603050405020304" pitchFamily="18" charset="0"/>
-                          <a:cs typeface="Consolas" panose="020B0609020204030204" pitchFamily="49" charset="0"/>
-                        </a:rPr>
-                        <a:t>1100 + 1010</a:t>
-                      </a:r>
-                      <a:endParaRPr lang="en-US" sz="1800" kern="100">
-                        <a:effectLst/>
-                        <a:latin typeface="Aptos" panose="020B0004020202020204" pitchFamily="34" charset="0"/>
-                        <a:ea typeface="DengXian" panose="02010600030101010101" pitchFamily="2" charset="-122"/>
-                        <a:cs typeface="Times New Roman" panose="02020603050405020304" pitchFamily="18" charset="0"/>
-                      </a:endParaRPr>
-                    </a:p>
-                  </a:txBody>
-                  <a:tcPr marL="68580" marR="68580" marT="0" marB="0" anchor="ctr">
-                    <a:lnL w="12700" cap="flat" cmpd="sng" algn="ctr">
-                      <a:solidFill>
-                        <a:srgbClr val="000000"/>
-                      </a:solidFill>
-                      <a:prstDash val="solid"/>
-                      <a:round/>
-                      <a:headEnd type="none" w="med" len="med"/>
-                      <a:tailEnd type="none" w="med" len="med"/>
-                    </a:lnL>
-                    <a:lnR w="12700" cap="flat" cmpd="sng" algn="ctr">
-                      <a:solidFill>
-                        <a:srgbClr val="000000"/>
-                      </a:solidFill>
-                      <a:prstDash val="solid"/>
-                      <a:round/>
-                      <a:headEnd type="none" w="med" len="med"/>
-                      <a:tailEnd type="none" w="med" len="med"/>
-                    </a:lnR>
-                    <a:lnT w="12700" cap="flat" cmpd="sng" algn="ctr">
-                      <a:solidFill>
-                        <a:srgbClr val="000000"/>
-                      </a:solidFill>
-                      <a:prstDash val="solid"/>
-                      <a:round/>
-                      <a:headEnd type="none" w="med" len="med"/>
-                      <a:tailEnd type="none" w="med" len="med"/>
-                    </a:lnT>
-                    <a:lnB w="12700" cap="flat" cmpd="sng" algn="ctr">
-                      <a:solidFill>
-                        <a:srgbClr val="000000"/>
-                      </a:solidFill>
-                      <a:prstDash val="solid"/>
-                      <a:round/>
-                      <a:headEnd type="none" w="med" len="med"/>
-                      <a:tailEnd type="none" w="med" len="med"/>
-                    </a:lnB>
-                    <a:solidFill>
-                      <a:srgbClr val="FFFFFF"/>
-                    </a:solidFill>
-                  </a:tcPr>
-                </a:tc>
-                <a:tc>
-                  <a:txBody>
-                    <a:bodyPr/>
-                    <a:lstStyle/>
-                    <a:p>
-                      <a:pPr indent="140335">
-                        <a:lnSpc>
-                          <a:spcPct val="115000"/>
-                        </a:lnSpc>
-                        <a:spcAft>
-                          <a:spcPts val="800"/>
-                        </a:spcAft>
-                        <a:buNone/>
-                      </a:pPr>
-                      <a:r>
-                        <a:rPr lang="en-US" sz="1800" kern="100" dirty="0">
-                          <a:effectLst/>
-                          <a:latin typeface="Aptos" panose="020B0004020202020204" pitchFamily="34" charset="0"/>
-                          <a:ea typeface="DengXian" panose="02010600030101010101" pitchFamily="2" charset="-122"/>
-                          <a:cs typeface="Times New Roman" panose="02020603050405020304" pitchFamily="18" charset="0"/>
-                        </a:rPr>
-                        <a:t>0110</a:t>
-                      </a:r>
-                    </a:p>
-                  </a:txBody>
-                  <a:tcPr marL="68580" marR="68580" marT="0" marB="0" anchor="ctr">
-                    <a:lnL w="12700" cap="flat" cmpd="sng" algn="ctr">
-                      <a:solidFill>
-                        <a:srgbClr val="000000"/>
-                      </a:solidFill>
-                      <a:prstDash val="solid"/>
-                      <a:round/>
-                      <a:headEnd type="none" w="med" len="med"/>
-                      <a:tailEnd type="none" w="med" len="med"/>
-                    </a:lnL>
-                    <a:lnR w="12700" cap="flat" cmpd="sng" algn="ctr">
-                      <a:solidFill>
-                        <a:srgbClr val="000000"/>
-                      </a:solidFill>
-                      <a:prstDash val="solid"/>
-                      <a:round/>
-                      <a:headEnd type="none" w="med" len="med"/>
-                      <a:tailEnd type="none" w="med" len="med"/>
-                    </a:lnR>
-                    <a:lnT w="12700" cap="flat" cmpd="sng" algn="ctr">
-                      <a:solidFill>
-                        <a:srgbClr val="000000"/>
-                      </a:solidFill>
-                      <a:prstDash val="solid"/>
-                      <a:round/>
-                      <a:headEnd type="none" w="med" len="med"/>
-                      <a:tailEnd type="none" w="med" len="med"/>
-                    </a:lnT>
-                    <a:lnB w="12700" cap="flat" cmpd="sng" algn="ctr">
-                      <a:solidFill>
-                        <a:srgbClr val="000000"/>
-                      </a:solidFill>
-                      <a:prstDash val="solid"/>
-                      <a:round/>
-                      <a:headEnd type="none" w="med" len="med"/>
-                      <a:tailEnd type="none" w="med" len="med"/>
-                    </a:lnB>
-                    <a:solidFill>
-                      <a:srgbClr val="FFFFFF"/>
-                    </a:solidFill>
-                  </a:tcPr>
-                </a:tc>
-                <a:tc>
-                  <a:txBody>
-                    <a:bodyPr/>
-                    <a:lstStyle/>
-                    <a:p>
-                      <a:pPr indent="140335">
-                        <a:lnSpc>
-                          <a:spcPct val="115000"/>
-                        </a:lnSpc>
-                        <a:spcAft>
-                          <a:spcPts val="800"/>
-                        </a:spcAft>
-                        <a:buNone/>
-                      </a:pPr>
-                      <a:r>
-                        <a:rPr lang="en-US" sz="1800" kern="100" dirty="0">
-                          <a:effectLst/>
-                          <a:latin typeface="Aptos" panose="020B0004020202020204" pitchFamily="34" charset="0"/>
-                          <a:ea typeface="DengXian" panose="02010600030101010101" pitchFamily="2" charset="-122"/>
-                          <a:cs typeface="Times New Roman" panose="02020603050405020304" pitchFamily="18" charset="0"/>
-                        </a:rPr>
-                        <a:t>1</a:t>
-                      </a:r>
-                    </a:p>
-                  </a:txBody>
-                  <a:tcPr marL="68580" marR="68580" marT="0" marB="0" anchor="ctr">
-                    <a:lnL w="12700" cap="flat" cmpd="sng" algn="ctr">
-                      <a:solidFill>
-                        <a:srgbClr val="000000"/>
-                      </a:solidFill>
-                      <a:prstDash val="solid"/>
-                      <a:round/>
-                      <a:headEnd type="none" w="med" len="med"/>
-                      <a:tailEnd type="none" w="med" len="med"/>
-                    </a:lnL>
-                    <a:lnR w="12700" cap="flat" cmpd="sng" algn="ctr">
-                      <a:solidFill>
-                        <a:srgbClr val="000000"/>
-                      </a:solidFill>
-                      <a:prstDash val="solid"/>
-                      <a:round/>
-                      <a:headEnd type="none" w="med" len="med"/>
-                      <a:tailEnd type="none" w="med" len="med"/>
-                    </a:lnR>
-                    <a:lnT w="12700" cap="flat" cmpd="sng" algn="ctr">
-                      <a:solidFill>
-                        <a:srgbClr val="000000"/>
-                      </a:solidFill>
-                      <a:prstDash val="solid"/>
-                      <a:round/>
-                      <a:headEnd type="none" w="med" len="med"/>
-                      <a:tailEnd type="none" w="med" len="med"/>
-                    </a:lnT>
-                    <a:lnB w="12700" cap="flat" cmpd="sng" algn="ctr">
-                      <a:solidFill>
-                        <a:srgbClr val="000000"/>
-                      </a:solidFill>
-                      <a:prstDash val="solid"/>
-                      <a:round/>
-                      <a:headEnd type="none" w="med" len="med"/>
-                      <a:tailEnd type="none" w="med" len="med"/>
-                    </a:lnB>
-                    <a:solidFill>
-                      <a:srgbClr val="FFFFFF"/>
-                    </a:solidFill>
-                  </a:tcPr>
-                </a:tc>
-                <a:tc>
-                  <a:txBody>
-                    <a:bodyPr/>
-                    <a:lstStyle/>
-                    <a:p>
-                      <a:pPr indent="140335">
-                        <a:lnSpc>
-                          <a:spcPct val="115000"/>
-                        </a:lnSpc>
-                        <a:spcAft>
-                          <a:spcPts val="800"/>
-                        </a:spcAft>
-                        <a:buNone/>
-                      </a:pPr>
-                      <a:r>
-                        <a:rPr lang="en-US" sz="1800" kern="100" dirty="0">
-                          <a:effectLst/>
-                          <a:latin typeface="Aptos" panose="020B0004020202020204" pitchFamily="34" charset="0"/>
-                          <a:ea typeface="DengXian" panose="02010600030101010101" pitchFamily="2" charset="-122"/>
-                          <a:cs typeface="Times New Roman" panose="02020603050405020304" pitchFamily="18" charset="0"/>
-                        </a:rPr>
-                        <a:t>1</a:t>
-                      </a:r>
-                    </a:p>
-                  </a:txBody>
-                  <a:tcPr marL="68580" marR="68580" marT="0" marB="0" anchor="ctr">
-                    <a:lnL w="12700" cap="flat" cmpd="sng" algn="ctr">
-                      <a:solidFill>
-                        <a:srgbClr val="000000"/>
-                      </a:solidFill>
-                      <a:prstDash val="solid"/>
-                      <a:round/>
-                      <a:headEnd type="none" w="med" len="med"/>
-                      <a:tailEnd type="none" w="med" len="med"/>
-                    </a:lnL>
-                    <a:lnR w="12700" cap="flat" cmpd="sng" algn="ctr">
-                      <a:solidFill>
-                        <a:srgbClr val="000000"/>
-                      </a:solidFill>
-                      <a:prstDash val="solid"/>
-                      <a:round/>
-                      <a:headEnd type="none" w="med" len="med"/>
-                      <a:tailEnd type="none" w="med" len="med"/>
-                    </a:lnR>
-                    <a:lnT w="12700" cap="flat" cmpd="sng" algn="ctr">
-                      <a:solidFill>
-                        <a:srgbClr val="000000"/>
-                      </a:solidFill>
-                      <a:prstDash val="solid"/>
-                      <a:round/>
-                      <a:headEnd type="none" w="med" len="med"/>
-                      <a:tailEnd type="none" w="med" len="med"/>
-                    </a:lnT>
-                    <a:lnB w="12700" cap="flat" cmpd="sng" algn="ctr">
-                      <a:solidFill>
-                        <a:srgbClr val="000000"/>
-                      </a:solidFill>
-                      <a:prstDash val="solid"/>
-                      <a:round/>
-                      <a:headEnd type="none" w="med" len="med"/>
-                      <a:tailEnd type="none" w="med" len="med"/>
-                    </a:lnB>
-                    <a:solidFill>
-                      <a:srgbClr val="FFFFFF"/>
-                    </a:solidFill>
-                  </a:tcPr>
-                </a:tc>
-                <a:tc>
-                  <a:txBody>
-                    <a:bodyPr/>
-                    <a:lstStyle/>
-                    <a:p>
-                      <a:pPr indent="140335">
-                        <a:lnSpc>
-                          <a:spcPct val="115000"/>
-                        </a:lnSpc>
-                        <a:spcAft>
-                          <a:spcPts val="800"/>
-                        </a:spcAft>
-                        <a:buNone/>
-                      </a:pPr>
-                      <a:r>
-                        <a:rPr lang="en-US" sz="1800" kern="100" dirty="0">
-                          <a:effectLst/>
-                          <a:latin typeface="Aptos" panose="020B0004020202020204" pitchFamily="34" charset="0"/>
-                          <a:ea typeface="DengXian" panose="02010600030101010101" pitchFamily="2" charset="-122"/>
-                          <a:cs typeface="Times New Roman" panose="02020603050405020304" pitchFamily="18" charset="0"/>
-                        </a:rPr>
-                        <a:t>N / N</a:t>
-                      </a:r>
-                    </a:p>
-                    <a:p>
-                      <a:pPr indent="140335">
-                        <a:lnSpc>
-                          <a:spcPct val="115000"/>
-                        </a:lnSpc>
-                        <a:spcAft>
-                          <a:spcPts val="800"/>
-                        </a:spcAft>
-                        <a:buNone/>
-                      </a:pPr>
-                      <a:r>
-                        <a:rPr lang="en-US" sz="1800" kern="100" dirty="0">
-                          <a:effectLst/>
-                          <a:latin typeface="Aptos" panose="020B0004020202020204" pitchFamily="34" charset="0"/>
-                          <a:ea typeface="DengXian" panose="02010600030101010101" pitchFamily="2" charset="-122"/>
-                          <a:cs typeface="Times New Roman" panose="02020603050405020304" pitchFamily="18" charset="0"/>
-                        </a:rPr>
-                        <a:t>Unsigned add: 12+10=6  (GT 22)</a:t>
-                      </a:r>
-                    </a:p>
-                    <a:p>
-                      <a:pPr indent="140335">
-                        <a:lnSpc>
-                          <a:spcPct val="115000"/>
-                        </a:lnSpc>
-                        <a:spcAft>
-                          <a:spcPts val="800"/>
-                        </a:spcAft>
-                        <a:buNone/>
-                      </a:pPr>
-                      <a:r>
-                        <a:rPr lang="en-US" sz="1800" kern="100" dirty="0">
-                          <a:effectLst/>
-                          <a:latin typeface="Aptos" panose="020B0004020202020204" pitchFamily="34" charset="0"/>
-                          <a:ea typeface="DengXian" panose="02010600030101010101" pitchFamily="2" charset="-122"/>
-                          <a:cs typeface="Times New Roman" panose="02020603050405020304" pitchFamily="18" charset="0"/>
-                        </a:rPr>
-                        <a:t>Signed add: -4 –6 =  6 (GT -10)</a:t>
-                      </a:r>
-                    </a:p>
-                  </a:txBody>
-                  <a:tcPr marL="68580" marR="68580" marT="0" marB="0" anchor="ctr">
-                    <a:lnL w="12700" cap="flat" cmpd="sng" algn="ctr">
-                      <a:solidFill>
-                        <a:srgbClr val="000000"/>
-                      </a:solidFill>
-                      <a:prstDash val="solid"/>
-                      <a:round/>
-                      <a:headEnd type="none" w="med" len="med"/>
-                      <a:tailEnd type="none" w="med" len="med"/>
-                    </a:lnL>
-                    <a:lnR w="12700" cap="flat" cmpd="sng" algn="ctr">
-                      <a:solidFill>
-                        <a:srgbClr val="000000"/>
-                      </a:solidFill>
-                      <a:prstDash val="solid"/>
-                      <a:round/>
-                      <a:headEnd type="none" w="med" len="med"/>
-                      <a:tailEnd type="none" w="med" len="med"/>
-                    </a:lnR>
-                    <a:lnT w="12700" cap="flat" cmpd="sng" algn="ctr">
-                      <a:solidFill>
-                        <a:srgbClr val="000000"/>
-                      </a:solidFill>
-                      <a:prstDash val="solid"/>
-                      <a:round/>
-                      <a:headEnd type="none" w="med" len="med"/>
-                      <a:tailEnd type="none" w="med" len="med"/>
-                    </a:lnT>
-                    <a:lnB w="12700" cap="flat" cmpd="sng" algn="ctr">
-                      <a:solidFill>
-                        <a:srgbClr val="000000"/>
-                      </a:solidFill>
-                      <a:prstDash val="solid"/>
-                      <a:round/>
-                      <a:headEnd type="none" w="med" len="med"/>
-                      <a:tailEnd type="none" w="med" len="med"/>
-                    </a:lnB>
-                    <a:solidFill>
-                      <a:srgbClr val="FFFFFF"/>
-                    </a:solidFill>
-                  </a:tcPr>
-                </a:tc>
-                <a:extLst>
-                  <a:ext uri="{0D108BD9-81ED-4DB2-BD59-A6C34878D82A}">
-                    <a16:rowId xmlns:a16="http://schemas.microsoft.com/office/drawing/2014/main" val="2157277809"/>
-                  </a:ext>
-                </a:extLst>
-              </a:tr>
-              <a:tr h="332105">
-                <a:tc>
-                  <a:txBody>
-                    <a:bodyPr/>
-                    <a:lstStyle/>
-                    <a:p>
-                      <a:pPr indent="140335">
-                        <a:lnSpc>
-                          <a:spcPct val="115000"/>
-                        </a:lnSpc>
-                        <a:spcAft>
-                          <a:spcPts val="800"/>
-                        </a:spcAft>
-                        <a:buNone/>
-                      </a:pPr>
-                      <a:r>
-                        <a:rPr lang="en-US" sz="1600" b="1" kern="100">
-                          <a:solidFill>
-                            <a:srgbClr val="000000"/>
-                          </a:solidFill>
-                          <a:effectLst/>
-                          <a:latin typeface="Consolas" panose="020B0609020204030204" pitchFamily="49" charset="0"/>
-                          <a:ea typeface="Times New Roman" panose="02020603050405020304" pitchFamily="18" charset="0"/>
-                          <a:cs typeface="Consolas" panose="020B0609020204030204" pitchFamily="49" charset="0"/>
-                        </a:rPr>
-                        <a:t>0100 - 0010</a:t>
-                      </a:r>
-                      <a:endParaRPr lang="en-US" sz="1800" kern="100">
-                        <a:effectLst/>
-                        <a:latin typeface="Aptos" panose="020B0004020202020204" pitchFamily="34" charset="0"/>
-                        <a:ea typeface="DengXian" panose="02010600030101010101" pitchFamily="2" charset="-122"/>
-                        <a:cs typeface="Times New Roman" panose="02020603050405020304" pitchFamily="18" charset="0"/>
-                      </a:endParaRPr>
-                    </a:p>
-                  </a:txBody>
-                  <a:tcPr marL="68580" marR="68580" marT="0" marB="0" anchor="ctr">
-                    <a:lnL w="12700" cap="flat" cmpd="sng" algn="ctr">
-                      <a:solidFill>
-                        <a:srgbClr val="000000"/>
-                      </a:solidFill>
-                      <a:prstDash val="solid"/>
-                      <a:round/>
-                      <a:headEnd type="none" w="med" len="med"/>
-                      <a:tailEnd type="none" w="med" len="med"/>
-                    </a:lnL>
-                    <a:lnR w="12700" cap="flat" cmpd="sng" algn="ctr">
-                      <a:solidFill>
-                        <a:srgbClr val="000000"/>
-                      </a:solidFill>
-                      <a:prstDash val="solid"/>
-                      <a:round/>
-                      <a:headEnd type="none" w="med" len="med"/>
-                      <a:tailEnd type="none" w="med" len="med"/>
-                    </a:lnR>
-                    <a:lnT w="12700" cap="flat" cmpd="sng" algn="ctr">
-                      <a:solidFill>
-                        <a:srgbClr val="000000"/>
-                      </a:solidFill>
-                      <a:prstDash val="solid"/>
-                      <a:round/>
-                      <a:headEnd type="none" w="med" len="med"/>
-                      <a:tailEnd type="none" w="med" len="med"/>
-                    </a:lnT>
-                    <a:lnB w="12700" cap="flat" cmpd="sng" algn="ctr">
-                      <a:solidFill>
-                        <a:srgbClr val="000000"/>
-                      </a:solidFill>
-                      <a:prstDash val="solid"/>
-                      <a:round/>
-                      <a:headEnd type="none" w="med" len="med"/>
-                      <a:tailEnd type="none" w="med" len="med"/>
-                    </a:lnB>
-                    <a:solidFill>
-                      <a:srgbClr val="FFFFFF"/>
-                    </a:solidFill>
-                  </a:tcPr>
-                </a:tc>
-                <a:tc>
-                  <a:txBody>
-                    <a:bodyPr/>
-                    <a:lstStyle/>
-                    <a:p>
-                      <a:pPr indent="140335">
-                        <a:lnSpc>
-                          <a:spcPct val="115000"/>
-                        </a:lnSpc>
-                        <a:spcAft>
-                          <a:spcPts val="800"/>
-                        </a:spcAft>
-                        <a:buNone/>
-                      </a:pPr>
-                      <a:r>
-                        <a:rPr lang="en-US" sz="1800" kern="100" dirty="0">
-                          <a:effectLst/>
-                          <a:latin typeface="Aptos" panose="020B0004020202020204" pitchFamily="34" charset="0"/>
-                          <a:ea typeface="DengXian" panose="02010600030101010101" pitchFamily="2" charset="-122"/>
-                          <a:cs typeface="Times New Roman" panose="02020603050405020304" pitchFamily="18" charset="0"/>
-                        </a:rPr>
-                        <a:t>0010</a:t>
-                      </a:r>
-                    </a:p>
-                  </a:txBody>
-                  <a:tcPr marL="68580" marR="68580" marT="0" marB="0" anchor="ctr">
-                    <a:lnL w="12700" cap="flat" cmpd="sng" algn="ctr">
-                      <a:solidFill>
-                        <a:srgbClr val="000000"/>
-                      </a:solidFill>
-                      <a:prstDash val="solid"/>
-                      <a:round/>
-                      <a:headEnd type="none" w="med" len="med"/>
-                      <a:tailEnd type="none" w="med" len="med"/>
-                    </a:lnL>
-                    <a:lnR w="12700" cap="flat" cmpd="sng" algn="ctr">
-                      <a:solidFill>
-                        <a:srgbClr val="000000"/>
-                      </a:solidFill>
-                      <a:prstDash val="solid"/>
-                      <a:round/>
-                      <a:headEnd type="none" w="med" len="med"/>
-                      <a:tailEnd type="none" w="med" len="med"/>
-                    </a:lnR>
-                    <a:lnT w="12700" cap="flat" cmpd="sng" algn="ctr">
-                      <a:solidFill>
-                        <a:srgbClr val="000000"/>
-                      </a:solidFill>
-                      <a:prstDash val="solid"/>
-                      <a:round/>
-                      <a:headEnd type="none" w="med" len="med"/>
-                      <a:tailEnd type="none" w="med" len="med"/>
-                    </a:lnT>
-                    <a:lnB w="12700" cap="flat" cmpd="sng" algn="ctr">
-                      <a:solidFill>
-                        <a:srgbClr val="000000"/>
-                      </a:solidFill>
-                      <a:prstDash val="solid"/>
-                      <a:round/>
-                      <a:headEnd type="none" w="med" len="med"/>
-                      <a:tailEnd type="none" w="med" len="med"/>
-                    </a:lnB>
-                    <a:solidFill>
-                      <a:srgbClr val="FFFFFF"/>
-                    </a:solidFill>
-                  </a:tcPr>
-                </a:tc>
-                <a:tc>
-                  <a:txBody>
-                    <a:bodyPr/>
-                    <a:lstStyle/>
-                    <a:p>
-                      <a:pPr indent="140335">
-                        <a:lnSpc>
-                          <a:spcPct val="115000"/>
-                        </a:lnSpc>
-                        <a:spcAft>
-                          <a:spcPts val="800"/>
-                        </a:spcAft>
-                        <a:buNone/>
-                      </a:pPr>
-                      <a:r>
-                        <a:rPr lang="en-US" sz="1800" kern="100" dirty="0">
-                          <a:effectLst/>
-                          <a:latin typeface="Aptos" panose="020B0004020202020204" pitchFamily="34" charset="0"/>
-                          <a:ea typeface="DengXian" panose="02010600030101010101" pitchFamily="2" charset="-122"/>
-                          <a:cs typeface="Times New Roman" panose="02020603050405020304" pitchFamily="18" charset="0"/>
-                        </a:rPr>
-                        <a:t>1</a:t>
-                      </a:r>
-                    </a:p>
-                  </a:txBody>
-                  <a:tcPr marL="68580" marR="68580" marT="0" marB="0" anchor="ctr">
-                    <a:lnL w="12700" cap="flat" cmpd="sng" algn="ctr">
-                      <a:solidFill>
-                        <a:srgbClr val="000000"/>
-                      </a:solidFill>
-                      <a:prstDash val="solid"/>
-                      <a:round/>
-                      <a:headEnd type="none" w="med" len="med"/>
-                      <a:tailEnd type="none" w="med" len="med"/>
-                    </a:lnL>
-                    <a:lnR w="12700" cap="flat" cmpd="sng" algn="ctr">
-                      <a:solidFill>
-                        <a:srgbClr val="000000"/>
-                      </a:solidFill>
-                      <a:prstDash val="solid"/>
-                      <a:round/>
-                      <a:headEnd type="none" w="med" len="med"/>
-                      <a:tailEnd type="none" w="med" len="med"/>
-                    </a:lnR>
-                    <a:lnT w="12700" cap="flat" cmpd="sng" algn="ctr">
-                      <a:solidFill>
-                        <a:srgbClr val="000000"/>
-                      </a:solidFill>
-                      <a:prstDash val="solid"/>
-                      <a:round/>
-                      <a:headEnd type="none" w="med" len="med"/>
-                      <a:tailEnd type="none" w="med" len="med"/>
-                    </a:lnT>
-                    <a:lnB w="12700" cap="flat" cmpd="sng" algn="ctr">
-                      <a:solidFill>
-                        <a:srgbClr val="000000"/>
-                      </a:solidFill>
-                      <a:prstDash val="solid"/>
-                      <a:round/>
-                      <a:headEnd type="none" w="med" len="med"/>
-                      <a:tailEnd type="none" w="med" len="med"/>
-                    </a:lnB>
-                    <a:solidFill>
-                      <a:srgbClr val="FFFFFF"/>
-                    </a:solidFill>
-                  </a:tcPr>
-                </a:tc>
-                <a:tc>
-                  <a:txBody>
-                    <a:bodyPr/>
-                    <a:lstStyle/>
-                    <a:p>
-                      <a:pPr indent="140335">
-                        <a:lnSpc>
-                          <a:spcPct val="115000"/>
-                        </a:lnSpc>
-                        <a:spcAft>
-                          <a:spcPts val="800"/>
-                        </a:spcAft>
-                        <a:buNone/>
-                      </a:pPr>
-                      <a:r>
-                        <a:rPr lang="en-US" sz="1800" kern="100" dirty="0">
-                          <a:effectLst/>
-                          <a:latin typeface="Aptos" panose="020B0004020202020204" pitchFamily="34" charset="0"/>
-                          <a:ea typeface="DengXian" panose="02010600030101010101" pitchFamily="2" charset="-122"/>
-                          <a:cs typeface="Times New Roman" panose="02020603050405020304" pitchFamily="18" charset="0"/>
-                        </a:rPr>
-                        <a:t>0</a:t>
-                      </a:r>
-                    </a:p>
-                  </a:txBody>
-                  <a:tcPr marL="68580" marR="68580" marT="0" marB="0" anchor="ctr">
-                    <a:lnL w="12700" cap="flat" cmpd="sng" algn="ctr">
-                      <a:solidFill>
-                        <a:srgbClr val="000000"/>
-                      </a:solidFill>
-                      <a:prstDash val="solid"/>
-                      <a:round/>
-                      <a:headEnd type="none" w="med" len="med"/>
-                      <a:tailEnd type="none" w="med" len="med"/>
-                    </a:lnL>
-                    <a:lnR w="12700" cap="flat" cmpd="sng" algn="ctr">
-                      <a:solidFill>
-                        <a:srgbClr val="000000"/>
-                      </a:solidFill>
-                      <a:prstDash val="solid"/>
-                      <a:round/>
-                      <a:headEnd type="none" w="med" len="med"/>
-                      <a:tailEnd type="none" w="med" len="med"/>
-                    </a:lnR>
-                    <a:lnT w="12700" cap="flat" cmpd="sng" algn="ctr">
-                      <a:solidFill>
-                        <a:srgbClr val="000000"/>
-                      </a:solidFill>
-                      <a:prstDash val="solid"/>
-                      <a:round/>
-                      <a:headEnd type="none" w="med" len="med"/>
-                      <a:tailEnd type="none" w="med" len="med"/>
-                    </a:lnT>
-                    <a:lnB w="12700" cap="flat" cmpd="sng" algn="ctr">
-                      <a:solidFill>
-                        <a:srgbClr val="000000"/>
-                      </a:solidFill>
-                      <a:prstDash val="solid"/>
-                      <a:round/>
-                      <a:headEnd type="none" w="med" len="med"/>
-                      <a:tailEnd type="none" w="med" len="med"/>
-                    </a:lnB>
-                    <a:solidFill>
-                      <a:srgbClr val="FFFFFF"/>
-                    </a:solidFill>
-                  </a:tcPr>
-                </a:tc>
-                <a:tc>
-                  <a:txBody>
-                    <a:bodyPr/>
-                    <a:lstStyle/>
-                    <a:p>
-                      <a:pPr indent="140335">
-                        <a:lnSpc>
-                          <a:spcPct val="115000"/>
-                        </a:lnSpc>
-                        <a:spcAft>
-                          <a:spcPts val="800"/>
-                        </a:spcAft>
-                        <a:buNone/>
-                      </a:pPr>
-                      <a:r>
-                        <a:rPr lang="en-US" sz="1800" kern="100" dirty="0">
-                          <a:effectLst/>
-                          <a:latin typeface="Aptos" panose="020B0004020202020204" pitchFamily="34" charset="0"/>
-                          <a:ea typeface="DengXian" panose="02010600030101010101" pitchFamily="2" charset="-122"/>
-                          <a:cs typeface="Times New Roman" panose="02020603050405020304" pitchFamily="18" charset="0"/>
-                        </a:rPr>
-                        <a:t>Y / Y</a:t>
-                      </a:r>
-                    </a:p>
-                  </a:txBody>
-                  <a:tcPr marL="68580" marR="68580" marT="0" marB="0" anchor="ctr">
-                    <a:lnL w="12700" cap="flat" cmpd="sng" algn="ctr">
-                      <a:solidFill>
-                        <a:srgbClr val="000000"/>
-                      </a:solidFill>
-                      <a:prstDash val="solid"/>
-                      <a:round/>
-                      <a:headEnd type="none" w="med" len="med"/>
-                      <a:tailEnd type="none" w="med" len="med"/>
-                    </a:lnL>
-                    <a:lnR w="12700" cap="flat" cmpd="sng" algn="ctr">
-                      <a:solidFill>
-                        <a:srgbClr val="000000"/>
-                      </a:solidFill>
-                      <a:prstDash val="solid"/>
-                      <a:round/>
-                      <a:headEnd type="none" w="med" len="med"/>
-                      <a:tailEnd type="none" w="med" len="med"/>
-                    </a:lnR>
-                    <a:lnT w="12700" cap="flat" cmpd="sng" algn="ctr">
-                      <a:solidFill>
-                        <a:srgbClr val="000000"/>
-                      </a:solidFill>
-                      <a:prstDash val="solid"/>
-                      <a:round/>
-                      <a:headEnd type="none" w="med" len="med"/>
-                      <a:tailEnd type="none" w="med" len="med"/>
-                    </a:lnT>
-                    <a:lnB w="12700" cap="flat" cmpd="sng" algn="ctr">
-                      <a:solidFill>
-                        <a:srgbClr val="000000"/>
-                      </a:solidFill>
-                      <a:prstDash val="solid"/>
-                      <a:round/>
-                      <a:headEnd type="none" w="med" len="med"/>
-                      <a:tailEnd type="none" w="med" len="med"/>
-                    </a:lnB>
-                    <a:solidFill>
-                      <a:srgbClr val="FFFFFF"/>
-                    </a:solidFill>
-                  </a:tcPr>
-                </a:tc>
-                <a:extLst>
-                  <a:ext uri="{0D108BD9-81ED-4DB2-BD59-A6C34878D82A}">
-                    <a16:rowId xmlns:a16="http://schemas.microsoft.com/office/drawing/2014/main" val="584716115"/>
-                  </a:ext>
-                </a:extLst>
-              </a:tr>
-              <a:tr h="332105">
-                <a:tc>
-                  <a:txBody>
-                    <a:bodyPr/>
-                    <a:lstStyle/>
-                    <a:p>
-                      <a:pPr indent="140335">
-                        <a:lnSpc>
-                          <a:spcPct val="115000"/>
-                        </a:lnSpc>
-                        <a:spcAft>
-                          <a:spcPts val="800"/>
-                        </a:spcAft>
-                        <a:buNone/>
-                      </a:pPr>
-                      <a:r>
-                        <a:rPr lang="en-US" sz="1600" b="1" kern="100">
-                          <a:solidFill>
-                            <a:srgbClr val="000000"/>
-                          </a:solidFill>
-                          <a:effectLst/>
-                          <a:latin typeface="Consolas" panose="020B0609020204030204" pitchFamily="49" charset="0"/>
-                          <a:ea typeface="Times New Roman" panose="02020603050405020304" pitchFamily="18" charset="0"/>
-                          <a:cs typeface="Consolas" panose="020B0609020204030204" pitchFamily="49" charset="0"/>
-                        </a:rPr>
-                        <a:t>0100 - 0110</a:t>
-                      </a:r>
-                      <a:endParaRPr lang="en-US" sz="1800" kern="100">
-                        <a:effectLst/>
-                        <a:latin typeface="Aptos" panose="020B0004020202020204" pitchFamily="34" charset="0"/>
-                        <a:ea typeface="DengXian" panose="02010600030101010101" pitchFamily="2" charset="-122"/>
-                        <a:cs typeface="Times New Roman" panose="02020603050405020304" pitchFamily="18" charset="0"/>
-                      </a:endParaRPr>
-                    </a:p>
-                  </a:txBody>
-                  <a:tcPr marL="68580" marR="68580" marT="0" marB="0" anchor="ctr">
-                    <a:lnL w="12700" cap="flat" cmpd="sng" algn="ctr">
-                      <a:solidFill>
-                        <a:srgbClr val="000000"/>
-                      </a:solidFill>
-                      <a:prstDash val="solid"/>
-                      <a:round/>
-                      <a:headEnd type="none" w="med" len="med"/>
-                      <a:tailEnd type="none" w="med" len="med"/>
-                    </a:lnL>
-                    <a:lnR w="12700" cap="flat" cmpd="sng" algn="ctr">
-                      <a:solidFill>
-                        <a:srgbClr val="000000"/>
-                      </a:solidFill>
-                      <a:prstDash val="solid"/>
-                      <a:round/>
-                      <a:headEnd type="none" w="med" len="med"/>
-                      <a:tailEnd type="none" w="med" len="med"/>
-                    </a:lnR>
-                    <a:lnT w="12700" cap="flat" cmpd="sng" algn="ctr">
-                      <a:solidFill>
-                        <a:srgbClr val="000000"/>
-                      </a:solidFill>
-                      <a:prstDash val="solid"/>
-                      <a:round/>
-                      <a:headEnd type="none" w="med" len="med"/>
-                      <a:tailEnd type="none" w="med" len="med"/>
-                    </a:lnT>
-                    <a:lnB w="12700" cap="flat" cmpd="sng" algn="ctr">
-                      <a:solidFill>
-                        <a:srgbClr val="000000"/>
-                      </a:solidFill>
-                      <a:prstDash val="solid"/>
-                      <a:round/>
-                      <a:headEnd type="none" w="med" len="med"/>
-                      <a:tailEnd type="none" w="med" len="med"/>
-                    </a:lnB>
-                    <a:solidFill>
-                      <a:srgbClr val="FFFFFF"/>
-                    </a:solidFill>
-                  </a:tcPr>
-                </a:tc>
-                <a:tc>
-                  <a:txBody>
-                    <a:bodyPr/>
-                    <a:lstStyle/>
-                    <a:p>
-                      <a:pPr indent="140335">
-                        <a:lnSpc>
-                          <a:spcPct val="115000"/>
-                        </a:lnSpc>
-                        <a:spcAft>
-                          <a:spcPts val="800"/>
-                        </a:spcAft>
-                        <a:buNone/>
-                      </a:pPr>
-                      <a:endParaRPr lang="en-US" sz="1800" kern="100" dirty="0">
-                        <a:effectLst/>
-                        <a:latin typeface="Aptos" panose="020B0004020202020204" pitchFamily="34" charset="0"/>
-                        <a:ea typeface="DengXian" panose="02010600030101010101" pitchFamily="2" charset="-122"/>
-                        <a:cs typeface="Times New Roman" panose="02020603050405020304" pitchFamily="18" charset="0"/>
-                      </a:endParaRPr>
-                    </a:p>
-                  </a:txBody>
-                  <a:tcPr marL="68580" marR="68580" marT="0" marB="0" anchor="ctr">
-                    <a:lnL w="12700" cap="flat" cmpd="sng" algn="ctr">
-                      <a:solidFill>
-                        <a:srgbClr val="000000"/>
-                      </a:solidFill>
-                      <a:prstDash val="solid"/>
-                      <a:round/>
-                      <a:headEnd type="none" w="med" len="med"/>
-                      <a:tailEnd type="none" w="med" len="med"/>
-                    </a:lnL>
-                    <a:lnR w="12700" cap="flat" cmpd="sng" algn="ctr">
-                      <a:solidFill>
-                        <a:srgbClr val="000000"/>
-                      </a:solidFill>
-                      <a:prstDash val="solid"/>
-                      <a:round/>
-                      <a:headEnd type="none" w="med" len="med"/>
-                      <a:tailEnd type="none" w="med" len="med"/>
-                    </a:lnR>
-                    <a:lnT w="12700" cap="flat" cmpd="sng" algn="ctr">
-                      <a:solidFill>
-                        <a:srgbClr val="000000"/>
-                      </a:solidFill>
-                      <a:prstDash val="solid"/>
-                      <a:round/>
-                      <a:headEnd type="none" w="med" len="med"/>
-                      <a:tailEnd type="none" w="med" len="med"/>
-                    </a:lnT>
-                    <a:lnB w="12700" cap="flat" cmpd="sng" algn="ctr">
-                      <a:solidFill>
-                        <a:srgbClr val="000000"/>
-                      </a:solidFill>
-                      <a:prstDash val="solid"/>
-                      <a:round/>
-                      <a:headEnd type="none" w="med" len="med"/>
-                      <a:tailEnd type="none" w="med" len="med"/>
-                    </a:lnB>
-                    <a:solidFill>
-                      <a:srgbClr val="FFFFFF"/>
-                    </a:solidFill>
-                  </a:tcPr>
-                </a:tc>
-                <a:tc>
-                  <a:txBody>
-                    <a:bodyPr/>
-                    <a:lstStyle/>
-                    <a:p>
-                      <a:pPr indent="140335">
-                        <a:lnSpc>
-                          <a:spcPct val="115000"/>
-                        </a:lnSpc>
-                        <a:spcAft>
-                          <a:spcPts val="800"/>
-                        </a:spcAft>
-                        <a:buNone/>
-                      </a:pPr>
-                      <a:endParaRPr lang="en-US" sz="1800" kern="100">
-                        <a:effectLst/>
-                        <a:latin typeface="Aptos" panose="020B0004020202020204" pitchFamily="34" charset="0"/>
-                        <a:ea typeface="DengXian" panose="02010600030101010101" pitchFamily="2" charset="-122"/>
-                        <a:cs typeface="Times New Roman" panose="02020603050405020304" pitchFamily="18" charset="0"/>
-                      </a:endParaRPr>
-                    </a:p>
-                  </a:txBody>
-                  <a:tcPr marL="68580" marR="68580" marT="0" marB="0" anchor="ctr">
-                    <a:lnL w="12700" cap="flat" cmpd="sng" algn="ctr">
-                      <a:solidFill>
-                        <a:srgbClr val="000000"/>
-                      </a:solidFill>
-                      <a:prstDash val="solid"/>
-                      <a:round/>
-                      <a:headEnd type="none" w="med" len="med"/>
-                      <a:tailEnd type="none" w="med" len="med"/>
-                    </a:lnL>
-                    <a:lnR w="12700" cap="flat" cmpd="sng" algn="ctr">
-                      <a:solidFill>
-                        <a:srgbClr val="000000"/>
-                      </a:solidFill>
-                      <a:prstDash val="solid"/>
-                      <a:round/>
-                      <a:headEnd type="none" w="med" len="med"/>
-                      <a:tailEnd type="none" w="med" len="med"/>
-                    </a:lnR>
-                    <a:lnT w="12700" cap="flat" cmpd="sng" algn="ctr">
-                      <a:solidFill>
-                        <a:srgbClr val="000000"/>
-                      </a:solidFill>
-                      <a:prstDash val="solid"/>
-                      <a:round/>
-                      <a:headEnd type="none" w="med" len="med"/>
-                      <a:tailEnd type="none" w="med" len="med"/>
-                    </a:lnT>
-                    <a:lnB w="12700" cap="flat" cmpd="sng" algn="ctr">
-                      <a:solidFill>
-                        <a:srgbClr val="000000"/>
-                      </a:solidFill>
-                      <a:prstDash val="solid"/>
-                      <a:round/>
-                      <a:headEnd type="none" w="med" len="med"/>
-                      <a:tailEnd type="none" w="med" len="med"/>
-                    </a:lnB>
-                    <a:solidFill>
-                      <a:srgbClr val="FFFFFF"/>
-                    </a:solidFill>
-                  </a:tcPr>
-                </a:tc>
-                <a:tc>
-                  <a:txBody>
-                    <a:bodyPr/>
-                    <a:lstStyle/>
-                    <a:p>
-                      <a:pPr indent="140335">
-                        <a:lnSpc>
-                          <a:spcPct val="115000"/>
-                        </a:lnSpc>
-                        <a:spcAft>
-                          <a:spcPts val="800"/>
-                        </a:spcAft>
-                        <a:buNone/>
-                      </a:pPr>
-                      <a:endParaRPr lang="en-US" sz="1800" kern="100">
-                        <a:effectLst/>
-                        <a:latin typeface="Aptos" panose="020B0004020202020204" pitchFamily="34" charset="0"/>
-                        <a:ea typeface="DengXian" panose="02010600030101010101" pitchFamily="2" charset="-122"/>
-                        <a:cs typeface="Times New Roman" panose="02020603050405020304" pitchFamily="18" charset="0"/>
-                      </a:endParaRPr>
-                    </a:p>
-                  </a:txBody>
-                  <a:tcPr marL="68580" marR="68580" marT="0" marB="0" anchor="ctr">
-                    <a:lnL w="12700" cap="flat" cmpd="sng" algn="ctr">
-                      <a:solidFill>
-                        <a:srgbClr val="000000"/>
-                      </a:solidFill>
-                      <a:prstDash val="solid"/>
-                      <a:round/>
-                      <a:headEnd type="none" w="med" len="med"/>
-                      <a:tailEnd type="none" w="med" len="med"/>
-                    </a:lnL>
-                    <a:lnR w="12700" cap="flat" cmpd="sng" algn="ctr">
-                      <a:solidFill>
-                        <a:srgbClr val="000000"/>
-                      </a:solidFill>
-                      <a:prstDash val="solid"/>
-                      <a:round/>
-                      <a:headEnd type="none" w="med" len="med"/>
-                      <a:tailEnd type="none" w="med" len="med"/>
-                    </a:lnR>
-                    <a:lnT w="12700" cap="flat" cmpd="sng" algn="ctr">
-                      <a:solidFill>
-                        <a:srgbClr val="000000"/>
-                      </a:solidFill>
-                      <a:prstDash val="solid"/>
-                      <a:round/>
-                      <a:headEnd type="none" w="med" len="med"/>
-                      <a:tailEnd type="none" w="med" len="med"/>
-                    </a:lnT>
-                    <a:lnB w="12700" cap="flat" cmpd="sng" algn="ctr">
-                      <a:solidFill>
-                        <a:srgbClr val="000000"/>
-                      </a:solidFill>
-                      <a:prstDash val="solid"/>
-                      <a:round/>
-                      <a:headEnd type="none" w="med" len="med"/>
-                      <a:tailEnd type="none" w="med" len="med"/>
-                    </a:lnB>
-                    <a:solidFill>
-                      <a:srgbClr val="FFFFFF"/>
-                    </a:solidFill>
-                  </a:tcPr>
-                </a:tc>
-                <a:tc>
-                  <a:txBody>
-                    <a:bodyPr/>
-                    <a:lstStyle/>
-                    <a:p>
-                      <a:pPr indent="140335">
-                        <a:lnSpc>
-                          <a:spcPct val="115000"/>
-                        </a:lnSpc>
-                        <a:spcAft>
-                          <a:spcPts val="800"/>
-                        </a:spcAft>
-                        <a:buNone/>
-                      </a:pPr>
-                      <a:endParaRPr lang="en-US" sz="1800" kern="100" dirty="0">
-                        <a:effectLst/>
-                        <a:latin typeface="Aptos" panose="020B0004020202020204" pitchFamily="34" charset="0"/>
-                        <a:ea typeface="DengXian" panose="02010600030101010101" pitchFamily="2" charset="-122"/>
-                        <a:cs typeface="Times New Roman" panose="02020603050405020304" pitchFamily="18" charset="0"/>
-                      </a:endParaRPr>
-                    </a:p>
-                  </a:txBody>
-                  <a:tcPr marL="68580" marR="68580" marT="0" marB="0" anchor="ctr">
-                    <a:lnL w="12700" cap="flat" cmpd="sng" algn="ctr">
-                      <a:solidFill>
-                        <a:srgbClr val="000000"/>
-                      </a:solidFill>
-                      <a:prstDash val="solid"/>
-                      <a:round/>
-                      <a:headEnd type="none" w="med" len="med"/>
-                      <a:tailEnd type="none" w="med" len="med"/>
-                    </a:lnL>
-                    <a:lnR w="12700" cap="flat" cmpd="sng" algn="ctr">
-                      <a:solidFill>
-                        <a:srgbClr val="000000"/>
-                      </a:solidFill>
-                      <a:prstDash val="solid"/>
-                      <a:round/>
-                      <a:headEnd type="none" w="med" len="med"/>
-                      <a:tailEnd type="none" w="med" len="med"/>
-                    </a:lnR>
-                    <a:lnT w="12700" cap="flat" cmpd="sng" algn="ctr">
-                      <a:solidFill>
-                        <a:srgbClr val="000000"/>
-                      </a:solidFill>
-                      <a:prstDash val="solid"/>
-                      <a:round/>
-                      <a:headEnd type="none" w="med" len="med"/>
-                      <a:tailEnd type="none" w="med" len="med"/>
-                    </a:lnT>
-                    <a:lnB w="12700" cap="flat" cmpd="sng" algn="ctr">
-                      <a:solidFill>
-                        <a:srgbClr val="000000"/>
-                      </a:solidFill>
-                      <a:prstDash val="solid"/>
-                      <a:round/>
-                      <a:headEnd type="none" w="med" len="med"/>
-                      <a:tailEnd type="none" w="med" len="med"/>
-                    </a:lnB>
-                    <a:solidFill>
-                      <a:srgbClr val="FFFFFF"/>
-                    </a:solidFill>
-                  </a:tcPr>
-                </a:tc>
-                <a:extLst>
-                  <a:ext uri="{0D108BD9-81ED-4DB2-BD59-A6C34878D82A}">
-                    <a16:rowId xmlns:a16="http://schemas.microsoft.com/office/drawing/2014/main" val="3363010056"/>
-                  </a:ext>
-                </a:extLst>
-              </a:tr>
-              <a:tr h="332105">
-                <a:tc>
-                  <a:txBody>
-                    <a:bodyPr/>
-                    <a:lstStyle/>
-                    <a:p>
-                      <a:pPr indent="140335">
-                        <a:lnSpc>
-                          <a:spcPct val="115000"/>
-                        </a:lnSpc>
-                        <a:spcAft>
-                          <a:spcPts val="800"/>
-                        </a:spcAft>
-                        <a:buNone/>
-                      </a:pPr>
-                      <a:r>
-                        <a:rPr lang="en-US" sz="1600" b="1" kern="100">
-                          <a:solidFill>
-                            <a:srgbClr val="000000"/>
-                          </a:solidFill>
-                          <a:effectLst/>
-                          <a:latin typeface="Consolas" panose="020B0609020204030204" pitchFamily="49" charset="0"/>
-                          <a:ea typeface="Times New Roman" panose="02020603050405020304" pitchFamily="18" charset="0"/>
-                          <a:cs typeface="Consolas" panose="020B0609020204030204" pitchFamily="49" charset="0"/>
-                        </a:rPr>
-                        <a:t>1100 - 0110</a:t>
-                      </a:r>
-                      <a:endParaRPr lang="en-US" sz="1800" kern="100">
-                        <a:effectLst/>
-                        <a:latin typeface="Aptos" panose="020B0004020202020204" pitchFamily="34" charset="0"/>
-                        <a:ea typeface="DengXian" panose="02010600030101010101" pitchFamily="2" charset="-122"/>
-                        <a:cs typeface="Times New Roman" panose="02020603050405020304" pitchFamily="18" charset="0"/>
-                      </a:endParaRPr>
-                    </a:p>
-                  </a:txBody>
-                  <a:tcPr marL="68580" marR="68580" marT="0" marB="0" anchor="ctr">
-                    <a:lnL w="12700" cap="flat" cmpd="sng" algn="ctr">
-                      <a:solidFill>
-                        <a:srgbClr val="000000"/>
-                      </a:solidFill>
-                      <a:prstDash val="solid"/>
-                      <a:round/>
-                      <a:headEnd type="none" w="med" len="med"/>
-                      <a:tailEnd type="none" w="med" len="med"/>
-                    </a:lnL>
-                    <a:lnR w="12700" cap="flat" cmpd="sng" algn="ctr">
-                      <a:solidFill>
-                        <a:srgbClr val="000000"/>
-                      </a:solidFill>
-                      <a:prstDash val="solid"/>
-                      <a:round/>
-                      <a:headEnd type="none" w="med" len="med"/>
-                      <a:tailEnd type="none" w="med" len="med"/>
-                    </a:lnR>
-                    <a:lnT w="12700" cap="flat" cmpd="sng" algn="ctr">
-                      <a:solidFill>
-                        <a:srgbClr val="000000"/>
-                      </a:solidFill>
-                      <a:prstDash val="solid"/>
-                      <a:round/>
-                      <a:headEnd type="none" w="med" len="med"/>
-                      <a:tailEnd type="none" w="med" len="med"/>
-                    </a:lnT>
-                    <a:lnB w="12700" cap="flat" cmpd="sng" algn="ctr">
-                      <a:solidFill>
-                        <a:srgbClr val="000000"/>
-                      </a:solidFill>
-                      <a:prstDash val="solid"/>
-                      <a:round/>
-                      <a:headEnd type="none" w="med" len="med"/>
-                      <a:tailEnd type="none" w="med" len="med"/>
-                    </a:lnB>
-                    <a:solidFill>
-                      <a:srgbClr val="FFFFFF"/>
-                    </a:solidFill>
-                  </a:tcPr>
-                </a:tc>
-                <a:tc>
-                  <a:txBody>
-                    <a:bodyPr/>
-                    <a:lstStyle/>
-                    <a:p>
-                      <a:pPr indent="140335">
-                        <a:lnSpc>
-                          <a:spcPct val="115000"/>
-                        </a:lnSpc>
-                        <a:spcAft>
-                          <a:spcPts val="800"/>
-                        </a:spcAft>
-                        <a:buNone/>
-                      </a:pPr>
-                      <a:r>
-                        <a:rPr lang="en-US" sz="1800" kern="100" dirty="0">
-                          <a:effectLst/>
-                          <a:latin typeface="Aptos" panose="020B0004020202020204" pitchFamily="34" charset="0"/>
-                          <a:ea typeface="DengXian" panose="02010600030101010101" pitchFamily="2" charset="-122"/>
-                          <a:cs typeface="Times New Roman" panose="02020603050405020304" pitchFamily="18" charset="0"/>
-                        </a:rPr>
-                        <a:t>0110</a:t>
-                      </a:r>
-                    </a:p>
-                  </a:txBody>
-                  <a:tcPr marL="68580" marR="68580" marT="0" marB="0" anchor="ctr">
-                    <a:lnL w="12700" cap="flat" cmpd="sng" algn="ctr">
-                      <a:solidFill>
-                        <a:srgbClr val="000000"/>
-                      </a:solidFill>
-                      <a:prstDash val="solid"/>
-                      <a:round/>
-                      <a:headEnd type="none" w="med" len="med"/>
-                      <a:tailEnd type="none" w="med" len="med"/>
-                    </a:lnL>
-                    <a:lnR w="12700" cap="flat" cmpd="sng" algn="ctr">
-                      <a:solidFill>
-                        <a:srgbClr val="000000"/>
-                      </a:solidFill>
-                      <a:prstDash val="solid"/>
-                      <a:round/>
-                      <a:headEnd type="none" w="med" len="med"/>
-                      <a:tailEnd type="none" w="med" len="med"/>
-                    </a:lnR>
-                    <a:lnT w="12700" cap="flat" cmpd="sng" algn="ctr">
-                      <a:solidFill>
-                        <a:srgbClr val="000000"/>
-                      </a:solidFill>
-                      <a:prstDash val="solid"/>
-                      <a:round/>
-                      <a:headEnd type="none" w="med" len="med"/>
-                      <a:tailEnd type="none" w="med" len="med"/>
-                    </a:lnT>
-                    <a:lnB w="12700" cap="flat" cmpd="sng" algn="ctr">
-                      <a:solidFill>
-                        <a:srgbClr val="000000"/>
-                      </a:solidFill>
-                      <a:prstDash val="solid"/>
-                      <a:round/>
-                      <a:headEnd type="none" w="med" len="med"/>
-                      <a:tailEnd type="none" w="med" len="med"/>
-                    </a:lnB>
-                    <a:solidFill>
-                      <a:srgbClr val="FFFFFF"/>
-                    </a:solidFill>
-                  </a:tcPr>
-                </a:tc>
-                <a:tc>
-                  <a:txBody>
-                    <a:bodyPr/>
-                    <a:lstStyle/>
-                    <a:p>
-                      <a:pPr indent="140335">
-                        <a:lnSpc>
-                          <a:spcPct val="115000"/>
-                        </a:lnSpc>
-                        <a:spcAft>
-                          <a:spcPts val="800"/>
-                        </a:spcAft>
-                        <a:buNone/>
-                      </a:pPr>
-                      <a:r>
-                        <a:rPr lang="en-US" sz="1800" kern="100" dirty="0">
-                          <a:effectLst/>
-                          <a:latin typeface="Aptos" panose="020B0004020202020204" pitchFamily="34" charset="0"/>
-                          <a:ea typeface="DengXian" panose="02010600030101010101" pitchFamily="2" charset="-122"/>
-                          <a:cs typeface="Times New Roman" panose="02020603050405020304" pitchFamily="18" charset="0"/>
-                        </a:rPr>
-                        <a:t>1</a:t>
-                      </a:r>
-                    </a:p>
-                  </a:txBody>
-                  <a:tcPr marL="68580" marR="68580" marT="0" marB="0" anchor="ctr">
-                    <a:lnL w="12700" cap="flat" cmpd="sng" algn="ctr">
-                      <a:solidFill>
-                        <a:srgbClr val="000000"/>
-                      </a:solidFill>
-                      <a:prstDash val="solid"/>
-                      <a:round/>
-                      <a:headEnd type="none" w="med" len="med"/>
-                      <a:tailEnd type="none" w="med" len="med"/>
-                    </a:lnL>
-                    <a:lnR w="12700" cap="flat" cmpd="sng" algn="ctr">
-                      <a:solidFill>
-                        <a:srgbClr val="000000"/>
-                      </a:solidFill>
-                      <a:prstDash val="solid"/>
-                      <a:round/>
-                      <a:headEnd type="none" w="med" len="med"/>
-                      <a:tailEnd type="none" w="med" len="med"/>
-                    </a:lnR>
-                    <a:lnT w="12700" cap="flat" cmpd="sng" algn="ctr">
-                      <a:solidFill>
-                        <a:srgbClr val="000000"/>
-                      </a:solidFill>
-                      <a:prstDash val="solid"/>
-                      <a:round/>
-                      <a:headEnd type="none" w="med" len="med"/>
-                      <a:tailEnd type="none" w="med" len="med"/>
-                    </a:lnT>
-                    <a:lnB w="12700" cap="flat" cmpd="sng" algn="ctr">
-                      <a:solidFill>
-                        <a:srgbClr val="000000"/>
-                      </a:solidFill>
-                      <a:prstDash val="solid"/>
-                      <a:round/>
-                      <a:headEnd type="none" w="med" len="med"/>
-                      <a:tailEnd type="none" w="med" len="med"/>
-                    </a:lnB>
-                    <a:solidFill>
-                      <a:srgbClr val="FFFFFF"/>
-                    </a:solidFill>
-                  </a:tcPr>
-                </a:tc>
-                <a:tc>
-                  <a:txBody>
-                    <a:bodyPr/>
-                    <a:lstStyle/>
-                    <a:p>
-                      <a:pPr indent="140335">
-                        <a:lnSpc>
-                          <a:spcPct val="115000"/>
-                        </a:lnSpc>
-                        <a:spcAft>
-                          <a:spcPts val="800"/>
-                        </a:spcAft>
-                        <a:buNone/>
-                      </a:pPr>
-                      <a:r>
-                        <a:rPr lang="en-US" sz="1800" kern="100" dirty="0">
-                          <a:effectLst/>
-                          <a:latin typeface="Aptos" panose="020B0004020202020204" pitchFamily="34" charset="0"/>
-                          <a:ea typeface="DengXian" panose="02010600030101010101" pitchFamily="2" charset="-122"/>
-                          <a:cs typeface="Times New Roman" panose="02020603050405020304" pitchFamily="18" charset="0"/>
-                        </a:rPr>
-                        <a:t>1</a:t>
-                      </a:r>
-                    </a:p>
-                  </a:txBody>
-                  <a:tcPr marL="68580" marR="68580" marT="0" marB="0" anchor="ctr">
-                    <a:lnL w="12700" cap="flat" cmpd="sng" algn="ctr">
-                      <a:solidFill>
-                        <a:srgbClr val="000000"/>
-                      </a:solidFill>
-                      <a:prstDash val="solid"/>
-                      <a:round/>
-                      <a:headEnd type="none" w="med" len="med"/>
-                      <a:tailEnd type="none" w="med" len="med"/>
-                    </a:lnL>
-                    <a:lnR w="12700" cap="flat" cmpd="sng" algn="ctr">
-                      <a:solidFill>
-                        <a:srgbClr val="000000"/>
-                      </a:solidFill>
-                      <a:prstDash val="solid"/>
-                      <a:round/>
-                      <a:headEnd type="none" w="med" len="med"/>
-                      <a:tailEnd type="none" w="med" len="med"/>
-                    </a:lnR>
-                    <a:lnT w="12700" cap="flat" cmpd="sng" algn="ctr">
-                      <a:solidFill>
-                        <a:srgbClr val="000000"/>
-                      </a:solidFill>
-                      <a:prstDash val="solid"/>
-                      <a:round/>
-                      <a:headEnd type="none" w="med" len="med"/>
-                      <a:tailEnd type="none" w="med" len="med"/>
-                    </a:lnT>
-                    <a:lnB w="12700" cap="flat" cmpd="sng" algn="ctr">
-                      <a:solidFill>
-                        <a:srgbClr val="000000"/>
-                      </a:solidFill>
-                      <a:prstDash val="solid"/>
-                      <a:round/>
-                      <a:headEnd type="none" w="med" len="med"/>
-                      <a:tailEnd type="none" w="med" len="med"/>
-                    </a:lnB>
-                    <a:solidFill>
-                      <a:srgbClr val="FFFFFF"/>
-                    </a:solidFill>
-                  </a:tcPr>
-                </a:tc>
-                <a:tc>
-                  <a:txBody>
-                    <a:bodyPr/>
-                    <a:lstStyle/>
-                    <a:p>
-                      <a:pPr indent="140335">
-                        <a:lnSpc>
-                          <a:spcPct val="115000"/>
-                        </a:lnSpc>
-                        <a:spcAft>
-                          <a:spcPts val="800"/>
-                        </a:spcAft>
-                        <a:buNone/>
-                      </a:pPr>
-                      <a:r>
-                        <a:rPr lang="en-US" sz="1800" kern="100" dirty="0">
-                          <a:effectLst/>
-                          <a:latin typeface="Aptos" panose="020B0004020202020204" pitchFamily="34" charset="0"/>
-                          <a:ea typeface="DengXian" panose="02010600030101010101" pitchFamily="2" charset="-122"/>
-                          <a:cs typeface="Times New Roman" panose="02020603050405020304" pitchFamily="18" charset="0"/>
-                        </a:rPr>
-                        <a:t>Y / N</a:t>
-                      </a:r>
-                    </a:p>
-                  </a:txBody>
-                  <a:tcPr marL="68580" marR="68580" marT="0" marB="0" anchor="ctr">
-                    <a:lnL w="12700" cap="flat" cmpd="sng" algn="ctr">
-                      <a:solidFill>
-                        <a:srgbClr val="000000"/>
-                      </a:solidFill>
-                      <a:prstDash val="solid"/>
-                      <a:round/>
-                      <a:headEnd type="none" w="med" len="med"/>
-                      <a:tailEnd type="none" w="med" len="med"/>
-                    </a:lnL>
-                    <a:lnR w="12700" cap="flat" cmpd="sng" algn="ctr">
-                      <a:solidFill>
-                        <a:srgbClr val="000000"/>
-                      </a:solidFill>
-                      <a:prstDash val="solid"/>
-                      <a:round/>
-                      <a:headEnd type="none" w="med" len="med"/>
-                      <a:tailEnd type="none" w="med" len="med"/>
-                    </a:lnR>
-                    <a:lnT w="12700" cap="flat" cmpd="sng" algn="ctr">
-                      <a:solidFill>
-                        <a:srgbClr val="000000"/>
-                      </a:solidFill>
-                      <a:prstDash val="solid"/>
-                      <a:round/>
-                      <a:headEnd type="none" w="med" len="med"/>
-                      <a:tailEnd type="none" w="med" len="med"/>
-                    </a:lnT>
-                    <a:lnB w="12700" cap="flat" cmpd="sng" algn="ctr">
-                      <a:solidFill>
-                        <a:srgbClr val="000000"/>
-                      </a:solidFill>
-                      <a:prstDash val="solid"/>
-                      <a:round/>
-                      <a:headEnd type="none" w="med" len="med"/>
-                      <a:tailEnd type="none" w="med" len="med"/>
-                    </a:lnB>
-                    <a:solidFill>
-                      <a:srgbClr val="FFFFFF"/>
-                    </a:solidFill>
-                  </a:tcPr>
-                </a:tc>
-                <a:extLst>
-                  <a:ext uri="{0D108BD9-81ED-4DB2-BD59-A6C34878D82A}">
-                    <a16:rowId xmlns:a16="http://schemas.microsoft.com/office/drawing/2014/main" val="1670228422"/>
-                  </a:ext>
-                </a:extLst>
-              </a:tr>
-              <a:tr h="332105">
-                <a:tc>
-                  <a:txBody>
-                    <a:bodyPr/>
-                    <a:lstStyle/>
-                    <a:p>
-                      <a:pPr indent="140335">
-                        <a:lnSpc>
-                          <a:spcPct val="115000"/>
-                        </a:lnSpc>
-                        <a:spcAft>
-                          <a:spcPts val="800"/>
-                        </a:spcAft>
-                        <a:buNone/>
-                      </a:pPr>
-                      <a:r>
-                        <a:rPr lang="en-US" sz="1600" b="1" kern="100">
-                          <a:solidFill>
-                            <a:srgbClr val="000000"/>
-                          </a:solidFill>
-                          <a:effectLst/>
-                          <a:latin typeface="Consolas" panose="020B0609020204030204" pitchFamily="49" charset="0"/>
-                          <a:ea typeface="Times New Roman" panose="02020603050405020304" pitchFamily="18" charset="0"/>
-                          <a:cs typeface="Consolas" panose="020B0609020204030204" pitchFamily="49" charset="0"/>
-                        </a:rPr>
-                        <a:t>0100 - 1110</a:t>
-                      </a:r>
-                      <a:endParaRPr lang="en-US" sz="1800" kern="100">
-                        <a:effectLst/>
-                        <a:latin typeface="Aptos" panose="020B0004020202020204" pitchFamily="34" charset="0"/>
-                        <a:ea typeface="DengXian" panose="02010600030101010101" pitchFamily="2" charset="-122"/>
-                        <a:cs typeface="Times New Roman" panose="02020603050405020304" pitchFamily="18" charset="0"/>
-                      </a:endParaRPr>
-                    </a:p>
-                  </a:txBody>
-                  <a:tcPr marL="68580" marR="68580" marT="0" marB="0" anchor="ctr">
-                    <a:lnL w="12700" cap="flat" cmpd="sng" algn="ctr">
-                      <a:solidFill>
-                        <a:srgbClr val="000000"/>
-                      </a:solidFill>
-                      <a:prstDash val="solid"/>
-                      <a:round/>
-                      <a:headEnd type="none" w="med" len="med"/>
-                      <a:tailEnd type="none" w="med" len="med"/>
-                    </a:lnL>
-                    <a:lnR w="12700" cap="flat" cmpd="sng" algn="ctr">
-                      <a:solidFill>
-                        <a:srgbClr val="000000"/>
-                      </a:solidFill>
-                      <a:prstDash val="solid"/>
-                      <a:round/>
-                      <a:headEnd type="none" w="med" len="med"/>
-                      <a:tailEnd type="none" w="med" len="med"/>
-                    </a:lnR>
-                    <a:lnT w="12700" cap="flat" cmpd="sng" algn="ctr">
-                      <a:solidFill>
-                        <a:srgbClr val="000000"/>
-                      </a:solidFill>
-                      <a:prstDash val="solid"/>
-                      <a:round/>
-                      <a:headEnd type="none" w="med" len="med"/>
-                      <a:tailEnd type="none" w="med" len="med"/>
-                    </a:lnT>
-                    <a:lnB w="12700" cap="flat" cmpd="sng" algn="ctr">
-                      <a:solidFill>
-                        <a:srgbClr val="000000"/>
-                      </a:solidFill>
-                      <a:prstDash val="solid"/>
-                      <a:round/>
-                      <a:headEnd type="none" w="med" len="med"/>
-                      <a:tailEnd type="none" w="med" len="med"/>
-                    </a:lnB>
-                    <a:solidFill>
-                      <a:srgbClr val="FFFFFF"/>
-                    </a:solidFill>
-                  </a:tcPr>
-                </a:tc>
-                <a:tc>
-                  <a:txBody>
-                    <a:bodyPr/>
-                    <a:lstStyle/>
-                    <a:p>
-                      <a:pPr indent="140335">
-                        <a:lnSpc>
-                          <a:spcPct val="115000"/>
-                        </a:lnSpc>
-                        <a:spcAft>
-                          <a:spcPts val="800"/>
-                        </a:spcAft>
-                        <a:buNone/>
-                      </a:pPr>
-                      <a:r>
-                        <a:rPr lang="en-US" sz="1800" kern="100" dirty="0">
-                          <a:effectLst/>
-                          <a:latin typeface="Aptos" panose="020B0004020202020204" pitchFamily="34" charset="0"/>
-                          <a:ea typeface="DengXian" panose="02010600030101010101" pitchFamily="2" charset="-122"/>
-                          <a:cs typeface="Times New Roman" panose="02020603050405020304" pitchFamily="18" charset="0"/>
-                        </a:rPr>
-                        <a:t>0110</a:t>
-                      </a:r>
-                    </a:p>
-                  </a:txBody>
-                  <a:tcPr marL="68580" marR="68580" marT="0" marB="0" anchor="ctr">
-                    <a:lnL w="12700" cap="flat" cmpd="sng" algn="ctr">
-                      <a:solidFill>
-                        <a:srgbClr val="000000"/>
-                      </a:solidFill>
-                      <a:prstDash val="solid"/>
-                      <a:round/>
-                      <a:headEnd type="none" w="med" len="med"/>
-                      <a:tailEnd type="none" w="med" len="med"/>
-                    </a:lnL>
-                    <a:lnR w="12700" cap="flat" cmpd="sng" algn="ctr">
-                      <a:solidFill>
-                        <a:srgbClr val="000000"/>
-                      </a:solidFill>
-                      <a:prstDash val="solid"/>
-                      <a:round/>
-                      <a:headEnd type="none" w="med" len="med"/>
-                      <a:tailEnd type="none" w="med" len="med"/>
-                    </a:lnR>
-                    <a:lnT w="12700" cap="flat" cmpd="sng" algn="ctr">
-                      <a:solidFill>
-                        <a:srgbClr val="000000"/>
-                      </a:solidFill>
-                      <a:prstDash val="solid"/>
-                      <a:round/>
-                      <a:headEnd type="none" w="med" len="med"/>
-                      <a:tailEnd type="none" w="med" len="med"/>
-                    </a:lnT>
-                    <a:lnB w="12700" cap="flat" cmpd="sng" algn="ctr">
-                      <a:solidFill>
-                        <a:srgbClr val="000000"/>
-                      </a:solidFill>
-                      <a:prstDash val="solid"/>
-                      <a:round/>
-                      <a:headEnd type="none" w="med" len="med"/>
-                      <a:tailEnd type="none" w="med" len="med"/>
-                    </a:lnB>
-                    <a:solidFill>
-                      <a:srgbClr val="FFFFFF"/>
-                    </a:solidFill>
-                  </a:tcPr>
-                </a:tc>
-                <a:tc>
-                  <a:txBody>
-                    <a:bodyPr/>
-                    <a:lstStyle/>
-                    <a:p>
-                      <a:pPr indent="140335">
-                        <a:lnSpc>
-                          <a:spcPct val="115000"/>
-                        </a:lnSpc>
-                        <a:spcAft>
-                          <a:spcPts val="800"/>
-                        </a:spcAft>
-                        <a:buNone/>
-                      </a:pPr>
-                      <a:r>
-                        <a:rPr lang="en-US" sz="1800" kern="100" dirty="0">
-                          <a:effectLst/>
-                          <a:latin typeface="Aptos" panose="020B0004020202020204" pitchFamily="34" charset="0"/>
-                          <a:ea typeface="DengXian" panose="02010600030101010101" pitchFamily="2" charset="-122"/>
-                          <a:cs typeface="Times New Roman" panose="02020603050405020304" pitchFamily="18" charset="0"/>
-                        </a:rPr>
-                        <a:t>0</a:t>
-                      </a:r>
-                    </a:p>
-                  </a:txBody>
-                  <a:tcPr marL="68580" marR="68580" marT="0" marB="0" anchor="ctr">
-                    <a:lnL w="12700" cap="flat" cmpd="sng" algn="ctr">
-                      <a:solidFill>
-                        <a:srgbClr val="000000"/>
-                      </a:solidFill>
-                      <a:prstDash val="solid"/>
-                      <a:round/>
-                      <a:headEnd type="none" w="med" len="med"/>
-                      <a:tailEnd type="none" w="med" len="med"/>
-                    </a:lnL>
-                    <a:lnR w="12700" cap="flat" cmpd="sng" algn="ctr">
-                      <a:solidFill>
-                        <a:srgbClr val="000000"/>
-                      </a:solidFill>
-                      <a:prstDash val="solid"/>
-                      <a:round/>
-                      <a:headEnd type="none" w="med" len="med"/>
-                      <a:tailEnd type="none" w="med" len="med"/>
-                    </a:lnR>
-                    <a:lnT w="12700" cap="flat" cmpd="sng" algn="ctr">
-                      <a:solidFill>
-                        <a:srgbClr val="000000"/>
-                      </a:solidFill>
-                      <a:prstDash val="solid"/>
-                      <a:round/>
-                      <a:headEnd type="none" w="med" len="med"/>
-                      <a:tailEnd type="none" w="med" len="med"/>
-                    </a:lnT>
-                    <a:lnB w="12700" cap="flat" cmpd="sng" algn="ctr">
-                      <a:solidFill>
-                        <a:srgbClr val="000000"/>
-                      </a:solidFill>
-                      <a:prstDash val="solid"/>
-                      <a:round/>
-                      <a:headEnd type="none" w="med" len="med"/>
-                      <a:tailEnd type="none" w="med" len="med"/>
-                    </a:lnB>
-                    <a:solidFill>
-                      <a:srgbClr val="FFFFFF"/>
-                    </a:solidFill>
-                  </a:tcPr>
-                </a:tc>
-                <a:tc>
-                  <a:txBody>
-                    <a:bodyPr/>
-                    <a:lstStyle/>
-                    <a:p>
-                      <a:pPr indent="140335">
-                        <a:lnSpc>
-                          <a:spcPct val="115000"/>
-                        </a:lnSpc>
-                        <a:spcAft>
-                          <a:spcPts val="800"/>
-                        </a:spcAft>
-                        <a:buNone/>
-                      </a:pPr>
-                      <a:r>
-                        <a:rPr lang="en-US" sz="1800" kern="100" dirty="0">
-                          <a:effectLst/>
-                          <a:latin typeface="Aptos" panose="020B0004020202020204" pitchFamily="34" charset="0"/>
-                          <a:ea typeface="DengXian" panose="02010600030101010101" pitchFamily="2" charset="-122"/>
-                          <a:cs typeface="Times New Roman" panose="02020603050405020304" pitchFamily="18" charset="0"/>
-                        </a:rPr>
-                        <a:t>0</a:t>
-                      </a:r>
-                    </a:p>
-                  </a:txBody>
-                  <a:tcPr marL="68580" marR="68580" marT="0" marB="0" anchor="ctr">
-                    <a:lnL w="12700" cap="flat" cmpd="sng" algn="ctr">
-                      <a:solidFill>
-                        <a:srgbClr val="000000"/>
-                      </a:solidFill>
-                      <a:prstDash val="solid"/>
-                      <a:round/>
-                      <a:headEnd type="none" w="med" len="med"/>
-                      <a:tailEnd type="none" w="med" len="med"/>
-                    </a:lnL>
-                    <a:lnR w="12700" cap="flat" cmpd="sng" algn="ctr">
-                      <a:solidFill>
-                        <a:srgbClr val="000000"/>
-                      </a:solidFill>
-                      <a:prstDash val="solid"/>
-                      <a:round/>
-                      <a:headEnd type="none" w="med" len="med"/>
-                      <a:tailEnd type="none" w="med" len="med"/>
-                    </a:lnR>
-                    <a:lnT w="12700" cap="flat" cmpd="sng" algn="ctr">
-                      <a:solidFill>
-                        <a:srgbClr val="000000"/>
-                      </a:solidFill>
-                      <a:prstDash val="solid"/>
-                      <a:round/>
-                      <a:headEnd type="none" w="med" len="med"/>
-                      <a:tailEnd type="none" w="med" len="med"/>
-                    </a:lnT>
-                    <a:lnB w="12700" cap="flat" cmpd="sng" algn="ctr">
-                      <a:solidFill>
-                        <a:srgbClr val="000000"/>
-                      </a:solidFill>
-                      <a:prstDash val="solid"/>
-                      <a:round/>
-                      <a:headEnd type="none" w="med" len="med"/>
-                      <a:tailEnd type="none" w="med" len="med"/>
-                    </a:lnB>
-                    <a:solidFill>
-                      <a:srgbClr val="FFFFFF"/>
-                    </a:solidFill>
-                  </a:tcPr>
-                </a:tc>
-                <a:tc>
-                  <a:txBody>
-                    <a:bodyPr/>
-                    <a:lstStyle/>
-                    <a:p>
-                      <a:pPr indent="140335">
-                        <a:lnSpc>
-                          <a:spcPct val="115000"/>
-                        </a:lnSpc>
-                        <a:spcAft>
-                          <a:spcPts val="800"/>
-                        </a:spcAft>
-                        <a:buNone/>
-                      </a:pPr>
-                      <a:r>
-                        <a:rPr lang="en-US" sz="1800" kern="100">
-                          <a:effectLst/>
-                          <a:latin typeface="Aptos" panose="020B0004020202020204" pitchFamily="34" charset="0"/>
-                          <a:ea typeface="DengXian" panose="02010600030101010101" pitchFamily="2" charset="-122"/>
-                          <a:cs typeface="Times New Roman" panose="02020603050405020304" pitchFamily="18" charset="0"/>
-                        </a:rPr>
-                        <a:t>N / Y</a:t>
-                      </a:r>
-                      <a:endParaRPr lang="en-US" sz="1800" kern="100" dirty="0">
-                        <a:effectLst/>
-                        <a:latin typeface="Aptos" panose="020B0004020202020204" pitchFamily="34" charset="0"/>
-                        <a:ea typeface="DengXian" panose="02010600030101010101" pitchFamily="2" charset="-122"/>
-                        <a:cs typeface="Times New Roman" panose="02020603050405020304" pitchFamily="18" charset="0"/>
-                      </a:endParaRPr>
-                    </a:p>
-                  </a:txBody>
-                  <a:tcPr marL="68580" marR="68580" marT="0" marB="0" anchor="ctr">
-                    <a:lnL w="12700" cap="flat" cmpd="sng" algn="ctr">
-                      <a:solidFill>
-                        <a:srgbClr val="000000"/>
-                      </a:solidFill>
-                      <a:prstDash val="solid"/>
-                      <a:round/>
-                      <a:headEnd type="none" w="med" len="med"/>
-                      <a:tailEnd type="none" w="med" len="med"/>
-                    </a:lnL>
-                    <a:lnR w="12700" cap="flat" cmpd="sng" algn="ctr">
-                      <a:solidFill>
-                        <a:srgbClr val="000000"/>
-                      </a:solidFill>
-                      <a:prstDash val="solid"/>
-                      <a:round/>
-                      <a:headEnd type="none" w="med" len="med"/>
-                      <a:tailEnd type="none" w="med" len="med"/>
-                    </a:lnR>
-                    <a:lnT w="12700" cap="flat" cmpd="sng" algn="ctr">
-                      <a:solidFill>
-                        <a:srgbClr val="000000"/>
-                      </a:solidFill>
-                      <a:prstDash val="solid"/>
-                      <a:round/>
-                      <a:headEnd type="none" w="med" len="med"/>
-                      <a:tailEnd type="none" w="med" len="med"/>
-                    </a:lnT>
-                    <a:lnB w="12700" cap="flat" cmpd="sng" algn="ctr">
-                      <a:solidFill>
-                        <a:srgbClr val="000000"/>
-                      </a:solidFill>
-                      <a:prstDash val="solid"/>
-                      <a:round/>
-                      <a:headEnd type="none" w="med" len="med"/>
-                      <a:tailEnd type="none" w="med" len="med"/>
-                    </a:lnB>
-                    <a:solidFill>
-                      <a:srgbClr val="FFFFFF"/>
-                    </a:solidFill>
-                  </a:tcPr>
-                </a:tc>
-                <a:extLst>
-                  <a:ext uri="{0D108BD9-81ED-4DB2-BD59-A6C34878D82A}">
-                    <a16:rowId xmlns:a16="http://schemas.microsoft.com/office/drawing/2014/main" val="1526810937"/>
-                  </a:ext>
-                </a:extLst>
-              </a:tr>
-            </a:tbl>
-          </a:graphicData>
-        </a:graphic>
-      </p:graphicFrame>
-      <p:sp>
-        <p:nvSpPr>
-          <p:cNvPr id="7" name="Content Placeholder 3">
-            <a:extLst>
-              <a:ext uri="{FF2B5EF4-FFF2-40B4-BE49-F238E27FC236}">
-                <a16:creationId xmlns:a16="http://schemas.microsoft.com/office/drawing/2014/main" id="{4B89EF58-E7D7-52A9-B76A-D6754B4BB133}"/>
-              </a:ext>
-            </a:extLst>
-          </p:cNvPr>
-          <p:cNvSpPr>
-            <a:spLocks noGrp="1"/>
-          </p:cNvSpPr>
-          <p:nvPr>
-            <p:ph sz="quarter" idx="1"/>
-          </p:nvPr>
-        </p:nvSpPr>
-        <p:spPr>
-          <a:xfrm>
-            <a:off x="457200" y="1219200"/>
-            <a:ext cx="8229600" cy="365760"/>
-          </a:xfrm>
-        </p:spPr>
-        <p:txBody>
-          <a:bodyPr>
-            <a:normAutofit fontScale="77500" lnSpcReduction="20000"/>
-          </a:bodyPr>
-          <a:lstStyle/>
-          <a:p>
-            <a:r>
-              <a:rPr lang="en-US" dirty="0"/>
-              <a:t>For a 4-bit system, calculate the result of summation, setting C and V flags</a:t>
-            </a:r>
-          </a:p>
-        </p:txBody>
-      </p:sp>
-    </p:spTree>
-    <p:extLst>
-      <p:ext uri="{BB962C8B-B14F-4D97-AF65-F5344CB8AC3E}">
-        <p14:creationId xmlns:p14="http://schemas.microsoft.com/office/powerpoint/2010/main" val="3350438353"/>
       </p:ext>
     </p:extLst>
   </p:cSld>

--- a/PPTs/Ch4_ARM_Arithmetic_Logic_Exercises.pptx
+++ b/PPTs/Ch4_ARM_Arithmetic_Logic_Exercises.pptx
@@ -5,7 +5,7 @@
     <p:sldMasterId id="2147483660" r:id="rId1"/>
   </p:sldMasterIdLst>
   <p:notesMasterIdLst>
-    <p:notesMasterId r:id="rId22"/>
+    <p:notesMasterId r:id="rId25"/>
   </p:notesMasterIdLst>
   <p:sldIdLst>
     <p:sldId id="256" r:id="rId2"/>
@@ -20,14 +20,17 @@
     <p:sldId id="257" r:id="rId11"/>
     <p:sldId id="352" r:id="rId12"/>
     <p:sldId id="559" r:id="rId13"/>
-    <p:sldId id="563" r:id="rId14"/>
-    <p:sldId id="568" r:id="rId15"/>
-    <p:sldId id="571" r:id="rId16"/>
-    <p:sldId id="574" r:id="rId17"/>
-    <p:sldId id="354" r:id="rId18"/>
-    <p:sldId id="357" r:id="rId19"/>
-    <p:sldId id="384" r:id="rId20"/>
-    <p:sldId id="589" r:id="rId21"/>
+    <p:sldId id="592" r:id="rId14"/>
+    <p:sldId id="563" r:id="rId15"/>
+    <p:sldId id="561" r:id="rId16"/>
+    <p:sldId id="593" r:id="rId17"/>
+    <p:sldId id="568" r:id="rId18"/>
+    <p:sldId id="571" r:id="rId19"/>
+    <p:sldId id="574" r:id="rId20"/>
+    <p:sldId id="354" r:id="rId21"/>
+    <p:sldId id="357" r:id="rId22"/>
+    <p:sldId id="384" r:id="rId23"/>
+    <p:sldId id="589" r:id="rId24"/>
   </p:sldIdLst>
   <p:sldSz cx="9144000" cy="6858000" type="screen4x3"/>
   <p:notesSz cx="6858000" cy="9144000"/>
@@ -148,7 +151,7 @@
 <file path=ppt/revisionInfo.xml><?xml version="1.0" encoding="utf-8"?>
 <p1510:revInfo xmlns:a="http://schemas.openxmlformats.org/drawingml/2006/main" xmlns:r="http://schemas.openxmlformats.org/officeDocument/2006/relationships" xmlns:p1510="http://schemas.microsoft.com/office/powerpoint/2015/10/main">
   <p1510:revLst>
-    <p1510:client id="{191F7D32-A5D4-44C8-A28D-1F95E29E1B1E}" v="7" dt="2025-10-14T22:47:17.650"/>
+    <p1510:client id="{191F7D32-A5D4-44C8-A28D-1F95E29E1B1E}" v="11" dt="2025-10-17T12:10:01.432"/>
   </p1510:revLst>
 </p1510:revInfo>
 </file>
@@ -157,8 +160,8 @@
 <pc:chgInfo xmlns:a="http://schemas.openxmlformats.org/drawingml/2006/main" xmlns:r="http://schemas.openxmlformats.org/officeDocument/2006/relationships" xmlns:ac="http://schemas.microsoft.com/office/drawing/2013/main/command" xmlns:pc="http://schemas.microsoft.com/office/powerpoint/2013/main/command">
   <pc:docChgLst>
     <pc:chgData name="Zonghua Gu" userId="9a7e1853e1951ef5" providerId="LiveId" clId="{CF1FAA12-072C-4ED5-BA76-0FFFAEFDB88A}"/>
-    <pc:docChg chg="undo custSel addSld delSld modSld">
-      <pc:chgData name="Zonghua Gu" userId="9a7e1853e1951ef5" providerId="LiveId" clId="{CF1FAA12-072C-4ED5-BA76-0FFFAEFDB88A}" dt="2025-10-16T23:18:31.366" v="228" actId="47"/>
+    <pc:docChg chg="undo custSel addSld delSld modSld sldOrd">
+      <pc:chgData name="Zonghua Gu" userId="9a7e1853e1951ef5" providerId="LiveId" clId="{CF1FAA12-072C-4ED5-BA76-0FFFAEFDB88A}" dt="2025-10-17T12:10:24.526" v="254" actId="47"/>
       <pc:docMkLst>
         <pc:docMk/>
       </pc:docMkLst>
@@ -319,12 +322,28 @@
           <pc:sldMk cId="1329116476" sldId="560"/>
         </pc:sldMkLst>
       </pc:sldChg>
-      <pc:sldChg chg="del">
-        <pc:chgData name="Zonghua Gu" userId="9a7e1853e1951ef5" providerId="LiveId" clId="{CF1FAA12-072C-4ED5-BA76-0FFFAEFDB88A}" dt="2025-09-24T02:22:11.606" v="12" actId="47"/>
+      <pc:sldChg chg="modSp add del mod">
+        <pc:chgData name="Zonghua Gu" userId="9a7e1853e1951ef5" providerId="LiveId" clId="{CF1FAA12-072C-4ED5-BA76-0FFFAEFDB88A}" dt="2025-10-17T12:10:12.397" v="253" actId="20577"/>
         <pc:sldMkLst>
           <pc:docMk/>
           <pc:sldMk cId="3280752258" sldId="561"/>
         </pc:sldMkLst>
+        <pc:spChg chg="mod">
+          <ac:chgData name="Zonghua Gu" userId="9a7e1853e1951ef5" providerId="LiveId" clId="{CF1FAA12-072C-4ED5-BA76-0FFFAEFDB88A}" dt="2025-10-17T12:10:08.584" v="249" actId="20577"/>
+          <ac:spMkLst>
+            <pc:docMk/>
+            <pc:sldMk cId="3280752258" sldId="561"/>
+            <ac:spMk id="2" creationId="{3C452DBC-650F-2FD6-D799-9D9632A6EF51}"/>
+          </ac:spMkLst>
+        </pc:spChg>
+        <pc:spChg chg="mod">
+          <ac:chgData name="Zonghua Gu" userId="9a7e1853e1951ef5" providerId="LiveId" clId="{CF1FAA12-072C-4ED5-BA76-0FFFAEFDB88A}" dt="2025-10-17T12:10:12.397" v="253" actId="20577"/>
+          <ac:spMkLst>
+            <pc:docMk/>
+            <pc:sldMk cId="3280752258" sldId="561"/>
+            <ac:spMk id="4" creationId="{8B96A0C6-9296-BA88-C598-6B260416FC42}"/>
+          </ac:spMkLst>
+        </pc:spChg>
       </pc:sldChg>
       <pc:sldChg chg="del">
         <pc:chgData name="Zonghua Gu" userId="9a7e1853e1951ef5" providerId="LiveId" clId="{CF1FAA12-072C-4ED5-BA76-0FFFAEFDB88A}" dt="2025-09-24T02:22:12.953" v="13" actId="47"/>
@@ -432,6 +451,59 @@
           <pc:sldMk cId="3279631536" sldId="590"/>
         </pc:sldMkLst>
       </pc:sldChg>
+      <pc:sldChg chg="modSp add mod">
+        <pc:chgData name="Zonghua Gu" userId="9a7e1853e1951ef5" providerId="LiveId" clId="{CF1FAA12-072C-4ED5-BA76-0FFFAEFDB88A}" dt="2025-10-17T12:03:59.741" v="246" actId="20577"/>
+        <pc:sldMkLst>
+          <pc:docMk/>
+          <pc:sldMk cId="3403107874" sldId="592"/>
+        </pc:sldMkLst>
+        <pc:spChg chg="mod">
+          <ac:chgData name="Zonghua Gu" userId="9a7e1853e1951ef5" providerId="LiveId" clId="{CF1FAA12-072C-4ED5-BA76-0FFFAEFDB88A}" dt="2025-10-17T12:03:19.494" v="232" actId="20577"/>
+          <ac:spMkLst>
+            <pc:docMk/>
+            <pc:sldMk cId="3403107874" sldId="592"/>
+            <ac:spMk id="2" creationId="{3BF8795C-148F-094D-80F5-1264C3578EE6}"/>
+          </ac:spMkLst>
+        </pc:spChg>
+        <pc:spChg chg="mod">
+          <ac:chgData name="Zonghua Gu" userId="9a7e1853e1951ef5" providerId="LiveId" clId="{CF1FAA12-072C-4ED5-BA76-0FFFAEFDB88A}" dt="2025-10-17T12:03:59.741" v="246" actId="20577"/>
+          <ac:spMkLst>
+            <pc:docMk/>
+            <pc:sldMk cId="3403107874" sldId="592"/>
+            <ac:spMk id="4" creationId="{2C569AB0-22FC-BE38-C5AA-9F8E6ECA54DA}"/>
+          </ac:spMkLst>
+        </pc:spChg>
+      </pc:sldChg>
+      <pc:sldChg chg="modSp add mod ord">
+        <pc:chgData name="Zonghua Gu" userId="9a7e1853e1951ef5" providerId="LiveId" clId="{CF1FAA12-072C-4ED5-BA76-0FFFAEFDB88A}" dt="2025-10-17T12:03:56.480" v="244" actId="20577"/>
+        <pc:sldMkLst>
+          <pc:docMk/>
+          <pc:sldMk cId="3657267278" sldId="593"/>
+        </pc:sldMkLst>
+        <pc:spChg chg="mod">
+          <ac:chgData name="Zonghua Gu" userId="9a7e1853e1951ef5" providerId="LiveId" clId="{CF1FAA12-072C-4ED5-BA76-0FFFAEFDB88A}" dt="2025-10-17T12:03:36.301" v="237" actId="20577"/>
+          <ac:spMkLst>
+            <pc:docMk/>
+            <pc:sldMk cId="3657267278" sldId="593"/>
+            <ac:spMk id="2" creationId="{9AB860C7-6D32-CED6-8DDA-C2F9D8462339}"/>
+          </ac:spMkLst>
+        </pc:spChg>
+        <pc:spChg chg="mod">
+          <ac:chgData name="Zonghua Gu" userId="9a7e1853e1951ef5" providerId="LiveId" clId="{CF1FAA12-072C-4ED5-BA76-0FFFAEFDB88A}" dt="2025-10-17T12:03:56.480" v="244" actId="20577"/>
+          <ac:spMkLst>
+            <pc:docMk/>
+            <pc:sldMk cId="3657267278" sldId="593"/>
+            <ac:spMk id="4" creationId="{B0AEBDB8-79A1-498D-B9D2-DDE87FE9C064}"/>
+          </ac:spMkLst>
+        </pc:spChg>
+      </pc:sldChg>
+      <pc:sldChg chg="add del">
+        <pc:chgData name="Zonghua Gu" userId="9a7e1853e1951ef5" providerId="LiveId" clId="{CF1FAA12-072C-4ED5-BA76-0FFFAEFDB88A}" dt="2025-10-17T12:10:24.526" v="254" actId="47"/>
+        <pc:sldMkLst>
+          <pc:docMk/>
+          <pc:sldMk cId="1161203829" sldId="594"/>
+        </pc:sldMkLst>
+      </pc:sldChg>
     </pc:docChg>
   </pc:docChgLst>
 </pc:chgInfo>
@@ -572,7 +644,7 @@
             <a:fld id="{3AC3A17A-95E8-4381-B66B-5D6DE2B3048A}" type="datetimeFigureOut">
               <a:rPr lang="en-US" smtClean="0"/>
               <a:pPr/>
-              <a:t>10/16/2025</a:t>
+              <a:t>10/17/2025</a:t>
             </a:fld>
             <a:endParaRPr lang="en-US"/>
           </a:p>
@@ -2686,7 +2758,13 @@
   <p:cSld>
     <p:spTree>
       <p:nvGrpSpPr>
-        <p:cNvPr id="1" name=""/>
+        <p:cNvPr id="1" name="">
+          <a:extLst>
+            <a:ext uri="{FF2B5EF4-FFF2-40B4-BE49-F238E27FC236}">
+              <a16:creationId xmlns:a16="http://schemas.microsoft.com/office/drawing/2014/main" id="{56673741-8FC4-2591-E3BC-8A077C769111}"/>
+            </a:ext>
+          </a:extLst>
+        </p:cNvPr>
         <p:cNvGrpSpPr/>
         <p:nvPr/>
       </p:nvGrpSpPr>
@@ -2700,7 +2778,13 @@
       </p:grpSpPr>
       <p:sp>
         <p:nvSpPr>
-          <p:cNvPr id="2" name="Slide Image Placeholder 1"/>
+          <p:cNvPr id="2" name="Slide Image Placeholder 1">
+            <a:extLst>
+              <a:ext uri="{FF2B5EF4-FFF2-40B4-BE49-F238E27FC236}">
+                <a16:creationId xmlns:a16="http://schemas.microsoft.com/office/drawing/2014/main" id="{38D9CAA2-6E22-E219-DF82-8A50424360C0}"/>
+              </a:ext>
+            </a:extLst>
+          </p:cNvPr>
           <p:cNvSpPr>
             <a:spLocks noGrp="1" noRot="1" noChangeAspect="1"/>
           </p:cNvSpPr>
@@ -2712,7 +2796,13 @@
       </p:sp>
       <p:sp>
         <p:nvSpPr>
-          <p:cNvPr id="3" name="Notes Placeholder 2"/>
+          <p:cNvPr id="3" name="Notes Placeholder 2">
+            <a:extLst>
+              <a:ext uri="{FF2B5EF4-FFF2-40B4-BE49-F238E27FC236}">
+                <a16:creationId xmlns:a16="http://schemas.microsoft.com/office/drawing/2014/main" id="{1C23D407-7127-9C12-D518-1935CDC4D167}"/>
+              </a:ext>
+            </a:extLst>
+          </p:cNvPr>
           <p:cNvSpPr>
             <a:spLocks noGrp="1"/>
           </p:cNvSpPr>
@@ -2725,29 +2815,19 @@
           <a:bodyPr/>
           <a:lstStyle/>
           <a:p>
-            <a:r>
-              <a:rPr lang="en-US" dirty="0"/>
-              <a:t>ANS: count ones, then subtract from 32</a:t>
-            </a:r>
-          </a:p>
-          <a:p>
-            <a:r>
-              <a:rPr lang="pt-BR" dirty="0"/>
-              <a:t>Or </a:t>
-            </a:r>
-            <a:r>
-              <a:rPr lang="en-US" dirty="0"/>
-              <a:t>Invert r0 to get r4, then count 0’s in r4</a:t>
-            </a:r>
-          </a:p>
-          <a:p>
             <a:endParaRPr lang="en-US" dirty="0"/>
           </a:p>
         </p:txBody>
       </p:sp>
       <p:sp>
         <p:nvSpPr>
-          <p:cNvPr id="4" name="Slide Number Placeholder 3"/>
+          <p:cNvPr id="4" name="Slide Number Placeholder 3">
+            <a:extLst>
+              <a:ext uri="{FF2B5EF4-FFF2-40B4-BE49-F238E27FC236}">
+                <a16:creationId xmlns:a16="http://schemas.microsoft.com/office/drawing/2014/main" id="{44EED6B6-BD58-1B29-B600-C30D0C6EB0C0}"/>
+              </a:ext>
+            </a:extLst>
+          </p:cNvPr>
           <p:cNvSpPr>
             <a:spLocks noGrp="1"/>
           </p:cNvSpPr>
@@ -2763,7 +2843,7 @@
             <a:fld id="{1B0C9D69-9831-4844-8B1E-062B2DA58B0D}" type="slidenum">
               <a:rPr lang="en-US" smtClean="0"/>
               <a:pPr/>
-              <a:t>16</a:t>
+              <a:t>13</a:t>
             </a:fld>
             <a:endParaRPr lang="en-US"/>
           </a:p>
@@ -2772,7 +2852,7 @@
     </p:spTree>
     <p:extLst>
       <p:ext uri="{BB962C8B-B14F-4D97-AF65-F5344CB8AC3E}">
-        <p14:creationId xmlns:p14="http://schemas.microsoft.com/office/powerpoint/2010/main" val="1182014578"/>
+        <p14:creationId xmlns:p14="http://schemas.microsoft.com/office/powerpoint/2010/main" val="598058463"/>
       </p:ext>
     </p:extLst>
   </p:cSld>
@@ -2783,6 +2863,232 @@
 </file>
 
 <file path=ppt/notesSlides/notesSlide5.xml><?xml version="1.0" encoding="utf-8"?>
+<p:notes xmlns:a="http://schemas.openxmlformats.org/drawingml/2006/main" xmlns:r="http://schemas.openxmlformats.org/officeDocument/2006/relationships" xmlns:p="http://schemas.openxmlformats.org/presentationml/2006/main">
+  <p:cSld>
+    <p:spTree>
+      <p:nvGrpSpPr>
+        <p:cNvPr id="1" name="">
+          <a:extLst>
+            <a:ext uri="{FF2B5EF4-FFF2-40B4-BE49-F238E27FC236}">
+              <a16:creationId xmlns:a16="http://schemas.microsoft.com/office/drawing/2014/main" id="{1AA9ED06-CB4D-495B-C694-4C1B6E74BDA3}"/>
+            </a:ext>
+          </a:extLst>
+        </p:cNvPr>
+        <p:cNvGrpSpPr/>
+        <p:nvPr/>
+      </p:nvGrpSpPr>
+      <p:grpSpPr>
+        <a:xfrm>
+          <a:off x="0" y="0"/>
+          <a:ext cx="0" cy="0"/>
+          <a:chOff x="0" y="0"/>
+          <a:chExt cx="0" cy="0"/>
+        </a:xfrm>
+      </p:grpSpPr>
+      <p:sp>
+        <p:nvSpPr>
+          <p:cNvPr id="2" name="Slide Image Placeholder 1">
+            <a:extLst>
+              <a:ext uri="{FF2B5EF4-FFF2-40B4-BE49-F238E27FC236}">
+                <a16:creationId xmlns:a16="http://schemas.microsoft.com/office/drawing/2014/main" id="{FA8BA59D-F778-B6DB-A073-14EAC72E42F0}"/>
+              </a:ext>
+            </a:extLst>
+          </p:cNvPr>
+          <p:cNvSpPr>
+            <a:spLocks noGrp="1" noRot="1" noChangeAspect="1"/>
+          </p:cNvSpPr>
+          <p:nvPr>
+            <p:ph type="sldImg"/>
+          </p:nvPr>
+        </p:nvSpPr>
+        <p:spPr/>
+      </p:sp>
+      <p:sp>
+        <p:nvSpPr>
+          <p:cNvPr id="3" name="Notes Placeholder 2">
+            <a:extLst>
+              <a:ext uri="{FF2B5EF4-FFF2-40B4-BE49-F238E27FC236}">
+                <a16:creationId xmlns:a16="http://schemas.microsoft.com/office/drawing/2014/main" id="{C0C57544-8E4A-41E5-8E60-89D98A207072}"/>
+              </a:ext>
+            </a:extLst>
+          </p:cNvPr>
+          <p:cNvSpPr>
+            <a:spLocks noGrp="1"/>
+          </p:cNvSpPr>
+          <p:nvPr>
+            <p:ph type="body" idx="1"/>
+          </p:nvPr>
+        </p:nvSpPr>
+        <p:spPr/>
+        <p:txBody>
+          <a:bodyPr/>
+          <a:lstStyle/>
+          <a:p>
+            <a:r>
+              <a:rPr lang="pt-BR" dirty="0"/>
+              <a:t>R2 = 0x01122334, R3 = 0x00112233, R4 = 0x00001122, R5 = 0x01122334, R6 = 0x00112233, R7 = 0x00001122.</a:t>
+            </a:r>
+            <a:endParaRPr lang="en-US" dirty="0"/>
+          </a:p>
+        </p:txBody>
+      </p:sp>
+      <p:sp>
+        <p:nvSpPr>
+          <p:cNvPr id="4" name="Slide Number Placeholder 3">
+            <a:extLst>
+              <a:ext uri="{FF2B5EF4-FFF2-40B4-BE49-F238E27FC236}">
+                <a16:creationId xmlns:a16="http://schemas.microsoft.com/office/drawing/2014/main" id="{DFE15DA1-B8B2-6177-0798-B0B79A26A3A3}"/>
+              </a:ext>
+            </a:extLst>
+          </p:cNvPr>
+          <p:cNvSpPr>
+            <a:spLocks noGrp="1"/>
+          </p:cNvSpPr>
+          <p:nvPr>
+            <p:ph type="sldNum" sz="quarter" idx="5"/>
+          </p:nvPr>
+        </p:nvSpPr>
+        <p:spPr/>
+        <p:txBody>
+          <a:bodyPr/>
+          <a:lstStyle/>
+          <a:p>
+            <a:fld id="{1B0C9D69-9831-4844-8B1E-062B2DA58B0D}" type="slidenum">
+              <a:rPr lang="en-US" smtClean="0"/>
+              <a:pPr/>
+              <a:t>15</a:t>
+            </a:fld>
+            <a:endParaRPr lang="en-US"/>
+          </a:p>
+        </p:txBody>
+      </p:sp>
+    </p:spTree>
+    <p:extLst>
+      <p:ext uri="{BB962C8B-B14F-4D97-AF65-F5344CB8AC3E}">
+        <p14:creationId xmlns:p14="http://schemas.microsoft.com/office/powerpoint/2010/main" val="2073562476"/>
+      </p:ext>
+    </p:extLst>
+  </p:cSld>
+  <p:clrMapOvr>
+    <a:masterClrMapping/>
+  </p:clrMapOvr>
+</p:notes>
+</file>
+
+<file path=ppt/notesSlides/notesSlide6.xml><?xml version="1.0" encoding="utf-8"?>
+<p:notes xmlns:a="http://schemas.openxmlformats.org/drawingml/2006/main" xmlns:r="http://schemas.openxmlformats.org/officeDocument/2006/relationships" xmlns:p="http://schemas.openxmlformats.org/presentationml/2006/main">
+  <p:cSld>
+    <p:spTree>
+      <p:nvGrpSpPr>
+        <p:cNvPr id="1" name="">
+          <a:extLst>
+            <a:ext uri="{FF2B5EF4-FFF2-40B4-BE49-F238E27FC236}">
+              <a16:creationId xmlns:a16="http://schemas.microsoft.com/office/drawing/2014/main" id="{7CC7458A-F714-96DC-BEC2-76172F97FEE3}"/>
+            </a:ext>
+          </a:extLst>
+        </p:cNvPr>
+        <p:cNvGrpSpPr/>
+        <p:nvPr/>
+      </p:nvGrpSpPr>
+      <p:grpSpPr>
+        <a:xfrm>
+          <a:off x="0" y="0"/>
+          <a:ext cx="0" cy="0"/>
+          <a:chOff x="0" y="0"/>
+          <a:chExt cx="0" cy="0"/>
+        </a:xfrm>
+      </p:grpSpPr>
+      <p:sp>
+        <p:nvSpPr>
+          <p:cNvPr id="2" name="Slide Image Placeholder 1">
+            <a:extLst>
+              <a:ext uri="{FF2B5EF4-FFF2-40B4-BE49-F238E27FC236}">
+                <a16:creationId xmlns:a16="http://schemas.microsoft.com/office/drawing/2014/main" id="{94672E45-2A52-237E-B35D-FEA0095D1AE0}"/>
+              </a:ext>
+            </a:extLst>
+          </p:cNvPr>
+          <p:cNvSpPr>
+            <a:spLocks noGrp="1" noRot="1" noChangeAspect="1"/>
+          </p:cNvSpPr>
+          <p:nvPr>
+            <p:ph type="sldImg"/>
+          </p:nvPr>
+        </p:nvSpPr>
+        <p:spPr/>
+      </p:sp>
+      <p:sp>
+        <p:nvSpPr>
+          <p:cNvPr id="3" name="Notes Placeholder 2">
+            <a:extLst>
+              <a:ext uri="{FF2B5EF4-FFF2-40B4-BE49-F238E27FC236}">
+                <a16:creationId xmlns:a16="http://schemas.microsoft.com/office/drawing/2014/main" id="{03FD1FBD-6F97-9862-594A-5783D9367710}"/>
+              </a:ext>
+            </a:extLst>
+          </p:cNvPr>
+          <p:cNvSpPr>
+            <a:spLocks noGrp="1"/>
+          </p:cNvSpPr>
+          <p:nvPr>
+            <p:ph type="body" idx="1"/>
+          </p:nvPr>
+        </p:nvSpPr>
+        <p:spPr/>
+        <p:txBody>
+          <a:bodyPr/>
+          <a:lstStyle/>
+          <a:p>
+            <a:r>
+              <a:rPr lang="pt-BR" dirty="0"/>
+              <a:t>R2 = 0x01122334, R3 = 0x00112233, R4 = 0x00001122, R5 = 0x01122334, R6 = 0x00112233, R7 = 0x00001122.</a:t>
+            </a:r>
+            <a:endParaRPr lang="en-US" dirty="0"/>
+          </a:p>
+        </p:txBody>
+      </p:sp>
+      <p:sp>
+        <p:nvSpPr>
+          <p:cNvPr id="4" name="Slide Number Placeholder 3">
+            <a:extLst>
+              <a:ext uri="{FF2B5EF4-FFF2-40B4-BE49-F238E27FC236}">
+                <a16:creationId xmlns:a16="http://schemas.microsoft.com/office/drawing/2014/main" id="{2A87E9D0-8E60-5AB5-285C-ECC3C6FE9680}"/>
+              </a:ext>
+            </a:extLst>
+          </p:cNvPr>
+          <p:cNvSpPr>
+            <a:spLocks noGrp="1"/>
+          </p:cNvSpPr>
+          <p:nvPr>
+            <p:ph type="sldNum" sz="quarter" idx="5"/>
+          </p:nvPr>
+        </p:nvSpPr>
+        <p:spPr/>
+        <p:txBody>
+          <a:bodyPr/>
+          <a:lstStyle/>
+          <a:p>
+            <a:fld id="{1B0C9D69-9831-4844-8B1E-062B2DA58B0D}" type="slidenum">
+              <a:rPr lang="en-US" smtClean="0"/>
+              <a:pPr/>
+              <a:t>16</a:t>
+            </a:fld>
+            <a:endParaRPr lang="en-US"/>
+          </a:p>
+        </p:txBody>
+      </p:sp>
+    </p:spTree>
+    <p:extLst>
+      <p:ext uri="{BB962C8B-B14F-4D97-AF65-F5344CB8AC3E}">
+        <p14:creationId xmlns:p14="http://schemas.microsoft.com/office/powerpoint/2010/main" val="2155631793"/>
+      </p:ext>
+    </p:extLst>
+  </p:cSld>
+  <p:clrMapOvr>
+    <a:masterClrMapping/>
+  </p:clrMapOvr>
+</p:notes>
+</file>
+
+<file path=ppt/notesSlides/notesSlide7.xml><?xml version="1.0" encoding="utf-8"?>
 <p:notes xmlns:a="http://schemas.openxmlformats.org/drawingml/2006/main" xmlns:r="http://schemas.openxmlformats.org/officeDocument/2006/relationships" xmlns:p="http://schemas.openxmlformats.org/presentationml/2006/main">
   <p:cSld>
     <p:spTree>
@@ -2826,47 +3132,23 @@
           <a:bodyPr/>
           <a:lstStyle/>
           <a:p>
-            <a:pPr lvl="1"/>
             <a:r>
               <a:rPr lang="en-US" dirty="0"/>
-              <a:t>r0 = 0xffffffff</a:t>
-            </a:r>
-          </a:p>
-          <a:p>
-            <a:pPr lvl="1"/>
+              <a:t>ANS: count ones, then subtract from 32</a:t>
+            </a:r>
+          </a:p>
+          <a:p>
+            <a:r>
+              <a:rPr lang="pt-BR" dirty="0"/>
+              <a:t>Or </a:t>
+            </a:r>
             <a:r>
               <a:rPr lang="en-US" dirty="0"/>
-              <a:t>r1 = 0x00000001</a:t>
-            </a:r>
-          </a:p>
-          <a:p>
-            <a:pPr lvl="1"/>
-            <a:r>
-              <a:rPr lang="en-US" dirty="0"/>
-              <a:t>r2 = 0x00000003</a:t>
-            </a:r>
-          </a:p>
-          <a:p>
-            <a:pPr lvl="1"/>
-            <a:r>
-              <a:rPr lang="en-US" dirty="0"/>
-              <a:t>r3 = 0xfffffff0</a:t>
+              <a:t>Invert r0 to get r4, then count 0’s in r4</a:t>
             </a:r>
           </a:p>
           <a:p>
             <a:endParaRPr lang="en-US" dirty="0"/>
-          </a:p>
-          <a:p>
-            <a:r>
-              <a:rPr lang="en-US" dirty="0"/>
-              <a:t>The N, Z, C, and V flags start out as zero.</a:t>
-            </a:r>
-          </a:p>
-          <a:p>
-            <a:r>
-              <a:rPr lang="en-US" dirty="0"/>
-              <a:t>After the execution of the following instructions, fill in the flag values. </a:t>
-            </a:r>
           </a:p>
         </p:txBody>
       </p:sp>
@@ -2897,7 +3179,7 @@
     </p:spTree>
     <p:extLst>
       <p:ext uri="{BB962C8B-B14F-4D97-AF65-F5344CB8AC3E}">
-        <p14:creationId xmlns:p14="http://schemas.microsoft.com/office/powerpoint/2010/main" val="3497697715"/>
+        <p14:creationId xmlns:p14="http://schemas.microsoft.com/office/powerpoint/2010/main" val="1182014578"/>
       </p:ext>
     </p:extLst>
   </p:cSld>
@@ -2907,7 +3189,7 @@
 </p:notes>
 </file>
 
-<file path=ppt/notesSlides/notesSlide6.xml><?xml version="1.0" encoding="utf-8"?>
+<file path=ppt/notesSlides/notesSlide8.xml><?xml version="1.0" encoding="utf-8"?>
 <p:notes xmlns:a="http://schemas.openxmlformats.org/drawingml/2006/main" xmlns:r="http://schemas.openxmlformats.org/officeDocument/2006/relationships" xmlns:p="http://schemas.openxmlformats.org/presentationml/2006/main">
   <p:cSld>
     <p:spTree>
@@ -2951,30 +3233,47 @@
           <a:bodyPr/>
           <a:lstStyle/>
           <a:p>
+            <a:pPr lvl="1"/>
+            <a:r>
+              <a:rPr lang="en-US" dirty="0"/>
+              <a:t>r0 = 0xffffffff</a:t>
+            </a:r>
+          </a:p>
+          <a:p>
+            <a:pPr lvl="1"/>
+            <a:r>
+              <a:rPr lang="en-US" dirty="0"/>
+              <a:t>r1 = 0x00000001</a:t>
+            </a:r>
+          </a:p>
+          <a:p>
+            <a:pPr lvl="1"/>
+            <a:r>
+              <a:rPr lang="en-US" dirty="0"/>
+              <a:t>r2 = 0x00000003</a:t>
+            </a:r>
+          </a:p>
+          <a:p>
+            <a:pPr lvl="1"/>
+            <a:r>
+              <a:rPr lang="en-US" dirty="0"/>
+              <a:t>r3 = 0xfffffff0</a:t>
+            </a:r>
+          </a:p>
+          <a:p>
             <a:endParaRPr lang="en-US" dirty="0"/>
           </a:p>
           <a:p>
             <a:r>
               <a:rPr lang="en-US" dirty="0"/>
-              <a:t>Suppose </a:t>
-            </a:r>
-          </a:p>
-          <a:p>
-            <a:pPr lvl="1"/>
+              <a:t>The N, Z, C, and V flags start out as zero.</a:t>
+            </a:r>
+          </a:p>
+          <a:p>
             <a:r>
               <a:rPr lang="en-US" dirty="0"/>
-              <a:t>r0 = 0xFFFFFFFF, r1 = 0x00000001, r2 = 0x00000000,</a:t>
-            </a:r>
-          </a:p>
-          <a:p>
-            <a:pPr lvl="1"/>
-            <a:r>
-              <a:rPr lang="en-US" dirty="0"/>
-              <a:t>NZCV = 0000 initially</a:t>
-            </a:r>
-          </a:p>
-          <a:p>
-            <a:endParaRPr lang="en-US" dirty="0"/>
+              <a:t>After the execution of the following instructions, fill in the flag values. </a:t>
+            </a:r>
           </a:p>
         </p:txBody>
       </p:sp>
@@ -2996,7 +3295,115 @@
             <a:fld id="{1B0C9D69-9831-4844-8B1E-062B2DA58B0D}" type="slidenum">
               <a:rPr lang="en-US" smtClean="0"/>
               <a:pPr/>
-              <a:t>20</a:t>
+              <a:t>22</a:t>
+            </a:fld>
+            <a:endParaRPr lang="en-US"/>
+          </a:p>
+        </p:txBody>
+      </p:sp>
+    </p:spTree>
+    <p:extLst>
+      <p:ext uri="{BB962C8B-B14F-4D97-AF65-F5344CB8AC3E}">
+        <p14:creationId xmlns:p14="http://schemas.microsoft.com/office/powerpoint/2010/main" val="3497697715"/>
+      </p:ext>
+    </p:extLst>
+  </p:cSld>
+  <p:clrMapOvr>
+    <a:masterClrMapping/>
+  </p:clrMapOvr>
+</p:notes>
+</file>
+
+<file path=ppt/notesSlides/notesSlide9.xml><?xml version="1.0" encoding="utf-8"?>
+<p:notes xmlns:a="http://schemas.openxmlformats.org/drawingml/2006/main" xmlns:r="http://schemas.openxmlformats.org/officeDocument/2006/relationships" xmlns:p="http://schemas.openxmlformats.org/presentationml/2006/main">
+  <p:cSld>
+    <p:spTree>
+      <p:nvGrpSpPr>
+        <p:cNvPr id="1" name=""/>
+        <p:cNvGrpSpPr/>
+        <p:nvPr/>
+      </p:nvGrpSpPr>
+      <p:grpSpPr>
+        <a:xfrm>
+          <a:off x="0" y="0"/>
+          <a:ext cx="0" cy="0"/>
+          <a:chOff x="0" y="0"/>
+          <a:chExt cx="0" cy="0"/>
+        </a:xfrm>
+      </p:grpSpPr>
+      <p:sp>
+        <p:nvSpPr>
+          <p:cNvPr id="2" name="Slide Image Placeholder 1"/>
+          <p:cNvSpPr>
+            <a:spLocks noGrp="1" noRot="1" noChangeAspect="1"/>
+          </p:cNvSpPr>
+          <p:nvPr>
+            <p:ph type="sldImg"/>
+          </p:nvPr>
+        </p:nvSpPr>
+        <p:spPr/>
+      </p:sp>
+      <p:sp>
+        <p:nvSpPr>
+          <p:cNvPr id="3" name="Notes Placeholder 2"/>
+          <p:cNvSpPr>
+            <a:spLocks noGrp="1"/>
+          </p:cNvSpPr>
+          <p:nvPr>
+            <p:ph type="body" idx="1"/>
+          </p:nvPr>
+        </p:nvSpPr>
+        <p:spPr/>
+        <p:txBody>
+          <a:bodyPr/>
+          <a:lstStyle/>
+          <a:p>
+            <a:endParaRPr lang="en-US" dirty="0"/>
+          </a:p>
+          <a:p>
+            <a:r>
+              <a:rPr lang="en-US" dirty="0"/>
+              <a:t>Suppose </a:t>
+            </a:r>
+          </a:p>
+          <a:p>
+            <a:pPr lvl="1"/>
+            <a:r>
+              <a:rPr lang="en-US" dirty="0"/>
+              <a:t>r0 = 0xFFFFFFFF, r1 = 0x00000001, r2 = 0x00000000,</a:t>
+            </a:r>
+          </a:p>
+          <a:p>
+            <a:pPr lvl="1"/>
+            <a:r>
+              <a:rPr lang="en-US" dirty="0"/>
+              <a:t>NZCV = 0000 initially</a:t>
+            </a:r>
+          </a:p>
+          <a:p>
+            <a:endParaRPr lang="en-US" dirty="0"/>
+          </a:p>
+        </p:txBody>
+      </p:sp>
+      <p:sp>
+        <p:nvSpPr>
+          <p:cNvPr id="4" name="Slide Number Placeholder 3"/>
+          <p:cNvSpPr>
+            <a:spLocks noGrp="1"/>
+          </p:cNvSpPr>
+          <p:nvPr>
+            <p:ph type="sldNum" sz="quarter" idx="5"/>
+          </p:nvPr>
+        </p:nvSpPr>
+        <p:spPr/>
+        <p:txBody>
+          <a:bodyPr/>
+          <a:lstStyle/>
+          <a:p>
+            <a:fld id="{1B0C9D69-9831-4844-8B1E-062B2DA58B0D}" type="slidenum">
+              <a:rPr lang="en-US" smtClean="0"/>
+              <a:pPr/>
+              <a:t>23</a:t>
             </a:fld>
             <a:endParaRPr lang="en-US"/>
           </a:p>
@@ -3158,7 +3565,7 @@
             <a:fld id="{966FEA0E-C2DF-4252-97AD-54F2B7E07EAC}" type="datetime1">
               <a:rPr lang="en-US" smtClean="0"/>
               <a:pPr eaLnBrk="1" latinLnBrk="0" hangingPunct="1"/>
-              <a:t>10/16/2025</a:t>
+              <a:t>10/17/2025</a:t>
             </a:fld>
             <a:endParaRPr lang="en-US" sz="1600" dirty="0"/>
           </a:p>
@@ -3519,7 +3926,7 @@
             <a:fld id="{69EF9524-0CAA-4F98-BAC2-CE6B712F5E94}" type="datetime1">
               <a:rPr lang="en-US" smtClean="0"/>
               <a:pPr eaLnBrk="1" latinLnBrk="0" hangingPunct="1"/>
-              <a:t>10/16/2025</a:t>
+              <a:t>10/17/2025</a:t>
             </a:fld>
             <a:endParaRPr lang="en-US"/>
           </a:p>
@@ -3696,7 +4103,7 @@
             <a:fld id="{CB20516D-6F89-4C89-8307-32A716E22875}" type="datetime1">
               <a:rPr lang="en-US" smtClean="0"/>
               <a:pPr eaLnBrk="1" latinLnBrk="0" hangingPunct="1"/>
-              <a:t>10/16/2025</a:t>
+              <a:t>10/17/2025</a:t>
             </a:fld>
             <a:endParaRPr lang="en-US"/>
           </a:p>
@@ -3933,7 +4340,7 @@
             <a:fld id="{0CD88620-7329-4FC3-B65D-4EA691138F1B}" type="datetime1">
               <a:rPr lang="en-US" smtClean="0"/>
               <a:pPr eaLnBrk="1" latinLnBrk="0" hangingPunct="1"/>
-              <a:t>10/16/2025</a:t>
+              <a:t>10/17/2025</a:t>
             </a:fld>
             <a:endParaRPr lang="en-US" dirty="0"/>
           </a:p>
@@ -4204,7 +4611,7 @@
             <a:fld id="{0E46F3A1-5653-427D-9F78-56077401431A}" type="datetime1">
               <a:rPr lang="en-US" smtClean="0"/>
               <a:pPr eaLnBrk="1" latinLnBrk="0" hangingPunct="1"/>
-              <a:t>10/16/2025</a:t>
+              <a:t>10/17/2025</a:t>
             </a:fld>
             <a:endParaRPr lang="en-US" dirty="0"/>
           </a:p>
@@ -4426,7 +4833,7 @@
             <a:fld id="{CB67FC03-415A-45F0-B002-DF181377F7DC}" type="datetime1">
               <a:rPr lang="en-US" smtClean="0"/>
               <a:pPr eaLnBrk="1" latinLnBrk="0" hangingPunct="1"/>
-              <a:t>10/16/2025</a:t>
+              <a:t>10/17/2025</a:t>
             </a:fld>
             <a:endParaRPr lang="en-US"/>
           </a:p>
@@ -4780,7 +5187,7 @@
             <a:fld id="{1B6FC726-A0B4-4FC7-90F5-F17415A5C1A3}" type="datetime1">
               <a:rPr lang="en-US" smtClean="0"/>
               <a:pPr eaLnBrk="1" latinLnBrk="0" hangingPunct="1"/>
-              <a:t>10/16/2025</a:t>
+              <a:t>10/17/2025</a:t>
             </a:fld>
             <a:endParaRPr lang="en-US"/>
           </a:p>
@@ -5014,7 +5421,7 @@
             <a:fld id="{BE217211-C3F9-4892-9CC3-C7105638567D}" type="datetime1">
               <a:rPr lang="en-US" smtClean="0"/>
               <a:pPr eaLnBrk="1" latinLnBrk="0" hangingPunct="1"/>
-              <a:t>10/16/2025</a:t>
+              <a:t>10/17/2025</a:t>
             </a:fld>
             <a:endParaRPr lang="en-US"/>
           </a:p>
@@ -5157,7 +5564,7 @@
             <a:fld id="{BA713E6A-6B26-4373-A75B-EF395DC64F9E}" type="datetime1">
               <a:rPr lang="en-US" smtClean="0"/>
               <a:pPr eaLnBrk="1" latinLnBrk="0" hangingPunct="1"/>
-              <a:t>10/16/2025</a:t>
+              <a:t>10/17/2025</a:t>
             </a:fld>
             <a:endParaRPr lang="en-US"/>
           </a:p>
@@ -5436,7 +5843,7 @@
             <a:fld id="{57EB41EF-4260-415A-8DD6-FEDCC46E7EFC}" type="datetime1">
               <a:rPr lang="en-US" smtClean="0"/>
               <a:pPr eaLnBrk="1" latinLnBrk="0" hangingPunct="1"/>
-              <a:t>10/16/2025</a:t>
+              <a:t>10/17/2025</a:t>
             </a:fld>
             <a:endParaRPr lang="en-US"/>
           </a:p>
@@ -5845,7 +6252,7 @@
             <a:fld id="{6BDA80A0-06CC-4492-94A0-E8516751045E}" type="datetime1">
               <a:rPr lang="en-US" smtClean="0"/>
               <a:pPr eaLnBrk="1" latinLnBrk="0" hangingPunct="1"/>
-              <a:t>10/16/2025</a:t>
+              <a:t>10/17/2025</a:t>
             </a:fld>
             <a:endParaRPr lang="en-US"/>
           </a:p>
@@ -6184,7 +6591,7 @@
             <a:fld id="{A25B5B4B-57EE-495D-8E74-A657CFD8BB6C}" type="datetime1">
               <a:rPr lang="en-US" smtClean="0"/>
               <a:pPr eaLnBrk="1" latinLnBrk="0" hangingPunct="1"/>
-              <a:t>10/16/2025</a:t>
+              <a:t>10/17/2025</a:t>
             </a:fld>
             <a:endParaRPr lang="en-US" sz="1400" dirty="0">
               <a:solidFill>
@@ -7499,6 +7906,171 @@
         <p:cNvPr id="1" name="">
           <a:extLst>
             <a:ext uri="{FF2B5EF4-FFF2-40B4-BE49-F238E27FC236}">
+              <a16:creationId xmlns:a16="http://schemas.microsoft.com/office/drawing/2014/main" id="{65370120-AA85-2F0A-CC9A-66A79F09B9D8}"/>
+            </a:ext>
+          </a:extLst>
+        </p:cNvPr>
+        <p:cNvGrpSpPr/>
+        <p:nvPr/>
+      </p:nvGrpSpPr>
+      <p:grpSpPr>
+        <a:xfrm>
+          <a:off x="0" y="0"/>
+          <a:ext cx="0" cy="0"/>
+          <a:chOff x="0" y="0"/>
+          <a:chExt cx="0" cy="0"/>
+        </a:xfrm>
+      </p:grpSpPr>
+      <p:sp>
+        <p:nvSpPr>
+          <p:cNvPr id="2" name="Title 1">
+            <a:extLst>
+              <a:ext uri="{FF2B5EF4-FFF2-40B4-BE49-F238E27FC236}">
+                <a16:creationId xmlns:a16="http://schemas.microsoft.com/office/drawing/2014/main" id="{3BF8795C-148F-094D-80F5-1264C3578EE6}"/>
+              </a:ext>
+            </a:extLst>
+          </p:cNvPr>
+          <p:cNvSpPr>
+            <a:spLocks noGrp="1"/>
+          </p:cNvSpPr>
+          <p:nvPr>
+            <p:ph type="title"/>
+          </p:nvPr>
+        </p:nvSpPr>
+        <p:spPr/>
+        <p:txBody>
+          <a:bodyPr/>
+          <a:lstStyle/>
+          <a:p>
+            <a:r>
+              <a:rPr lang="en-US" dirty="0"/>
+              <a:t>Shift LSLS</a:t>
+            </a:r>
+          </a:p>
+        </p:txBody>
+      </p:sp>
+      <p:sp>
+        <p:nvSpPr>
+          <p:cNvPr id="3" name="Slide Number Placeholder 2">
+            <a:extLst>
+              <a:ext uri="{FF2B5EF4-FFF2-40B4-BE49-F238E27FC236}">
+                <a16:creationId xmlns:a16="http://schemas.microsoft.com/office/drawing/2014/main" id="{ABC9452F-FC85-2CA2-05E2-EE443BFFBF65}"/>
+              </a:ext>
+            </a:extLst>
+          </p:cNvPr>
+          <p:cNvSpPr>
+            <a:spLocks noGrp="1"/>
+          </p:cNvSpPr>
+          <p:nvPr>
+            <p:ph type="sldNum" sz="quarter" idx="12"/>
+          </p:nvPr>
+        </p:nvSpPr>
+        <p:spPr/>
+        <p:txBody>
+          <a:bodyPr/>
+          <a:lstStyle/>
+          <a:p>
+            <a:fld id="{EA7C8D44-3667-46F6-9772-CC52308E2A7F}" type="slidenum">
+              <a:rPr kumimoji="0" lang="en-US" smtClean="0"/>
+              <a:pPr/>
+              <a:t>13</a:t>
+            </a:fld>
+            <a:endParaRPr kumimoji="0" lang="en-US" dirty="0"/>
+          </a:p>
+        </p:txBody>
+      </p:sp>
+      <p:sp>
+        <p:nvSpPr>
+          <p:cNvPr id="4" name="Content Placeholder 3">
+            <a:extLst>
+              <a:ext uri="{FF2B5EF4-FFF2-40B4-BE49-F238E27FC236}">
+                <a16:creationId xmlns:a16="http://schemas.microsoft.com/office/drawing/2014/main" id="{2C569AB0-22FC-BE38-C5AA-9F8E6ECA54DA}"/>
+              </a:ext>
+            </a:extLst>
+          </p:cNvPr>
+          <p:cNvSpPr>
+            <a:spLocks noGrp="1"/>
+          </p:cNvSpPr>
+          <p:nvPr>
+            <p:ph sz="quarter" idx="1"/>
+          </p:nvPr>
+        </p:nvSpPr>
+        <p:spPr>
+          <a:xfrm>
+            <a:off x="457200" y="1219200"/>
+            <a:ext cx="8229600" cy="5638800"/>
+          </a:xfrm>
+        </p:spPr>
+        <p:txBody>
+          <a:bodyPr>
+            <a:normAutofit/>
+          </a:bodyPr>
+          <a:lstStyle/>
+          <a:p>
+            <a:r>
+              <a:rPr lang="pt-BR" dirty="0"/>
+              <a:t>Compute register values, and</a:t>
+            </a:r>
+            <a:r>
+              <a:rPr lang="en-US" dirty="0"/>
+              <a:t> NZCV flags after execution of each instruction, assuming all flags are initially 0</a:t>
+            </a:r>
+            <a:r>
+              <a:rPr lang="pt-BR" dirty="0"/>
+              <a:t>.</a:t>
+            </a:r>
+          </a:p>
+          <a:p>
+            <a:pPr lvl="1"/>
+            <a:r>
+              <a:rPr lang="pt-BR" dirty="0"/>
+              <a:t>LDR R1, =0x11223344</a:t>
+            </a:r>
+          </a:p>
+          <a:p>
+            <a:pPr lvl="1"/>
+            <a:r>
+              <a:rPr lang="pt-BR" dirty="0"/>
+              <a:t>MOV R2, R1, LSLS #4</a:t>
+            </a:r>
+          </a:p>
+          <a:p>
+            <a:pPr lvl="1"/>
+            <a:r>
+              <a:rPr lang="pt-BR" dirty="0"/>
+              <a:t>MOV R3, R1, LSLS #8</a:t>
+            </a:r>
+          </a:p>
+          <a:p>
+            <a:pPr lvl="1"/>
+            <a:r>
+              <a:rPr lang="pt-BR" dirty="0"/>
+              <a:t>MOV R4, R1, LSLS #16</a:t>
+            </a:r>
+          </a:p>
+        </p:txBody>
+      </p:sp>
+    </p:spTree>
+    <p:extLst>
+      <p:ext uri="{BB962C8B-B14F-4D97-AF65-F5344CB8AC3E}">
+        <p14:creationId xmlns:p14="http://schemas.microsoft.com/office/powerpoint/2010/main" val="3403107874"/>
+      </p:ext>
+    </p:extLst>
+  </p:cSld>
+  <p:clrMapOvr>
+    <a:masterClrMapping/>
+  </p:clrMapOvr>
+</p:sld>
+</file>
+
+<file path=ppt/slides/slide14.xml><?xml version="1.0" encoding="utf-8"?>
+<p:sld xmlns:a="http://schemas.openxmlformats.org/drawingml/2006/main" xmlns:r="http://schemas.openxmlformats.org/officeDocument/2006/relationships" xmlns:p="http://schemas.openxmlformats.org/presentationml/2006/main">
+  <p:cSld>
+    <p:spTree>
+      <p:nvGrpSpPr>
+        <p:cNvPr id="1" name="">
+          <a:extLst>
+            <a:ext uri="{FF2B5EF4-FFF2-40B4-BE49-F238E27FC236}">
               <a16:creationId xmlns:a16="http://schemas.microsoft.com/office/drawing/2014/main" id="{9D91839C-F6D4-9964-61E4-7718ED85E7FC}"/>
             </a:ext>
           </a:extLst>
@@ -7566,7 +8138,7 @@
             <a:fld id="{EA7C8D44-3667-46F6-9772-CC52308E2A7F}" type="slidenum">
               <a:rPr kumimoji="0" lang="en-US" smtClean="0"/>
               <a:pPr/>
-              <a:t>13</a:t>
+              <a:t>14</a:t>
             </a:fld>
             <a:endParaRPr kumimoji="0" lang="en-US" dirty="0"/>
           </a:p>
@@ -7630,160 +8202,6 @@
     <p:extLst>
       <p:ext uri="{BB962C8B-B14F-4D97-AF65-F5344CB8AC3E}">
         <p14:creationId xmlns:p14="http://schemas.microsoft.com/office/powerpoint/2010/main" val="1151160017"/>
-      </p:ext>
-    </p:extLst>
-  </p:cSld>
-  <p:clrMapOvr>
-    <a:masterClrMapping/>
-  </p:clrMapOvr>
-</p:sld>
-</file>
-
-<file path=ppt/slides/slide14.xml><?xml version="1.0" encoding="utf-8"?>
-<p:sld xmlns:a="http://schemas.openxmlformats.org/drawingml/2006/main" xmlns:r="http://schemas.openxmlformats.org/officeDocument/2006/relationships" xmlns:p="http://schemas.openxmlformats.org/presentationml/2006/main">
-  <p:cSld>
-    <p:spTree>
-      <p:nvGrpSpPr>
-        <p:cNvPr id="1" name=""/>
-        <p:cNvGrpSpPr/>
-        <p:nvPr/>
-      </p:nvGrpSpPr>
-      <p:grpSpPr>
-        <a:xfrm>
-          <a:off x="0" y="0"/>
-          <a:ext cx="0" cy="0"/>
-          <a:chOff x="0" y="0"/>
-          <a:chExt cx="0" cy="0"/>
-        </a:xfrm>
-      </p:grpSpPr>
-      <p:sp>
-        <p:nvSpPr>
-          <p:cNvPr id="2" name="Title 1">
-            <a:extLst>
-              <a:ext uri="{FF2B5EF4-FFF2-40B4-BE49-F238E27FC236}">
-                <a16:creationId xmlns:a16="http://schemas.microsoft.com/office/drawing/2014/main" id="{0C2E5212-EBBF-507A-8939-5B24EAC68025}"/>
-              </a:ext>
-            </a:extLst>
-          </p:cNvPr>
-          <p:cNvSpPr>
-            <a:spLocks noGrp="1"/>
-          </p:cNvSpPr>
-          <p:nvPr>
-            <p:ph type="title"/>
-          </p:nvPr>
-        </p:nvSpPr>
-        <p:spPr/>
-        <p:txBody>
-          <a:bodyPr/>
-          <a:lstStyle/>
-          <a:p>
-            <a:r>
-              <a:rPr lang="en-US" dirty="0"/>
-              <a:t>Multiply without MUL</a:t>
-            </a:r>
-          </a:p>
-        </p:txBody>
-      </p:sp>
-      <p:sp>
-        <p:nvSpPr>
-          <p:cNvPr id="3" name="Slide Number Placeholder 2">
-            <a:extLst>
-              <a:ext uri="{FF2B5EF4-FFF2-40B4-BE49-F238E27FC236}">
-                <a16:creationId xmlns:a16="http://schemas.microsoft.com/office/drawing/2014/main" id="{3D282959-239B-7B59-648D-A0210CB0FED0}"/>
-              </a:ext>
-            </a:extLst>
-          </p:cNvPr>
-          <p:cNvSpPr>
-            <a:spLocks noGrp="1"/>
-          </p:cNvSpPr>
-          <p:nvPr>
-            <p:ph type="sldNum" sz="quarter" idx="12"/>
-          </p:nvPr>
-        </p:nvSpPr>
-        <p:spPr/>
-        <p:txBody>
-          <a:bodyPr/>
-          <a:lstStyle/>
-          <a:p>
-            <a:fld id="{EA7C8D44-3667-46F6-9772-CC52308E2A7F}" type="slidenum">
-              <a:rPr kumimoji="0" lang="en-US" smtClean="0"/>
-              <a:pPr/>
-              <a:t>14</a:t>
-            </a:fld>
-            <a:endParaRPr kumimoji="0" lang="en-US" dirty="0"/>
-          </a:p>
-        </p:txBody>
-      </p:sp>
-      <p:sp>
-        <p:nvSpPr>
-          <p:cNvPr id="4" name="Content Placeholder 3">
-            <a:extLst>
-              <a:ext uri="{FF2B5EF4-FFF2-40B4-BE49-F238E27FC236}">
-                <a16:creationId xmlns:a16="http://schemas.microsoft.com/office/drawing/2014/main" id="{90B6A678-F78A-5E7F-A0E9-3A3B773CE733}"/>
-              </a:ext>
-            </a:extLst>
-          </p:cNvPr>
-          <p:cNvSpPr>
-            <a:spLocks noGrp="1"/>
-          </p:cNvSpPr>
-          <p:nvPr>
-            <p:ph sz="quarter" idx="1"/>
-          </p:nvPr>
-        </p:nvSpPr>
-        <p:spPr/>
-        <p:txBody>
-          <a:bodyPr/>
-          <a:lstStyle/>
-          <a:p>
-            <a:r>
-              <a:rPr lang="en-US" dirty="0"/>
-              <a:t>Without using MUL instruction, give instructions that multiply a register, r3 by</a:t>
-            </a:r>
-          </a:p>
-          <a:p>
-            <a:pPr lvl="1"/>
-            <a:r>
-              <a:rPr lang="en-US" dirty="0"/>
-              <a:t>135</a:t>
-            </a:r>
-          </a:p>
-          <a:p>
-            <a:pPr lvl="1"/>
-            <a:r>
-              <a:rPr lang="en-US" dirty="0"/>
-              <a:t>153</a:t>
-            </a:r>
-          </a:p>
-          <a:p>
-            <a:pPr lvl="1"/>
-            <a:r>
-              <a:rPr lang="en-US" dirty="0"/>
-              <a:t>255</a:t>
-            </a:r>
-          </a:p>
-          <a:p>
-            <a:pPr lvl="1"/>
-            <a:r>
-              <a:rPr lang="en-US" dirty="0"/>
-              <a:t>18</a:t>
-            </a:r>
-          </a:p>
-          <a:p>
-            <a:pPr lvl="1"/>
-            <a:r>
-              <a:rPr lang="en-US"/>
-              <a:t>16384</a:t>
-            </a:r>
-          </a:p>
-          <a:p>
-            <a:endParaRPr lang="en-US" dirty="0"/>
-          </a:p>
-        </p:txBody>
-      </p:sp>
-    </p:spTree>
-    <p:extLst>
-      <p:ext uri="{BB962C8B-B14F-4D97-AF65-F5344CB8AC3E}">
-        <p14:creationId xmlns:p14="http://schemas.microsoft.com/office/powerpoint/2010/main" val="570184693"/>
       </p:ext>
     </p:extLst>
   </p:cSld>
@@ -7798,7 +8216,13 @@
   <p:cSld>
     <p:spTree>
       <p:nvGrpSpPr>
-        <p:cNvPr id="1" name=""/>
+        <p:cNvPr id="1" name="">
+          <a:extLst>
+            <a:ext uri="{FF2B5EF4-FFF2-40B4-BE49-F238E27FC236}">
+              <a16:creationId xmlns:a16="http://schemas.microsoft.com/office/drawing/2014/main" id="{F5E06A51-A439-F103-49BD-FDEA556B41D2}"/>
+            </a:ext>
+          </a:extLst>
+        </p:cNvPr>
         <p:cNvGrpSpPr/>
         <p:nvPr/>
       </p:nvGrpSpPr>
@@ -7815,7 +8239,7 @@
           <p:cNvPr id="2" name="Title 1">
             <a:extLst>
               <a:ext uri="{FF2B5EF4-FFF2-40B4-BE49-F238E27FC236}">
-                <a16:creationId xmlns:a16="http://schemas.microsoft.com/office/drawing/2014/main" id="{0130680A-E82D-BBE9-C61F-EB0A6FEBF49E}"/>
+                <a16:creationId xmlns:a16="http://schemas.microsoft.com/office/drawing/2014/main" id="{3C452DBC-650F-2FD6-D799-9D9632A6EF51}"/>
               </a:ext>
             </a:extLst>
           </p:cNvPr>
@@ -7833,7 +8257,7 @@
           <a:p>
             <a:r>
               <a:rPr lang="en-US" dirty="0"/>
-              <a:t>Count number of ones</a:t>
+              <a:t>Shift LSR ASR</a:t>
             </a:r>
           </a:p>
         </p:txBody>
@@ -7843,7 +8267,7 @@
           <p:cNvPr id="3" name="Slide Number Placeholder 2">
             <a:extLst>
               <a:ext uri="{FF2B5EF4-FFF2-40B4-BE49-F238E27FC236}">
-                <a16:creationId xmlns:a16="http://schemas.microsoft.com/office/drawing/2014/main" id="{B7C6C243-F37B-89BF-2B6A-9A56B69C57F6}"/>
+                <a16:creationId xmlns:a16="http://schemas.microsoft.com/office/drawing/2014/main" id="{A991C5B6-51F3-7333-86A4-FA1F19558C24}"/>
               </a:ext>
             </a:extLst>
           </p:cNvPr>
@@ -7873,7 +8297,7 @@
           <p:cNvPr id="4" name="Content Placeholder 3">
             <a:extLst>
               <a:ext uri="{FF2B5EF4-FFF2-40B4-BE49-F238E27FC236}">
-                <a16:creationId xmlns:a16="http://schemas.microsoft.com/office/drawing/2014/main" id="{00C41A2D-28FB-F7BC-6CAD-42CE944332B1}"/>
+                <a16:creationId xmlns:a16="http://schemas.microsoft.com/office/drawing/2014/main" id="{8B96A0C6-9296-BA88-C598-6B260416FC42}"/>
               </a:ext>
             </a:extLst>
           </p:cNvPr>
@@ -7884,7 +8308,12 @@
             <p:ph sz="quarter" idx="1"/>
           </p:nvPr>
         </p:nvSpPr>
-        <p:spPr/>
+        <p:spPr>
+          <a:xfrm>
+            <a:off x="457200" y="1219200"/>
+            <a:ext cx="8229600" cy="5638800"/>
+          </a:xfrm>
+        </p:spPr>
         <p:txBody>
           <a:bodyPr>
             <a:normAutofit/>
@@ -7892,22 +8321,73 @@
           <a:lstStyle/>
           <a:p>
             <a:r>
-              <a:rPr lang="en-US" dirty="0"/>
-              <a:t>Write a program to count the number of ones in a 32-bit register r0. </a:t>
-            </a:r>
-          </a:p>
-          <a:p>
-            <a:endParaRPr lang="en-US" dirty="0"/>
-          </a:p>
-          <a:p>
-            <a:endParaRPr lang="en-US" dirty="0"/>
+              <a:rPr lang="pt-BR" dirty="0"/>
+              <a:t>Compute register values:</a:t>
+            </a:r>
+          </a:p>
+          <a:p>
+            <a:pPr lvl="1"/>
+            <a:r>
+              <a:rPr lang="pt-BR" dirty="0"/>
+              <a:t>LDR R1, =0X11223344</a:t>
+            </a:r>
+          </a:p>
+          <a:p>
+            <a:pPr lvl="1"/>
+            <a:r>
+              <a:rPr lang="pt-BR" dirty="0"/>
+              <a:t>MOV R2, R1, LSR #4</a:t>
+            </a:r>
+          </a:p>
+          <a:p>
+            <a:pPr lvl="1"/>
+            <a:r>
+              <a:rPr lang="pt-BR" dirty="0"/>
+              <a:t>MOV R3, R1, LSR #8</a:t>
+            </a:r>
+          </a:p>
+          <a:p>
+            <a:pPr lvl="1"/>
+            <a:r>
+              <a:rPr lang="pt-BR" dirty="0"/>
+              <a:t>MOV R4, R1, LSR #16</a:t>
+            </a:r>
+          </a:p>
+          <a:p>
+            <a:pPr lvl="1"/>
+            <a:r>
+              <a:rPr lang="pt-BR" dirty="0"/>
+              <a:t>MOV R5, R1, </a:t>
+            </a:r>
+            <a:r>
+              <a:rPr lang="en-US" altLang="zh-CN" dirty="0"/>
+              <a:t>A</a:t>
+            </a:r>
+            <a:r>
+              <a:rPr lang="pt-BR" dirty="0"/>
+              <a:t>SR #4</a:t>
+            </a:r>
+          </a:p>
+          <a:p>
+            <a:pPr lvl="1"/>
+            <a:r>
+              <a:rPr lang="pt-BR" dirty="0"/>
+              <a:t>MOV R6, R1, ASR #8</a:t>
+            </a:r>
+          </a:p>
+          <a:p>
+            <a:pPr lvl="1"/>
+            <a:r>
+              <a:rPr lang="pt-BR" dirty="0"/>
+              <a:t>MOV R7, R1, ASR #16</a:t>
+            </a:r>
           </a:p>
         </p:txBody>
       </p:sp>
     </p:spTree>
     <p:extLst>
       <p:ext uri="{BB962C8B-B14F-4D97-AF65-F5344CB8AC3E}">
-        <p14:creationId xmlns:p14="http://schemas.microsoft.com/office/powerpoint/2010/main" val="498654524"/>
+        <p14:creationId xmlns:p14="http://schemas.microsoft.com/office/powerpoint/2010/main" val="3280752258"/>
       </p:ext>
     </p:extLst>
   </p:cSld>
@@ -7925,7 +8405,7 @@
         <p:cNvPr id="1" name="">
           <a:extLst>
             <a:ext uri="{FF2B5EF4-FFF2-40B4-BE49-F238E27FC236}">
-              <a16:creationId xmlns:a16="http://schemas.microsoft.com/office/drawing/2014/main" id="{21E47DC9-FEC2-35B7-BE17-C800232773BF}"/>
+              <a16:creationId xmlns:a16="http://schemas.microsoft.com/office/drawing/2014/main" id="{FF5EDAD4-A15A-CB26-167A-FED5BF3058E2}"/>
             </a:ext>
           </a:extLst>
         </p:cNvPr>
@@ -7945,7 +8425,7 @@
           <p:cNvPr id="2" name="Title 1">
             <a:extLst>
               <a:ext uri="{FF2B5EF4-FFF2-40B4-BE49-F238E27FC236}">
-                <a16:creationId xmlns:a16="http://schemas.microsoft.com/office/drawing/2014/main" id="{DBC93014-01D8-9E5D-845A-870F048F2095}"/>
+                <a16:creationId xmlns:a16="http://schemas.microsoft.com/office/drawing/2014/main" id="{9AB860C7-6D32-CED6-8DDA-C2F9D8462339}"/>
               </a:ext>
             </a:extLst>
           </p:cNvPr>
@@ -7963,7 +8443,7 @@
           <a:p>
             <a:r>
               <a:rPr lang="en-US" dirty="0"/>
-              <a:t>Count the number of zeros</a:t>
+              <a:t>Shift LSRS ASR</a:t>
             </a:r>
           </a:p>
         </p:txBody>
@@ -7973,7 +8453,7 @@
           <p:cNvPr id="3" name="Slide Number Placeholder 2">
             <a:extLst>
               <a:ext uri="{FF2B5EF4-FFF2-40B4-BE49-F238E27FC236}">
-                <a16:creationId xmlns:a16="http://schemas.microsoft.com/office/drawing/2014/main" id="{90D51E58-1BCE-C9D5-7122-108C438ED836}"/>
+                <a16:creationId xmlns:a16="http://schemas.microsoft.com/office/drawing/2014/main" id="{C5DF2A77-49EC-04E8-D5EC-35623E91682E}"/>
               </a:ext>
             </a:extLst>
           </p:cNvPr>
@@ -8003,7 +8483,7 @@
           <p:cNvPr id="4" name="Content Placeholder 3">
             <a:extLst>
               <a:ext uri="{FF2B5EF4-FFF2-40B4-BE49-F238E27FC236}">
-                <a16:creationId xmlns:a16="http://schemas.microsoft.com/office/drawing/2014/main" id="{F7E59F7F-A91F-C3AC-6F2E-7E041BC2CCCA}"/>
+                <a16:creationId xmlns:a16="http://schemas.microsoft.com/office/drawing/2014/main" id="{B0AEBDB8-79A1-498D-B9D2-DDE87FE9C064}"/>
               </a:ext>
             </a:extLst>
           </p:cNvPr>
@@ -8016,8 +8496,8 @@
         </p:nvSpPr>
         <p:spPr>
           <a:xfrm>
-            <a:off x="457200" y="1219200"/>
-            <a:ext cx="8229600" cy="5486400"/>
+            <a:off x="457200" y="1103188"/>
+            <a:ext cx="8229600" cy="5638800"/>
           </a:xfrm>
         </p:spPr>
         <p:txBody>
@@ -8027,8 +8507,73 @@
           <a:lstStyle/>
           <a:p>
             <a:r>
+              <a:rPr lang="pt-BR" dirty="0"/>
+              <a:t>Compute register values, and</a:t>
+            </a:r>
+            <a:r>
               <a:rPr lang="en-US" dirty="0"/>
-              <a:t>Based on the program that counts 1’s, modify it to count the number of zeros a 32-bit register r0. </a:t>
+              <a:t> NZCV flags after execution of each instruction, assuming all flags are initially 0</a:t>
+            </a:r>
+            <a:r>
+              <a:rPr lang="pt-BR" dirty="0"/>
+              <a:t>-</a:t>
+            </a:r>
+          </a:p>
+          <a:p>
+            <a:pPr lvl="1"/>
+            <a:r>
+              <a:rPr lang="pt-BR" dirty="0"/>
+              <a:t>LDR R1, =0X11223344</a:t>
+            </a:r>
+          </a:p>
+          <a:p>
+            <a:pPr lvl="1"/>
+            <a:r>
+              <a:rPr lang="pt-BR" dirty="0"/>
+              <a:t>MOV R2, R1, LSRS #4</a:t>
+            </a:r>
+          </a:p>
+          <a:p>
+            <a:pPr lvl="1"/>
+            <a:r>
+              <a:rPr lang="pt-BR" dirty="0"/>
+              <a:t>MOV R3, R1, LSRS #8</a:t>
+            </a:r>
+          </a:p>
+          <a:p>
+            <a:pPr lvl="1"/>
+            <a:r>
+              <a:rPr lang="pt-BR" dirty="0"/>
+              <a:t>MOV R4, R1, LSRS #16</a:t>
+            </a:r>
+          </a:p>
+          <a:p>
+            <a:pPr lvl="1"/>
+            <a:r>
+              <a:rPr lang="pt-BR" dirty="0"/>
+              <a:t>MOV R5, R1, </a:t>
+            </a:r>
+            <a:r>
+              <a:rPr lang="en-US" altLang="zh-CN" dirty="0"/>
+              <a:t>A</a:t>
+            </a:r>
+            <a:r>
+              <a:rPr lang="pt-BR" dirty="0"/>
+              <a:t>SRS #4</a:t>
+            </a:r>
+          </a:p>
+          <a:p>
+            <a:pPr lvl="1"/>
+            <a:r>
+              <a:rPr lang="pt-BR" dirty="0"/>
+              <a:t>MOV R6, R1, ASRS #8</a:t>
+            </a:r>
+          </a:p>
+          <a:p>
+            <a:pPr lvl="1"/>
+            <a:r>
+              <a:rPr lang="pt-BR" dirty="0"/>
+              <a:t>MOV R7, R1, ASRS #16</a:t>
             </a:r>
           </a:p>
         </p:txBody>
@@ -8036,7 +8581,7 @@
     </p:spTree>
     <p:extLst>
       <p:ext uri="{BB962C8B-B14F-4D97-AF65-F5344CB8AC3E}">
-        <p14:creationId xmlns:p14="http://schemas.microsoft.com/office/powerpoint/2010/main" val="2952282065"/>
+        <p14:creationId xmlns:p14="http://schemas.microsoft.com/office/powerpoint/2010/main" val="3657267278"/>
       </p:ext>
     </p:extLst>
   </p:cSld>
@@ -8068,7 +8613,7 @@
           <p:cNvPr id="2" name="Title 1">
             <a:extLst>
               <a:ext uri="{FF2B5EF4-FFF2-40B4-BE49-F238E27FC236}">
-                <a16:creationId xmlns:a16="http://schemas.microsoft.com/office/drawing/2014/main" id="{11B52526-FDDF-35FA-A44E-1A2334442F74}"/>
+                <a16:creationId xmlns:a16="http://schemas.microsoft.com/office/drawing/2014/main" id="{0C2E5212-EBBF-507A-8939-5B24EAC68025}"/>
               </a:ext>
             </a:extLst>
           </p:cNvPr>
@@ -8086,7 +8631,7 @@
           <a:p>
             <a:r>
               <a:rPr lang="en-US" dirty="0"/>
-              <a:t>Flags ANDS</a:t>
+              <a:t>Multiply without MUL</a:t>
             </a:r>
           </a:p>
         </p:txBody>
@@ -8096,7 +8641,7 @@
           <p:cNvPr id="3" name="Slide Number Placeholder 2">
             <a:extLst>
               <a:ext uri="{FF2B5EF4-FFF2-40B4-BE49-F238E27FC236}">
-                <a16:creationId xmlns:a16="http://schemas.microsoft.com/office/drawing/2014/main" id="{BCB70333-70B3-0D05-E999-759739E502C6}"/>
+                <a16:creationId xmlns:a16="http://schemas.microsoft.com/office/drawing/2014/main" id="{3D282959-239B-7B59-648D-A0210CB0FED0}"/>
               </a:ext>
             </a:extLst>
           </p:cNvPr>
@@ -8126,7 +8671,7 @@
           <p:cNvPr id="4" name="Content Placeholder 3">
             <a:extLst>
               <a:ext uri="{FF2B5EF4-FFF2-40B4-BE49-F238E27FC236}">
-                <a16:creationId xmlns:a16="http://schemas.microsoft.com/office/drawing/2014/main" id="{43995D49-573C-6129-4E24-762AAEB6BD07}"/>
+                <a16:creationId xmlns:a16="http://schemas.microsoft.com/office/drawing/2014/main" id="{90B6A678-F78A-5E7F-A0E9-3A3B773CE733}"/>
               </a:ext>
             </a:extLst>
           </p:cNvPr>
@@ -8144,97 +8689,53 @@
           <a:p>
             <a:r>
               <a:rPr lang="en-US" dirty="0"/>
-              <a:t>What are value of r2, and NZCV flags after execution, assuming all flags are initially 0.</a:t>
+              <a:t>Without using MUL instruction, give instructions that multiply a register, r3 by</a:t>
+            </a:r>
+          </a:p>
+          <a:p>
+            <a:pPr lvl="1"/>
+            <a:r>
+              <a:rPr lang="en-US" dirty="0"/>
+              <a:t>135</a:t>
+            </a:r>
+          </a:p>
+          <a:p>
+            <a:pPr lvl="1"/>
+            <a:r>
+              <a:rPr lang="en-US" dirty="0"/>
+              <a:t>153</a:t>
+            </a:r>
+          </a:p>
+          <a:p>
+            <a:pPr lvl="1"/>
+            <a:r>
+              <a:rPr lang="en-US" dirty="0"/>
+              <a:t>255</a:t>
+            </a:r>
+          </a:p>
+          <a:p>
+            <a:pPr lvl="1"/>
+            <a:r>
+              <a:rPr lang="en-US" dirty="0"/>
+              <a:t>18</a:t>
+            </a:r>
+          </a:p>
+          <a:p>
+            <a:pPr lvl="1"/>
+            <a:r>
+              <a:rPr lang="en-US"/>
+              <a:t>16384</a:t>
             </a:r>
           </a:p>
           <a:p>
             <a:endParaRPr lang="en-US" dirty="0"/>
-          </a:p>
-          <a:p>
-            <a:endParaRPr lang="en-US" dirty="0"/>
-          </a:p>
-        </p:txBody>
-      </p:sp>
-      <p:sp>
-        <p:nvSpPr>
-          <p:cNvPr id="7" name="Rectangle 6">
-            <a:extLst>
-              <a:ext uri="{FF2B5EF4-FFF2-40B4-BE49-F238E27FC236}">
-                <a16:creationId xmlns:a16="http://schemas.microsoft.com/office/drawing/2014/main" id="{BCB598EB-3D73-A532-9DE0-CBC965E702FA}"/>
-              </a:ext>
-            </a:extLst>
-          </p:cNvPr>
-          <p:cNvSpPr/>
-          <p:nvPr/>
-        </p:nvSpPr>
-        <p:spPr>
-          <a:xfrm>
-            <a:off x="860298" y="2213036"/>
-            <a:ext cx="3467100" cy="1015663"/>
-          </a:xfrm>
-          <a:prstGeom prst="rect">
-            <a:avLst/>
-          </a:prstGeom>
-        </p:spPr>
-        <p:style>
-          <a:lnRef idx="2">
-            <a:schemeClr val="accent1"/>
-          </a:lnRef>
-          <a:fillRef idx="1">
-            <a:schemeClr val="lt1"/>
-          </a:fillRef>
-          <a:effectRef idx="0">
-            <a:schemeClr val="accent1"/>
-          </a:effectRef>
-          <a:fontRef idx="minor">
-            <a:schemeClr val="dk1"/>
-          </a:fontRef>
-        </p:style>
-        <p:txBody>
-          <a:bodyPr wrap="square">
-            <a:spAutoFit/>
-          </a:bodyPr>
-          <a:lstStyle/>
-          <a:p>
-            <a:r>
-              <a:rPr lang="pt-BR" sz="2000" dirty="0">
-                <a:latin typeface="Consolas" panose="020B0609020204030204" pitchFamily="49" charset="0"/>
-                <a:cs typeface="Consolas" panose="020B0609020204030204" pitchFamily="49" charset="0"/>
-              </a:rPr>
-              <a:t>LDR r0, =0xFFFFFFF00</a:t>
-            </a:r>
-          </a:p>
-          <a:p>
-            <a:r>
-              <a:rPr lang="pt-BR" sz="2000" dirty="0">
-                <a:latin typeface="Consolas" panose="020B0609020204030204" pitchFamily="49" charset="0"/>
-                <a:cs typeface="Consolas" panose="020B0609020204030204" pitchFamily="49" charset="0"/>
-              </a:rPr>
-              <a:t>LDR r1, =0x00000001</a:t>
-            </a:r>
-          </a:p>
-          <a:p>
-            <a:r>
-              <a:rPr lang="pt-BR" sz="2000" dirty="0">
-                <a:latin typeface="Consolas" panose="020B0609020204030204" pitchFamily="49" charset="0"/>
-                <a:cs typeface="Consolas" panose="020B0609020204030204" pitchFamily="49" charset="0"/>
-              </a:rPr>
-              <a:t>ANDS r2, r1, r0, LSL #1</a:t>
-            </a:r>
-            <a:endParaRPr lang="en-US" sz="2000" dirty="0">
-              <a:solidFill>
-                <a:srgbClr val="C00000"/>
-              </a:solidFill>
-              <a:latin typeface="Consolas" panose="020B0609020204030204" pitchFamily="49" charset="0"/>
-              <a:cs typeface="Consolas" panose="020B0609020204030204" pitchFamily="49" charset="0"/>
-            </a:endParaRPr>
           </a:p>
         </p:txBody>
       </p:sp>
     </p:spTree>
     <p:extLst>
       <p:ext uri="{BB962C8B-B14F-4D97-AF65-F5344CB8AC3E}">
-        <p14:creationId xmlns:p14="http://schemas.microsoft.com/office/powerpoint/2010/main" val="2291445225"/>
+        <p14:creationId xmlns:p14="http://schemas.microsoft.com/office/powerpoint/2010/main" val="570184693"/>
       </p:ext>
     </p:extLst>
   </p:cSld>
@@ -8266,7 +8767,7 @@
           <p:cNvPr id="2" name="Title 1">
             <a:extLst>
               <a:ext uri="{FF2B5EF4-FFF2-40B4-BE49-F238E27FC236}">
-                <a16:creationId xmlns:a16="http://schemas.microsoft.com/office/drawing/2014/main" id="{E3C709F9-4905-FD89-18E1-B8EB2F602C94}"/>
+                <a16:creationId xmlns:a16="http://schemas.microsoft.com/office/drawing/2014/main" id="{0130680A-E82D-BBE9-C61F-EB0A6FEBF49E}"/>
               </a:ext>
             </a:extLst>
           </p:cNvPr>
@@ -8284,7 +8785,7 @@
           <a:p>
             <a:r>
               <a:rPr lang="en-US" dirty="0"/>
-              <a:t>Flags ADDS</a:t>
+              <a:t>Count number of ones</a:t>
             </a:r>
           </a:p>
         </p:txBody>
@@ -8294,7 +8795,7 @@
           <p:cNvPr id="3" name="Slide Number Placeholder 2">
             <a:extLst>
               <a:ext uri="{FF2B5EF4-FFF2-40B4-BE49-F238E27FC236}">
-                <a16:creationId xmlns:a16="http://schemas.microsoft.com/office/drawing/2014/main" id="{40E8A52C-2E2E-54F3-49AA-2CABED2CB91F}"/>
+                <a16:creationId xmlns:a16="http://schemas.microsoft.com/office/drawing/2014/main" id="{B7C6C243-F37B-89BF-2B6A-9A56B69C57F6}"/>
               </a:ext>
             </a:extLst>
           </p:cNvPr>
@@ -8321,10 +8822,10 @@
       </p:sp>
       <p:sp>
         <p:nvSpPr>
-          <p:cNvPr id="7" name="Content Placeholder 3">
+          <p:cNvPr id="4" name="Content Placeholder 3">
             <a:extLst>
               <a:ext uri="{FF2B5EF4-FFF2-40B4-BE49-F238E27FC236}">
-                <a16:creationId xmlns:a16="http://schemas.microsoft.com/office/drawing/2014/main" id="{B21BD5E1-8C43-5CBF-BEB4-B430BDD4D73C}"/>
+                <a16:creationId xmlns:a16="http://schemas.microsoft.com/office/drawing/2014/main" id="{00C41A2D-28FB-F7BC-6CAD-42CE944332B1}"/>
               </a:ext>
             </a:extLst>
           </p:cNvPr>
@@ -8335,103 +8836,30 @@
             <p:ph sz="quarter" idx="1"/>
           </p:nvPr>
         </p:nvSpPr>
-        <p:spPr>
-          <a:xfrm>
-            <a:off x="457200" y="1219200"/>
-            <a:ext cx="8229600" cy="4937760"/>
-          </a:xfrm>
-        </p:spPr>
-        <p:txBody>
-          <a:bodyPr/>
+        <p:spPr/>
+        <p:txBody>
+          <a:bodyPr>
+            <a:normAutofit/>
+          </a:bodyPr>
           <a:lstStyle/>
           <a:p>
             <a:r>
               <a:rPr lang="en-US" dirty="0"/>
-              <a:t>What are value of r2, and NZCV flags after execution, assuming all flags are initially 0.</a:t>
-            </a:r>
-          </a:p>
-        </p:txBody>
-      </p:sp>
-      <p:sp>
-        <p:nvSpPr>
-          <p:cNvPr id="8" name="Rectangle 7">
-            <a:extLst>
-              <a:ext uri="{FF2B5EF4-FFF2-40B4-BE49-F238E27FC236}">
-                <a16:creationId xmlns:a16="http://schemas.microsoft.com/office/drawing/2014/main" id="{D43F8B0C-9B9C-5AAA-26B5-003AE580EB61}"/>
-              </a:ext>
-            </a:extLst>
-          </p:cNvPr>
-          <p:cNvSpPr/>
-          <p:nvPr/>
-        </p:nvSpPr>
-        <p:spPr>
-          <a:xfrm>
-            <a:off x="860298" y="2133600"/>
-            <a:ext cx="3467100" cy="1015663"/>
-          </a:xfrm>
-          <a:prstGeom prst="rect">
-            <a:avLst/>
-          </a:prstGeom>
-        </p:spPr>
-        <p:style>
-          <a:lnRef idx="2">
-            <a:schemeClr val="accent1"/>
-          </a:lnRef>
-          <a:fillRef idx="1">
-            <a:schemeClr val="lt1"/>
-          </a:fillRef>
-          <a:effectRef idx="0">
-            <a:schemeClr val="accent1"/>
-          </a:effectRef>
-          <a:fontRef idx="minor">
-            <a:schemeClr val="dk1"/>
-          </a:fontRef>
-        </p:style>
-        <p:txBody>
-          <a:bodyPr wrap="square">
-            <a:spAutoFit/>
-          </a:bodyPr>
-          <a:lstStyle/>
-          <a:p>
-            <a:r>
-              <a:rPr lang="pt-BR" sz="2000" dirty="0">
-                <a:latin typeface="Consolas" panose="020B0609020204030204" pitchFamily="49" charset="0"/>
-                <a:cs typeface="Consolas" panose="020B0609020204030204" pitchFamily="49" charset="0"/>
-              </a:rPr>
-              <a:t>LDR r0, =0xFFFFFFF00</a:t>
-            </a:r>
-          </a:p>
-          <a:p>
-            <a:r>
-              <a:rPr lang="pt-BR" sz="2000" dirty="0">
-                <a:latin typeface="Consolas" panose="020B0609020204030204" pitchFamily="49" charset="0"/>
-                <a:cs typeface="Consolas" panose="020B0609020204030204" pitchFamily="49" charset="0"/>
-              </a:rPr>
-              <a:t>LDR r1, =0x00000001</a:t>
-            </a:r>
-          </a:p>
-          <a:p>
-            <a:r>
-              <a:rPr lang="pt-BR" sz="2000" dirty="0">
-                <a:latin typeface="Consolas" panose="020B0609020204030204" pitchFamily="49" charset="0"/>
-                <a:cs typeface="Consolas" panose="020B0609020204030204" pitchFamily="49" charset="0"/>
-              </a:rPr>
-              <a:t>ADDS r2, r1, r0, LSL #1</a:t>
-            </a:r>
-            <a:endParaRPr lang="en-US" sz="2000" dirty="0">
-              <a:solidFill>
-                <a:srgbClr val="C00000"/>
-              </a:solidFill>
-              <a:latin typeface="Consolas" panose="020B0609020204030204" pitchFamily="49" charset="0"/>
-              <a:cs typeface="Consolas" panose="020B0609020204030204" pitchFamily="49" charset="0"/>
-            </a:endParaRPr>
+              <a:t>Write a program to count the number of ones in a 32-bit register r0. </a:t>
+            </a:r>
+          </a:p>
+          <a:p>
+            <a:endParaRPr lang="en-US" dirty="0"/>
+          </a:p>
+          <a:p>
+            <a:endParaRPr lang="en-US" dirty="0"/>
           </a:p>
         </p:txBody>
       </p:sp>
     </p:spTree>
     <p:extLst>
       <p:ext uri="{BB962C8B-B14F-4D97-AF65-F5344CB8AC3E}">
-        <p14:creationId xmlns:p14="http://schemas.microsoft.com/office/powerpoint/2010/main" val="1401545001"/>
+        <p14:creationId xmlns:p14="http://schemas.microsoft.com/office/powerpoint/2010/main" val="498654524"/>
       </p:ext>
     </p:extLst>
   </p:cSld>
@@ -8446,7 +8874,13 @@
   <p:cSld>
     <p:spTree>
       <p:nvGrpSpPr>
-        <p:cNvPr id="1" name=""/>
+        <p:cNvPr id="1" name="">
+          <a:extLst>
+            <a:ext uri="{FF2B5EF4-FFF2-40B4-BE49-F238E27FC236}">
+              <a16:creationId xmlns:a16="http://schemas.microsoft.com/office/drawing/2014/main" id="{21E47DC9-FEC2-35B7-BE17-C800232773BF}"/>
+            </a:ext>
+          </a:extLst>
+        </p:cNvPr>
         <p:cNvGrpSpPr/>
         <p:nvPr/>
       </p:nvGrpSpPr>
@@ -8463,7 +8897,7 @@
           <p:cNvPr id="2" name="Title 1">
             <a:extLst>
               <a:ext uri="{FF2B5EF4-FFF2-40B4-BE49-F238E27FC236}">
-                <a16:creationId xmlns:a16="http://schemas.microsoft.com/office/drawing/2014/main" id="{F03CE9CC-DEC3-BC36-FF0A-FD088EB33CA9}"/>
+                <a16:creationId xmlns:a16="http://schemas.microsoft.com/office/drawing/2014/main" id="{DBC93014-01D8-9E5D-845A-870F048F2095}"/>
               </a:ext>
             </a:extLst>
           </p:cNvPr>
@@ -8481,7 +8915,7 @@
           <a:p>
             <a:r>
               <a:rPr lang="en-US" dirty="0"/>
-              <a:t>Flags</a:t>
+              <a:t>Count the number of zeros</a:t>
             </a:r>
           </a:p>
         </p:txBody>
@@ -8491,7 +8925,7 @@
           <p:cNvPr id="3" name="Slide Number Placeholder 2">
             <a:extLst>
               <a:ext uri="{FF2B5EF4-FFF2-40B4-BE49-F238E27FC236}">
-                <a16:creationId xmlns:a16="http://schemas.microsoft.com/office/drawing/2014/main" id="{CEDFB2C4-0E87-791F-5E7D-1A0D8DB247C5}"/>
+                <a16:creationId xmlns:a16="http://schemas.microsoft.com/office/drawing/2014/main" id="{90D51E58-1BCE-C9D5-7122-108C438ED836}"/>
               </a:ext>
             </a:extLst>
           </p:cNvPr>
@@ -8521,7 +8955,7 @@
           <p:cNvPr id="4" name="Content Placeholder 3">
             <a:extLst>
               <a:ext uri="{FF2B5EF4-FFF2-40B4-BE49-F238E27FC236}">
-                <a16:creationId xmlns:a16="http://schemas.microsoft.com/office/drawing/2014/main" id="{FD21DA5F-0B0C-5E4B-FFBA-4A8692F7A975}"/>
+                <a16:creationId xmlns:a16="http://schemas.microsoft.com/office/drawing/2014/main" id="{F7E59F7F-A91F-C3AC-6F2E-7E041BC2CCCA}"/>
               </a:ext>
             </a:extLst>
           </p:cNvPr>
@@ -8532,7 +8966,12 @@
             <p:ph sz="quarter" idx="1"/>
           </p:nvPr>
         </p:nvSpPr>
-        <p:spPr/>
+        <p:spPr>
+          <a:xfrm>
+            <a:off x="457200" y="1219200"/>
+            <a:ext cx="8229600" cy="5486400"/>
+          </a:xfrm>
+        </p:spPr>
         <p:txBody>
           <a:bodyPr>
             <a:normAutofit/>
@@ -8541,270 +8980,15 @@
           <a:p>
             <a:r>
               <a:rPr lang="en-US" dirty="0"/>
-              <a:t>Suppose registers have the following values:</a:t>
-            </a:r>
-          </a:p>
-          <a:p>
-            <a:r>
-              <a:rPr lang="en-US" dirty="0"/>
-              <a:t>What are value of r4, and NZCV flags after execution, assuming all flags are initially 0. (Each instruction runs individually.)</a:t>
-            </a:r>
-          </a:p>
-          <a:p>
-            <a:pPr lvl="1"/>
-            <a:r>
-              <a:rPr lang="pt-BR" dirty="0"/>
-              <a:t>(a) ADD r4, r0, r2, ASR #3</a:t>
-            </a:r>
-          </a:p>
-          <a:p>
-            <a:pPr lvl="1"/>
-            <a:r>
-              <a:rPr lang="pt-BR" dirty="0"/>
-              <a:t>(b) ADDS r4, r0, r1</a:t>
-            </a:r>
-          </a:p>
-          <a:p>
-            <a:pPr lvl="1"/>
-            <a:r>
-              <a:rPr lang="pt-BR" dirty="0"/>
-              <a:t>(c) LSRS r4, r0, #1</a:t>
-            </a:r>
-          </a:p>
-          <a:p>
-            <a:pPr lvl="1"/>
-            <a:r>
-              <a:rPr lang="pt-BR" dirty="0"/>
-              <a:t>(d) ANDS r4, r0, r3</a:t>
-            </a:r>
-          </a:p>
-          <a:p>
-            <a:pPr lvl="1"/>
-            <a:r>
-              <a:rPr lang="en-US" dirty="0"/>
-              <a:t>(e) CMP r2, #3</a:t>
-            </a:r>
-          </a:p>
-        </p:txBody>
-      </p:sp>
-      <p:graphicFrame>
-        <p:nvGraphicFramePr>
-          <p:cNvPr id="6" name="Table 5">
-            <a:extLst>
-              <a:ext uri="{FF2B5EF4-FFF2-40B4-BE49-F238E27FC236}">
-                <a16:creationId xmlns:a16="http://schemas.microsoft.com/office/drawing/2014/main" id="{F6C027E4-0F54-2503-6E54-155E1BC92737}"/>
-              </a:ext>
-            </a:extLst>
-          </p:cNvPr>
-          <p:cNvGraphicFramePr>
-            <a:graphicFrameLocks noGrp="1"/>
-          </p:cNvGraphicFramePr>
-          <p:nvPr>
-            <p:extLst>
-              <p:ext uri="{D42A27DB-BD31-4B8C-83A1-F6EECF244321}">
-                <p14:modId xmlns:p14="http://schemas.microsoft.com/office/powerpoint/2010/main" val="1219088588"/>
-              </p:ext>
-            </p:extLst>
-          </p:nvPr>
-        </p:nvGraphicFramePr>
-        <p:xfrm>
-          <a:off x="7070034" y="69573"/>
-          <a:ext cx="1984513" cy="1483360"/>
-        </p:xfrm>
-        <a:graphic>
-          <a:graphicData uri="http://schemas.openxmlformats.org/drawingml/2006/table">
-            <a:tbl>
-              <a:tblPr firstRow="1" bandRow="1">
-                <a:tableStyleId>{5940675A-B579-460E-94D1-54222C63F5DA}</a:tableStyleId>
-              </a:tblPr>
-              <a:tblGrid>
-                <a:gridCol w="496128">
-                  <a:extLst>
-                    <a:ext uri="{9D8B030D-6E8A-4147-A177-3AD203B41FA5}">
-                      <a16:colId xmlns:a16="http://schemas.microsoft.com/office/drawing/2014/main" val="1977830853"/>
-                    </a:ext>
-                  </a:extLst>
-                </a:gridCol>
-                <a:gridCol w="1488385">
-                  <a:extLst>
-                    <a:ext uri="{9D8B030D-6E8A-4147-A177-3AD203B41FA5}">
-                      <a16:colId xmlns:a16="http://schemas.microsoft.com/office/drawing/2014/main" val="1289645906"/>
-                    </a:ext>
-                  </a:extLst>
-                </a:gridCol>
-              </a:tblGrid>
-              <a:tr h="370840">
-                <a:tc>
-                  <a:txBody>
-                    <a:bodyPr/>
-                    <a:lstStyle/>
-                    <a:p>
-                      <a:r>
-                        <a:rPr lang="en-US" sz="1800" dirty="0"/>
-                        <a:t>r0</a:t>
-                      </a:r>
-                    </a:p>
-                  </a:txBody>
-                  <a:tcPr>
-                    <a:solidFill>
-                      <a:schemeClr val="bg1"/>
-                    </a:solidFill>
-                  </a:tcPr>
-                </a:tc>
-                <a:tc>
-                  <a:txBody>
-                    <a:bodyPr/>
-                    <a:lstStyle/>
-                    <a:p>
-                      <a:r>
-                        <a:rPr lang="en-US" sz="1800" dirty="0"/>
-                        <a:t>0xffffffff</a:t>
-                      </a:r>
-                    </a:p>
-                  </a:txBody>
-                  <a:tcPr>
-                    <a:solidFill>
-                      <a:schemeClr val="bg1"/>
-                    </a:solidFill>
-                  </a:tcPr>
-                </a:tc>
-                <a:extLst>
-                  <a:ext uri="{0D108BD9-81ED-4DB2-BD59-A6C34878D82A}">
-                    <a16:rowId xmlns:a16="http://schemas.microsoft.com/office/drawing/2014/main" val="431725572"/>
-                  </a:ext>
-                </a:extLst>
-              </a:tr>
-              <a:tr h="370840">
-                <a:tc>
-                  <a:txBody>
-                    <a:bodyPr/>
-                    <a:lstStyle/>
-                    <a:p>
-                      <a:r>
-                        <a:rPr lang="en-US" sz="1800" dirty="0"/>
-                        <a:t>r1</a:t>
-                      </a:r>
-                    </a:p>
-                  </a:txBody>
-                  <a:tcPr>
-                    <a:solidFill>
-                      <a:schemeClr val="bg1"/>
-                    </a:solidFill>
-                  </a:tcPr>
-                </a:tc>
-                <a:tc>
-                  <a:txBody>
-                    <a:bodyPr/>
-                    <a:lstStyle/>
-                    <a:p>
-                      <a:r>
-                        <a:rPr lang="en-US" sz="1800" dirty="0"/>
-                        <a:t>0x00000001</a:t>
-                      </a:r>
-                    </a:p>
-                  </a:txBody>
-                  <a:tcPr>
-                    <a:solidFill>
-                      <a:schemeClr val="bg1"/>
-                    </a:solidFill>
-                  </a:tcPr>
-                </a:tc>
-                <a:extLst>
-                  <a:ext uri="{0D108BD9-81ED-4DB2-BD59-A6C34878D82A}">
-                    <a16:rowId xmlns:a16="http://schemas.microsoft.com/office/drawing/2014/main" val="1221187379"/>
-                  </a:ext>
-                </a:extLst>
-              </a:tr>
-              <a:tr h="370840">
-                <a:tc>
-                  <a:txBody>
-                    <a:bodyPr/>
-                    <a:lstStyle/>
-                    <a:p>
-                      <a:r>
-                        <a:rPr lang="en-US" sz="1800" dirty="0"/>
-                        <a:t>r2</a:t>
-                      </a:r>
-                    </a:p>
-                  </a:txBody>
-                  <a:tcPr>
-                    <a:solidFill>
-                      <a:schemeClr val="bg1"/>
-                    </a:solidFill>
-                  </a:tcPr>
-                </a:tc>
-                <a:tc>
-                  <a:txBody>
-                    <a:bodyPr/>
-                    <a:lstStyle/>
-                    <a:p>
-                      <a:r>
-                        <a:rPr lang="en-US" sz="1800" dirty="0"/>
-                        <a:t>0x00000003</a:t>
-                      </a:r>
-                    </a:p>
-                  </a:txBody>
-                  <a:tcPr>
-                    <a:solidFill>
-                      <a:schemeClr val="bg1"/>
-                    </a:solidFill>
-                  </a:tcPr>
-                </a:tc>
-                <a:extLst>
-                  <a:ext uri="{0D108BD9-81ED-4DB2-BD59-A6C34878D82A}">
-                    <a16:rowId xmlns:a16="http://schemas.microsoft.com/office/drawing/2014/main" val="1070044812"/>
-                  </a:ext>
-                </a:extLst>
-              </a:tr>
-              <a:tr h="370840">
-                <a:tc>
-                  <a:txBody>
-                    <a:bodyPr/>
-                    <a:lstStyle/>
-                    <a:p>
-                      <a:r>
-                        <a:rPr lang="en-US" sz="1800" dirty="0"/>
-                        <a:t>r3</a:t>
-                      </a:r>
-                    </a:p>
-                  </a:txBody>
-                  <a:tcPr>
-                    <a:solidFill>
-                      <a:schemeClr val="bg1"/>
-                    </a:solidFill>
-                  </a:tcPr>
-                </a:tc>
-                <a:tc>
-                  <a:txBody>
-                    <a:bodyPr/>
-                    <a:lstStyle/>
-                    <a:p>
-                      <a:r>
-                        <a:rPr lang="en-US" sz="1800" dirty="0"/>
-                        <a:t>0xfffffff0</a:t>
-                      </a:r>
-                    </a:p>
-                  </a:txBody>
-                  <a:tcPr>
-                    <a:solidFill>
-                      <a:schemeClr val="bg1"/>
-                    </a:solidFill>
-                  </a:tcPr>
-                </a:tc>
-                <a:extLst>
-                  <a:ext uri="{0D108BD9-81ED-4DB2-BD59-A6C34878D82A}">
-                    <a16:rowId xmlns:a16="http://schemas.microsoft.com/office/drawing/2014/main" val="479018026"/>
-                  </a:ext>
-                </a:extLst>
-              </a:tr>
-            </a:tbl>
-          </a:graphicData>
-        </a:graphic>
-      </p:graphicFrame>
+              <a:t>Based on the program that counts 1’s, modify it to count the number of zeros a 32-bit register r0. </a:t>
+            </a:r>
+          </a:p>
+        </p:txBody>
+      </p:sp>
     </p:spTree>
     <p:extLst>
       <p:ext uri="{BB962C8B-B14F-4D97-AF65-F5344CB8AC3E}">
-        <p14:creationId xmlns:p14="http://schemas.microsoft.com/office/powerpoint/2010/main" val="1456166100"/>
+        <p14:creationId xmlns:p14="http://schemas.microsoft.com/office/powerpoint/2010/main" val="2952282065"/>
       </p:ext>
     </p:extLst>
   </p:cSld>
@@ -9313,6 +9497,774 @@
   <p:cSld>
     <p:spTree>
       <p:nvGrpSpPr>
+        <p:cNvPr id="1" name=""/>
+        <p:cNvGrpSpPr/>
+        <p:nvPr/>
+      </p:nvGrpSpPr>
+      <p:grpSpPr>
+        <a:xfrm>
+          <a:off x="0" y="0"/>
+          <a:ext cx="0" cy="0"/>
+          <a:chOff x="0" y="0"/>
+          <a:chExt cx="0" cy="0"/>
+        </a:xfrm>
+      </p:grpSpPr>
+      <p:sp>
+        <p:nvSpPr>
+          <p:cNvPr id="2" name="Title 1">
+            <a:extLst>
+              <a:ext uri="{FF2B5EF4-FFF2-40B4-BE49-F238E27FC236}">
+                <a16:creationId xmlns:a16="http://schemas.microsoft.com/office/drawing/2014/main" id="{11B52526-FDDF-35FA-A44E-1A2334442F74}"/>
+              </a:ext>
+            </a:extLst>
+          </p:cNvPr>
+          <p:cNvSpPr>
+            <a:spLocks noGrp="1"/>
+          </p:cNvSpPr>
+          <p:nvPr>
+            <p:ph type="title"/>
+          </p:nvPr>
+        </p:nvSpPr>
+        <p:spPr/>
+        <p:txBody>
+          <a:bodyPr/>
+          <a:lstStyle/>
+          <a:p>
+            <a:r>
+              <a:rPr lang="en-US" dirty="0"/>
+              <a:t>Flags ANDS</a:t>
+            </a:r>
+          </a:p>
+        </p:txBody>
+      </p:sp>
+      <p:sp>
+        <p:nvSpPr>
+          <p:cNvPr id="3" name="Slide Number Placeholder 2">
+            <a:extLst>
+              <a:ext uri="{FF2B5EF4-FFF2-40B4-BE49-F238E27FC236}">
+                <a16:creationId xmlns:a16="http://schemas.microsoft.com/office/drawing/2014/main" id="{BCB70333-70B3-0D05-E999-759739E502C6}"/>
+              </a:ext>
+            </a:extLst>
+          </p:cNvPr>
+          <p:cNvSpPr>
+            <a:spLocks noGrp="1"/>
+          </p:cNvSpPr>
+          <p:nvPr>
+            <p:ph type="sldNum" sz="quarter" idx="12"/>
+          </p:nvPr>
+        </p:nvSpPr>
+        <p:spPr/>
+        <p:txBody>
+          <a:bodyPr/>
+          <a:lstStyle/>
+          <a:p>
+            <a:fld id="{EA7C8D44-3667-46F6-9772-CC52308E2A7F}" type="slidenum">
+              <a:rPr kumimoji="0" lang="en-US" smtClean="0"/>
+              <a:pPr/>
+              <a:t>20</a:t>
+            </a:fld>
+            <a:endParaRPr kumimoji="0" lang="en-US" dirty="0"/>
+          </a:p>
+        </p:txBody>
+      </p:sp>
+      <p:sp>
+        <p:nvSpPr>
+          <p:cNvPr id="4" name="Content Placeholder 3">
+            <a:extLst>
+              <a:ext uri="{FF2B5EF4-FFF2-40B4-BE49-F238E27FC236}">
+                <a16:creationId xmlns:a16="http://schemas.microsoft.com/office/drawing/2014/main" id="{43995D49-573C-6129-4E24-762AAEB6BD07}"/>
+              </a:ext>
+            </a:extLst>
+          </p:cNvPr>
+          <p:cNvSpPr>
+            <a:spLocks noGrp="1"/>
+          </p:cNvSpPr>
+          <p:nvPr>
+            <p:ph sz="quarter" idx="1"/>
+          </p:nvPr>
+        </p:nvSpPr>
+        <p:spPr/>
+        <p:txBody>
+          <a:bodyPr/>
+          <a:lstStyle/>
+          <a:p>
+            <a:r>
+              <a:rPr lang="en-US" dirty="0"/>
+              <a:t>What are value of r2, and NZCV flags after execution, assuming all flags are initially 0.</a:t>
+            </a:r>
+          </a:p>
+          <a:p>
+            <a:endParaRPr lang="en-US" dirty="0"/>
+          </a:p>
+          <a:p>
+            <a:endParaRPr lang="en-US" dirty="0"/>
+          </a:p>
+        </p:txBody>
+      </p:sp>
+      <p:sp>
+        <p:nvSpPr>
+          <p:cNvPr id="7" name="Rectangle 6">
+            <a:extLst>
+              <a:ext uri="{FF2B5EF4-FFF2-40B4-BE49-F238E27FC236}">
+                <a16:creationId xmlns:a16="http://schemas.microsoft.com/office/drawing/2014/main" id="{BCB598EB-3D73-A532-9DE0-CBC965E702FA}"/>
+              </a:ext>
+            </a:extLst>
+          </p:cNvPr>
+          <p:cNvSpPr/>
+          <p:nvPr/>
+        </p:nvSpPr>
+        <p:spPr>
+          <a:xfrm>
+            <a:off x="860298" y="2213036"/>
+            <a:ext cx="3467100" cy="1015663"/>
+          </a:xfrm>
+          <a:prstGeom prst="rect">
+            <a:avLst/>
+          </a:prstGeom>
+        </p:spPr>
+        <p:style>
+          <a:lnRef idx="2">
+            <a:schemeClr val="accent1"/>
+          </a:lnRef>
+          <a:fillRef idx="1">
+            <a:schemeClr val="lt1"/>
+          </a:fillRef>
+          <a:effectRef idx="0">
+            <a:schemeClr val="accent1"/>
+          </a:effectRef>
+          <a:fontRef idx="minor">
+            <a:schemeClr val="dk1"/>
+          </a:fontRef>
+        </p:style>
+        <p:txBody>
+          <a:bodyPr wrap="square">
+            <a:spAutoFit/>
+          </a:bodyPr>
+          <a:lstStyle/>
+          <a:p>
+            <a:r>
+              <a:rPr lang="pt-BR" sz="2000" dirty="0">
+                <a:latin typeface="Consolas" panose="020B0609020204030204" pitchFamily="49" charset="0"/>
+                <a:cs typeface="Consolas" panose="020B0609020204030204" pitchFamily="49" charset="0"/>
+              </a:rPr>
+              <a:t>LDR r0, =0xFFFFFFF00</a:t>
+            </a:r>
+          </a:p>
+          <a:p>
+            <a:r>
+              <a:rPr lang="pt-BR" sz="2000" dirty="0">
+                <a:latin typeface="Consolas" panose="020B0609020204030204" pitchFamily="49" charset="0"/>
+                <a:cs typeface="Consolas" panose="020B0609020204030204" pitchFamily="49" charset="0"/>
+              </a:rPr>
+              <a:t>LDR r1, =0x00000001</a:t>
+            </a:r>
+          </a:p>
+          <a:p>
+            <a:r>
+              <a:rPr lang="pt-BR" sz="2000" dirty="0">
+                <a:latin typeface="Consolas" panose="020B0609020204030204" pitchFamily="49" charset="0"/>
+                <a:cs typeface="Consolas" panose="020B0609020204030204" pitchFamily="49" charset="0"/>
+              </a:rPr>
+              <a:t>ANDS r2, r1, r0, LSL #1</a:t>
+            </a:r>
+            <a:endParaRPr lang="en-US" sz="2000" dirty="0">
+              <a:solidFill>
+                <a:srgbClr val="C00000"/>
+              </a:solidFill>
+              <a:latin typeface="Consolas" panose="020B0609020204030204" pitchFamily="49" charset="0"/>
+              <a:cs typeface="Consolas" panose="020B0609020204030204" pitchFamily="49" charset="0"/>
+            </a:endParaRPr>
+          </a:p>
+        </p:txBody>
+      </p:sp>
+    </p:spTree>
+    <p:extLst>
+      <p:ext uri="{BB962C8B-B14F-4D97-AF65-F5344CB8AC3E}">
+        <p14:creationId xmlns:p14="http://schemas.microsoft.com/office/powerpoint/2010/main" val="2291445225"/>
+      </p:ext>
+    </p:extLst>
+  </p:cSld>
+  <p:clrMapOvr>
+    <a:masterClrMapping/>
+  </p:clrMapOvr>
+</p:sld>
+</file>
+
+<file path=ppt/slides/slide21.xml><?xml version="1.0" encoding="utf-8"?>
+<p:sld xmlns:a="http://schemas.openxmlformats.org/drawingml/2006/main" xmlns:r="http://schemas.openxmlformats.org/officeDocument/2006/relationships" xmlns:p="http://schemas.openxmlformats.org/presentationml/2006/main">
+  <p:cSld>
+    <p:spTree>
+      <p:nvGrpSpPr>
+        <p:cNvPr id="1" name=""/>
+        <p:cNvGrpSpPr/>
+        <p:nvPr/>
+      </p:nvGrpSpPr>
+      <p:grpSpPr>
+        <a:xfrm>
+          <a:off x="0" y="0"/>
+          <a:ext cx="0" cy="0"/>
+          <a:chOff x="0" y="0"/>
+          <a:chExt cx="0" cy="0"/>
+        </a:xfrm>
+      </p:grpSpPr>
+      <p:sp>
+        <p:nvSpPr>
+          <p:cNvPr id="2" name="Title 1">
+            <a:extLst>
+              <a:ext uri="{FF2B5EF4-FFF2-40B4-BE49-F238E27FC236}">
+                <a16:creationId xmlns:a16="http://schemas.microsoft.com/office/drawing/2014/main" id="{E3C709F9-4905-FD89-18E1-B8EB2F602C94}"/>
+              </a:ext>
+            </a:extLst>
+          </p:cNvPr>
+          <p:cNvSpPr>
+            <a:spLocks noGrp="1"/>
+          </p:cNvSpPr>
+          <p:nvPr>
+            <p:ph type="title"/>
+          </p:nvPr>
+        </p:nvSpPr>
+        <p:spPr/>
+        <p:txBody>
+          <a:bodyPr/>
+          <a:lstStyle/>
+          <a:p>
+            <a:r>
+              <a:rPr lang="en-US" dirty="0"/>
+              <a:t>Flags ADDS</a:t>
+            </a:r>
+          </a:p>
+        </p:txBody>
+      </p:sp>
+      <p:sp>
+        <p:nvSpPr>
+          <p:cNvPr id="3" name="Slide Number Placeholder 2">
+            <a:extLst>
+              <a:ext uri="{FF2B5EF4-FFF2-40B4-BE49-F238E27FC236}">
+                <a16:creationId xmlns:a16="http://schemas.microsoft.com/office/drawing/2014/main" id="{40E8A52C-2E2E-54F3-49AA-2CABED2CB91F}"/>
+              </a:ext>
+            </a:extLst>
+          </p:cNvPr>
+          <p:cNvSpPr>
+            <a:spLocks noGrp="1"/>
+          </p:cNvSpPr>
+          <p:nvPr>
+            <p:ph type="sldNum" sz="quarter" idx="12"/>
+          </p:nvPr>
+        </p:nvSpPr>
+        <p:spPr/>
+        <p:txBody>
+          <a:bodyPr/>
+          <a:lstStyle/>
+          <a:p>
+            <a:fld id="{EA7C8D44-3667-46F6-9772-CC52308E2A7F}" type="slidenum">
+              <a:rPr kumimoji="0" lang="en-US" smtClean="0"/>
+              <a:pPr/>
+              <a:t>21</a:t>
+            </a:fld>
+            <a:endParaRPr kumimoji="0" lang="en-US" dirty="0"/>
+          </a:p>
+        </p:txBody>
+      </p:sp>
+      <p:sp>
+        <p:nvSpPr>
+          <p:cNvPr id="7" name="Content Placeholder 3">
+            <a:extLst>
+              <a:ext uri="{FF2B5EF4-FFF2-40B4-BE49-F238E27FC236}">
+                <a16:creationId xmlns:a16="http://schemas.microsoft.com/office/drawing/2014/main" id="{B21BD5E1-8C43-5CBF-BEB4-B430BDD4D73C}"/>
+              </a:ext>
+            </a:extLst>
+          </p:cNvPr>
+          <p:cNvSpPr>
+            <a:spLocks noGrp="1"/>
+          </p:cNvSpPr>
+          <p:nvPr>
+            <p:ph sz="quarter" idx="1"/>
+          </p:nvPr>
+        </p:nvSpPr>
+        <p:spPr>
+          <a:xfrm>
+            <a:off x="457200" y="1219200"/>
+            <a:ext cx="8229600" cy="4937760"/>
+          </a:xfrm>
+        </p:spPr>
+        <p:txBody>
+          <a:bodyPr/>
+          <a:lstStyle/>
+          <a:p>
+            <a:r>
+              <a:rPr lang="en-US" dirty="0"/>
+              <a:t>What are value of r2, and NZCV flags after execution, assuming all flags are initially 0.</a:t>
+            </a:r>
+          </a:p>
+        </p:txBody>
+      </p:sp>
+      <p:sp>
+        <p:nvSpPr>
+          <p:cNvPr id="8" name="Rectangle 7">
+            <a:extLst>
+              <a:ext uri="{FF2B5EF4-FFF2-40B4-BE49-F238E27FC236}">
+                <a16:creationId xmlns:a16="http://schemas.microsoft.com/office/drawing/2014/main" id="{D43F8B0C-9B9C-5AAA-26B5-003AE580EB61}"/>
+              </a:ext>
+            </a:extLst>
+          </p:cNvPr>
+          <p:cNvSpPr/>
+          <p:nvPr/>
+        </p:nvSpPr>
+        <p:spPr>
+          <a:xfrm>
+            <a:off x="860298" y="2133600"/>
+            <a:ext cx="3467100" cy="1015663"/>
+          </a:xfrm>
+          <a:prstGeom prst="rect">
+            <a:avLst/>
+          </a:prstGeom>
+        </p:spPr>
+        <p:style>
+          <a:lnRef idx="2">
+            <a:schemeClr val="accent1"/>
+          </a:lnRef>
+          <a:fillRef idx="1">
+            <a:schemeClr val="lt1"/>
+          </a:fillRef>
+          <a:effectRef idx="0">
+            <a:schemeClr val="accent1"/>
+          </a:effectRef>
+          <a:fontRef idx="minor">
+            <a:schemeClr val="dk1"/>
+          </a:fontRef>
+        </p:style>
+        <p:txBody>
+          <a:bodyPr wrap="square">
+            <a:spAutoFit/>
+          </a:bodyPr>
+          <a:lstStyle/>
+          <a:p>
+            <a:r>
+              <a:rPr lang="pt-BR" sz="2000" dirty="0">
+                <a:latin typeface="Consolas" panose="020B0609020204030204" pitchFamily="49" charset="0"/>
+                <a:cs typeface="Consolas" panose="020B0609020204030204" pitchFamily="49" charset="0"/>
+              </a:rPr>
+              <a:t>LDR r0, =0xFFFFFFF00</a:t>
+            </a:r>
+          </a:p>
+          <a:p>
+            <a:r>
+              <a:rPr lang="pt-BR" sz="2000" dirty="0">
+                <a:latin typeface="Consolas" panose="020B0609020204030204" pitchFamily="49" charset="0"/>
+                <a:cs typeface="Consolas" panose="020B0609020204030204" pitchFamily="49" charset="0"/>
+              </a:rPr>
+              <a:t>LDR r1, =0x00000001</a:t>
+            </a:r>
+          </a:p>
+          <a:p>
+            <a:r>
+              <a:rPr lang="pt-BR" sz="2000" dirty="0">
+                <a:latin typeface="Consolas" panose="020B0609020204030204" pitchFamily="49" charset="0"/>
+                <a:cs typeface="Consolas" panose="020B0609020204030204" pitchFamily="49" charset="0"/>
+              </a:rPr>
+              <a:t>ADDS r2, r1, r0, LSL #1</a:t>
+            </a:r>
+            <a:endParaRPr lang="en-US" sz="2000" dirty="0">
+              <a:solidFill>
+                <a:srgbClr val="C00000"/>
+              </a:solidFill>
+              <a:latin typeface="Consolas" panose="020B0609020204030204" pitchFamily="49" charset="0"/>
+              <a:cs typeface="Consolas" panose="020B0609020204030204" pitchFamily="49" charset="0"/>
+            </a:endParaRPr>
+          </a:p>
+        </p:txBody>
+      </p:sp>
+    </p:spTree>
+    <p:extLst>
+      <p:ext uri="{BB962C8B-B14F-4D97-AF65-F5344CB8AC3E}">
+        <p14:creationId xmlns:p14="http://schemas.microsoft.com/office/powerpoint/2010/main" val="1401545001"/>
+      </p:ext>
+    </p:extLst>
+  </p:cSld>
+  <p:clrMapOvr>
+    <a:masterClrMapping/>
+  </p:clrMapOvr>
+</p:sld>
+</file>
+
+<file path=ppt/slides/slide22.xml><?xml version="1.0" encoding="utf-8"?>
+<p:sld xmlns:a="http://schemas.openxmlformats.org/drawingml/2006/main" xmlns:r="http://schemas.openxmlformats.org/officeDocument/2006/relationships" xmlns:p="http://schemas.openxmlformats.org/presentationml/2006/main">
+  <p:cSld>
+    <p:spTree>
+      <p:nvGrpSpPr>
+        <p:cNvPr id="1" name=""/>
+        <p:cNvGrpSpPr/>
+        <p:nvPr/>
+      </p:nvGrpSpPr>
+      <p:grpSpPr>
+        <a:xfrm>
+          <a:off x="0" y="0"/>
+          <a:ext cx="0" cy="0"/>
+          <a:chOff x="0" y="0"/>
+          <a:chExt cx="0" cy="0"/>
+        </a:xfrm>
+      </p:grpSpPr>
+      <p:sp>
+        <p:nvSpPr>
+          <p:cNvPr id="2" name="Title 1">
+            <a:extLst>
+              <a:ext uri="{FF2B5EF4-FFF2-40B4-BE49-F238E27FC236}">
+                <a16:creationId xmlns:a16="http://schemas.microsoft.com/office/drawing/2014/main" id="{F03CE9CC-DEC3-BC36-FF0A-FD088EB33CA9}"/>
+              </a:ext>
+            </a:extLst>
+          </p:cNvPr>
+          <p:cNvSpPr>
+            <a:spLocks noGrp="1"/>
+          </p:cNvSpPr>
+          <p:nvPr>
+            <p:ph type="title"/>
+          </p:nvPr>
+        </p:nvSpPr>
+        <p:spPr/>
+        <p:txBody>
+          <a:bodyPr/>
+          <a:lstStyle/>
+          <a:p>
+            <a:r>
+              <a:rPr lang="en-US" dirty="0"/>
+              <a:t>Flags</a:t>
+            </a:r>
+          </a:p>
+        </p:txBody>
+      </p:sp>
+      <p:sp>
+        <p:nvSpPr>
+          <p:cNvPr id="3" name="Slide Number Placeholder 2">
+            <a:extLst>
+              <a:ext uri="{FF2B5EF4-FFF2-40B4-BE49-F238E27FC236}">
+                <a16:creationId xmlns:a16="http://schemas.microsoft.com/office/drawing/2014/main" id="{CEDFB2C4-0E87-791F-5E7D-1A0D8DB247C5}"/>
+              </a:ext>
+            </a:extLst>
+          </p:cNvPr>
+          <p:cNvSpPr>
+            <a:spLocks noGrp="1"/>
+          </p:cNvSpPr>
+          <p:nvPr>
+            <p:ph type="sldNum" sz="quarter" idx="12"/>
+          </p:nvPr>
+        </p:nvSpPr>
+        <p:spPr/>
+        <p:txBody>
+          <a:bodyPr/>
+          <a:lstStyle/>
+          <a:p>
+            <a:fld id="{EA7C8D44-3667-46F6-9772-CC52308E2A7F}" type="slidenum">
+              <a:rPr kumimoji="0" lang="en-US" smtClean="0"/>
+              <a:pPr/>
+              <a:t>22</a:t>
+            </a:fld>
+            <a:endParaRPr kumimoji="0" lang="en-US" dirty="0"/>
+          </a:p>
+        </p:txBody>
+      </p:sp>
+      <p:sp>
+        <p:nvSpPr>
+          <p:cNvPr id="4" name="Content Placeholder 3">
+            <a:extLst>
+              <a:ext uri="{FF2B5EF4-FFF2-40B4-BE49-F238E27FC236}">
+                <a16:creationId xmlns:a16="http://schemas.microsoft.com/office/drawing/2014/main" id="{FD21DA5F-0B0C-5E4B-FFBA-4A8692F7A975}"/>
+              </a:ext>
+            </a:extLst>
+          </p:cNvPr>
+          <p:cNvSpPr>
+            <a:spLocks noGrp="1"/>
+          </p:cNvSpPr>
+          <p:nvPr>
+            <p:ph sz="quarter" idx="1"/>
+          </p:nvPr>
+        </p:nvSpPr>
+        <p:spPr/>
+        <p:txBody>
+          <a:bodyPr>
+            <a:normAutofit/>
+          </a:bodyPr>
+          <a:lstStyle/>
+          <a:p>
+            <a:r>
+              <a:rPr lang="en-US" dirty="0"/>
+              <a:t>Suppose registers have the following values:</a:t>
+            </a:r>
+          </a:p>
+          <a:p>
+            <a:r>
+              <a:rPr lang="en-US" dirty="0"/>
+              <a:t>What are value of r4, and NZCV flags after execution, assuming all flags are initially 0. (Each instruction runs individually.)</a:t>
+            </a:r>
+          </a:p>
+          <a:p>
+            <a:pPr lvl="1"/>
+            <a:r>
+              <a:rPr lang="pt-BR" dirty="0"/>
+              <a:t>(a) ADD r4, r0, r2, ASR #3</a:t>
+            </a:r>
+          </a:p>
+          <a:p>
+            <a:pPr lvl="1"/>
+            <a:r>
+              <a:rPr lang="pt-BR" dirty="0"/>
+              <a:t>(b) ADDS r4, r0, r1</a:t>
+            </a:r>
+          </a:p>
+          <a:p>
+            <a:pPr lvl="1"/>
+            <a:r>
+              <a:rPr lang="pt-BR" dirty="0"/>
+              <a:t>(c) LSRS r4, r0, #1</a:t>
+            </a:r>
+          </a:p>
+          <a:p>
+            <a:pPr lvl="1"/>
+            <a:r>
+              <a:rPr lang="pt-BR" dirty="0"/>
+              <a:t>(d) ANDS r4, r0, r3</a:t>
+            </a:r>
+          </a:p>
+          <a:p>
+            <a:pPr lvl="1"/>
+            <a:r>
+              <a:rPr lang="en-US" dirty="0"/>
+              <a:t>(e) CMP r2, #3</a:t>
+            </a:r>
+          </a:p>
+        </p:txBody>
+      </p:sp>
+      <p:graphicFrame>
+        <p:nvGraphicFramePr>
+          <p:cNvPr id="6" name="Table 5">
+            <a:extLst>
+              <a:ext uri="{FF2B5EF4-FFF2-40B4-BE49-F238E27FC236}">
+                <a16:creationId xmlns:a16="http://schemas.microsoft.com/office/drawing/2014/main" id="{F6C027E4-0F54-2503-6E54-155E1BC92737}"/>
+              </a:ext>
+            </a:extLst>
+          </p:cNvPr>
+          <p:cNvGraphicFramePr>
+            <a:graphicFrameLocks noGrp="1"/>
+          </p:cNvGraphicFramePr>
+          <p:nvPr>
+            <p:extLst>
+              <p:ext uri="{D42A27DB-BD31-4B8C-83A1-F6EECF244321}">
+                <p14:modId xmlns:p14="http://schemas.microsoft.com/office/powerpoint/2010/main" val="1219088588"/>
+              </p:ext>
+            </p:extLst>
+          </p:nvPr>
+        </p:nvGraphicFramePr>
+        <p:xfrm>
+          <a:off x="7070034" y="69573"/>
+          <a:ext cx="1984513" cy="1483360"/>
+        </p:xfrm>
+        <a:graphic>
+          <a:graphicData uri="http://schemas.openxmlformats.org/drawingml/2006/table">
+            <a:tbl>
+              <a:tblPr firstRow="1" bandRow="1">
+                <a:tableStyleId>{5940675A-B579-460E-94D1-54222C63F5DA}</a:tableStyleId>
+              </a:tblPr>
+              <a:tblGrid>
+                <a:gridCol w="496128">
+                  <a:extLst>
+                    <a:ext uri="{9D8B030D-6E8A-4147-A177-3AD203B41FA5}">
+                      <a16:colId xmlns:a16="http://schemas.microsoft.com/office/drawing/2014/main" val="1977830853"/>
+                    </a:ext>
+                  </a:extLst>
+                </a:gridCol>
+                <a:gridCol w="1488385">
+                  <a:extLst>
+                    <a:ext uri="{9D8B030D-6E8A-4147-A177-3AD203B41FA5}">
+                      <a16:colId xmlns:a16="http://schemas.microsoft.com/office/drawing/2014/main" val="1289645906"/>
+                    </a:ext>
+                  </a:extLst>
+                </a:gridCol>
+              </a:tblGrid>
+              <a:tr h="370840">
+                <a:tc>
+                  <a:txBody>
+                    <a:bodyPr/>
+                    <a:lstStyle/>
+                    <a:p>
+                      <a:r>
+                        <a:rPr lang="en-US" sz="1800" dirty="0"/>
+                        <a:t>r0</a:t>
+                      </a:r>
+                    </a:p>
+                  </a:txBody>
+                  <a:tcPr>
+                    <a:solidFill>
+                      <a:schemeClr val="bg1"/>
+                    </a:solidFill>
+                  </a:tcPr>
+                </a:tc>
+                <a:tc>
+                  <a:txBody>
+                    <a:bodyPr/>
+                    <a:lstStyle/>
+                    <a:p>
+                      <a:r>
+                        <a:rPr lang="en-US" sz="1800" dirty="0"/>
+                        <a:t>0xffffffff</a:t>
+                      </a:r>
+                    </a:p>
+                  </a:txBody>
+                  <a:tcPr>
+                    <a:solidFill>
+                      <a:schemeClr val="bg1"/>
+                    </a:solidFill>
+                  </a:tcPr>
+                </a:tc>
+                <a:extLst>
+                  <a:ext uri="{0D108BD9-81ED-4DB2-BD59-A6C34878D82A}">
+                    <a16:rowId xmlns:a16="http://schemas.microsoft.com/office/drawing/2014/main" val="431725572"/>
+                  </a:ext>
+                </a:extLst>
+              </a:tr>
+              <a:tr h="370840">
+                <a:tc>
+                  <a:txBody>
+                    <a:bodyPr/>
+                    <a:lstStyle/>
+                    <a:p>
+                      <a:r>
+                        <a:rPr lang="en-US" sz="1800" dirty="0"/>
+                        <a:t>r1</a:t>
+                      </a:r>
+                    </a:p>
+                  </a:txBody>
+                  <a:tcPr>
+                    <a:solidFill>
+                      <a:schemeClr val="bg1"/>
+                    </a:solidFill>
+                  </a:tcPr>
+                </a:tc>
+                <a:tc>
+                  <a:txBody>
+                    <a:bodyPr/>
+                    <a:lstStyle/>
+                    <a:p>
+                      <a:r>
+                        <a:rPr lang="en-US" sz="1800" dirty="0"/>
+                        <a:t>0x00000001</a:t>
+                      </a:r>
+                    </a:p>
+                  </a:txBody>
+                  <a:tcPr>
+                    <a:solidFill>
+                      <a:schemeClr val="bg1"/>
+                    </a:solidFill>
+                  </a:tcPr>
+                </a:tc>
+                <a:extLst>
+                  <a:ext uri="{0D108BD9-81ED-4DB2-BD59-A6C34878D82A}">
+                    <a16:rowId xmlns:a16="http://schemas.microsoft.com/office/drawing/2014/main" val="1221187379"/>
+                  </a:ext>
+                </a:extLst>
+              </a:tr>
+              <a:tr h="370840">
+                <a:tc>
+                  <a:txBody>
+                    <a:bodyPr/>
+                    <a:lstStyle/>
+                    <a:p>
+                      <a:r>
+                        <a:rPr lang="en-US" sz="1800" dirty="0"/>
+                        <a:t>r2</a:t>
+                      </a:r>
+                    </a:p>
+                  </a:txBody>
+                  <a:tcPr>
+                    <a:solidFill>
+                      <a:schemeClr val="bg1"/>
+                    </a:solidFill>
+                  </a:tcPr>
+                </a:tc>
+                <a:tc>
+                  <a:txBody>
+                    <a:bodyPr/>
+                    <a:lstStyle/>
+                    <a:p>
+                      <a:r>
+                        <a:rPr lang="en-US" sz="1800" dirty="0"/>
+                        <a:t>0x00000003</a:t>
+                      </a:r>
+                    </a:p>
+                  </a:txBody>
+                  <a:tcPr>
+                    <a:solidFill>
+                      <a:schemeClr val="bg1"/>
+                    </a:solidFill>
+                  </a:tcPr>
+                </a:tc>
+                <a:extLst>
+                  <a:ext uri="{0D108BD9-81ED-4DB2-BD59-A6C34878D82A}">
+                    <a16:rowId xmlns:a16="http://schemas.microsoft.com/office/drawing/2014/main" val="1070044812"/>
+                  </a:ext>
+                </a:extLst>
+              </a:tr>
+              <a:tr h="370840">
+                <a:tc>
+                  <a:txBody>
+                    <a:bodyPr/>
+                    <a:lstStyle/>
+                    <a:p>
+                      <a:r>
+                        <a:rPr lang="en-US" sz="1800" dirty="0"/>
+                        <a:t>r3</a:t>
+                      </a:r>
+                    </a:p>
+                  </a:txBody>
+                  <a:tcPr>
+                    <a:solidFill>
+                      <a:schemeClr val="bg1"/>
+                    </a:solidFill>
+                  </a:tcPr>
+                </a:tc>
+                <a:tc>
+                  <a:txBody>
+                    <a:bodyPr/>
+                    <a:lstStyle/>
+                    <a:p>
+                      <a:r>
+                        <a:rPr lang="en-US" sz="1800" dirty="0"/>
+                        <a:t>0xfffffff0</a:t>
+                      </a:r>
+                    </a:p>
+                  </a:txBody>
+                  <a:tcPr>
+                    <a:solidFill>
+                      <a:schemeClr val="bg1"/>
+                    </a:solidFill>
+                  </a:tcPr>
+                </a:tc>
+                <a:extLst>
+                  <a:ext uri="{0D108BD9-81ED-4DB2-BD59-A6C34878D82A}">
+                    <a16:rowId xmlns:a16="http://schemas.microsoft.com/office/drawing/2014/main" val="479018026"/>
+                  </a:ext>
+                </a:extLst>
+              </a:tr>
+            </a:tbl>
+          </a:graphicData>
+        </a:graphic>
+      </p:graphicFrame>
+    </p:spTree>
+    <p:extLst>
+      <p:ext uri="{BB962C8B-B14F-4D97-AF65-F5344CB8AC3E}">
+        <p14:creationId xmlns:p14="http://schemas.microsoft.com/office/powerpoint/2010/main" val="1456166100"/>
+      </p:ext>
+    </p:extLst>
+  </p:cSld>
+  <p:clrMapOvr>
+    <a:masterClrMapping/>
+  </p:clrMapOvr>
+</p:sld>
+</file>
+
+<file path=ppt/slides/slide23.xml><?xml version="1.0" encoding="utf-8"?>
+<p:sld xmlns:a="http://schemas.openxmlformats.org/drawingml/2006/main" xmlns:r="http://schemas.openxmlformats.org/officeDocument/2006/relationships" xmlns:p="http://schemas.openxmlformats.org/presentationml/2006/main">
+  <p:cSld>
+    <p:spTree>
+      <p:nvGrpSpPr>
         <p:cNvPr id="1" name="">
           <a:extLst>
             <a:ext uri="{FF2B5EF4-FFF2-40B4-BE49-F238E27FC236}">
@@ -9383,7 +10335,7 @@
             <a:fld id="{EA7C8D44-3667-46F6-9772-CC52308E2A7F}" type="slidenum">
               <a:rPr kumimoji="0" lang="en-US" smtClean="0"/>
               <a:pPr/>
-              <a:t>20</a:t>
+              <a:t>23</a:t>
             </a:fld>
             <a:endParaRPr kumimoji="0" lang="en-US" dirty="0"/>
           </a:p>
